--- a/DeepLearning/docs/ExerciseList/[DL] Lista de Exercícios - 2025.2 (PPGI).pptx
+++ b/DeepLearning/docs/ExerciseList/[DL] Lista de Exercícios - 2025.2 (PPGI).pptx
@@ -21,18 +21,20 @@
     <p:sldId id="285" r:id="rId15"/>
     <p:sldId id="306" r:id="rId16"/>
     <p:sldId id="307" r:id="rId17"/>
-    <p:sldId id="308" r:id="rId18"/>
-    <p:sldId id="296" r:id="rId19"/>
-    <p:sldId id="286" r:id="rId20"/>
-    <p:sldId id="297" r:id="rId21"/>
-    <p:sldId id="300" r:id="rId22"/>
-    <p:sldId id="301" r:id="rId23"/>
-    <p:sldId id="302" r:id="rId24"/>
-    <p:sldId id="305" r:id="rId25"/>
-    <p:sldId id="287" r:id="rId26"/>
-    <p:sldId id="309" r:id="rId27"/>
-    <p:sldId id="310" r:id="rId28"/>
-    <p:sldId id="311" r:id="rId29"/>
+    <p:sldId id="312" r:id="rId18"/>
+    <p:sldId id="308" r:id="rId19"/>
+    <p:sldId id="313" r:id="rId20"/>
+    <p:sldId id="296" r:id="rId21"/>
+    <p:sldId id="286" r:id="rId22"/>
+    <p:sldId id="297" r:id="rId23"/>
+    <p:sldId id="300" r:id="rId24"/>
+    <p:sldId id="301" r:id="rId25"/>
+    <p:sldId id="302" r:id="rId26"/>
+    <p:sldId id="305" r:id="rId27"/>
+    <p:sldId id="287" r:id="rId28"/>
+    <p:sldId id="309" r:id="rId29"/>
+    <p:sldId id="310" r:id="rId30"/>
+    <p:sldId id="311" r:id="rId31"/>
   </p:sldIdLst>
   <p:sldSz cx="12192000" cy="6858000"/>
   <p:notesSz cx="6858000" cy="9144000"/>
@@ -164,7 +166,9 @@
             <p14:sldId id="285"/>
             <p14:sldId id="306"/>
             <p14:sldId id="307"/>
+            <p14:sldId id="312"/>
             <p14:sldId id="308"/>
+            <p14:sldId id="313"/>
           </p14:sldIdLst>
         </p14:section>
         <p14:section name="Questão 4" id="{379DA844-D19D-41CE-9A2E-D6ED72368DFA}">
@@ -198,13 +202,294 @@
 <file path=ppt/revisionInfo.xml><?xml version="1.0" encoding="utf-8"?>
 <p1510:revInfo xmlns:a="http://schemas.openxmlformats.org/drawingml/2006/main" xmlns:r="http://schemas.openxmlformats.org/officeDocument/2006/relationships" xmlns:p1510="http://schemas.microsoft.com/office/powerpoint/2015/10/main">
   <p1510:revLst>
-    <p1510:client id="{F10AA5E3-AD27-4460-92A2-BD5918E5B397}" v="115" dt="2025-09-04T01:36:48.926"/>
+    <p1510:client id="{57233262-EDF2-8B2D-E416-E690305389A4}" v="284" dt="2025-09-04T15:36:53.018"/>
+    <p1510:client id="{F10AA5E3-AD27-4460-92A2-BD5918E5B397}" v="146" dt="2025-09-04T15:57:25.839"/>
   </p1510:revLst>
 </p1510:revInfo>
 </file>
 
 <file path=ppt/changesInfos/changesInfo1.xml><?xml version="1.0" encoding="utf-8"?>
 <pc:chgInfo xmlns:a="http://schemas.openxmlformats.org/drawingml/2006/main" xmlns:r="http://schemas.openxmlformats.org/officeDocument/2006/relationships" xmlns:ac="http://schemas.microsoft.com/office/drawing/2013/main/command" xmlns:pc="http://schemas.microsoft.com/office/powerpoint/2013/main/command">
+  <pc:docChgLst>
+    <pc:chgData name="Usuário Convidado" providerId="Windows Live" clId="Web-{57233262-EDF2-8B2D-E416-E690305389A4}"/>
+    <pc:docChg chg="addSld delSld modSld sldOrd modSection">
+      <pc:chgData name="Usuário Convidado" userId="" providerId="Windows Live" clId="Web-{57233262-EDF2-8B2D-E416-E690305389A4}" dt="2025-09-04T15:36:53.018" v="180" actId="1076"/>
+      <pc:docMkLst>
+        <pc:docMk/>
+      </pc:docMkLst>
+      <pc:sldChg chg="addSp modSp">
+        <pc:chgData name="Usuário Convidado" userId="" providerId="Windows Live" clId="Web-{57233262-EDF2-8B2D-E416-E690305389A4}" dt="2025-09-04T15:04:43.242" v="84" actId="20577"/>
+        <pc:sldMkLst>
+          <pc:docMk/>
+          <pc:sldMk cId="1455303379" sldId="306"/>
+        </pc:sldMkLst>
+        <pc:spChg chg="add mod">
+          <ac:chgData name="Usuário Convidado" userId="" providerId="Windows Live" clId="Web-{57233262-EDF2-8B2D-E416-E690305389A4}" dt="2025-09-04T15:04:43.242" v="84" actId="20577"/>
+          <ac:spMkLst>
+            <pc:docMk/>
+            <pc:sldMk cId="1455303379" sldId="306"/>
+            <ac:spMk id="6" creationId="{38A5B6F3-9F41-A03B-5DEC-FF8D2D1C7007}"/>
+          </ac:spMkLst>
+        </pc:spChg>
+        <pc:picChg chg="mod">
+          <ac:chgData name="Usuário Convidado" userId="" providerId="Windows Live" clId="Web-{57233262-EDF2-8B2D-E416-E690305389A4}" dt="2025-09-04T14:49:24.751" v="27" actId="1076"/>
+          <ac:picMkLst>
+            <pc:docMk/>
+            <pc:sldMk cId="1455303379" sldId="306"/>
+            <ac:picMk id="5" creationId="{ED1CF77A-54A8-52DC-6E71-00151507EE69}"/>
+          </ac:picMkLst>
+        </pc:picChg>
+      </pc:sldChg>
+      <pc:sldChg chg="delSp">
+        <pc:chgData name="Usuário Convidado" userId="" providerId="Windows Live" clId="Web-{57233262-EDF2-8B2D-E416-E690305389A4}" dt="2025-09-04T14:49:17.579" v="26"/>
+        <pc:sldMkLst>
+          <pc:docMk/>
+          <pc:sldMk cId="4128823105" sldId="307"/>
+        </pc:sldMkLst>
+        <pc:picChg chg="del">
+          <ac:chgData name="Usuário Convidado" userId="" providerId="Windows Live" clId="Web-{57233262-EDF2-8B2D-E416-E690305389A4}" dt="2025-09-04T14:49:17.579" v="26"/>
+          <ac:picMkLst>
+            <pc:docMk/>
+            <pc:sldMk cId="4128823105" sldId="307"/>
+            <ac:picMk id="11" creationId="{D9E487DF-3CF7-4366-D2AA-A0FB4F371200}"/>
+          </ac:picMkLst>
+        </pc:picChg>
+        <pc:picChg chg="del">
+          <ac:chgData name="Usuário Convidado" userId="" providerId="Windows Live" clId="Web-{57233262-EDF2-8B2D-E416-E690305389A4}" dt="2025-09-04T14:49:17.579" v="25"/>
+          <ac:picMkLst>
+            <pc:docMk/>
+            <pc:sldMk cId="4128823105" sldId="307"/>
+            <ac:picMk id="13" creationId="{DF2CA6EE-0793-D03F-5EEB-95840F864BD7}"/>
+          </ac:picMkLst>
+        </pc:picChg>
+      </pc:sldChg>
+      <pc:sldChg chg="addSp delSp modSp">
+        <pc:chgData name="Usuário Convidado" userId="" providerId="Windows Live" clId="Web-{57233262-EDF2-8B2D-E416-E690305389A4}" dt="2025-09-04T15:34:40.079" v="163" actId="1076"/>
+        <pc:sldMkLst>
+          <pc:docMk/>
+          <pc:sldMk cId="1299049715" sldId="308"/>
+        </pc:sldMkLst>
+        <pc:spChg chg="add del mod">
+          <ac:chgData name="Usuário Convidado" userId="" providerId="Windows Live" clId="Web-{57233262-EDF2-8B2D-E416-E690305389A4}" dt="2025-09-04T15:33:57.693" v="155"/>
+          <ac:spMkLst>
+            <pc:docMk/>
+            <pc:sldMk cId="1299049715" sldId="308"/>
+            <ac:spMk id="13" creationId="{D40A1869-86B5-13DE-F1FF-333E0A03CBC3}"/>
+          </ac:spMkLst>
+        </pc:spChg>
+        <pc:spChg chg="add mod">
+          <ac:chgData name="Usuário Convidado" userId="" providerId="Windows Live" clId="Web-{57233262-EDF2-8B2D-E416-E690305389A4}" dt="2025-09-04T15:34:40.079" v="163" actId="1076"/>
+          <ac:spMkLst>
+            <pc:docMk/>
+            <pc:sldMk cId="1299049715" sldId="308"/>
+            <ac:spMk id="15" creationId="{A22406C2-D461-168D-2F75-20825A811C95}"/>
+          </ac:spMkLst>
+        </pc:spChg>
+        <pc:picChg chg="add del mod">
+          <ac:chgData name="Usuário Convidado" userId="" providerId="Windows Live" clId="Web-{57233262-EDF2-8B2D-E416-E690305389A4}" dt="2025-09-04T15:24:58.334" v="105"/>
+          <ac:picMkLst>
+            <pc:docMk/>
+            <pc:sldMk cId="1299049715" sldId="308"/>
+            <ac:picMk id="5" creationId="{0098F4B4-D802-9314-8047-0A93FB5D7275}"/>
+          </ac:picMkLst>
+        </pc:picChg>
+        <pc:picChg chg="del mod">
+          <ac:chgData name="Usuário Convidado" userId="" providerId="Windows Live" clId="Web-{57233262-EDF2-8B2D-E416-E690305389A4}" dt="2025-09-04T15:27:51.567" v="117"/>
+          <ac:picMkLst>
+            <pc:docMk/>
+            <pc:sldMk cId="1299049715" sldId="308"/>
+            <ac:picMk id="6" creationId="{1BBC747F-40A5-C207-0F9C-75EFC933FB38}"/>
+          </ac:picMkLst>
+        </pc:picChg>
+        <pc:picChg chg="add del mod">
+          <ac:chgData name="Usuário Convidado" userId="" providerId="Windows Live" clId="Web-{57233262-EDF2-8B2D-E416-E690305389A4}" dt="2025-09-04T15:25:05.553" v="110"/>
+          <ac:picMkLst>
+            <pc:docMk/>
+            <pc:sldMk cId="1299049715" sldId="308"/>
+            <ac:picMk id="9" creationId="{DEA716D3-1BFF-90C2-09C8-C1C88308ADA3}"/>
+          </ac:picMkLst>
+        </pc:picChg>
+        <pc:picChg chg="add mod">
+          <ac:chgData name="Usuário Convidado" userId="" providerId="Windows Live" clId="Web-{57233262-EDF2-8B2D-E416-E690305389A4}" dt="2025-09-04T15:34:31.391" v="161" actId="1076"/>
+          <ac:picMkLst>
+            <pc:docMk/>
+            <pc:sldMk cId="1299049715" sldId="308"/>
+            <ac:picMk id="10" creationId="{46884FDC-A2D8-32E6-583B-1344038D08EE}"/>
+          </ac:picMkLst>
+        </pc:picChg>
+        <pc:picChg chg="add mod">
+          <ac:chgData name="Usuário Convidado" userId="" providerId="Windows Live" clId="Web-{57233262-EDF2-8B2D-E416-E690305389A4}" dt="2025-09-04T15:34:31.437" v="162" actId="1076"/>
+          <ac:picMkLst>
+            <pc:docMk/>
+            <pc:sldMk cId="1299049715" sldId="308"/>
+            <ac:picMk id="11" creationId="{41BA781A-4432-2AD2-929C-A81FA7B72528}"/>
+          </ac:picMkLst>
+        </pc:picChg>
+        <pc:picChg chg="add mod">
+          <ac:chgData name="Usuário Convidado" userId="" providerId="Windows Live" clId="Web-{57233262-EDF2-8B2D-E416-E690305389A4}" dt="2025-09-04T15:33:29.132" v="151" actId="1076"/>
+          <ac:picMkLst>
+            <pc:docMk/>
+            <pc:sldMk cId="1299049715" sldId="308"/>
+            <ac:picMk id="12" creationId="{A029150B-BC82-5B3B-AD81-2F9B076E1E41}"/>
+          </ac:picMkLst>
+        </pc:picChg>
+      </pc:sldChg>
+      <pc:sldChg chg="addSp modSp">
+        <pc:chgData name="Usuário Convidado" userId="" providerId="Windows Live" clId="Web-{57233262-EDF2-8B2D-E416-E690305389A4}" dt="2025-09-04T15:23:46.693" v="104" actId="20577"/>
+        <pc:sldMkLst>
+          <pc:docMk/>
+          <pc:sldMk cId="720000608" sldId="309"/>
+        </pc:sldMkLst>
+        <pc:spChg chg="add mod">
+          <ac:chgData name="Usuário Convidado" userId="" providerId="Windows Live" clId="Web-{57233262-EDF2-8B2D-E416-E690305389A4}" dt="2025-09-04T15:23:46.693" v="104" actId="20577"/>
+          <ac:spMkLst>
+            <pc:docMk/>
+            <pc:sldMk cId="720000608" sldId="309"/>
+            <ac:spMk id="6" creationId="{D40A1869-86B5-13DE-F1FF-333E0A03CBC3}"/>
+          </ac:spMkLst>
+        </pc:spChg>
+        <pc:picChg chg="mod">
+          <ac:chgData name="Usuário Convidado" userId="" providerId="Windows Live" clId="Web-{57233262-EDF2-8B2D-E416-E690305389A4}" dt="2025-09-04T15:22:54.833" v="88" actId="1076"/>
+          <ac:picMkLst>
+            <pc:docMk/>
+            <pc:sldMk cId="720000608" sldId="309"/>
+            <ac:picMk id="5" creationId="{1443A748-1C56-6BF3-9E01-BBF3081444BA}"/>
+          </ac:picMkLst>
+        </pc:picChg>
+      </pc:sldChg>
+      <pc:sldChg chg="addSp modSp">
+        <pc:chgData name="Usuário Convidado" userId="" providerId="Windows Live" clId="Web-{57233262-EDF2-8B2D-E416-E690305389A4}" dt="2025-09-04T15:36:53.018" v="180" actId="1076"/>
+        <pc:sldMkLst>
+          <pc:docMk/>
+          <pc:sldMk cId="93527627" sldId="310"/>
+        </pc:sldMkLst>
+        <pc:spChg chg="add mod">
+          <ac:chgData name="Usuário Convidado" userId="" providerId="Windows Live" clId="Web-{57233262-EDF2-8B2D-E416-E690305389A4}" dt="2025-09-04T15:36:53.018" v="180" actId="1076"/>
+          <ac:spMkLst>
+            <pc:docMk/>
+            <pc:sldMk cId="93527627" sldId="310"/>
+            <ac:spMk id="5" creationId="{6D3847B8-291A-12A4-818E-8C0765274384}"/>
+          </ac:spMkLst>
+        </pc:spChg>
+        <pc:grpChg chg="add mod">
+          <ac:chgData name="Usuário Convidado" userId="" providerId="Windows Live" clId="Web-{57233262-EDF2-8B2D-E416-E690305389A4}" dt="2025-09-04T15:36:49.565" v="179" actId="1076"/>
+          <ac:grpSpMkLst>
+            <pc:docMk/>
+            <pc:sldMk cId="93527627" sldId="310"/>
+            <ac:grpSpMk id="6" creationId="{3CE5340B-BA13-1A8D-8701-3C400F363EB8}"/>
+          </ac:grpSpMkLst>
+        </pc:grpChg>
+        <pc:picChg chg="mod">
+          <ac:chgData name="Usuário Convidado" userId="" providerId="Windows Live" clId="Web-{57233262-EDF2-8B2D-E416-E690305389A4}" dt="2025-09-04T15:31:10.698" v="125" actId="1076"/>
+          <ac:picMkLst>
+            <pc:docMk/>
+            <pc:sldMk cId="93527627" sldId="310"/>
+            <ac:picMk id="9" creationId="{3C0BD3D6-9138-2613-C414-7430E82C172F}"/>
+          </ac:picMkLst>
+        </pc:picChg>
+        <pc:picChg chg="mod">
+          <ac:chgData name="Usuário Convidado" userId="" providerId="Windows Live" clId="Web-{57233262-EDF2-8B2D-E416-E690305389A4}" dt="2025-09-04T15:32:54.512" v="141" actId="1076"/>
+          <ac:picMkLst>
+            <pc:docMk/>
+            <pc:sldMk cId="93527627" sldId="310"/>
+            <ac:picMk id="11" creationId="{9E50F7A6-0CA9-1682-2BD7-27C576D5BDE8}"/>
+          </ac:picMkLst>
+        </pc:picChg>
+        <pc:picChg chg="mod">
+          <ac:chgData name="Usuário Convidado" userId="" providerId="Windows Live" clId="Web-{57233262-EDF2-8B2D-E416-E690305389A4}" dt="2025-09-04T15:32:51.074" v="140" actId="1076"/>
+          <ac:picMkLst>
+            <pc:docMk/>
+            <pc:sldMk cId="93527627" sldId="310"/>
+            <ac:picMk id="12" creationId="{CA028F4C-03B6-6514-99D2-096872446998}"/>
+          </ac:picMkLst>
+        </pc:picChg>
+      </pc:sldChg>
+      <pc:sldChg chg="modSp">
+        <pc:chgData name="Usuário Convidado" userId="" providerId="Windows Live" clId="Web-{57233262-EDF2-8B2D-E416-E690305389A4}" dt="2025-09-04T15:19:19.733" v="87" actId="1076"/>
+        <pc:sldMkLst>
+          <pc:docMk/>
+          <pc:sldMk cId="197823138" sldId="311"/>
+        </pc:sldMkLst>
+        <pc:picChg chg="mod">
+          <ac:chgData name="Usuário Convidado" userId="" providerId="Windows Live" clId="Web-{57233262-EDF2-8B2D-E416-E690305389A4}" dt="2025-09-04T15:19:19.733" v="87" actId="1076"/>
+          <ac:picMkLst>
+            <pc:docMk/>
+            <pc:sldMk cId="197823138" sldId="311"/>
+            <ac:picMk id="6" creationId="{6107EF58-92F9-8B71-EB49-79C8F22F034E}"/>
+          </ac:picMkLst>
+        </pc:picChg>
+      </pc:sldChg>
+      <pc:sldChg chg="addSp delSp modSp add ord replId">
+        <pc:chgData name="Usuário Convidado" userId="" providerId="Windows Live" clId="Web-{57233262-EDF2-8B2D-E416-E690305389A4}" dt="2025-09-04T14:46:30.652" v="16"/>
+        <pc:sldMkLst>
+          <pc:docMk/>
+          <pc:sldMk cId="2125416589" sldId="312"/>
+        </pc:sldMkLst>
+        <pc:picChg chg="add del mod">
+          <ac:chgData name="Usuário Convidado" userId="" providerId="Windows Live" clId="Web-{57233262-EDF2-8B2D-E416-E690305389A4}" dt="2025-09-04T14:45:52.293" v="10"/>
+          <ac:picMkLst>
+            <pc:docMk/>
+            <pc:sldMk cId="2125416589" sldId="312"/>
+            <ac:picMk id="3" creationId="{6DAF7650-7CD0-64A7-7CF3-D2916DECEA8B}"/>
+          </ac:picMkLst>
+        </pc:picChg>
+        <pc:picChg chg="del">
+          <ac:chgData name="Usuário Convidado" userId="" providerId="Windows Live" clId="Web-{57233262-EDF2-8B2D-E416-E690305389A4}" dt="2025-09-04T14:40:23.025" v="3"/>
+          <ac:picMkLst>
+            <pc:docMk/>
+            <pc:sldMk cId="2125416589" sldId="312"/>
+            <ac:picMk id="5" creationId="{B743A4C1-F965-28FC-DAA1-AD3C649331A5}"/>
+          </ac:picMkLst>
+        </pc:picChg>
+        <pc:picChg chg="add mod">
+          <ac:chgData name="Usuário Convidado" userId="" providerId="Windows Live" clId="Web-{57233262-EDF2-8B2D-E416-E690305389A4}" dt="2025-09-04T14:46:14.434" v="15" actId="14100"/>
+          <ac:picMkLst>
+            <pc:docMk/>
+            <pc:sldMk cId="2125416589" sldId="312"/>
+            <ac:picMk id="6" creationId="{F541213F-CBF0-9851-3207-BC937B27617D}"/>
+          </ac:picMkLst>
+        </pc:picChg>
+      </pc:sldChg>
+      <pc:sldChg chg="new del">
+        <pc:chgData name="Usuário Convidado" userId="" providerId="Windows Live" clId="Web-{57233262-EDF2-8B2D-E416-E690305389A4}" dt="2025-09-04T14:40:18.103" v="1"/>
+        <pc:sldMkLst>
+          <pc:docMk/>
+          <pc:sldMk cId="3924858870" sldId="312"/>
+        </pc:sldMkLst>
+      </pc:sldChg>
+      <pc:sldChg chg="addSp delSp modSp add replId">
+        <pc:chgData name="Usuário Convidado" userId="" providerId="Windows Live" clId="Web-{57233262-EDF2-8B2D-E416-E690305389A4}" dt="2025-09-04T15:29:13.273" v="124" actId="1076"/>
+        <pc:sldMkLst>
+          <pc:docMk/>
+          <pc:sldMk cId="3339640022" sldId="313"/>
+        </pc:sldMkLst>
+        <pc:picChg chg="add mod">
+          <ac:chgData name="Usuário Convidado" userId="" providerId="Windows Live" clId="Web-{57233262-EDF2-8B2D-E416-E690305389A4}" dt="2025-09-04T15:29:13.273" v="124" actId="1076"/>
+          <ac:picMkLst>
+            <pc:docMk/>
+            <pc:sldMk cId="3339640022" sldId="313"/>
+            <ac:picMk id="3" creationId="{163A8CC1-DED4-3AFD-9DF1-D099F7BEC835}"/>
+          </ac:picMkLst>
+        </pc:picChg>
+        <pc:picChg chg="del">
+          <ac:chgData name="Usuário Convidado" userId="" providerId="Windows Live" clId="Web-{57233262-EDF2-8B2D-E416-E690305389A4}" dt="2025-09-04T15:29:00.804" v="121"/>
+          <ac:picMkLst>
+            <pc:docMk/>
+            <pc:sldMk cId="3339640022" sldId="313"/>
+            <ac:picMk id="10" creationId="{6E15EEEC-F319-200B-B19F-E9D6A56DC5CD}"/>
+          </ac:picMkLst>
+        </pc:picChg>
+        <pc:picChg chg="del">
+          <ac:chgData name="Usuário Convidado" userId="" providerId="Windows Live" clId="Web-{57233262-EDF2-8B2D-E416-E690305389A4}" dt="2025-09-04T15:29:00.867" v="122"/>
+          <ac:picMkLst>
+            <pc:docMk/>
+            <pc:sldMk cId="3339640022" sldId="313"/>
+            <ac:picMk id="11" creationId="{56D527AF-30A0-F7DA-B1E6-7080D14BEC33}"/>
+          </ac:picMkLst>
+        </pc:picChg>
+      </pc:sldChg>
+    </pc:docChg>
+  </pc:docChgLst>
   <pc:docChgLst>
     <pc:chgData name="Thiago Ney Evaristo Rodrigues" userId="fb50eefc1efb6381" providerId="Windows Live" clId="Web-{B9B5D969-8FE9-3C5C-CC2C-98B2E3B7FC11}"/>
     <pc:docChg chg="modSld">
@@ -218,46 +503,6 @@
           <pc:docMk/>
           <pc:sldMk cId="2936865589" sldId="267"/>
         </pc:sldMkLst>
-        <pc:grpChg chg="del">
-          <ac:chgData name="Thiago Ney Evaristo Rodrigues" userId="fb50eefc1efb6381" providerId="Windows Live" clId="Web-{B9B5D969-8FE9-3C5C-CC2C-98B2E3B7FC11}" dt="2025-08-18T20:42:38.200" v="4"/>
-          <ac:grpSpMkLst>
-            <pc:docMk/>
-            <pc:sldMk cId="2936865589" sldId="267"/>
-            <ac:grpSpMk id="11" creationId="{F4ABE762-CFCC-CBFC-F453-78F85CD75D38}"/>
-          </ac:grpSpMkLst>
-        </pc:grpChg>
-        <pc:picChg chg="add mod">
-          <ac:chgData name="Thiago Ney Evaristo Rodrigues" userId="fb50eefc1efb6381" providerId="Windows Live" clId="Web-{B9B5D969-8FE9-3C5C-CC2C-98B2E3B7FC11}" dt="2025-08-18T20:44:19.876" v="36" actId="1076"/>
-          <ac:picMkLst>
-            <pc:docMk/>
-            <pc:sldMk cId="2936865589" sldId="267"/>
-            <ac:picMk id="5" creationId="{CBABFFB8-2444-392F-E568-52A3BEC80731}"/>
-          </ac:picMkLst>
-        </pc:picChg>
-        <pc:picChg chg="topLvl">
-          <ac:chgData name="Thiago Ney Evaristo Rodrigues" userId="fb50eefc1efb6381" providerId="Windows Live" clId="Web-{B9B5D969-8FE9-3C5C-CC2C-98B2E3B7FC11}" dt="2025-08-18T20:42:38.200" v="4"/>
-          <ac:picMkLst>
-            <pc:docMk/>
-            <pc:sldMk cId="2936865589" sldId="267"/>
-            <ac:picMk id="6" creationId="{180A3A88-C16E-4BED-06D1-45C572A20374}"/>
-          </ac:picMkLst>
-        </pc:picChg>
-        <pc:picChg chg="add del mod topLvl">
-          <ac:chgData name="Thiago Ney Evaristo Rodrigues" userId="fb50eefc1efb6381" providerId="Windows Live" clId="Web-{B9B5D969-8FE9-3C5C-CC2C-98B2E3B7FC11}" dt="2025-08-18T20:43:44.234" v="25"/>
-          <ac:picMkLst>
-            <pc:docMk/>
-            <pc:sldMk cId="2936865589" sldId="267"/>
-            <ac:picMk id="7" creationId="{D367DE33-B6F2-AF57-0FEC-0951A8F39C3D}"/>
-          </ac:picMkLst>
-        </pc:picChg>
-        <pc:picChg chg="add mod">
-          <ac:chgData name="Thiago Ney Evaristo Rodrigues" userId="fb50eefc1efb6381" providerId="Windows Live" clId="Web-{B9B5D969-8FE9-3C5C-CC2C-98B2E3B7FC11}" dt="2025-08-18T20:44:18.719" v="35" actId="1076"/>
-          <ac:picMkLst>
-            <pc:docMk/>
-            <pc:sldMk cId="2936865589" sldId="267"/>
-            <ac:picMk id="9" creationId="{C4A06186-1CA4-965F-BA8E-825B5E733D9B}"/>
-          </ac:picMkLst>
-        </pc:picChg>
       </pc:sldChg>
     </pc:docChg>
   </pc:docChgLst>
@@ -274,70 +519,6 @@
           <pc:docMk/>
           <pc:sldMk cId="3536410419" sldId="264"/>
         </pc:sldMkLst>
-        <pc:spChg chg="mod">
-          <ac:chgData name="Thiago Ney Evaristo Rodrigues" userId="fb50eefc1efb6381" providerId="LiveId" clId="{4A2E2E4D-6AE6-40C9-B147-34264DB25721}" dt="2025-08-18T20:20:59.053" v="3598" actId="20577"/>
-          <ac:spMkLst>
-            <pc:docMk/>
-            <pc:sldMk cId="3536410419" sldId="264"/>
-            <ac:spMk id="2" creationId="{4EB487FB-E80E-1F4C-A74B-9885BDE23929}"/>
-          </ac:spMkLst>
-        </pc:spChg>
-        <pc:spChg chg="mod">
-          <ac:chgData name="Thiago Ney Evaristo Rodrigues" userId="fb50eefc1efb6381" providerId="LiveId" clId="{4A2E2E4D-6AE6-40C9-B147-34264DB25721}" dt="2025-08-18T19:24:36.440" v="1053" actId="12789"/>
-          <ac:spMkLst>
-            <pc:docMk/>
-            <pc:sldMk cId="3536410419" sldId="264"/>
-            <ac:spMk id="3" creationId="{A2566FEB-E0B9-C52F-25A4-D2A9488DACB2}"/>
-          </ac:spMkLst>
-        </pc:spChg>
-        <pc:spChg chg="add">
-          <ac:chgData name="Thiago Ney Evaristo Rodrigues" userId="fb50eefc1efb6381" providerId="LiveId" clId="{4A2E2E4D-6AE6-40C9-B147-34264DB25721}" dt="2025-08-18T15:20:22.363" v="309"/>
-          <ac:spMkLst>
-            <pc:docMk/>
-            <pc:sldMk cId="3536410419" sldId="264"/>
-            <ac:spMk id="5" creationId="{03FD59FC-1A18-6953-EB08-DF0F33B51982}"/>
-          </ac:spMkLst>
-        </pc:spChg>
-        <pc:spChg chg="add del mod">
-          <ac:chgData name="Thiago Ney Evaristo Rodrigues" userId="fb50eefc1efb6381" providerId="LiveId" clId="{4A2E2E4D-6AE6-40C9-B147-34264DB25721}" dt="2025-08-18T20:19:21.120" v="3561" actId="478"/>
-          <ac:spMkLst>
-            <pc:docMk/>
-            <pc:sldMk cId="3536410419" sldId="264"/>
-            <ac:spMk id="5" creationId="{AC4E1C13-BA72-901D-3330-372A803DD6A7}"/>
-          </ac:spMkLst>
-        </pc:spChg>
-        <pc:spChg chg="add">
-          <ac:chgData name="Thiago Ney Evaristo Rodrigues" userId="fb50eefc1efb6381" providerId="LiveId" clId="{4A2E2E4D-6AE6-40C9-B147-34264DB25721}" dt="2025-08-18T15:20:27.766" v="310"/>
-          <ac:spMkLst>
-            <pc:docMk/>
-            <pc:sldMk cId="3536410419" sldId="264"/>
-            <ac:spMk id="6" creationId="{7CDB40B4-541C-40D2-9F9F-A74EABA77CA6}"/>
-          </ac:spMkLst>
-        </pc:spChg>
-        <pc:spChg chg="add">
-          <ac:chgData name="Thiago Ney Evaristo Rodrigues" userId="fb50eefc1efb6381" providerId="LiveId" clId="{4A2E2E4D-6AE6-40C9-B147-34264DB25721}" dt="2025-08-18T15:22:35.401" v="379"/>
-          <ac:spMkLst>
-            <pc:docMk/>
-            <pc:sldMk cId="3536410419" sldId="264"/>
-            <ac:spMk id="7" creationId="{17756BB6-4A2C-5A80-9780-4207C70A1E9B}"/>
-          </ac:spMkLst>
-        </pc:spChg>
-        <pc:spChg chg="add mod">
-          <ac:chgData name="Thiago Ney Evaristo Rodrigues" userId="fb50eefc1efb6381" providerId="LiveId" clId="{4A2E2E4D-6AE6-40C9-B147-34264DB25721}" dt="2025-08-18T19:16:52.409" v="966" actId="555"/>
-          <ac:spMkLst>
-            <pc:docMk/>
-            <pc:sldMk cId="3536410419" sldId="264"/>
-            <ac:spMk id="9" creationId="{D8430433-FA66-D5A3-062F-A93112CB2B52}"/>
-          </ac:spMkLst>
-        </pc:spChg>
-        <pc:spChg chg="add mod">
-          <ac:chgData name="Thiago Ney Evaristo Rodrigues" userId="fb50eefc1efb6381" providerId="LiveId" clId="{4A2E2E4D-6AE6-40C9-B147-34264DB25721}" dt="2025-08-18T15:38:32.504" v="962" actId="1076"/>
-          <ac:spMkLst>
-            <pc:docMk/>
-            <pc:sldMk cId="3536410419" sldId="264"/>
-            <ac:spMk id="10" creationId="{B6CC3FE1-0548-4031-10F5-7E8ED23E955E}"/>
-          </ac:spMkLst>
-        </pc:spChg>
       </pc:sldChg>
       <pc:sldChg chg="addSp delSp modSp mod">
         <pc:chgData name="Thiago Ney Evaristo Rodrigues" userId="fb50eefc1efb6381" providerId="LiveId" clId="{4A2E2E4D-6AE6-40C9-B147-34264DB25721}" dt="2025-08-18T20:19:35.690" v="3564" actId="21"/>
@@ -345,54 +526,6 @@
           <pc:docMk/>
           <pc:sldMk cId="280983118" sldId="265"/>
         </pc:sldMkLst>
-        <pc:spChg chg="mod">
-          <ac:chgData name="Thiago Ney Evaristo Rodrigues" userId="fb50eefc1efb6381" providerId="LiveId" clId="{4A2E2E4D-6AE6-40C9-B147-34264DB25721}" dt="2025-08-18T15:12:35.346" v="256" actId="255"/>
-          <ac:spMkLst>
-            <pc:docMk/>
-            <pc:sldMk cId="280983118" sldId="265"/>
-            <ac:spMk id="2" creationId="{859043AE-2AE5-A6F6-E505-B0941A4FB2E3}"/>
-          </ac:spMkLst>
-        </pc:spChg>
-        <pc:spChg chg="del mod">
-          <ac:chgData name="Thiago Ney Evaristo Rodrigues" userId="fb50eefc1efb6381" providerId="LiveId" clId="{4A2E2E4D-6AE6-40C9-B147-34264DB25721}" dt="2025-08-18T19:20:05.936" v="998" actId="478"/>
-          <ac:spMkLst>
-            <pc:docMk/>
-            <pc:sldMk cId="280983118" sldId="265"/>
-            <ac:spMk id="3" creationId="{BB559D3D-4FBE-8E76-CB69-02073D9729B9}"/>
-          </ac:spMkLst>
-        </pc:spChg>
-        <pc:spChg chg="add mod">
-          <ac:chgData name="Thiago Ney Evaristo Rodrigues" userId="fb50eefc1efb6381" providerId="LiveId" clId="{4A2E2E4D-6AE6-40C9-B147-34264DB25721}" dt="2025-08-18T19:25:40.500" v="1118" actId="553"/>
-          <ac:spMkLst>
-            <pc:docMk/>
-            <pc:sldMk cId="280983118" sldId="265"/>
-            <ac:spMk id="7" creationId="{3FCDC171-1EE4-5B02-431C-0C38839E7CA6}"/>
-          </ac:spMkLst>
-        </pc:spChg>
-        <pc:spChg chg="add del mod">
-          <ac:chgData name="Thiago Ney Evaristo Rodrigues" userId="fb50eefc1efb6381" providerId="LiveId" clId="{4A2E2E4D-6AE6-40C9-B147-34264DB25721}" dt="2025-08-18T20:19:35.690" v="3564" actId="21"/>
-          <ac:spMkLst>
-            <pc:docMk/>
-            <pc:sldMk cId="280983118" sldId="265"/>
-            <ac:spMk id="9" creationId="{A087F3F7-3238-806A-6015-1F80C44DF6BE}"/>
-          </ac:spMkLst>
-        </pc:spChg>
-        <pc:spChg chg="add del mod">
-          <ac:chgData name="Thiago Ney Evaristo Rodrigues" userId="fb50eefc1efb6381" providerId="LiveId" clId="{4A2E2E4D-6AE6-40C9-B147-34264DB25721}" dt="2025-08-18T20:19:35.690" v="3564" actId="21"/>
-          <ac:spMkLst>
-            <pc:docMk/>
-            <pc:sldMk cId="280983118" sldId="265"/>
-            <ac:spMk id="10" creationId="{8B86310E-48CF-D0CE-1A9A-F187CABB7ED0}"/>
-          </ac:spMkLst>
-        </pc:spChg>
-        <pc:picChg chg="mod">
-          <ac:chgData name="Thiago Ney Evaristo Rodrigues" userId="fb50eefc1efb6381" providerId="LiveId" clId="{4A2E2E4D-6AE6-40C9-B147-34264DB25721}" dt="2025-08-18T19:25:35.589" v="1117" actId="552"/>
-          <ac:picMkLst>
-            <pc:docMk/>
-            <pc:sldMk cId="280983118" sldId="265"/>
-            <ac:picMk id="5" creationId="{18C07F95-DA9D-953A-01AA-93C1BF6E2F95}"/>
-          </ac:picMkLst>
-        </pc:picChg>
       </pc:sldChg>
       <pc:sldChg chg="addSp delSp modSp mod">
         <pc:chgData name="Thiago Ney Evaristo Rodrigues" userId="fb50eefc1efb6381" providerId="LiveId" clId="{4A2E2E4D-6AE6-40C9-B147-34264DB25721}" dt="2025-08-18T20:19:45.955" v="3567" actId="478"/>
@@ -400,54 +533,6 @@
           <pc:docMk/>
           <pc:sldMk cId="3614048354" sldId="266"/>
         </pc:sldMkLst>
-        <pc:spChg chg="mod">
-          <ac:chgData name="Thiago Ney Evaristo Rodrigues" userId="fb50eefc1efb6381" providerId="LiveId" clId="{4A2E2E4D-6AE6-40C9-B147-34264DB25721}" dt="2025-08-18T15:08:37.345" v="209" actId="2711"/>
-          <ac:spMkLst>
-            <pc:docMk/>
-            <pc:sldMk cId="3614048354" sldId="266"/>
-            <ac:spMk id="2" creationId="{03C515E5-27AF-0EA8-A477-EBB3A50A631F}"/>
-          </ac:spMkLst>
-        </pc:spChg>
-        <pc:spChg chg="del mod">
-          <ac:chgData name="Thiago Ney Evaristo Rodrigues" userId="fb50eefc1efb6381" providerId="LiveId" clId="{4A2E2E4D-6AE6-40C9-B147-34264DB25721}" dt="2025-08-18T19:29:40.791" v="1215" actId="478"/>
-          <ac:spMkLst>
-            <pc:docMk/>
-            <pc:sldMk cId="3614048354" sldId="266"/>
-            <ac:spMk id="3" creationId="{54795B77-50A9-AE54-C5E4-B3DE4348BE09}"/>
-          </ac:spMkLst>
-        </pc:spChg>
-        <pc:spChg chg="add del mod">
-          <ac:chgData name="Thiago Ney Evaristo Rodrigues" userId="fb50eefc1efb6381" providerId="LiveId" clId="{4A2E2E4D-6AE6-40C9-B147-34264DB25721}" dt="2025-08-18T20:19:45.159" v="3566" actId="478"/>
-          <ac:spMkLst>
-            <pc:docMk/>
-            <pc:sldMk cId="3614048354" sldId="266"/>
-            <ac:spMk id="6" creationId="{AE6B09A9-F362-A695-21FE-5E97AFFD9DEA}"/>
-          </ac:spMkLst>
-        </pc:spChg>
-        <pc:spChg chg="add del mod">
-          <ac:chgData name="Thiago Ney Evaristo Rodrigues" userId="fb50eefc1efb6381" providerId="LiveId" clId="{4A2E2E4D-6AE6-40C9-B147-34264DB25721}" dt="2025-08-18T20:19:45.955" v="3567" actId="478"/>
-          <ac:spMkLst>
-            <pc:docMk/>
-            <pc:sldMk cId="3614048354" sldId="266"/>
-            <ac:spMk id="7" creationId="{E07784F0-E45A-36FF-63C6-1AC5BB0D8A7B}"/>
-          </ac:spMkLst>
-        </pc:spChg>
-        <pc:spChg chg="add mod">
-          <ac:chgData name="Thiago Ney Evaristo Rodrigues" userId="fb50eefc1efb6381" providerId="LiveId" clId="{4A2E2E4D-6AE6-40C9-B147-34264DB25721}" dt="2025-08-18T19:31:08.173" v="1228" actId="113"/>
-          <ac:spMkLst>
-            <pc:docMk/>
-            <pc:sldMk cId="3614048354" sldId="266"/>
-            <ac:spMk id="9" creationId="{2128A055-8CC1-0FE0-CF77-56B049A64681}"/>
-          </ac:spMkLst>
-        </pc:spChg>
-        <pc:picChg chg="mod">
-          <ac:chgData name="Thiago Ney Evaristo Rodrigues" userId="fb50eefc1efb6381" providerId="LiveId" clId="{4A2E2E4D-6AE6-40C9-B147-34264DB25721}" dt="2025-08-18T19:30:53.149" v="1226" actId="12789"/>
-          <ac:picMkLst>
-            <pc:docMk/>
-            <pc:sldMk cId="3614048354" sldId="266"/>
-            <ac:picMk id="5" creationId="{06F26671-4A0E-3770-263C-E2C6B886A9EB}"/>
-          </ac:picMkLst>
-        </pc:picChg>
       </pc:sldChg>
       <pc:sldChg chg="addSp delSp modSp mod">
         <pc:chgData name="Thiago Ney Evaristo Rodrigues" userId="fb50eefc1efb6381" providerId="LiveId" clId="{4A2E2E4D-6AE6-40C9-B147-34264DB25721}" dt="2025-08-18T20:50:05.521" v="3672" actId="478"/>
@@ -455,86 +540,6 @@
           <pc:docMk/>
           <pc:sldMk cId="2936865589" sldId="267"/>
         </pc:sldMkLst>
-        <pc:spChg chg="mod">
-          <ac:chgData name="Thiago Ney Evaristo Rodrigues" userId="fb50eefc1efb6381" providerId="LiveId" clId="{4A2E2E4D-6AE6-40C9-B147-34264DB25721}" dt="2025-08-18T15:08:41.914" v="210" actId="2711"/>
-          <ac:spMkLst>
-            <pc:docMk/>
-            <pc:sldMk cId="2936865589" sldId="267"/>
-            <ac:spMk id="2" creationId="{0F04B50E-3C49-5EBB-075B-1A866040E3E1}"/>
-          </ac:spMkLst>
-        </pc:spChg>
-        <pc:spChg chg="mod">
-          <ac:chgData name="Thiago Ney Evaristo Rodrigues" userId="fb50eefc1efb6381" providerId="LiveId" clId="{4A2E2E4D-6AE6-40C9-B147-34264DB25721}" dt="2025-08-18T20:32:36.127" v="3641" actId="113"/>
-          <ac:spMkLst>
-            <pc:docMk/>
-            <pc:sldMk cId="2936865589" sldId="267"/>
-            <ac:spMk id="3" creationId="{60D62624-8412-1DD1-D048-3C13B60D3EC0}"/>
-          </ac:spMkLst>
-        </pc:spChg>
-        <pc:spChg chg="add del mod">
-          <ac:chgData name="Thiago Ney Evaristo Rodrigues" userId="fb50eefc1efb6381" providerId="LiveId" clId="{4A2E2E4D-6AE6-40C9-B147-34264DB25721}" dt="2025-08-18T20:05:12.818" v="2603" actId="478"/>
-          <ac:spMkLst>
-            <pc:docMk/>
-            <pc:sldMk cId="2936865589" sldId="267"/>
-            <ac:spMk id="5" creationId="{49DD1C6F-BCAA-033C-656C-A238B8F4C7BC}"/>
-          </ac:spMkLst>
-        </pc:spChg>
-        <pc:spChg chg="add del mod">
-          <ac:chgData name="Thiago Ney Evaristo Rodrigues" userId="fb50eefc1efb6381" providerId="LiveId" clId="{4A2E2E4D-6AE6-40C9-B147-34264DB25721}" dt="2025-08-18T20:05:11.942" v="2602" actId="478"/>
-          <ac:spMkLst>
-            <pc:docMk/>
-            <pc:sldMk cId="2936865589" sldId="267"/>
-            <ac:spMk id="9" creationId="{DA020171-F8A3-B272-A930-6BF257141AE9}"/>
-          </ac:spMkLst>
-        </pc:spChg>
-        <pc:grpChg chg="add del mod">
-          <ac:chgData name="Thiago Ney Evaristo Rodrigues" userId="fb50eefc1efb6381" providerId="LiveId" clId="{4A2E2E4D-6AE6-40C9-B147-34264DB25721}" dt="2025-08-18T20:00:03.014" v="2386" actId="165"/>
-          <ac:grpSpMkLst>
-            <pc:docMk/>
-            <pc:sldMk cId="2936865589" sldId="267"/>
-            <ac:grpSpMk id="10" creationId="{33FAF82D-FA87-3405-AFA6-59AD7B9627E8}"/>
-          </ac:grpSpMkLst>
-        </pc:grpChg>
-        <pc:grpChg chg="add mod">
-          <ac:chgData name="Thiago Ney Evaristo Rodrigues" userId="fb50eefc1efb6381" providerId="LiveId" clId="{4A2E2E4D-6AE6-40C9-B147-34264DB25721}" dt="2025-08-18T20:04:26.732" v="2582" actId="12789"/>
-          <ac:grpSpMkLst>
-            <pc:docMk/>
-            <pc:sldMk cId="2936865589" sldId="267"/>
-            <ac:grpSpMk id="11" creationId="{F4ABE762-CFCC-CBFC-F453-78F85CD75D38}"/>
-          </ac:grpSpMkLst>
-        </pc:grpChg>
-        <pc:picChg chg="add del mod ord">
-          <ac:chgData name="Thiago Ney Evaristo Rodrigues" userId="fb50eefc1efb6381" providerId="LiveId" clId="{4A2E2E4D-6AE6-40C9-B147-34264DB25721}" dt="2025-08-18T20:50:03.492" v="3671" actId="167"/>
-          <ac:picMkLst>
-            <pc:docMk/>
-            <pc:sldMk cId="2936865589" sldId="267"/>
-            <ac:picMk id="5" creationId="{CBABFFB8-2444-392F-E568-52A3BEC80731}"/>
-          </ac:picMkLst>
-        </pc:picChg>
-        <pc:picChg chg="del mod topLvl">
-          <ac:chgData name="Thiago Ney Evaristo Rodrigues" userId="fb50eefc1efb6381" providerId="LiveId" clId="{4A2E2E4D-6AE6-40C9-B147-34264DB25721}" dt="2025-08-18T20:50:05.521" v="3672" actId="478"/>
-          <ac:picMkLst>
-            <pc:docMk/>
-            <pc:sldMk cId="2936865589" sldId="267"/>
-            <ac:picMk id="6" creationId="{180A3A88-C16E-4BED-06D1-45C572A20374}"/>
-          </ac:picMkLst>
-        </pc:picChg>
-        <pc:picChg chg="add del mod topLvl">
-          <ac:chgData name="Thiago Ney Evaristo Rodrigues" userId="fb50eefc1efb6381" providerId="LiveId" clId="{4A2E2E4D-6AE6-40C9-B147-34264DB25721}" dt="2025-08-18T20:49:48.482" v="3667" actId="478"/>
-          <ac:picMkLst>
-            <pc:docMk/>
-            <pc:sldMk cId="2936865589" sldId="267"/>
-            <ac:picMk id="7" creationId="{D367DE33-B6F2-AF57-0FEC-0951A8F39C3D}"/>
-          </ac:picMkLst>
-        </pc:picChg>
-        <pc:picChg chg="mod ord">
-          <ac:chgData name="Thiago Ney Evaristo Rodrigues" userId="fb50eefc1efb6381" providerId="LiveId" clId="{4A2E2E4D-6AE6-40C9-B147-34264DB25721}" dt="2025-08-18T20:49:46.450" v="3666" actId="167"/>
-          <ac:picMkLst>
-            <pc:docMk/>
-            <pc:sldMk cId="2936865589" sldId="267"/>
-            <ac:picMk id="9" creationId="{C4A06186-1CA4-965F-BA8E-825B5E733D9B}"/>
-          </ac:picMkLst>
-        </pc:picChg>
       </pc:sldChg>
       <pc:sldChg chg="modSp mod">
         <pc:chgData name="Thiago Ney Evaristo Rodrigues" userId="fb50eefc1efb6381" providerId="LiveId" clId="{4A2E2E4D-6AE6-40C9-B147-34264DB25721}" dt="2025-08-18T20:48:04.268" v="3642" actId="20577"/>
@@ -542,30 +547,6 @@
           <pc:docMk/>
           <pc:sldMk cId="872924692" sldId="268"/>
         </pc:sldMkLst>
-        <pc:spChg chg="mod">
-          <ac:chgData name="Thiago Ney Evaristo Rodrigues" userId="fb50eefc1efb6381" providerId="LiveId" clId="{4A2E2E4D-6AE6-40C9-B147-34264DB25721}" dt="2025-08-18T15:08:47.104" v="211" actId="2711"/>
-          <ac:spMkLst>
-            <pc:docMk/>
-            <pc:sldMk cId="872924692" sldId="268"/>
-            <ac:spMk id="2" creationId="{AB2FE7C6-3510-1E44-4FA1-888491BEC015}"/>
-          </ac:spMkLst>
-        </pc:spChg>
-        <pc:spChg chg="mod">
-          <ac:chgData name="Thiago Ney Evaristo Rodrigues" userId="fb50eefc1efb6381" providerId="LiveId" clId="{4A2E2E4D-6AE6-40C9-B147-34264DB25721}" dt="2025-08-18T20:48:04.268" v="3642" actId="20577"/>
-          <ac:spMkLst>
-            <pc:docMk/>
-            <pc:sldMk cId="872924692" sldId="268"/>
-            <ac:spMk id="3" creationId="{95FF030B-F453-B2DE-D408-C18AC94305C3}"/>
-          </ac:spMkLst>
-        </pc:spChg>
-        <pc:picChg chg="mod">
-          <ac:chgData name="Thiago Ney Evaristo Rodrigues" userId="fb50eefc1efb6381" providerId="LiveId" clId="{4A2E2E4D-6AE6-40C9-B147-34264DB25721}" dt="2025-08-18T20:17:53.588" v="3540" actId="12788"/>
-          <ac:picMkLst>
-            <pc:docMk/>
-            <pc:sldMk cId="872924692" sldId="268"/>
-            <ac:picMk id="5" creationId="{FD1B6C40-6C42-16AC-8A0C-1B7D57718FE5}"/>
-          </ac:picMkLst>
-        </pc:picChg>
       </pc:sldChg>
       <pc:sldChg chg="modSp add del mod">
         <pc:chgData name="Thiago Ney Evaristo Rodrigues" userId="fb50eefc1efb6381" providerId="LiveId" clId="{4A2E2E4D-6AE6-40C9-B147-34264DB25721}" dt="2025-08-18T20:32:26.125" v="3640" actId="47"/>
@@ -573,22 +554,6 @@
           <pc:docMk/>
           <pc:sldMk cId="627221529" sldId="269"/>
         </pc:sldMkLst>
-        <pc:spChg chg="mod">
-          <ac:chgData name="Thiago Ney Evaristo Rodrigues" userId="fb50eefc1efb6381" providerId="LiveId" clId="{4A2E2E4D-6AE6-40C9-B147-34264DB25721}" dt="2025-08-18T15:08:52.093" v="212" actId="2711"/>
-          <ac:spMkLst>
-            <pc:docMk/>
-            <pc:sldMk cId="627221529" sldId="269"/>
-            <ac:spMk id="2" creationId="{E6CF556B-CF65-D084-EB94-9353B5C3C56B}"/>
-          </ac:spMkLst>
-        </pc:spChg>
-        <pc:spChg chg="mod">
-          <ac:chgData name="Thiago Ney Evaristo Rodrigues" userId="fb50eefc1efb6381" providerId="LiveId" clId="{4A2E2E4D-6AE6-40C9-B147-34264DB25721}" dt="2025-08-18T15:08:58.626" v="213" actId="2711"/>
-          <ac:spMkLst>
-            <pc:docMk/>
-            <pc:sldMk cId="627221529" sldId="269"/>
-            <ac:spMk id="3" creationId="{CEAE33F4-8601-DD48-E7EB-FF4173F67449}"/>
-          </ac:spMkLst>
-        </pc:spChg>
       </pc:sldChg>
       <pc:sldChg chg="del">
         <pc:chgData name="Thiago Ney Evaristo Rodrigues" userId="fb50eefc1efb6381" providerId="LiveId" clId="{4A2E2E4D-6AE6-40C9-B147-34264DB25721}" dt="2025-08-18T14:58:11.630" v="197" actId="47"/>
@@ -603,46 +568,6 @@
           <pc:docMk/>
           <pc:sldMk cId="2710463504" sldId="271"/>
         </pc:sldMkLst>
-        <pc:spChg chg="del mod">
-          <ac:chgData name="Thiago Ney Evaristo Rodrigues" userId="fb50eefc1efb6381" providerId="LiveId" clId="{4A2E2E4D-6AE6-40C9-B147-34264DB25721}" dt="2025-08-18T15:11:59.208" v="231" actId="478"/>
-          <ac:spMkLst>
-            <pc:docMk/>
-            <pc:sldMk cId="2710463504" sldId="271"/>
-            <ac:spMk id="2" creationId="{477A2229-1657-F382-1760-7677C1288AAD}"/>
-          </ac:spMkLst>
-        </pc:spChg>
-        <pc:spChg chg="mod">
-          <ac:chgData name="Thiago Ney Evaristo Rodrigues" userId="fb50eefc1efb6381" providerId="LiveId" clId="{4A2E2E4D-6AE6-40C9-B147-34264DB25721}" dt="2025-08-18T15:34:31.211" v="749" actId="20577"/>
-          <ac:spMkLst>
-            <pc:docMk/>
-            <pc:sldMk cId="2710463504" sldId="271"/>
-            <ac:spMk id="3" creationId="{6D40C563-F2AC-2FCB-0B18-98F4198A588D}"/>
-          </ac:spMkLst>
-        </pc:spChg>
-        <pc:spChg chg="mod">
-          <ac:chgData name="Thiago Ney Evaristo Rodrigues" userId="fb50eefc1efb6381" providerId="LiveId" clId="{4A2E2E4D-6AE6-40C9-B147-34264DB25721}" dt="2025-08-18T15:10:43.702" v="229" actId="14100"/>
-          <ac:spMkLst>
-            <pc:docMk/>
-            <pc:sldMk cId="2710463504" sldId="271"/>
-            <ac:spMk id="4" creationId="{BB21480E-EAAB-C747-9BAB-F8EE30BF19BC}"/>
-          </ac:spMkLst>
-        </pc:spChg>
-        <pc:spChg chg="add del mod">
-          <ac:chgData name="Thiago Ney Evaristo Rodrigues" userId="fb50eefc1efb6381" providerId="LiveId" clId="{4A2E2E4D-6AE6-40C9-B147-34264DB25721}" dt="2025-08-18T15:12:02.547" v="232" actId="478"/>
-          <ac:spMkLst>
-            <pc:docMk/>
-            <pc:sldMk cId="2710463504" sldId="271"/>
-            <ac:spMk id="6" creationId="{6C9D036F-36E5-5AA0-F312-0FEB484DAAC3}"/>
-          </ac:spMkLst>
-        </pc:spChg>
-        <pc:spChg chg="add mod">
-          <ac:chgData name="Thiago Ney Evaristo Rodrigues" userId="fb50eefc1efb6381" providerId="LiveId" clId="{4A2E2E4D-6AE6-40C9-B147-34264DB25721}" dt="2025-08-18T15:26:21.009" v="565" actId="20577"/>
-          <ac:spMkLst>
-            <pc:docMk/>
-            <pc:sldMk cId="2710463504" sldId="271"/>
-            <ac:spMk id="7" creationId="{1DAADC52-2031-61FC-738C-F29F455C34F9}"/>
-          </ac:spMkLst>
-        </pc:spChg>
       </pc:sldChg>
       <pc:sldChg chg="addSp delSp modSp add mod">
         <pc:chgData name="Thiago Ney Evaristo Rodrigues" userId="fb50eefc1efb6381" providerId="LiveId" clId="{4A2E2E4D-6AE6-40C9-B147-34264DB25721}" dt="2025-08-18T15:13:11.534" v="259" actId="20577"/>
@@ -664,22 +589,6 @@
             <pc:docMk/>
             <pc:sldMk cId="1161736965" sldId="272"/>
             <ac:spMk id="3" creationId="{0602F417-C2BA-82D2-A79A-BEAE1A782593}"/>
-          </ac:spMkLst>
-        </pc:spChg>
-        <pc:spChg chg="del">
-          <ac:chgData name="Thiago Ney Evaristo Rodrigues" userId="fb50eefc1efb6381" providerId="LiveId" clId="{4A2E2E4D-6AE6-40C9-B147-34264DB25721}" dt="2025-08-18T14:46:55.342" v="64" actId="478"/>
-          <ac:spMkLst>
-            <pc:docMk/>
-            <pc:sldMk cId="1161736965" sldId="272"/>
-            <ac:spMk id="4" creationId="{2703106C-1A18-3F20-F36D-471C9CC2CD69}"/>
-          </ac:spMkLst>
-        </pc:spChg>
-        <pc:spChg chg="add del mod ord">
-          <ac:chgData name="Thiago Ney Evaristo Rodrigues" userId="fb50eefc1efb6381" providerId="LiveId" clId="{4A2E2E4D-6AE6-40C9-B147-34264DB25721}" dt="2025-08-18T14:46:33.306" v="57" actId="478"/>
-          <ac:spMkLst>
-            <pc:docMk/>
-            <pc:sldMk cId="1161736965" sldId="272"/>
-            <ac:spMk id="6" creationId="{9A383348-524C-2644-0A5B-130BC051ED26}"/>
           </ac:spMkLst>
         </pc:spChg>
         <pc:spChg chg="mod ord">
@@ -706,30 +615,6 @@
             <ac:spMk id="11" creationId="{C3DA79A5-1B9B-1336-8CD9-3885DA32B84D}"/>
           </ac:spMkLst>
         </pc:spChg>
-        <pc:spChg chg="add del mod ord">
-          <ac:chgData name="Thiago Ney Evaristo Rodrigues" userId="fb50eefc1efb6381" providerId="LiveId" clId="{4A2E2E4D-6AE6-40C9-B147-34264DB25721}" dt="2025-08-18T14:57:10.295" v="192" actId="478"/>
-          <ac:spMkLst>
-            <pc:docMk/>
-            <pc:sldMk cId="1161736965" sldId="272"/>
-            <ac:spMk id="12" creationId="{F825415A-E3CE-E45D-BE44-47CF22568263}"/>
-          </ac:spMkLst>
-        </pc:spChg>
-        <pc:picChg chg="mod ord">
-          <ac:chgData name="Thiago Ney Evaristo Rodrigues" userId="fb50eefc1efb6381" providerId="LiveId" clId="{4A2E2E4D-6AE6-40C9-B147-34264DB25721}" dt="2025-08-18T14:57:56.348" v="196" actId="1076"/>
-          <ac:picMkLst>
-            <pc:docMk/>
-            <pc:sldMk cId="1161736965" sldId="272"/>
-            <ac:picMk id="5" creationId="{8D1F9D6F-55C2-3FFC-06D5-DF7D89240788}"/>
-          </ac:picMkLst>
-        </pc:picChg>
-        <pc:picChg chg="add mod modCrop">
-          <ac:chgData name="Thiago Ney Evaristo Rodrigues" userId="fb50eefc1efb6381" providerId="LiveId" clId="{4A2E2E4D-6AE6-40C9-B147-34264DB25721}" dt="2025-08-18T14:55:32.303" v="177" actId="732"/>
-          <ac:picMkLst>
-            <pc:docMk/>
-            <pc:sldMk cId="1161736965" sldId="272"/>
-            <ac:picMk id="9" creationId="{36BD1F49-4C69-C48A-2CD9-660724FBDF08}"/>
-          </ac:picMkLst>
-        </pc:picChg>
       </pc:sldChg>
       <pc:sldChg chg="addSp delSp modSp mod">
         <pc:chgData name="Thiago Ney Evaristo Rodrigues" userId="fb50eefc1efb6381" providerId="LiveId" clId="{4A2E2E4D-6AE6-40C9-B147-34264DB25721}" dt="2025-08-18T19:43:40.005" v="1745" actId="12"/>
@@ -737,86 +622,6 @@
           <pc:docMk/>
           <pc:sldMk cId="1618868839" sldId="273"/>
         </pc:sldMkLst>
-        <pc:spChg chg="del">
-          <ac:chgData name="Thiago Ney Evaristo Rodrigues" userId="fb50eefc1efb6381" providerId="LiveId" clId="{4A2E2E4D-6AE6-40C9-B147-34264DB25721}" dt="2025-08-18T19:36:56.255" v="1246" actId="478"/>
-          <ac:spMkLst>
-            <pc:docMk/>
-            <pc:sldMk cId="1618868839" sldId="273"/>
-            <ac:spMk id="3" creationId="{9B7A3BA1-1FA7-DDAF-6F8C-E41477414288}"/>
-          </ac:spMkLst>
-        </pc:spChg>
-        <pc:spChg chg="add del mod">
-          <ac:chgData name="Thiago Ney Evaristo Rodrigues" userId="fb50eefc1efb6381" providerId="LiveId" clId="{4A2E2E4D-6AE6-40C9-B147-34264DB25721}" dt="2025-08-18T19:36:58.811" v="1247" actId="478"/>
-          <ac:spMkLst>
-            <pc:docMk/>
-            <pc:sldMk cId="1618868839" sldId="273"/>
-            <ac:spMk id="13" creationId="{8DFB379E-F0CF-744C-C91B-486D84D6E98A}"/>
-          </ac:spMkLst>
-        </pc:spChg>
-        <pc:spChg chg="add mod">
-          <ac:chgData name="Thiago Ney Evaristo Rodrigues" userId="fb50eefc1efb6381" providerId="LiveId" clId="{4A2E2E4D-6AE6-40C9-B147-34264DB25721}" dt="2025-08-18T19:43:40.005" v="1745" actId="12"/>
-          <ac:spMkLst>
-            <pc:docMk/>
-            <pc:sldMk cId="1618868839" sldId="273"/>
-            <ac:spMk id="15" creationId="{5F4A2122-F475-9B79-14C8-927EF5C1C0A0}"/>
-          </ac:spMkLst>
-        </pc:spChg>
-        <pc:grpChg chg="add del mod">
-          <ac:chgData name="Thiago Ney Evaristo Rodrigues" userId="fb50eefc1efb6381" providerId="LiveId" clId="{4A2E2E4D-6AE6-40C9-B147-34264DB25721}" dt="2025-08-18T19:37:12.756" v="1252" actId="165"/>
-          <ac:grpSpMkLst>
-            <pc:docMk/>
-            <pc:sldMk cId="1618868839" sldId="273"/>
-            <ac:grpSpMk id="14" creationId="{DA73C055-0FEE-C948-28F4-32FC3A5DCAC8}"/>
-          </ac:grpSpMkLst>
-        </pc:grpChg>
-        <pc:graphicFrameChg chg="add mod">
-          <ac:chgData name="Thiago Ney Evaristo Rodrigues" userId="fb50eefc1efb6381" providerId="LiveId" clId="{4A2E2E4D-6AE6-40C9-B147-34264DB25721}" dt="2025-08-18T19:35:44.387" v="1229"/>
-          <ac:graphicFrameMkLst>
-            <pc:docMk/>
-            <pc:sldMk cId="1618868839" sldId="273"/>
-            <ac:graphicFrameMk id="5" creationId="{CDF631E5-4D20-7BBC-2AB4-C4EC27EFDB7B}"/>
-          </ac:graphicFrameMkLst>
-        </pc:graphicFrameChg>
-        <pc:graphicFrameChg chg="add mod">
-          <ac:chgData name="Thiago Ney Evaristo Rodrigues" userId="fb50eefc1efb6381" providerId="LiveId" clId="{4A2E2E4D-6AE6-40C9-B147-34264DB25721}" dt="2025-08-18T19:36:02.596" v="1233"/>
-          <ac:graphicFrameMkLst>
-            <pc:docMk/>
-            <pc:sldMk cId="1618868839" sldId="273"/>
-            <ac:graphicFrameMk id="7" creationId="{15F5FD7F-0945-12A4-A0D1-A6AC06792BD9}"/>
-          </ac:graphicFrameMkLst>
-        </pc:graphicFrameChg>
-        <pc:graphicFrameChg chg="add mod">
-          <ac:chgData name="Thiago Ney Evaristo Rodrigues" userId="fb50eefc1efb6381" providerId="LiveId" clId="{4A2E2E4D-6AE6-40C9-B147-34264DB25721}" dt="2025-08-18T19:36:35.217" v="1238"/>
-          <ac:graphicFrameMkLst>
-            <pc:docMk/>
-            <pc:sldMk cId="1618868839" sldId="273"/>
-            <ac:graphicFrameMk id="10" creationId="{1FD7E503-02AC-8D32-D46E-C8BA3CDAF705}"/>
-          </ac:graphicFrameMkLst>
-        </pc:graphicFrameChg>
-        <pc:picChg chg="add del mod">
-          <ac:chgData name="Thiago Ney Evaristo Rodrigues" userId="fb50eefc1efb6381" providerId="LiveId" clId="{4A2E2E4D-6AE6-40C9-B147-34264DB25721}" dt="2025-08-18T19:36:33.900" v="1237" actId="478"/>
-          <ac:picMkLst>
-            <pc:docMk/>
-            <pc:sldMk cId="1618868839" sldId="273"/>
-            <ac:picMk id="6" creationId="{9394AFE0-51F8-9149-24C9-523F12B4DFB8}"/>
-          </ac:picMkLst>
-        </pc:picChg>
-        <pc:picChg chg="add mod topLvl">
-          <ac:chgData name="Thiago Ney Evaristo Rodrigues" userId="fb50eefc1efb6381" providerId="LiveId" clId="{4A2E2E4D-6AE6-40C9-B147-34264DB25721}" dt="2025-08-18T19:37:12.756" v="1252" actId="165"/>
-          <ac:picMkLst>
-            <pc:docMk/>
-            <pc:sldMk cId="1618868839" sldId="273"/>
-            <ac:picMk id="9" creationId="{A96539BD-E434-C58B-EE64-50A8C645F602}"/>
-          </ac:picMkLst>
-        </pc:picChg>
-        <pc:picChg chg="add mod topLvl">
-          <ac:chgData name="Thiago Ney Evaristo Rodrigues" userId="fb50eefc1efb6381" providerId="LiveId" clId="{4A2E2E4D-6AE6-40C9-B147-34264DB25721}" dt="2025-08-18T19:37:12.756" v="1252" actId="165"/>
-          <ac:picMkLst>
-            <pc:docMk/>
-            <pc:sldMk cId="1618868839" sldId="273"/>
-            <ac:picMk id="11" creationId="{88D13FA3-AA6B-94E1-59F9-E6CCCAEA53B7}"/>
-          </ac:picMkLst>
-        </pc:picChg>
       </pc:sldChg>
       <pc:sldChg chg="delSp modSp add del mod">
         <pc:chgData name="Thiago Ney Evaristo Rodrigues" userId="fb50eefc1efb6381" providerId="LiveId" clId="{4A2E2E4D-6AE6-40C9-B147-34264DB25721}" dt="2025-08-18T14:52:53.862" v="155" actId="47"/>
@@ -824,14 +629,6 @@
           <pc:docMk/>
           <pc:sldMk cId="2691277752" sldId="273"/>
         </pc:sldMkLst>
-        <pc:spChg chg="del mod">
-          <ac:chgData name="Thiago Ney Evaristo Rodrigues" userId="fb50eefc1efb6381" providerId="LiveId" clId="{4A2E2E4D-6AE6-40C9-B147-34264DB25721}" dt="2025-08-18T14:49:09.517" v="81" actId="21"/>
-          <ac:spMkLst>
-            <pc:docMk/>
-            <pc:sldMk cId="2691277752" sldId="273"/>
-            <ac:spMk id="4" creationId="{35B696B7-EAF9-43C8-FE97-AA60F7B69A41}"/>
-          </ac:spMkLst>
-        </pc:spChg>
       </pc:sldChg>
       <pc:sldChg chg="addSp delSp modSp mod ord">
         <pc:chgData name="Thiago Ney Evaristo Rodrigues" userId="fb50eefc1efb6381" providerId="LiveId" clId="{4A2E2E4D-6AE6-40C9-B147-34264DB25721}" dt="2025-08-18T20:19:50.143" v="3569" actId="478"/>
@@ -839,62 +636,6 @@
           <pc:docMk/>
           <pc:sldMk cId="3847462140" sldId="274"/>
         </pc:sldMkLst>
-        <pc:spChg chg="del">
-          <ac:chgData name="Thiago Ney Evaristo Rodrigues" userId="fb50eefc1efb6381" providerId="LiveId" clId="{4A2E2E4D-6AE6-40C9-B147-34264DB25721}" dt="2025-08-18T19:46:32.600" v="1750" actId="478"/>
-          <ac:spMkLst>
-            <pc:docMk/>
-            <pc:sldMk cId="3847462140" sldId="274"/>
-            <ac:spMk id="3" creationId="{814073FD-FF5D-623B-E912-7DB62A56CF31}"/>
-          </ac:spMkLst>
-        </pc:spChg>
-        <pc:spChg chg="add del mod">
-          <ac:chgData name="Thiago Ney Evaristo Rodrigues" userId="fb50eefc1efb6381" providerId="LiveId" clId="{4A2E2E4D-6AE6-40C9-B147-34264DB25721}" dt="2025-08-18T19:46:35.031" v="1751" actId="478"/>
-          <ac:spMkLst>
-            <pc:docMk/>
-            <pc:sldMk cId="3847462140" sldId="274"/>
-            <ac:spMk id="9" creationId="{C9696D13-4087-70A3-B48A-092364DFC2C6}"/>
-          </ac:spMkLst>
-        </pc:spChg>
-        <pc:spChg chg="add mod">
-          <ac:chgData name="Thiago Ney Evaristo Rodrigues" userId="fb50eefc1efb6381" providerId="LiveId" clId="{4A2E2E4D-6AE6-40C9-B147-34264DB25721}" dt="2025-08-18T19:51:07.452" v="2070" actId="553"/>
-          <ac:spMkLst>
-            <pc:docMk/>
-            <pc:sldMk cId="3847462140" sldId="274"/>
-            <ac:spMk id="10" creationId="{25B953B7-AA61-9D89-BCB0-D5A1EB160E22}"/>
-          </ac:spMkLst>
-        </pc:spChg>
-        <pc:spChg chg="add del mod">
-          <ac:chgData name="Thiago Ney Evaristo Rodrigues" userId="fb50eefc1efb6381" providerId="LiveId" clId="{4A2E2E4D-6AE6-40C9-B147-34264DB25721}" dt="2025-08-18T20:19:49.376" v="3568" actId="478"/>
-          <ac:spMkLst>
-            <pc:docMk/>
-            <pc:sldMk cId="3847462140" sldId="274"/>
-            <ac:spMk id="11" creationId="{AFA70144-B8A2-F111-CA35-E103B2DA9EC8}"/>
-          </ac:spMkLst>
-        </pc:spChg>
-        <pc:spChg chg="add del mod">
-          <ac:chgData name="Thiago Ney Evaristo Rodrigues" userId="fb50eefc1efb6381" providerId="LiveId" clId="{4A2E2E4D-6AE6-40C9-B147-34264DB25721}" dt="2025-08-18T20:19:50.143" v="3569" actId="478"/>
-          <ac:spMkLst>
-            <pc:docMk/>
-            <pc:sldMk cId="3847462140" sldId="274"/>
-            <ac:spMk id="12" creationId="{881BA229-03F2-9390-C7E4-C2872CF382C0}"/>
-          </ac:spMkLst>
-        </pc:spChg>
-        <pc:graphicFrameChg chg="add mod">
-          <ac:chgData name="Thiago Ney Evaristo Rodrigues" userId="fb50eefc1efb6381" providerId="LiveId" clId="{4A2E2E4D-6AE6-40C9-B147-34264DB25721}" dt="2025-08-18T19:46:04.755" v="1746"/>
-          <ac:graphicFrameMkLst>
-            <pc:docMk/>
-            <pc:sldMk cId="3847462140" sldId="274"/>
-            <ac:graphicFrameMk id="5" creationId="{086AE429-CD88-24F8-0157-7DCCED4ABF94}"/>
-          </ac:graphicFrameMkLst>
-        </pc:graphicFrameChg>
-        <pc:picChg chg="add mod">
-          <ac:chgData name="Thiago Ney Evaristo Rodrigues" userId="fb50eefc1efb6381" providerId="LiveId" clId="{4A2E2E4D-6AE6-40C9-B147-34264DB25721}" dt="2025-08-18T19:51:00.029" v="2054" actId="552"/>
-          <ac:picMkLst>
-            <pc:docMk/>
-            <pc:sldMk cId="3847462140" sldId="274"/>
-            <ac:picMk id="6" creationId="{42098842-DBCF-889D-ACB7-2BC3ECADD3B1}"/>
-          </ac:picMkLst>
-        </pc:picChg>
       </pc:sldChg>
       <pc:sldChg chg="addSp delSp modSp mod">
         <pc:chgData name="Thiago Ney Evaristo Rodrigues" userId="fb50eefc1efb6381" providerId="LiveId" clId="{4A2E2E4D-6AE6-40C9-B147-34264DB25721}" dt="2025-08-18T20:19:55.047" v="3571" actId="478"/>
@@ -902,46 +643,6 @@
           <pc:docMk/>
           <pc:sldMk cId="2318078833" sldId="275"/>
         </pc:sldMkLst>
-        <pc:spChg chg="mod">
-          <ac:chgData name="Thiago Ney Evaristo Rodrigues" userId="fb50eefc1efb6381" providerId="LiveId" clId="{4A2E2E4D-6AE6-40C9-B147-34264DB25721}" dt="2025-08-18T19:56:31.109" v="2176" actId="12789"/>
-          <ac:spMkLst>
-            <pc:docMk/>
-            <pc:sldMk cId="2318078833" sldId="275"/>
-            <ac:spMk id="3" creationId="{7E00A612-3E79-92DB-CC20-143B92011F19}"/>
-          </ac:spMkLst>
-        </pc:spChg>
-        <pc:spChg chg="add del mod">
-          <ac:chgData name="Thiago Ney Evaristo Rodrigues" userId="fb50eefc1efb6381" providerId="LiveId" clId="{4A2E2E4D-6AE6-40C9-B147-34264DB25721}" dt="2025-08-18T19:53:24.234" v="2139" actId="478"/>
-          <ac:spMkLst>
-            <pc:docMk/>
-            <pc:sldMk cId="2318078833" sldId="275"/>
-            <ac:spMk id="5" creationId="{EF747B92-43C1-19D1-B592-CCA79831481B}"/>
-          </ac:spMkLst>
-        </pc:spChg>
-        <pc:spChg chg="add del mod">
-          <ac:chgData name="Thiago Ney Evaristo Rodrigues" userId="fb50eefc1efb6381" providerId="LiveId" clId="{4A2E2E4D-6AE6-40C9-B147-34264DB25721}" dt="2025-08-18T20:19:55.047" v="3571" actId="478"/>
-          <ac:spMkLst>
-            <pc:docMk/>
-            <pc:sldMk cId="2318078833" sldId="275"/>
-            <ac:spMk id="7" creationId="{62919750-592C-56ED-6C89-515A1F68D57D}"/>
-          </ac:spMkLst>
-        </pc:spChg>
-        <pc:spChg chg="add del mod">
-          <ac:chgData name="Thiago Ney Evaristo Rodrigues" userId="fb50eefc1efb6381" providerId="LiveId" clId="{4A2E2E4D-6AE6-40C9-B147-34264DB25721}" dt="2025-08-18T20:19:54.312" v="3570" actId="478"/>
-          <ac:spMkLst>
-            <pc:docMk/>
-            <pc:sldMk cId="2318078833" sldId="275"/>
-            <ac:spMk id="9" creationId="{4084B8A3-02C1-C213-1FAC-B290CD53DE4C}"/>
-          </ac:spMkLst>
-        </pc:spChg>
-        <pc:picChg chg="mod">
-          <ac:chgData name="Thiago Ney Evaristo Rodrigues" userId="fb50eefc1efb6381" providerId="LiveId" clId="{4A2E2E4D-6AE6-40C9-B147-34264DB25721}" dt="2025-08-18T19:56:37.461" v="2177" actId="12789"/>
-          <ac:picMkLst>
-            <pc:docMk/>
-            <pc:sldMk cId="2318078833" sldId="275"/>
-            <ac:picMk id="6" creationId="{2A7EB31C-1E1E-E087-CAF8-3FA48AB54368}"/>
-          </ac:picMkLst>
-        </pc:picChg>
       </pc:sldChg>
       <pc:sldChg chg="addSp delSp modSp mod">
         <pc:chgData name="Thiago Ney Evaristo Rodrigues" userId="fb50eefc1efb6381" providerId="LiveId" clId="{4A2E2E4D-6AE6-40C9-B147-34264DB25721}" dt="2025-08-18T20:32:23.748" v="3639" actId="478"/>
@@ -949,70 +650,6 @@
           <pc:docMk/>
           <pc:sldMk cId="4106440066" sldId="276"/>
         </pc:sldMkLst>
-        <pc:spChg chg="del">
-          <ac:chgData name="Thiago Ney Evaristo Rodrigues" userId="fb50eefc1efb6381" providerId="LiveId" clId="{4A2E2E4D-6AE6-40C9-B147-34264DB25721}" dt="2025-08-18T20:19:03.957" v="3558" actId="478"/>
-          <ac:spMkLst>
-            <pc:docMk/>
-            <pc:sldMk cId="4106440066" sldId="276"/>
-            <ac:spMk id="3" creationId="{42910F21-DC0B-734A-A7CC-460BE5C31677}"/>
-          </ac:spMkLst>
-        </pc:spChg>
-        <pc:spChg chg="add del mod">
-          <ac:chgData name="Thiago Ney Evaristo Rodrigues" userId="fb50eefc1efb6381" providerId="LiveId" clId="{4A2E2E4D-6AE6-40C9-B147-34264DB25721}" dt="2025-08-18T20:19:04.957" v="3559" actId="478"/>
-          <ac:spMkLst>
-            <pc:docMk/>
-            <pc:sldMk cId="4106440066" sldId="276"/>
-            <ac:spMk id="6" creationId="{7E18377D-BAD5-9DF6-009F-36131C28DAA9}"/>
-          </ac:spMkLst>
-        </pc:spChg>
-        <pc:spChg chg="add del mod">
-          <ac:chgData name="Thiago Ney Evaristo Rodrigues" userId="fb50eefc1efb6381" providerId="LiveId" clId="{4A2E2E4D-6AE6-40C9-B147-34264DB25721}" dt="2025-08-18T20:32:23.748" v="3639" actId="478"/>
-          <ac:spMkLst>
-            <pc:docMk/>
-            <pc:sldMk cId="4106440066" sldId="276"/>
-            <ac:spMk id="9" creationId="{A087F3F7-3238-806A-6015-1F80C44DF6BE}"/>
-          </ac:spMkLst>
-        </pc:spChg>
-        <pc:spChg chg="add del mod">
-          <ac:chgData name="Thiago Ney Evaristo Rodrigues" userId="fb50eefc1efb6381" providerId="LiveId" clId="{4A2E2E4D-6AE6-40C9-B147-34264DB25721}" dt="2025-08-18T20:32:17.116" v="3637" actId="478"/>
-          <ac:spMkLst>
-            <pc:docMk/>
-            <pc:sldMk cId="4106440066" sldId="276"/>
-            <ac:spMk id="10" creationId="{8B86310E-48CF-D0CE-1A9A-F187CABB7ED0}"/>
-          </ac:spMkLst>
-        </pc:spChg>
-        <pc:grpChg chg="add del mod">
-          <ac:chgData name="Thiago Ney Evaristo Rodrigues" userId="fb50eefc1efb6381" providerId="LiveId" clId="{4A2E2E4D-6AE6-40C9-B147-34264DB25721}" dt="2025-08-18T20:29:30.930" v="3623" actId="165"/>
-          <ac:grpSpMkLst>
-            <pc:docMk/>
-            <pc:sldMk cId="4106440066" sldId="276"/>
-            <ac:grpSpMk id="13" creationId="{D13071CF-16FC-5FEB-98B7-4382D4CEA697}"/>
-          </ac:grpSpMkLst>
-        </pc:grpChg>
-        <pc:graphicFrameChg chg="add mod">
-          <ac:chgData name="Thiago Ney Evaristo Rodrigues" userId="fb50eefc1efb6381" providerId="LiveId" clId="{4A2E2E4D-6AE6-40C9-B147-34264DB25721}" dt="2025-08-18T20:28:56.893" v="3602"/>
-          <ac:graphicFrameMkLst>
-            <pc:docMk/>
-            <pc:sldMk cId="4106440066" sldId="276"/>
-            <ac:graphicFrameMk id="11" creationId="{ACE3E82E-BFDE-EDB7-7EEA-CF4861D0C216}"/>
-          </ac:graphicFrameMkLst>
-        </pc:graphicFrameChg>
-        <pc:picChg chg="mod topLvl">
-          <ac:chgData name="Thiago Ney Evaristo Rodrigues" userId="fb50eefc1efb6381" providerId="LiveId" clId="{4A2E2E4D-6AE6-40C9-B147-34264DB25721}" dt="2025-08-18T20:32:22.088" v="3638" actId="12789"/>
-          <ac:picMkLst>
-            <pc:docMk/>
-            <pc:sldMk cId="4106440066" sldId="276"/>
-            <ac:picMk id="7" creationId="{0B4B6E01-7712-792B-83B6-375079E7C23D}"/>
-          </ac:picMkLst>
-        </pc:picChg>
-        <pc:picChg chg="add mod topLvl">
-          <ac:chgData name="Thiago Ney Evaristo Rodrigues" userId="fb50eefc1efb6381" providerId="LiveId" clId="{4A2E2E4D-6AE6-40C9-B147-34264DB25721}" dt="2025-08-18T20:32:22.088" v="3638" actId="12789"/>
-          <ac:picMkLst>
-            <pc:docMk/>
-            <pc:sldMk cId="4106440066" sldId="276"/>
-            <ac:picMk id="12" creationId="{24DF5F36-1AAA-EB80-D21F-44EF7F8036A6}"/>
-          </ac:picMkLst>
-        </pc:picChg>
       </pc:sldChg>
       <pc:sldChg chg="addSp delSp modSp add mod">
         <pc:chgData name="Thiago Ney Evaristo Rodrigues" userId="fb50eefc1efb6381" providerId="LiveId" clId="{4A2E2E4D-6AE6-40C9-B147-34264DB25721}" dt="2025-08-18T20:19:59.314" v="3573" actId="478"/>
@@ -1020,77 +657,13 @@
           <pc:docMk/>
           <pc:sldMk cId="2120162573" sldId="277"/>
         </pc:sldMkLst>
-        <pc:spChg chg="mod">
-          <ac:chgData name="Thiago Ney Evaristo Rodrigues" userId="fb50eefc1efb6381" providerId="LiveId" clId="{4A2E2E4D-6AE6-40C9-B147-34264DB25721}" dt="2025-08-18T20:11:22.347" v="2953" actId="12789"/>
-          <ac:spMkLst>
-            <pc:docMk/>
-            <pc:sldMk cId="2120162573" sldId="277"/>
-            <ac:spMk id="3" creationId="{8F958C7E-15DD-587C-274B-FBEC38334881}"/>
-          </ac:spMkLst>
-        </pc:spChg>
-        <pc:spChg chg="add del mod">
-          <ac:chgData name="Thiago Ney Evaristo Rodrigues" userId="fb50eefc1efb6381" providerId="LiveId" clId="{4A2E2E4D-6AE6-40C9-B147-34264DB25721}" dt="2025-08-18T20:19:59.314" v="3573" actId="478"/>
-          <ac:spMkLst>
-            <pc:docMk/>
-            <pc:sldMk cId="2120162573" sldId="277"/>
-            <ac:spMk id="5" creationId="{2AD71ED9-26E5-ACBD-4769-AB386C0B1E19}"/>
-          </ac:spMkLst>
-        </pc:spChg>
-        <pc:spChg chg="add del mod">
-          <ac:chgData name="Thiago Ney Evaristo Rodrigues" userId="fb50eefc1efb6381" providerId="LiveId" clId="{4A2E2E4D-6AE6-40C9-B147-34264DB25721}" dt="2025-08-18T20:19:58.759" v="3572" actId="478"/>
-          <ac:spMkLst>
-            <pc:docMk/>
-            <pc:sldMk cId="2120162573" sldId="277"/>
-            <ac:spMk id="9" creationId="{1C9DAA64-B892-A15B-664A-6E6C6E7C1D30}"/>
-          </ac:spMkLst>
-        </pc:spChg>
-        <pc:spChg chg="add mod">
-          <ac:chgData name="Thiago Ney Evaristo Rodrigues" userId="fb50eefc1efb6381" providerId="LiveId" clId="{4A2E2E4D-6AE6-40C9-B147-34264DB25721}" dt="2025-08-18T20:06:24.213" v="2607"/>
-          <ac:spMkLst>
-            <pc:docMk/>
-            <pc:sldMk cId="2120162573" sldId="277"/>
-            <ac:spMk id="10" creationId="{B3BB354F-A91B-A1F8-1E56-24CEC543626A}"/>
-          </ac:spMkLst>
-        </pc:spChg>
-        <pc:spChg chg="add mod">
-          <ac:chgData name="Thiago Ney Evaristo Rodrigues" userId="fb50eefc1efb6381" providerId="LiveId" clId="{4A2E2E4D-6AE6-40C9-B147-34264DB25721}" dt="2025-08-18T20:06:24.213" v="2607"/>
-          <ac:spMkLst>
-            <pc:docMk/>
-            <pc:sldMk cId="2120162573" sldId="277"/>
-            <ac:spMk id="12" creationId="{AA2B9ED0-16CF-2D95-C44A-873090EE528D}"/>
-          </ac:spMkLst>
-        </pc:spChg>
-        <pc:grpChg chg="del">
-          <ac:chgData name="Thiago Ney Evaristo Rodrigues" userId="fb50eefc1efb6381" providerId="LiveId" clId="{4A2E2E4D-6AE6-40C9-B147-34264DB25721}" dt="2025-08-18T20:06:23.175" v="2606" actId="478"/>
-          <ac:grpSpMkLst>
-            <pc:docMk/>
-            <pc:sldMk cId="2120162573" sldId="277"/>
-            <ac:grpSpMk id="11" creationId="{A4F89E59-1ACF-DC6F-51BC-22C91A63596E}"/>
-          </ac:grpSpMkLst>
-        </pc:grpChg>
-        <pc:graphicFrameChg chg="add mod">
-          <ac:chgData name="Thiago Ney Evaristo Rodrigues" userId="fb50eefc1efb6381" providerId="LiveId" clId="{4A2E2E4D-6AE6-40C9-B147-34264DB25721}" dt="2025-08-18T20:06:38.566" v="2608"/>
-          <ac:graphicFrameMkLst>
-            <pc:docMk/>
-            <pc:sldMk cId="2120162573" sldId="277"/>
-            <ac:graphicFrameMk id="13" creationId="{5F2C6155-A2EA-18D1-4A48-B81071803B69}"/>
-          </ac:graphicFrameMkLst>
-        </pc:graphicFrameChg>
-        <pc:picChg chg="add mod">
-          <ac:chgData name="Thiago Ney Evaristo Rodrigues" userId="fb50eefc1efb6381" providerId="LiveId" clId="{4A2E2E4D-6AE6-40C9-B147-34264DB25721}" dt="2025-08-18T20:07:30.564" v="2623" actId="12789"/>
-          <ac:picMkLst>
-            <pc:docMk/>
-            <pc:sldMk cId="2120162573" sldId="277"/>
-            <ac:picMk id="14" creationId="{DAE18134-D13A-7B75-3FEE-3DD4E31C611E}"/>
-          </ac:picMkLst>
-        </pc:picChg>
       </pc:sldChg>
     </pc:docChg>
   </pc:docChgLst>
   <pc:docChgLst>
     <pc:chgData name="Thiago Ney Evaristo Rodrigues" userId="fb50eefc1efb6381" providerId="LiveId" clId="{55D7238F-0C39-4C7B-9625-78947C5B06FF}"/>
     <pc:docChg chg="custSel delSld modSld modSection">
-      <pc:chgData name="Thiago Ney Evaristo Rodrigues" userId="fb50eefc1efb6381" providerId="LiveId" clId="{55D7238F-0C39-4C7B-9625-78947C5B06FF}" dt="2025-09-04T01:36:48.926" v="114" actId="165"/>
+      <pc:chgData name="Thiago Ney Evaristo Rodrigues" userId="fb50eefc1efb6381" providerId="LiveId" clId="{55D7238F-0C39-4C7B-9625-78947C5B06FF}" dt="2025-09-04T15:57:25.839" v="142" actId="12788"/>
       <pc:docMkLst>
         <pc:docMk/>
       </pc:docMkLst>
@@ -1257,6 +830,106 @@
           </ac:picMkLst>
         </pc:picChg>
       </pc:sldChg>
+      <pc:sldChg chg="addSp delSp modSp mod">
+        <pc:chgData name="Thiago Ney Evaristo Rodrigues" userId="fb50eefc1efb6381" providerId="LiveId" clId="{55D7238F-0C39-4C7B-9625-78947C5B06FF}" dt="2025-09-04T15:44:35.461" v="135" actId="1038"/>
+        <pc:sldMkLst>
+          <pc:docMk/>
+          <pc:sldMk cId="4008161449" sldId="295"/>
+        </pc:sldMkLst>
+        <pc:spChg chg="mod">
+          <ac:chgData name="Thiago Ney Evaristo Rodrigues" userId="fb50eefc1efb6381" providerId="LiveId" clId="{55D7238F-0C39-4C7B-9625-78947C5B06FF}" dt="2025-09-04T15:44:01.811" v="125" actId="12789"/>
+          <ac:spMkLst>
+            <pc:docMk/>
+            <pc:sldMk cId="4008161449" sldId="295"/>
+            <ac:spMk id="2" creationId="{573C646C-7D12-5D5B-B3AB-5619D46FE915}"/>
+          </ac:spMkLst>
+        </pc:spChg>
+        <pc:spChg chg="del">
+          <ac:chgData name="Thiago Ney Evaristo Rodrigues" userId="fb50eefc1efb6381" providerId="LiveId" clId="{55D7238F-0C39-4C7B-9625-78947C5B06FF}" dt="2025-09-04T15:43:26.167" v="115" actId="478"/>
+          <ac:spMkLst>
+            <pc:docMk/>
+            <pc:sldMk cId="4008161449" sldId="295"/>
+            <ac:spMk id="8" creationId="{682D01B6-027A-8B6E-02B7-A29D71679E37}"/>
+          </ac:spMkLst>
+        </pc:spChg>
+        <pc:graphicFrameChg chg="add mod">
+          <ac:chgData name="Thiago Ney Evaristo Rodrigues" userId="fb50eefc1efb6381" providerId="LiveId" clId="{55D7238F-0C39-4C7B-9625-78947C5B06FF}" dt="2025-09-04T15:43:26.778" v="116"/>
+          <ac:graphicFrameMkLst>
+            <pc:docMk/>
+            <pc:sldMk cId="4008161449" sldId="295"/>
+            <ac:graphicFrameMk id="3" creationId="{D6829B32-7CD9-924C-BC03-07BF00E6C984}"/>
+          </ac:graphicFrameMkLst>
+        </pc:graphicFrameChg>
+        <pc:graphicFrameChg chg="add mod modGraphic">
+          <ac:chgData name="Thiago Ney Evaristo Rodrigues" userId="fb50eefc1efb6381" providerId="LiveId" clId="{55D7238F-0C39-4C7B-9625-78947C5B06FF}" dt="2025-09-04T15:44:01.811" v="125" actId="12789"/>
+          <ac:graphicFrameMkLst>
+            <pc:docMk/>
+            <pc:sldMk cId="4008161449" sldId="295"/>
+            <ac:graphicFrameMk id="6" creationId="{BE38C40E-F58B-9FFB-527D-7B0D2C3AB70A}"/>
+          </ac:graphicFrameMkLst>
+        </pc:graphicFrameChg>
+        <pc:picChg chg="del mod">
+          <ac:chgData name="Thiago Ney Evaristo Rodrigues" userId="fb50eefc1efb6381" providerId="LiveId" clId="{55D7238F-0C39-4C7B-9625-78947C5B06FF}" dt="2025-09-04T15:44:23.291" v="127" actId="478"/>
+          <ac:picMkLst>
+            <pc:docMk/>
+            <pc:sldMk cId="4008161449" sldId="295"/>
+            <ac:picMk id="5" creationId="{D80ACCA3-C007-11A4-550D-6ED1C2C7F0FA}"/>
+          </ac:picMkLst>
+        </pc:picChg>
+        <pc:picChg chg="add mod">
+          <ac:chgData name="Thiago Ney Evaristo Rodrigues" userId="fb50eefc1efb6381" providerId="LiveId" clId="{55D7238F-0C39-4C7B-9625-78947C5B06FF}" dt="2025-09-04T15:44:35.461" v="135" actId="1038"/>
+          <ac:picMkLst>
+            <pc:docMk/>
+            <pc:sldMk cId="4008161449" sldId="295"/>
+            <ac:picMk id="10" creationId="{0BC0456A-7AAC-1A2F-4869-74219DF5C2BA}"/>
+          </ac:picMkLst>
+        </pc:picChg>
+      </pc:sldChg>
+      <pc:sldChg chg="modSp mod">
+        <pc:chgData name="Thiago Ney Evaristo Rodrigues" userId="fb50eefc1efb6381" providerId="LiveId" clId="{55D7238F-0C39-4C7B-9625-78947C5B06FF}" dt="2025-09-04T15:57:25.839" v="142" actId="12788"/>
+        <pc:sldMkLst>
+          <pc:docMk/>
+          <pc:sldMk cId="3894030115" sldId="301"/>
+        </pc:sldMkLst>
+        <pc:spChg chg="mod">
+          <ac:chgData name="Thiago Ney Evaristo Rodrigues" userId="fb50eefc1efb6381" providerId="LiveId" clId="{55D7238F-0C39-4C7B-9625-78947C5B06FF}" dt="2025-09-04T15:57:25.839" v="142" actId="12788"/>
+          <ac:spMkLst>
+            <pc:docMk/>
+            <pc:sldMk cId="3894030115" sldId="301"/>
+            <ac:spMk id="6" creationId="{F88B8A18-4647-C25D-34BD-CCC6C66B7D36}"/>
+          </ac:spMkLst>
+        </pc:spChg>
+      </pc:sldChg>
+      <pc:sldChg chg="modSp mod">
+        <pc:chgData name="Thiago Ney Evaristo Rodrigues" userId="fb50eefc1efb6381" providerId="LiveId" clId="{55D7238F-0C39-4C7B-9625-78947C5B06FF}" dt="2025-09-04T15:45:43.403" v="136" actId="12788"/>
+        <pc:sldMkLst>
+          <pc:docMk/>
+          <pc:sldMk cId="4128823105" sldId="307"/>
+        </pc:sldMkLst>
+        <pc:picChg chg="mod">
+          <ac:chgData name="Thiago Ney Evaristo Rodrigues" userId="fb50eefc1efb6381" providerId="LiveId" clId="{55D7238F-0C39-4C7B-9625-78947C5B06FF}" dt="2025-09-04T15:45:43.403" v="136" actId="12788"/>
+          <ac:picMkLst>
+            <pc:docMk/>
+            <pc:sldMk cId="4128823105" sldId="307"/>
+            <ac:picMk id="9" creationId="{F310230A-8AF2-2770-BB9D-8D1D54D784BC}"/>
+          </ac:picMkLst>
+        </pc:picChg>
+      </pc:sldChg>
+      <pc:sldChg chg="modSp">
+        <pc:chgData name="Thiago Ney Evaristo Rodrigues" userId="fb50eefc1efb6381" providerId="LiveId" clId="{55D7238F-0C39-4C7B-9625-78947C5B06FF}" dt="2025-09-04T15:46:00.846" v="137"/>
+        <pc:sldMkLst>
+          <pc:docMk/>
+          <pc:sldMk cId="2125416589" sldId="312"/>
+        </pc:sldMkLst>
+        <pc:spChg chg="mod">
+          <ac:chgData name="Thiago Ney Evaristo Rodrigues" userId="fb50eefc1efb6381" providerId="LiveId" clId="{55D7238F-0C39-4C7B-9625-78947C5B06FF}" dt="2025-09-04T15:46:00.846" v="137"/>
+          <ac:spMkLst>
+            <pc:docMk/>
+            <pc:sldMk cId="2125416589" sldId="312"/>
+            <ac:spMk id="7" creationId="{62C6711D-CD10-30B0-DB5E-425D3FA1AEC6}"/>
+          </ac:spMkLst>
+        </pc:spChg>
+      </pc:sldChg>
     </pc:docChg>
   </pc:docChgLst>
   <pc:docChgLst>
@@ -1307,166 +980,6 @@
           <pc:docMk/>
           <pc:sldMk cId="2710463504" sldId="271"/>
         </pc:sldMkLst>
-        <pc:spChg chg="del mod">
-          <ac:chgData name="Thiago Ney Evaristo Rodrigues" userId="fb50eefc1efb6381" providerId="LiveId" clId="{CDB8E314-E490-485E-BFDC-E1775CB67CF5}" dt="2025-08-19T04:05:42.955" v="536" actId="478"/>
-          <ac:spMkLst>
-            <pc:docMk/>
-            <pc:sldMk cId="2710463504" sldId="271"/>
-            <ac:spMk id="3" creationId="{6D40C563-F2AC-2FCB-0B18-98F4198A588D}"/>
-          </ac:spMkLst>
-        </pc:spChg>
-        <pc:spChg chg="mod">
-          <ac:chgData name="Thiago Ney Evaristo Rodrigues" userId="fb50eefc1efb6381" providerId="LiveId" clId="{CDB8E314-E490-485E-BFDC-E1775CB67CF5}" dt="2025-08-19T04:43:26.241" v="1257" actId="20577"/>
-          <ac:spMkLst>
-            <pc:docMk/>
-            <pc:sldMk cId="2710463504" sldId="271"/>
-            <ac:spMk id="7" creationId="{1DAADC52-2031-61FC-738C-F29F455C34F9}"/>
-          </ac:spMkLst>
-        </pc:spChg>
-        <pc:spChg chg="add del mod">
-          <ac:chgData name="Thiago Ney Evaristo Rodrigues" userId="fb50eefc1efb6381" providerId="LiveId" clId="{CDB8E314-E490-485E-BFDC-E1775CB67CF5}" dt="2025-08-19T04:25:19.822" v="836" actId="478"/>
-          <ac:spMkLst>
-            <pc:docMk/>
-            <pc:sldMk cId="2710463504" sldId="271"/>
-            <ac:spMk id="10" creationId="{F2DA763E-87D5-B302-6280-CE03DA4D8DE7}"/>
-          </ac:spMkLst>
-        </pc:spChg>
-        <pc:spChg chg="add del mod">
-          <ac:chgData name="Thiago Ney Evaristo Rodrigues" userId="fb50eefc1efb6381" providerId="LiveId" clId="{CDB8E314-E490-485E-BFDC-E1775CB67CF5}" dt="2025-08-19T04:05:46.233" v="537" actId="478"/>
-          <ac:spMkLst>
-            <pc:docMk/>
-            <pc:sldMk cId="2710463504" sldId="271"/>
-            <ac:spMk id="12" creationId="{72079A11-1364-09C9-E58B-20EE89583A8E}"/>
-          </ac:spMkLst>
-        </pc:spChg>
-        <pc:spChg chg="add mod">
-          <ac:chgData name="Thiago Ney Evaristo Rodrigues" userId="fb50eefc1efb6381" providerId="LiveId" clId="{CDB8E314-E490-485E-BFDC-E1775CB67CF5}" dt="2025-08-19T04:11:34.345" v="581" actId="164"/>
-          <ac:spMkLst>
-            <pc:docMk/>
-            <pc:sldMk cId="2710463504" sldId="271"/>
-            <ac:spMk id="15" creationId="{D0505C55-900A-336F-E52B-DD5F3E35CD72}"/>
-          </ac:spMkLst>
-        </pc:spChg>
-        <pc:spChg chg="add del mod">
-          <ac:chgData name="Thiago Ney Evaristo Rodrigues" userId="fb50eefc1efb6381" providerId="LiveId" clId="{CDB8E314-E490-485E-BFDC-E1775CB67CF5}" dt="2025-08-19T04:33:45.699" v="949" actId="478"/>
-          <ac:spMkLst>
-            <pc:docMk/>
-            <pc:sldMk cId="2710463504" sldId="271"/>
-            <ac:spMk id="17" creationId="{A75664B5-E3B7-A58B-92A3-05619D926E1D}"/>
-          </ac:spMkLst>
-        </pc:spChg>
-        <pc:spChg chg="add del mod">
-          <ac:chgData name="Thiago Ney Evaristo Rodrigues" userId="fb50eefc1efb6381" providerId="LiveId" clId="{CDB8E314-E490-485E-BFDC-E1775CB67CF5}" dt="2025-08-19T04:33:45.699" v="949" actId="478"/>
-          <ac:spMkLst>
-            <pc:docMk/>
-            <pc:sldMk cId="2710463504" sldId="271"/>
-            <ac:spMk id="18" creationId="{438FA566-A24A-B45B-5C6D-4B88204C2E42}"/>
-          </ac:spMkLst>
-        </pc:spChg>
-        <pc:spChg chg="mod">
-          <ac:chgData name="Thiago Ney Evaristo Rodrigues" userId="fb50eefc1efb6381" providerId="LiveId" clId="{CDB8E314-E490-485E-BFDC-E1775CB67CF5}" dt="2025-08-19T04:22:46.138" v="811" actId="404"/>
-          <ac:spMkLst>
-            <pc:docMk/>
-            <pc:sldMk cId="2710463504" sldId="271"/>
-            <ac:spMk id="21" creationId="{EA40D69F-9483-502F-0A7B-6CAF40D8B81A}"/>
-          </ac:spMkLst>
-        </pc:spChg>
-        <pc:spChg chg="add mod">
-          <ac:chgData name="Thiago Ney Evaristo Rodrigues" userId="fb50eefc1efb6381" providerId="LiveId" clId="{CDB8E314-E490-485E-BFDC-E1775CB67CF5}" dt="2025-08-19T04:25:32.504" v="839" actId="12789"/>
-          <ac:spMkLst>
-            <pc:docMk/>
-            <pc:sldMk cId="2710463504" sldId="271"/>
-            <ac:spMk id="22" creationId="{19B54B60-BDCB-4B41-6568-CDCBBAE82A2C}"/>
-          </ac:spMkLst>
-        </pc:spChg>
-        <pc:spChg chg="mod">
-          <ac:chgData name="Thiago Ney Evaristo Rodrigues" userId="fb50eefc1efb6381" providerId="LiveId" clId="{CDB8E314-E490-485E-BFDC-E1775CB67CF5}" dt="2025-08-19T04:25:21.797" v="838" actId="207"/>
-          <ac:spMkLst>
-            <pc:docMk/>
-            <pc:sldMk cId="2710463504" sldId="271"/>
-            <ac:spMk id="25" creationId="{4AC45381-A30B-865D-B2DE-C3FD274B9229}"/>
-          </ac:spMkLst>
-        </pc:spChg>
-        <pc:grpChg chg="add del mod">
-          <ac:chgData name="Thiago Ney Evaristo Rodrigues" userId="fb50eefc1efb6381" providerId="LiveId" clId="{CDB8E314-E490-485E-BFDC-E1775CB67CF5}" dt="2025-08-19T04:19:40.276" v="718" actId="478"/>
-          <ac:grpSpMkLst>
-            <pc:docMk/>
-            <pc:sldMk cId="2710463504" sldId="271"/>
-            <ac:grpSpMk id="16" creationId="{33A9715E-BE19-1E51-D7C0-FBA895A5AD52}"/>
-          </ac:grpSpMkLst>
-        </pc:grpChg>
-        <pc:grpChg chg="add del mod">
-          <ac:chgData name="Thiago Ney Evaristo Rodrigues" userId="fb50eefc1efb6381" providerId="LiveId" clId="{CDB8E314-E490-485E-BFDC-E1775CB67CF5}" dt="2025-08-19T04:25:19.822" v="836" actId="478"/>
-          <ac:grpSpMkLst>
-            <pc:docMk/>
-            <pc:sldMk cId="2710463504" sldId="271"/>
-            <ac:grpSpMk id="19" creationId="{6C9D6A22-0AB0-5C56-78B3-4D0E50D70CBA}"/>
-          </ac:grpSpMkLst>
-        </pc:grpChg>
-        <pc:grpChg chg="add mod">
-          <ac:chgData name="Thiago Ney Evaristo Rodrigues" userId="fb50eefc1efb6381" providerId="LiveId" clId="{CDB8E314-E490-485E-BFDC-E1775CB67CF5}" dt="2025-08-19T04:25:32.504" v="839" actId="12789"/>
-          <ac:grpSpMkLst>
-            <pc:docMk/>
-            <pc:sldMk cId="2710463504" sldId="271"/>
-            <ac:grpSpMk id="23" creationId="{C6F9FBD9-CE75-3B21-A17E-B48B4266478F}"/>
-          </ac:grpSpMkLst>
-        </pc:grpChg>
-        <pc:picChg chg="add mod">
-          <ac:chgData name="Thiago Ney Evaristo Rodrigues" userId="fb50eefc1efb6381" providerId="LiveId" clId="{CDB8E314-E490-485E-BFDC-E1775CB67CF5}" dt="2025-08-19T03:31:49.971" v="54"/>
-          <ac:picMkLst>
-            <pc:docMk/>
-            <pc:sldMk cId="2710463504" sldId="271"/>
-            <ac:picMk id="2" creationId="{60C98168-A022-0A84-89E5-CBA549F5B68D}"/>
-          </ac:picMkLst>
-        </pc:picChg>
-        <pc:picChg chg="add del mod">
-          <ac:chgData name="Thiago Ney Evaristo Rodrigues" userId="fb50eefc1efb6381" providerId="LiveId" clId="{CDB8E314-E490-485E-BFDC-E1775CB67CF5}" dt="2025-08-19T03:36:05.913" v="101" actId="478"/>
-          <ac:picMkLst>
-            <pc:docMk/>
-            <pc:sldMk cId="2710463504" sldId="271"/>
-            <ac:picMk id="6" creationId="{37C4FA66-FC3C-BE53-2875-35238DFF9F03}"/>
-          </ac:picMkLst>
-        </pc:picChg>
-        <pc:picChg chg="add del">
-          <ac:chgData name="Thiago Ney Evaristo Rodrigues" userId="fb50eefc1efb6381" providerId="LiveId" clId="{CDB8E314-E490-485E-BFDC-E1775CB67CF5}" dt="2025-08-19T03:36:04.911" v="100" actId="478"/>
-          <ac:picMkLst>
-            <pc:docMk/>
-            <pc:sldMk cId="2710463504" sldId="271"/>
-            <ac:picMk id="8" creationId="{C04F3CA1-7FCB-16A1-EBF6-C4EB22D644CC}"/>
-          </ac:picMkLst>
-        </pc:picChg>
-        <pc:picChg chg="add mod">
-          <ac:chgData name="Thiago Ney Evaristo Rodrigues" userId="fb50eefc1efb6381" providerId="LiveId" clId="{CDB8E314-E490-485E-BFDC-E1775CB67CF5}" dt="2025-08-19T03:36:07.024" v="102"/>
-          <ac:picMkLst>
-            <pc:docMk/>
-            <pc:sldMk cId="2710463504" sldId="271"/>
-            <ac:picMk id="9" creationId="{04B64EB7-C89C-26CE-18B4-570BE5984D06}"/>
-          </ac:picMkLst>
-        </pc:picChg>
-        <pc:picChg chg="add mod">
-          <ac:chgData name="Thiago Ney Evaristo Rodrigues" userId="fb50eefc1efb6381" providerId="LiveId" clId="{CDB8E314-E490-485E-BFDC-E1775CB67CF5}" dt="2025-08-19T04:11:34.345" v="581" actId="164"/>
-          <ac:picMkLst>
-            <pc:docMk/>
-            <pc:sldMk cId="2710463504" sldId="271"/>
-            <ac:picMk id="14" creationId="{B7EF9608-B2EB-2C06-0004-7D265A63BF17}"/>
-          </ac:picMkLst>
-        </pc:picChg>
-        <pc:picChg chg="mod">
-          <ac:chgData name="Thiago Ney Evaristo Rodrigues" userId="fb50eefc1efb6381" providerId="LiveId" clId="{CDB8E314-E490-485E-BFDC-E1775CB67CF5}" dt="2025-08-19T04:19:41.393" v="719"/>
-          <ac:picMkLst>
-            <pc:docMk/>
-            <pc:sldMk cId="2710463504" sldId="271"/>
-            <ac:picMk id="20" creationId="{8BC66FFE-055F-7E9B-7D7D-998F17455FEA}"/>
-          </ac:picMkLst>
-        </pc:picChg>
-        <pc:picChg chg="mod">
-          <ac:chgData name="Thiago Ney Evaristo Rodrigues" userId="fb50eefc1efb6381" providerId="LiveId" clId="{CDB8E314-E490-485E-BFDC-E1775CB67CF5}" dt="2025-08-19T04:25:20.265" v="837"/>
-          <ac:picMkLst>
-            <pc:docMk/>
-            <pc:sldMk cId="2710463504" sldId="271"/>
-            <ac:picMk id="24" creationId="{B6CF7ED8-704D-E0D5-DFA0-E2101FFDB850}"/>
-          </ac:picMkLst>
-        </pc:picChg>
       </pc:sldChg>
       <pc:sldChg chg="addSp delSp modSp mod modTransition modShow">
         <pc:chgData name="Thiago Ney Evaristo Rodrigues" userId="fb50eefc1efb6381" providerId="LiveId" clId="{CDB8E314-E490-485E-BFDC-E1775CB67CF5}" dt="2025-08-19T23:05:37.440" v="3243"/>
@@ -1506,54 +1019,6 @@
             <ac:spMk id="11" creationId="{C3DA79A5-1B9B-1336-8CD9-3885DA32B84D}"/>
           </ac:spMkLst>
         </pc:spChg>
-        <pc:picChg chg="add mod">
-          <ac:chgData name="Thiago Ney Evaristo Rodrigues" userId="fb50eefc1efb6381" providerId="LiveId" clId="{CDB8E314-E490-485E-BFDC-E1775CB67CF5}" dt="2025-08-19T03:31:57.807" v="57"/>
-          <ac:picMkLst>
-            <pc:docMk/>
-            <pc:sldMk cId="1161736965" sldId="272"/>
-            <ac:picMk id="4" creationId="{8C428977-C162-8B00-606E-06976C0B0827}"/>
-          </ac:picMkLst>
-        </pc:picChg>
-        <pc:picChg chg="add del mod">
-          <ac:chgData name="Thiago Ney Evaristo Rodrigues" userId="fb50eefc1efb6381" providerId="LiveId" clId="{CDB8E314-E490-485E-BFDC-E1775CB67CF5}" dt="2025-08-19T03:36:41.771" v="113" actId="478"/>
-          <ac:picMkLst>
-            <pc:docMk/>
-            <pc:sldMk cId="1161736965" sldId="272"/>
-            <ac:picMk id="5" creationId="{8D1F9D6F-55C2-3FFC-06D5-DF7D89240788}"/>
-          </ac:picMkLst>
-        </pc:picChg>
-        <pc:picChg chg="add mod ord">
-          <ac:chgData name="Thiago Ney Evaristo Rodrigues" userId="fb50eefc1efb6381" providerId="LiveId" clId="{CDB8E314-E490-485E-BFDC-E1775CB67CF5}" dt="2025-08-19T03:55:53.538" v="345" actId="166"/>
-          <ac:picMkLst>
-            <pc:docMk/>
-            <pc:sldMk cId="1161736965" sldId="272"/>
-            <ac:picMk id="6" creationId="{FF53CE61-CC06-07B3-2FD9-B3FDD63B7196}"/>
-          </ac:picMkLst>
-        </pc:picChg>
-        <pc:picChg chg="del">
-          <ac:chgData name="Thiago Ney Evaristo Rodrigues" userId="fb50eefc1efb6381" providerId="LiveId" clId="{CDB8E314-E490-485E-BFDC-E1775CB67CF5}" dt="2025-08-19T03:55:06.988" v="335" actId="478"/>
-          <ac:picMkLst>
-            <pc:docMk/>
-            <pc:sldMk cId="1161736965" sldId="272"/>
-            <ac:picMk id="9" creationId="{36BD1F49-4C69-C48A-2CD9-660724FBDF08}"/>
-          </ac:picMkLst>
-        </pc:picChg>
-        <pc:picChg chg="add mod ord modCrop">
-          <ac:chgData name="Thiago Ney Evaristo Rodrigues" userId="fb50eefc1efb6381" providerId="LiveId" clId="{CDB8E314-E490-485E-BFDC-E1775CB67CF5}" dt="2025-08-19T04:06:54.709" v="557" actId="1076"/>
-          <ac:picMkLst>
-            <pc:docMk/>
-            <pc:sldMk cId="1161736965" sldId="272"/>
-            <ac:picMk id="12" creationId="{1645F89A-721F-23BD-C646-A61D22E0B977}"/>
-          </ac:picMkLst>
-        </pc:picChg>
-        <pc:picChg chg="add del mod">
-          <ac:chgData name="Thiago Ney Evaristo Rodrigues" userId="fb50eefc1efb6381" providerId="LiveId" clId="{CDB8E314-E490-485E-BFDC-E1775CB67CF5}" dt="2025-08-19T03:59:44.725" v="465" actId="478"/>
-          <ac:picMkLst>
-            <pc:docMk/>
-            <pc:sldMk cId="1161736965" sldId="272"/>
-            <ac:picMk id="1026" creationId="{279DD948-928A-55DB-1B86-01A6D98315B8}"/>
-          </ac:picMkLst>
-        </pc:picChg>
       </pc:sldChg>
       <pc:sldChg chg="addSp delSp modSp add del mod">
         <pc:chgData name="Thiago Ney Evaristo Rodrigues" userId="fb50eefc1efb6381" providerId="LiveId" clId="{CDB8E314-E490-485E-BFDC-E1775CB67CF5}" dt="2025-08-19T03:36:51.581" v="114" actId="47"/>
@@ -1561,30 +1026,6 @@
           <pc:docMk/>
           <pc:sldMk cId="485279989" sldId="273"/>
         </pc:sldMkLst>
-        <pc:spChg chg="mod ord">
-          <ac:chgData name="Thiago Ney Evaristo Rodrigues" userId="fb50eefc1efb6381" providerId="LiveId" clId="{CDB8E314-E490-485E-BFDC-E1775CB67CF5}" dt="2025-08-19T03:35:57.273" v="99" actId="12789"/>
-          <ac:spMkLst>
-            <pc:docMk/>
-            <pc:sldMk cId="485279989" sldId="273"/>
-            <ac:spMk id="4" creationId="{22C75B51-0290-10C7-A4CF-5ABDC89CB784}"/>
-          </ac:spMkLst>
-        </pc:spChg>
-        <pc:picChg chg="mod ord">
-          <ac:chgData name="Thiago Ney Evaristo Rodrigues" userId="fb50eefc1efb6381" providerId="LiveId" clId="{CDB8E314-E490-485E-BFDC-E1775CB67CF5}" dt="2025-08-19T03:35:57.273" v="99" actId="12789"/>
-          <ac:picMkLst>
-            <pc:docMk/>
-            <pc:sldMk cId="485279989" sldId="273"/>
-            <ac:picMk id="6" creationId="{322E10AC-3E63-5ACD-5579-961BF6177003}"/>
-          </ac:picMkLst>
-        </pc:picChg>
-        <pc:picChg chg="add del mod ord">
-          <ac:chgData name="Thiago Ney Evaristo Rodrigues" userId="fb50eefc1efb6381" providerId="LiveId" clId="{CDB8E314-E490-485E-BFDC-E1775CB67CF5}" dt="2025-08-19T03:35:52.980" v="98" actId="478"/>
-          <ac:picMkLst>
-            <pc:docMk/>
-            <pc:sldMk cId="485279989" sldId="273"/>
-            <ac:picMk id="8" creationId="{B6D6AE77-127D-BED1-1B54-B25D33505395}"/>
-          </ac:picMkLst>
-        </pc:picChg>
       </pc:sldChg>
       <pc:sldChg chg="delSp modSp add mod ord modTransition modShow">
         <pc:chgData name="Thiago Ney Evaristo Rodrigues" userId="fb50eefc1efb6381" providerId="LiveId" clId="{CDB8E314-E490-485E-BFDC-E1775CB67CF5}" dt="2025-08-19T23:05:37.440" v="3243"/>
@@ -1592,38 +1033,6 @@
           <pc:docMk/>
           <pc:sldMk cId="1206574297" sldId="273"/>
         </pc:sldMkLst>
-        <pc:spChg chg="mod">
-          <ac:chgData name="Thiago Ney Evaristo Rodrigues" userId="fb50eefc1efb6381" providerId="LiveId" clId="{CDB8E314-E490-485E-BFDC-E1775CB67CF5}" dt="2025-08-19T04:06:42.587" v="552"/>
-          <ac:spMkLst>
-            <pc:docMk/>
-            <pc:sldMk cId="1206574297" sldId="273"/>
-            <ac:spMk id="2" creationId="{6E9DE9B7-E2E5-9CA1-05B4-5AF06808C3D0}"/>
-          </ac:spMkLst>
-        </pc:spChg>
-        <pc:spChg chg="mod">
-          <ac:chgData name="Thiago Ney Evaristo Rodrigues" userId="fb50eefc1efb6381" providerId="LiveId" clId="{CDB8E314-E490-485E-BFDC-E1775CB67CF5}" dt="2025-08-19T04:02:14.531" v="480" actId="554"/>
-          <ac:spMkLst>
-            <pc:docMk/>
-            <pc:sldMk cId="1206574297" sldId="273"/>
-            <ac:spMk id="10" creationId="{089D8854-3CFF-B3CE-6FF4-706AE654EF04}"/>
-          </ac:spMkLst>
-        </pc:spChg>
-        <pc:picChg chg="del">
-          <ac:chgData name="Thiago Ney Evaristo Rodrigues" userId="fb50eefc1efb6381" providerId="LiveId" clId="{CDB8E314-E490-485E-BFDC-E1775CB67CF5}" dt="2025-08-19T04:01:40.887" v="469" actId="478"/>
-          <ac:picMkLst>
-            <pc:docMk/>
-            <pc:sldMk cId="1206574297" sldId="273"/>
-            <ac:picMk id="12" creationId="{534E5018-C70A-0B16-6287-063346DA7215}"/>
-          </ac:picMkLst>
-        </pc:picChg>
-        <pc:picChg chg="mod">
-          <ac:chgData name="Thiago Ney Evaristo Rodrigues" userId="fb50eefc1efb6381" providerId="LiveId" clId="{CDB8E314-E490-485E-BFDC-E1775CB67CF5}" dt="2025-08-19T04:02:07.847" v="478" actId="554"/>
-          <ac:picMkLst>
-            <pc:docMk/>
-            <pc:sldMk cId="1206574297" sldId="273"/>
-            <ac:picMk id="1026" creationId="{656BAEC9-D09C-D331-23C8-DFDCBDFC701C}"/>
-          </ac:picMkLst>
-        </pc:picChg>
       </pc:sldChg>
       <pc:sldChg chg="add">
         <pc:chgData name="Thiago Ney Evaristo Rodrigues" userId="fb50eefc1efb6381" providerId="LiveId" clId="{CDB8E314-E490-485E-BFDC-E1775CB67CF5}" dt="2025-08-19T03:26:35.017" v="10" actId="2890"/>
@@ -1645,46 +1054,6 @@
           <pc:docMk/>
           <pc:sldMk cId="3384704189" sldId="274"/>
         </pc:sldMkLst>
-        <pc:spChg chg="add del mod">
-          <ac:chgData name="Thiago Ney Evaristo Rodrigues" userId="fb50eefc1efb6381" providerId="LiveId" clId="{CDB8E314-E490-485E-BFDC-E1775CB67CF5}" dt="2025-08-19T14:57:07.192" v="1709" actId="478"/>
-          <ac:spMkLst>
-            <pc:docMk/>
-            <pc:sldMk cId="3384704189" sldId="274"/>
-            <ac:spMk id="2" creationId="{399AA02F-0BF2-A964-59EB-BC9C5B01D785}"/>
-          </ac:spMkLst>
-        </pc:spChg>
-        <pc:spChg chg="add del mod">
-          <ac:chgData name="Thiago Ney Evaristo Rodrigues" userId="fb50eefc1efb6381" providerId="LiveId" clId="{CDB8E314-E490-485E-BFDC-E1775CB67CF5}" dt="2025-08-19T15:14:24.555" v="1815" actId="478"/>
-          <ac:spMkLst>
-            <pc:docMk/>
-            <pc:sldMk cId="3384704189" sldId="274"/>
-            <ac:spMk id="3" creationId="{03195EBC-F080-3FFF-96C4-E334E926A8E2}"/>
-          </ac:spMkLst>
-        </pc:spChg>
-        <pc:spChg chg="mod">
-          <ac:chgData name="Thiago Ney Evaristo Rodrigues" userId="fb50eefc1efb6381" providerId="LiveId" clId="{CDB8E314-E490-485E-BFDC-E1775CB67CF5}" dt="2025-08-19T04:22:50.870" v="812" actId="404"/>
-          <ac:spMkLst>
-            <pc:docMk/>
-            <pc:sldMk cId="3384704189" sldId="274"/>
-            <ac:spMk id="5" creationId="{41C2104C-27DD-1BBB-3BBE-550407323DA4}"/>
-          </ac:spMkLst>
-        </pc:spChg>
-        <pc:spChg chg="add del mod">
-          <ac:chgData name="Thiago Ney Evaristo Rodrigues" userId="fb50eefc1efb6381" providerId="LiveId" clId="{CDB8E314-E490-485E-BFDC-E1775CB67CF5}" dt="2025-08-19T15:14:25.456" v="1816" actId="478"/>
-          <ac:spMkLst>
-            <pc:docMk/>
-            <pc:sldMk cId="3384704189" sldId="274"/>
-            <ac:spMk id="5" creationId="{B92D0618-4E61-BBF1-9925-4AAE88B4A38E}"/>
-          </ac:spMkLst>
-        </pc:spChg>
-        <pc:spChg chg="add del mod">
-          <ac:chgData name="Thiago Ney Evaristo Rodrigues" userId="fb50eefc1efb6381" providerId="LiveId" clId="{CDB8E314-E490-485E-BFDC-E1775CB67CF5}" dt="2025-08-19T04:24:58.911" v="833" actId="478"/>
-          <ac:spMkLst>
-            <pc:docMk/>
-            <pc:sldMk cId="3384704189" sldId="274"/>
-            <ac:spMk id="6" creationId="{A82743C1-9CD2-1601-2102-D9FAD9FAF00F}"/>
-          </ac:spMkLst>
-        </pc:spChg>
         <pc:spChg chg="mod">
           <ac:chgData name="Thiago Ney Evaristo Rodrigues" userId="fb50eefc1efb6381" providerId="LiveId" clId="{CDB8E314-E490-485E-BFDC-E1775CB67CF5}" dt="2025-08-19T14:53:28.670" v="1653" actId="20577"/>
           <ac:spMkLst>
@@ -1701,158 +1070,6 @@
             <ac:spMk id="8" creationId="{DA7DB3D6-169D-A3E5-6CCE-2424F4693484}"/>
           </ac:spMkLst>
         </pc:spChg>
-        <pc:spChg chg="del mod">
-          <ac:chgData name="Thiago Ney Evaristo Rodrigues" userId="fb50eefc1efb6381" providerId="LiveId" clId="{CDB8E314-E490-485E-BFDC-E1775CB67CF5}" dt="2025-08-19T04:20:00.769" v="721" actId="478"/>
-          <ac:spMkLst>
-            <pc:docMk/>
-            <pc:sldMk cId="3384704189" sldId="274"/>
-            <ac:spMk id="10" creationId="{13A50AD9-275F-5AC9-D203-6DDE07B3A9DC}"/>
-          </ac:spMkLst>
-        </pc:spChg>
-        <pc:spChg chg="del mod">
-          <ac:chgData name="Thiago Ney Evaristo Rodrigues" userId="fb50eefc1efb6381" providerId="LiveId" clId="{CDB8E314-E490-485E-BFDC-E1775CB67CF5}" dt="2025-08-19T04:33:49.440" v="950" actId="478"/>
-          <ac:spMkLst>
-            <pc:docMk/>
-            <pc:sldMk cId="3384704189" sldId="274"/>
-            <ac:spMk id="17" creationId="{83E1B87D-665B-0C99-9799-1613694B50E8}"/>
-          </ac:spMkLst>
-        </pc:spChg>
-        <pc:spChg chg="del mod">
-          <ac:chgData name="Thiago Ney Evaristo Rodrigues" userId="fb50eefc1efb6381" providerId="LiveId" clId="{CDB8E314-E490-485E-BFDC-E1775CB67CF5}" dt="2025-08-19T04:33:49.440" v="950" actId="478"/>
-          <ac:spMkLst>
-            <pc:docMk/>
-            <pc:sldMk cId="3384704189" sldId="274"/>
-            <ac:spMk id="18" creationId="{11D2CB5B-0C27-3613-5643-0B0C9E2C0E3D}"/>
-          </ac:spMkLst>
-        </pc:spChg>
-        <pc:spChg chg="mod topLvl">
-          <ac:chgData name="Thiago Ney Evaristo Rodrigues" userId="fb50eefc1efb6381" providerId="LiveId" clId="{CDB8E314-E490-485E-BFDC-E1775CB67CF5}" dt="2025-08-19T04:30:11.450" v="934" actId="165"/>
-          <ac:spMkLst>
-            <pc:docMk/>
-            <pc:sldMk cId="3384704189" sldId="274"/>
-            <ac:spMk id="20" creationId="{49FE986E-2DAC-DEA7-A291-02C979B22B85}"/>
-          </ac:spMkLst>
-        </pc:spChg>
-        <pc:spChg chg="mod topLvl">
-          <ac:chgData name="Thiago Ney Evaristo Rodrigues" userId="fb50eefc1efb6381" providerId="LiveId" clId="{CDB8E314-E490-485E-BFDC-E1775CB67CF5}" dt="2025-08-19T14:59:38.555" v="1729" actId="165"/>
-          <ac:spMkLst>
-            <pc:docMk/>
-            <pc:sldMk cId="3384704189" sldId="274"/>
-            <ac:spMk id="22" creationId="{CCF92664-BE6E-F4FD-8F05-567D314C29C0}"/>
-          </ac:spMkLst>
-        </pc:spChg>
-        <pc:grpChg chg="add del mod">
-          <ac:chgData name="Thiago Ney Evaristo Rodrigues" userId="fb50eefc1efb6381" providerId="LiveId" clId="{CDB8E314-E490-485E-BFDC-E1775CB67CF5}" dt="2025-08-19T04:24:58.911" v="833" actId="478"/>
-          <ac:grpSpMkLst>
-            <pc:docMk/>
-            <pc:sldMk cId="3384704189" sldId="274"/>
-            <ac:grpSpMk id="2" creationId="{85AC96A3-0610-29D7-2508-225FD06FB8A7}"/>
-          </ac:grpSpMkLst>
-        </pc:grpChg>
-        <pc:grpChg chg="add del mod">
-          <ac:chgData name="Thiago Ney Evaristo Rodrigues" userId="fb50eefc1efb6381" providerId="LiveId" clId="{CDB8E314-E490-485E-BFDC-E1775CB67CF5}" dt="2025-08-19T14:59:38.555" v="1729" actId="165"/>
-          <ac:grpSpMkLst>
-            <pc:docMk/>
-            <pc:sldMk cId="3384704189" sldId="274"/>
-            <ac:grpSpMk id="6" creationId="{C34CA4EC-3461-5707-149F-007CF9D8B9A5}"/>
-          </ac:grpSpMkLst>
-        </pc:grpChg>
-        <pc:grpChg chg="add del mod">
-          <ac:chgData name="Thiago Ney Evaristo Rodrigues" userId="fb50eefc1efb6381" providerId="LiveId" clId="{CDB8E314-E490-485E-BFDC-E1775CB67CF5}" dt="2025-08-19T04:28:31.236" v="892" actId="165"/>
-          <ac:grpSpMkLst>
-            <pc:docMk/>
-            <pc:sldMk cId="3384704189" sldId="274"/>
-            <ac:grpSpMk id="11" creationId="{2C859BF7-0263-3A7A-F60F-61200803F21A}"/>
-          </ac:grpSpMkLst>
-        </pc:grpChg>
-        <pc:grpChg chg="del mod topLvl">
-          <ac:chgData name="Thiago Ney Evaristo Rodrigues" userId="fb50eefc1efb6381" providerId="LiveId" clId="{CDB8E314-E490-485E-BFDC-E1775CB67CF5}" dt="2025-08-19T04:28:52.844" v="895" actId="165"/>
-          <ac:grpSpMkLst>
-            <pc:docMk/>
-            <pc:sldMk cId="3384704189" sldId="274"/>
-            <ac:grpSpMk id="12" creationId="{34CC74C1-1C88-D921-1091-429FC4366642}"/>
-          </ac:grpSpMkLst>
-        </pc:grpChg>
-        <pc:grpChg chg="del mod topLvl">
-          <ac:chgData name="Thiago Ney Evaristo Rodrigues" userId="fb50eefc1efb6381" providerId="LiveId" clId="{CDB8E314-E490-485E-BFDC-E1775CB67CF5}" dt="2025-08-19T04:28:35.765" v="893" actId="165"/>
-          <ac:grpSpMkLst>
-            <pc:docMk/>
-            <pc:sldMk cId="3384704189" sldId="274"/>
-            <ac:grpSpMk id="13" creationId="{9443F1C4-1907-9EE4-BFF8-90E0E528C59B}"/>
-          </ac:grpSpMkLst>
-        </pc:grpChg>
-        <pc:grpChg chg="del">
-          <ac:chgData name="Thiago Ney Evaristo Rodrigues" userId="fb50eefc1efb6381" providerId="LiveId" clId="{CDB8E314-E490-485E-BFDC-E1775CB67CF5}" dt="2025-08-19T04:19:36.401" v="716" actId="478"/>
-          <ac:grpSpMkLst>
-            <pc:docMk/>
-            <pc:sldMk cId="3384704189" sldId="274"/>
-            <ac:grpSpMk id="16" creationId="{28B16712-D1AB-0926-D4D2-03BD3CADFB1F}"/>
-          </ac:grpSpMkLst>
-        </pc:grpChg>
-        <pc:grpChg chg="add del mod topLvl">
-          <ac:chgData name="Thiago Ney Evaristo Rodrigues" userId="fb50eefc1efb6381" providerId="LiveId" clId="{CDB8E314-E490-485E-BFDC-E1775CB67CF5}" dt="2025-08-19T14:53:08.186" v="1628" actId="478"/>
-          <ac:grpSpMkLst>
-            <pc:docMk/>
-            <pc:sldMk cId="3384704189" sldId="274"/>
-            <ac:grpSpMk id="23" creationId="{F89EAB56-2BD2-F534-0C67-E6F64619A770}"/>
-          </ac:grpSpMkLst>
-        </pc:grpChg>
-        <pc:grpChg chg="add mod topLvl">
-          <ac:chgData name="Thiago Ney Evaristo Rodrigues" userId="fb50eefc1efb6381" providerId="LiveId" clId="{CDB8E314-E490-485E-BFDC-E1775CB67CF5}" dt="2025-08-19T14:59:38.555" v="1729" actId="165"/>
-          <ac:grpSpMkLst>
-            <pc:docMk/>
-            <pc:sldMk cId="3384704189" sldId="274"/>
-            <ac:grpSpMk id="24" creationId="{AA75C8AA-4FBD-7E46-A4FC-9BF854642B5D}"/>
-          </ac:grpSpMkLst>
-        </pc:grpChg>
-        <pc:grpChg chg="add del mod">
-          <ac:chgData name="Thiago Ney Evaristo Rodrigues" userId="fb50eefc1efb6381" providerId="LiveId" clId="{CDB8E314-E490-485E-BFDC-E1775CB67CF5}" dt="2025-08-19T04:29:45.891" v="929" actId="165"/>
-          <ac:grpSpMkLst>
-            <pc:docMk/>
-            <pc:sldMk cId="3384704189" sldId="274"/>
-            <ac:grpSpMk id="25" creationId="{B916DD57-1B55-95B8-9499-EF9522B01BFD}"/>
-          </ac:grpSpMkLst>
-        </pc:grpChg>
-        <pc:grpChg chg="add del mod topLvl">
-          <ac:chgData name="Thiago Ney Evaristo Rodrigues" userId="fb50eefc1efb6381" providerId="LiveId" clId="{CDB8E314-E490-485E-BFDC-E1775CB67CF5}" dt="2025-08-19T04:30:11.450" v="934" actId="165"/>
-          <ac:grpSpMkLst>
-            <pc:docMk/>
-            <pc:sldMk cId="3384704189" sldId="274"/>
-            <ac:grpSpMk id="26" creationId="{5A7B8CCE-6578-C7EC-C087-976DDEFC7EAE}"/>
-          </ac:grpSpMkLst>
-        </pc:grpChg>
-        <pc:grpChg chg="add del mod">
-          <ac:chgData name="Thiago Ney Evaristo Rodrigues" userId="fb50eefc1efb6381" providerId="LiveId" clId="{CDB8E314-E490-485E-BFDC-E1775CB67CF5}" dt="2025-08-19T04:30:07.221" v="933" actId="165"/>
-          <ac:grpSpMkLst>
-            <pc:docMk/>
-            <pc:sldMk cId="3384704189" sldId="274"/>
-            <ac:grpSpMk id="27" creationId="{09B4C02B-DFA5-9B46-99C7-6C32BFCDA98B}"/>
-          </ac:grpSpMkLst>
-        </pc:grpChg>
-        <pc:picChg chg="mod">
-          <ac:chgData name="Thiago Ney Evaristo Rodrigues" userId="fb50eefc1efb6381" providerId="LiveId" clId="{CDB8E314-E490-485E-BFDC-E1775CB67CF5}" dt="2025-08-19T04:19:37.324" v="717"/>
-          <ac:picMkLst>
-            <pc:docMk/>
-            <pc:sldMk cId="3384704189" sldId="274"/>
-            <ac:picMk id="3" creationId="{329F03D6-81C2-DD7E-886B-3943B483B78B}"/>
-          </ac:picMkLst>
-        </pc:picChg>
-        <pc:picChg chg="mod topLvl">
-          <ac:chgData name="Thiago Ney Evaristo Rodrigues" userId="fb50eefc1efb6381" providerId="LiveId" clId="{CDB8E314-E490-485E-BFDC-E1775CB67CF5}" dt="2025-08-19T04:30:11.450" v="934" actId="165"/>
-          <ac:picMkLst>
-            <pc:docMk/>
-            <pc:sldMk cId="3384704189" sldId="274"/>
-            <ac:picMk id="19" creationId="{CFC17638-3FFB-915D-0176-848B967A9C50}"/>
-          </ac:picMkLst>
-        </pc:picChg>
-        <pc:picChg chg="mod topLvl">
-          <ac:chgData name="Thiago Ney Evaristo Rodrigues" userId="fb50eefc1efb6381" providerId="LiveId" clId="{CDB8E314-E490-485E-BFDC-E1775CB67CF5}" dt="2025-08-19T14:59:38.555" v="1729" actId="165"/>
-          <ac:picMkLst>
-            <pc:docMk/>
-            <pc:sldMk cId="3384704189" sldId="274"/>
-            <ac:picMk id="21" creationId="{DB9168E9-65BE-0A0E-35A0-148CBC6E7263}"/>
-          </ac:picMkLst>
-        </pc:picChg>
       </pc:sldChg>
       <pc:sldChg chg="del">
         <pc:chgData name="Thiago Ney Evaristo Rodrigues" userId="fb50eefc1efb6381" providerId="LiveId" clId="{CDB8E314-E490-485E-BFDC-E1775CB67CF5}" dt="2025-08-19T03:26:25.468" v="3" actId="47"/>
@@ -1874,86 +1091,6 @@
           <pc:docMk/>
           <pc:sldMk cId="3554858252" sldId="275"/>
         </pc:sldMkLst>
-        <pc:spChg chg="mod">
-          <ac:chgData name="Thiago Ney Evaristo Rodrigues" userId="fb50eefc1efb6381" providerId="LiveId" clId="{CDB8E314-E490-485E-BFDC-E1775CB67CF5}" dt="2025-08-19T04:22:54.650" v="813" actId="404"/>
-          <ac:spMkLst>
-            <pc:docMk/>
-            <pc:sldMk cId="3554858252" sldId="275"/>
-            <ac:spMk id="5" creationId="{EEDE396C-3C3C-95AF-5BC4-648FA1A97CE6}"/>
-          </ac:spMkLst>
-        </pc:spChg>
-        <pc:spChg chg="add del mod">
-          <ac:chgData name="Thiago Ney Evaristo Rodrigues" userId="fb50eefc1efb6381" providerId="LiveId" clId="{CDB8E314-E490-485E-BFDC-E1775CB67CF5}" dt="2025-08-19T04:32:34.102" v="945" actId="478"/>
-          <ac:spMkLst>
-            <pc:docMk/>
-            <pc:sldMk cId="3554858252" sldId="275"/>
-            <ac:spMk id="6" creationId="{F2CF4AC6-2C1C-18D3-2E56-92212DD240E0}"/>
-          </ac:spMkLst>
-        </pc:spChg>
-        <pc:spChg chg="mod">
-          <ac:chgData name="Thiago Ney Evaristo Rodrigues" userId="fb50eefc1efb6381" providerId="LiveId" clId="{CDB8E314-E490-485E-BFDC-E1775CB67CF5}" dt="2025-08-19T04:43:17.668" v="1251" actId="20577"/>
-          <ac:spMkLst>
-            <pc:docMk/>
-            <pc:sldMk cId="3554858252" sldId="275"/>
-            <ac:spMk id="7" creationId="{20EDCE3A-374E-38C0-2F8A-EC31F9273BD7}"/>
-          </ac:spMkLst>
-        </pc:spChg>
-        <pc:spChg chg="add mod">
-          <ac:chgData name="Thiago Ney Evaristo Rodrigues" userId="fb50eefc1efb6381" providerId="LiveId" clId="{CDB8E314-E490-485E-BFDC-E1775CB67CF5}" dt="2025-08-19T04:32:29.576" v="944" actId="1076"/>
-          <ac:spMkLst>
-            <pc:docMk/>
-            <pc:sldMk cId="3554858252" sldId="275"/>
-            <ac:spMk id="8" creationId="{5B3652F2-C0C0-DA98-E934-6B8EE213B6EB}"/>
-          </ac:spMkLst>
-        </pc:spChg>
-        <pc:spChg chg="del">
-          <ac:chgData name="Thiago Ney Evaristo Rodrigues" userId="fb50eefc1efb6381" providerId="LiveId" clId="{CDB8E314-E490-485E-BFDC-E1775CB67CF5}" dt="2025-08-19T04:20:17.272" v="727" actId="478"/>
-          <ac:spMkLst>
-            <pc:docMk/>
-            <pc:sldMk cId="3554858252" sldId="275"/>
-            <ac:spMk id="10" creationId="{6B9CC4AC-E031-A422-F6AE-FFA5563E1CA5}"/>
-          </ac:spMkLst>
-        </pc:spChg>
-        <pc:spChg chg="del mod">
-          <ac:chgData name="Thiago Ney Evaristo Rodrigues" userId="fb50eefc1efb6381" providerId="LiveId" clId="{CDB8E314-E490-485E-BFDC-E1775CB67CF5}" dt="2025-08-19T04:33:52.998" v="951" actId="478"/>
-          <ac:spMkLst>
-            <pc:docMk/>
-            <pc:sldMk cId="3554858252" sldId="275"/>
-            <ac:spMk id="17" creationId="{768B8A4D-88A6-EBD1-66DC-BC14B9AD31A3}"/>
-          </ac:spMkLst>
-        </pc:spChg>
-        <pc:spChg chg="del">
-          <ac:chgData name="Thiago Ney Evaristo Rodrigues" userId="fb50eefc1efb6381" providerId="LiveId" clId="{CDB8E314-E490-485E-BFDC-E1775CB67CF5}" dt="2025-08-19T04:33:52.998" v="951" actId="478"/>
-          <ac:spMkLst>
-            <pc:docMk/>
-            <pc:sldMk cId="3554858252" sldId="275"/>
-            <ac:spMk id="18" creationId="{8AF42C9B-3FA2-EA96-0E55-09F1EEE7DF6D}"/>
-          </ac:spMkLst>
-        </pc:spChg>
-        <pc:grpChg chg="add del mod">
-          <ac:chgData name="Thiago Ney Evaristo Rodrigues" userId="fb50eefc1efb6381" providerId="LiveId" clId="{CDB8E314-E490-485E-BFDC-E1775CB67CF5}" dt="2025-08-19T04:24:45.396" v="832" actId="478"/>
-          <ac:grpSpMkLst>
-            <pc:docMk/>
-            <pc:sldMk cId="3554858252" sldId="275"/>
-            <ac:grpSpMk id="2" creationId="{CAE86CF5-B54E-93C9-48A0-47BB126871B4}"/>
-          </ac:grpSpMkLst>
-        </pc:grpChg>
-        <pc:grpChg chg="del">
-          <ac:chgData name="Thiago Ney Evaristo Rodrigues" userId="fb50eefc1efb6381" providerId="LiveId" clId="{CDB8E314-E490-485E-BFDC-E1775CB67CF5}" dt="2025-08-19T04:19:32.314" v="714" actId="478"/>
-          <ac:grpSpMkLst>
-            <pc:docMk/>
-            <pc:sldMk cId="3554858252" sldId="275"/>
-            <ac:grpSpMk id="16" creationId="{4AC64433-96DC-F79A-1772-0056B925BEE4}"/>
-          </ac:grpSpMkLst>
-        </pc:grpChg>
-        <pc:picChg chg="mod">
-          <ac:chgData name="Thiago Ney Evaristo Rodrigues" userId="fb50eefc1efb6381" providerId="LiveId" clId="{CDB8E314-E490-485E-BFDC-E1775CB67CF5}" dt="2025-08-19T04:19:33.251" v="715"/>
-          <ac:picMkLst>
-            <pc:docMk/>
-            <pc:sldMk cId="3554858252" sldId="275"/>
-            <ac:picMk id="3" creationId="{C61009EE-6B8F-0B1F-103B-7C17259274B6}"/>
-          </ac:picMkLst>
-        </pc:picChg>
       </pc:sldChg>
       <pc:sldChg chg="addSp delSp modSp add mod modTransition">
         <pc:chgData name="Thiago Ney Evaristo Rodrigues" userId="fb50eefc1efb6381" providerId="LiveId" clId="{CDB8E314-E490-485E-BFDC-E1775CB67CF5}" dt="2025-08-19T23:05:37.440" v="3243"/>
@@ -1961,150 +1098,6 @@
           <pc:docMk/>
           <pc:sldMk cId="2462354445" sldId="276"/>
         </pc:sldMkLst>
-        <pc:spChg chg="mod">
-          <ac:chgData name="Thiago Ney Evaristo Rodrigues" userId="fb50eefc1efb6381" providerId="LiveId" clId="{CDB8E314-E490-485E-BFDC-E1775CB67CF5}" dt="2025-08-19T04:22:58.705" v="814" actId="404"/>
-          <ac:spMkLst>
-            <pc:docMk/>
-            <pc:sldMk cId="2462354445" sldId="276"/>
-            <ac:spMk id="5" creationId="{7252F954-B866-64D2-C565-91E5A5A105F5}"/>
-          </ac:spMkLst>
-        </pc:spChg>
-        <pc:spChg chg="add del mod">
-          <ac:chgData name="Thiago Ney Evaristo Rodrigues" userId="fb50eefc1efb6381" providerId="LiveId" clId="{CDB8E314-E490-485E-BFDC-E1775CB67CF5}" dt="2025-08-19T04:24:25.395" v="826" actId="478"/>
-          <ac:spMkLst>
-            <pc:docMk/>
-            <pc:sldMk cId="2462354445" sldId="276"/>
-            <ac:spMk id="6" creationId="{C39F0B89-1C44-3780-B689-37DA0D213F38}"/>
-          </ac:spMkLst>
-        </pc:spChg>
-        <pc:spChg chg="mod">
-          <ac:chgData name="Thiago Ney Evaristo Rodrigues" userId="fb50eefc1efb6381" providerId="LiveId" clId="{CDB8E314-E490-485E-BFDC-E1775CB67CF5}" dt="2025-08-19T04:43:12.713" v="1248" actId="20577"/>
-          <ac:spMkLst>
-            <pc:docMk/>
-            <pc:sldMk cId="2462354445" sldId="276"/>
-            <ac:spMk id="7" creationId="{992043CB-C993-7089-F15B-4F90AE5A94D4}"/>
-          </ac:spMkLst>
-        </pc:spChg>
-        <pc:spChg chg="add mod topLvl">
-          <ac:chgData name="Thiago Ney Evaristo Rodrigues" userId="fb50eefc1efb6381" providerId="LiveId" clId="{CDB8E314-E490-485E-BFDC-E1775CB67CF5}" dt="2025-08-19T04:26:12.620" v="845" actId="165"/>
-          <ac:spMkLst>
-            <pc:docMk/>
-            <pc:sldMk cId="2462354445" sldId="276"/>
-            <ac:spMk id="8" creationId="{74CD3218-8910-0B42-5DE5-B09EE5232FAD}"/>
-          </ac:spMkLst>
-        </pc:spChg>
-        <pc:spChg chg="del">
-          <ac:chgData name="Thiago Ney Evaristo Rodrigues" userId="fb50eefc1efb6381" providerId="LiveId" clId="{CDB8E314-E490-485E-BFDC-E1775CB67CF5}" dt="2025-08-19T04:20:20.591" v="729" actId="478"/>
-          <ac:spMkLst>
-            <pc:docMk/>
-            <pc:sldMk cId="2462354445" sldId="276"/>
-            <ac:spMk id="10" creationId="{C7D1EDA8-9665-7A27-5C2C-81B41CE4A544}"/>
-          </ac:spMkLst>
-        </pc:spChg>
-        <pc:spChg chg="mod">
-          <ac:chgData name="Thiago Ney Evaristo Rodrigues" userId="fb50eefc1efb6381" providerId="LiveId" clId="{CDB8E314-E490-485E-BFDC-E1775CB67CF5}" dt="2025-08-19T04:26:12.620" v="845" actId="165"/>
-          <ac:spMkLst>
-            <pc:docMk/>
-            <pc:sldMk cId="2462354445" sldId="276"/>
-            <ac:spMk id="13" creationId="{BD635CF6-D26F-30EF-5CAD-C9BA35D94A0E}"/>
-          </ac:spMkLst>
-        </pc:spChg>
-        <pc:spChg chg="del mod">
-          <ac:chgData name="Thiago Ney Evaristo Rodrigues" userId="fb50eefc1efb6381" providerId="LiveId" clId="{CDB8E314-E490-485E-BFDC-E1775CB67CF5}" dt="2025-08-19T04:33:55.964" v="952" actId="478"/>
-          <ac:spMkLst>
-            <pc:docMk/>
-            <pc:sldMk cId="2462354445" sldId="276"/>
-            <ac:spMk id="17" creationId="{46CEBE2D-9A68-D013-DD1A-CE2FF2CD51DB}"/>
-          </ac:spMkLst>
-        </pc:spChg>
-        <pc:spChg chg="del">
-          <ac:chgData name="Thiago Ney Evaristo Rodrigues" userId="fb50eefc1efb6381" providerId="LiveId" clId="{CDB8E314-E490-485E-BFDC-E1775CB67CF5}" dt="2025-08-19T04:33:55.964" v="952" actId="478"/>
-          <ac:spMkLst>
-            <pc:docMk/>
-            <pc:sldMk cId="2462354445" sldId="276"/>
-            <ac:spMk id="18" creationId="{B69D08B1-89EA-0A84-1DF7-2E45C4EB2585}"/>
-          </ac:spMkLst>
-        </pc:spChg>
-        <pc:spChg chg="mod">
-          <ac:chgData name="Thiago Ney Evaristo Rodrigues" userId="fb50eefc1efb6381" providerId="LiveId" clId="{CDB8E314-E490-485E-BFDC-E1775CB67CF5}" dt="2025-08-19T04:26:12.620" v="845" actId="165"/>
-          <ac:spMkLst>
-            <pc:docMk/>
-            <pc:sldMk cId="2462354445" sldId="276"/>
-            <ac:spMk id="21" creationId="{A887DB3B-4BC2-6ED2-F4B0-2E689C295E41}"/>
-          </ac:spMkLst>
-        </pc:spChg>
-        <pc:grpChg chg="add del mod">
-          <ac:chgData name="Thiago Ney Evaristo Rodrigues" userId="fb50eefc1efb6381" providerId="LiveId" clId="{CDB8E314-E490-485E-BFDC-E1775CB67CF5}" dt="2025-08-19T04:24:25.395" v="826" actId="478"/>
-          <ac:grpSpMkLst>
-            <pc:docMk/>
-            <pc:sldMk cId="2462354445" sldId="276"/>
-            <ac:grpSpMk id="2" creationId="{607A0FC0-4DD2-0053-30B5-E43F5BC66975}"/>
-          </ac:grpSpMkLst>
-        </pc:grpChg>
-        <pc:grpChg chg="add mod topLvl">
-          <ac:chgData name="Thiago Ney Evaristo Rodrigues" userId="fb50eefc1efb6381" providerId="LiveId" clId="{CDB8E314-E490-485E-BFDC-E1775CB67CF5}" dt="2025-08-19T04:26:17.580" v="846" actId="164"/>
-          <ac:grpSpMkLst>
-            <pc:docMk/>
-            <pc:sldMk cId="2462354445" sldId="276"/>
-            <ac:grpSpMk id="11" creationId="{EA20399C-8B0A-BD93-9F0B-036BE4AEBB0E}"/>
-          </ac:grpSpMkLst>
-        </pc:grpChg>
-        <pc:grpChg chg="del">
-          <ac:chgData name="Thiago Ney Evaristo Rodrigues" userId="fb50eefc1efb6381" providerId="LiveId" clId="{CDB8E314-E490-485E-BFDC-E1775CB67CF5}" dt="2025-08-19T04:19:28.971" v="712" actId="478"/>
-          <ac:grpSpMkLst>
-            <pc:docMk/>
-            <pc:sldMk cId="2462354445" sldId="276"/>
-            <ac:grpSpMk id="16" creationId="{A38F3A87-8ACB-A213-FEAB-4F75902D69CC}"/>
-          </ac:grpSpMkLst>
-        </pc:grpChg>
-        <pc:grpChg chg="add mod topLvl">
-          <ac:chgData name="Thiago Ney Evaristo Rodrigues" userId="fb50eefc1efb6381" providerId="LiveId" clId="{CDB8E314-E490-485E-BFDC-E1775CB67CF5}" dt="2025-08-19T04:26:17.580" v="846" actId="164"/>
-          <ac:grpSpMkLst>
-            <pc:docMk/>
-            <pc:sldMk cId="2462354445" sldId="276"/>
-            <ac:grpSpMk id="19" creationId="{A18F00A0-7C13-2DBA-9CEB-E14C0914CB76}"/>
-          </ac:grpSpMkLst>
-        </pc:grpChg>
-        <pc:grpChg chg="add del mod">
-          <ac:chgData name="Thiago Ney Evaristo Rodrigues" userId="fb50eefc1efb6381" providerId="LiveId" clId="{CDB8E314-E490-485E-BFDC-E1775CB67CF5}" dt="2025-08-19T04:26:12.620" v="845" actId="165"/>
-          <ac:grpSpMkLst>
-            <pc:docMk/>
-            <pc:sldMk cId="2462354445" sldId="276"/>
-            <ac:grpSpMk id="22" creationId="{FC19F719-935B-E0A2-234F-27040D0E1534}"/>
-          </ac:grpSpMkLst>
-        </pc:grpChg>
-        <pc:grpChg chg="add mod">
-          <ac:chgData name="Thiago Ney Evaristo Rodrigues" userId="fb50eefc1efb6381" providerId="LiveId" clId="{CDB8E314-E490-485E-BFDC-E1775CB67CF5}" dt="2025-08-19T04:26:23.297" v="874" actId="1038"/>
-          <ac:grpSpMkLst>
-            <pc:docMk/>
-            <pc:sldMk cId="2462354445" sldId="276"/>
-            <ac:grpSpMk id="23" creationId="{3E8B3382-404C-4903-427C-3177A84C3B12}"/>
-          </ac:grpSpMkLst>
-        </pc:grpChg>
-        <pc:picChg chg="mod">
-          <ac:chgData name="Thiago Ney Evaristo Rodrigues" userId="fb50eefc1efb6381" providerId="LiveId" clId="{CDB8E314-E490-485E-BFDC-E1775CB67CF5}" dt="2025-08-19T04:19:29.923" v="713"/>
-          <ac:picMkLst>
-            <pc:docMk/>
-            <pc:sldMk cId="2462354445" sldId="276"/>
-            <ac:picMk id="3" creationId="{24D7F106-1C1B-1F64-7201-3F3C13D3CF96}"/>
-          </ac:picMkLst>
-        </pc:picChg>
-        <pc:picChg chg="mod">
-          <ac:chgData name="Thiago Ney Evaristo Rodrigues" userId="fb50eefc1efb6381" providerId="LiveId" clId="{CDB8E314-E490-485E-BFDC-E1775CB67CF5}" dt="2025-08-19T04:26:12.620" v="845" actId="165"/>
-          <ac:picMkLst>
-            <pc:docMk/>
-            <pc:sldMk cId="2462354445" sldId="276"/>
-            <ac:picMk id="12" creationId="{68C3CDD0-337F-F456-0422-55711653271B}"/>
-          </ac:picMkLst>
-        </pc:picChg>
-        <pc:picChg chg="mod">
-          <ac:chgData name="Thiago Ney Evaristo Rodrigues" userId="fb50eefc1efb6381" providerId="LiveId" clId="{CDB8E314-E490-485E-BFDC-E1775CB67CF5}" dt="2025-08-19T04:26:12.620" v="845" actId="165"/>
-          <ac:picMkLst>
-            <pc:docMk/>
-            <pc:sldMk cId="2462354445" sldId="276"/>
-            <ac:picMk id="20" creationId="{DD6CE55C-4F4A-978E-DC05-92EF94B4F3AD}"/>
-          </ac:picMkLst>
-        </pc:picChg>
       </pc:sldChg>
       <pc:sldChg chg="del">
         <pc:chgData name="Thiago Ney Evaristo Rodrigues" userId="fb50eefc1efb6381" providerId="LiveId" clId="{CDB8E314-E490-485E-BFDC-E1775CB67CF5}" dt="2025-08-19T03:26:28.144" v="9" actId="47"/>
@@ -2119,190 +1112,6 @@
           <pc:docMk/>
           <pc:sldMk cId="1496372959" sldId="277"/>
         </pc:sldMkLst>
-        <pc:spChg chg="mod">
-          <ac:chgData name="Thiago Ney Evaristo Rodrigues" userId="fb50eefc1efb6381" providerId="LiveId" clId="{CDB8E314-E490-485E-BFDC-E1775CB67CF5}" dt="2025-08-19T04:19:26.007" v="711"/>
-          <ac:spMkLst>
-            <pc:docMk/>
-            <pc:sldMk cId="1496372959" sldId="277"/>
-            <ac:spMk id="5" creationId="{719FBC32-3DC8-D4EF-79CF-90679C5887C0}"/>
-          </ac:spMkLst>
-        </pc:spChg>
-        <pc:spChg chg="add del mod">
-          <ac:chgData name="Thiago Ney Evaristo Rodrigues" userId="fb50eefc1efb6381" providerId="LiveId" clId="{CDB8E314-E490-485E-BFDC-E1775CB67CF5}" dt="2025-08-19T04:22:25.563" v="806" actId="478"/>
-          <ac:spMkLst>
-            <pc:docMk/>
-            <pc:sldMk cId="1496372959" sldId="277"/>
-            <ac:spMk id="6" creationId="{55C754FB-A787-A05C-E34A-35F2A2894E74}"/>
-          </ac:spMkLst>
-        </pc:spChg>
-        <pc:spChg chg="mod">
-          <ac:chgData name="Thiago Ney Evaristo Rodrigues" userId="fb50eefc1efb6381" providerId="LiveId" clId="{CDB8E314-E490-485E-BFDC-E1775CB67CF5}" dt="2025-08-19T04:43:39.568" v="1279" actId="20577"/>
-          <ac:spMkLst>
-            <pc:docMk/>
-            <pc:sldMk cId="1496372959" sldId="277"/>
-            <ac:spMk id="7" creationId="{D90ACE87-2A1B-A838-D1CB-A0FB146FD333}"/>
-          </ac:spMkLst>
-        </pc:spChg>
-        <pc:spChg chg="add mod topLvl">
-          <ac:chgData name="Thiago Ney Evaristo Rodrigues" userId="fb50eefc1efb6381" providerId="LiveId" clId="{CDB8E314-E490-485E-BFDC-E1775CB67CF5}" dt="2025-08-19T22:48:51.066" v="2928" actId="20577"/>
-          <ac:spMkLst>
-            <pc:docMk/>
-            <pc:sldMk cId="1496372959" sldId="277"/>
-            <ac:spMk id="8" creationId="{9B948F3B-C6D5-81B3-96C8-D2E8623D9944}"/>
-          </ac:spMkLst>
-        </pc:spChg>
-        <pc:spChg chg="del">
-          <ac:chgData name="Thiago Ney Evaristo Rodrigues" userId="fb50eefc1efb6381" providerId="LiveId" clId="{CDB8E314-E490-485E-BFDC-E1775CB67CF5}" dt="2025-08-19T04:20:25.076" v="731" actId="478"/>
-          <ac:spMkLst>
-            <pc:docMk/>
-            <pc:sldMk cId="1496372959" sldId="277"/>
-            <ac:spMk id="10" creationId="{68FFD2C9-CB7B-93A9-0744-DC22B9394129}"/>
-          </ac:spMkLst>
-        </pc:spChg>
-        <pc:spChg chg="del mod">
-          <ac:chgData name="Thiago Ney Evaristo Rodrigues" userId="fb50eefc1efb6381" providerId="LiveId" clId="{CDB8E314-E490-485E-BFDC-E1775CB67CF5}" dt="2025-08-19T04:33:58.663" v="953" actId="478"/>
-          <ac:spMkLst>
-            <pc:docMk/>
-            <pc:sldMk cId="1496372959" sldId="277"/>
-            <ac:spMk id="17" creationId="{D4C111D9-6905-4FE5-0E39-C7C33CC59BC3}"/>
-          </ac:spMkLst>
-        </pc:spChg>
-        <pc:spChg chg="del mod topLvl">
-          <ac:chgData name="Thiago Ney Evaristo Rodrigues" userId="fb50eefc1efb6381" providerId="LiveId" clId="{CDB8E314-E490-485E-BFDC-E1775CB67CF5}" dt="2025-08-19T04:33:58.663" v="953" actId="478"/>
-          <ac:spMkLst>
-            <pc:docMk/>
-            <pc:sldMk cId="1496372959" sldId="277"/>
-            <ac:spMk id="18" creationId="{244D5DA5-8233-F77F-EAFB-0A1C1630192D}"/>
-          </ac:spMkLst>
-        </pc:spChg>
-        <pc:spChg chg="mod">
-          <ac:chgData name="Thiago Ney Evaristo Rodrigues" userId="fb50eefc1efb6381" providerId="LiveId" clId="{CDB8E314-E490-485E-BFDC-E1775CB67CF5}" dt="2025-08-19T04:37:18.312" v="1086" actId="20577"/>
-          <ac:spMkLst>
-            <pc:docMk/>
-            <pc:sldMk cId="1496372959" sldId="277"/>
-            <ac:spMk id="20" creationId="{74AFD63E-1C60-68B9-333A-AF2DCD0C5814}"/>
-          </ac:spMkLst>
-        </pc:spChg>
-        <pc:spChg chg="mod">
-          <ac:chgData name="Thiago Ney Evaristo Rodrigues" userId="fb50eefc1efb6381" providerId="LiveId" clId="{CDB8E314-E490-485E-BFDC-E1775CB67CF5}" dt="2025-08-19T04:37:12.358" v="1083" actId="20577"/>
-          <ac:spMkLst>
-            <pc:docMk/>
-            <pc:sldMk cId="1496372959" sldId="277"/>
-            <ac:spMk id="22" creationId="{34D4BC25-B251-8CA6-C2EC-A4A58E69E307}"/>
-          </ac:spMkLst>
-        </pc:spChg>
-        <pc:spChg chg="add mod topLvl">
-          <ac:chgData name="Thiago Ney Evaristo Rodrigues" userId="fb50eefc1efb6381" providerId="LiveId" clId="{CDB8E314-E490-485E-BFDC-E1775CB67CF5}" dt="2025-08-19T04:38:38.392" v="1106" actId="165"/>
-          <ac:spMkLst>
-            <pc:docMk/>
-            <pc:sldMk cId="1496372959" sldId="277"/>
-            <ac:spMk id="28" creationId="{57109448-D6DA-5795-99B3-545084CF398E}"/>
-          </ac:spMkLst>
-        </pc:spChg>
-        <pc:grpChg chg="add del mod">
-          <ac:chgData name="Thiago Ney Evaristo Rodrigues" userId="fb50eefc1efb6381" providerId="LiveId" clId="{CDB8E314-E490-485E-BFDC-E1775CB67CF5}" dt="2025-08-19T04:22:25.563" v="806" actId="478"/>
-          <ac:grpSpMkLst>
-            <pc:docMk/>
-            <pc:sldMk cId="1496372959" sldId="277"/>
-            <ac:grpSpMk id="2" creationId="{19361E9B-C863-4820-1DDD-8CD6162C358E}"/>
-          </ac:grpSpMkLst>
-        </pc:grpChg>
-        <pc:grpChg chg="add mod topLvl">
-          <ac:chgData name="Thiago Ney Evaristo Rodrigues" userId="fb50eefc1efb6381" providerId="LiveId" clId="{CDB8E314-E490-485E-BFDC-E1775CB67CF5}" dt="2025-08-19T04:38:34.933" v="1105" actId="12789"/>
-          <ac:grpSpMkLst>
-            <pc:docMk/>
-            <pc:sldMk cId="1496372959" sldId="277"/>
-            <ac:grpSpMk id="11" creationId="{3864D80D-3F5F-0E41-8DF1-D514BFA64AFB}"/>
-          </ac:grpSpMkLst>
-        </pc:grpChg>
-        <pc:grpChg chg="mod">
-          <ac:chgData name="Thiago Ney Evaristo Rodrigues" userId="fb50eefc1efb6381" providerId="LiveId" clId="{CDB8E314-E490-485E-BFDC-E1775CB67CF5}" dt="2025-08-19T04:36:22.390" v="1051" actId="165"/>
-          <ac:grpSpMkLst>
-            <pc:docMk/>
-            <pc:sldMk cId="1496372959" sldId="277"/>
-            <ac:grpSpMk id="12" creationId="{E41194DC-2211-11D6-20D0-C4630776B0C8}"/>
-          </ac:grpSpMkLst>
-        </pc:grpChg>
-        <pc:grpChg chg="mod">
-          <ac:chgData name="Thiago Ney Evaristo Rodrigues" userId="fb50eefc1efb6381" providerId="LiveId" clId="{CDB8E314-E490-485E-BFDC-E1775CB67CF5}" dt="2025-08-19T04:36:22.390" v="1051" actId="165"/>
-          <ac:grpSpMkLst>
-            <pc:docMk/>
-            <pc:sldMk cId="1496372959" sldId="277"/>
-            <ac:grpSpMk id="13" creationId="{7449776A-28BE-AB19-A363-3E539619E9E0}"/>
-          </ac:grpSpMkLst>
-        </pc:grpChg>
-        <pc:grpChg chg="del">
-          <ac:chgData name="Thiago Ney Evaristo Rodrigues" userId="fb50eefc1efb6381" providerId="LiveId" clId="{CDB8E314-E490-485E-BFDC-E1775CB67CF5}" dt="2025-08-19T04:19:25.066" v="710" actId="478"/>
-          <ac:grpSpMkLst>
-            <pc:docMk/>
-            <pc:sldMk cId="1496372959" sldId="277"/>
-            <ac:grpSpMk id="16" creationId="{6720806E-3A5A-CD35-B667-69D7DFFE976D}"/>
-          </ac:grpSpMkLst>
-        </pc:grpChg>
-        <pc:grpChg chg="add del mod">
-          <ac:chgData name="Thiago Ney Evaristo Rodrigues" userId="fb50eefc1efb6381" providerId="LiveId" clId="{CDB8E314-E490-485E-BFDC-E1775CB67CF5}" dt="2025-08-19T04:26:45.855" v="877" actId="165"/>
-          <ac:grpSpMkLst>
-            <pc:docMk/>
-            <pc:sldMk cId="1496372959" sldId="277"/>
-            <ac:grpSpMk id="23" creationId="{FA982DF7-EDFE-3419-260A-CA85596F8141}"/>
-          </ac:grpSpMkLst>
-        </pc:grpChg>
-        <pc:grpChg chg="add del mod">
-          <ac:chgData name="Thiago Ney Evaristo Rodrigues" userId="fb50eefc1efb6381" providerId="LiveId" clId="{CDB8E314-E490-485E-BFDC-E1775CB67CF5}" dt="2025-08-19T04:35:51.531" v="985" actId="165"/>
-          <ac:grpSpMkLst>
-            <pc:docMk/>
-            <pc:sldMk cId="1496372959" sldId="277"/>
-            <ac:grpSpMk id="24" creationId="{00BD4D82-1C8F-A76D-B8A7-E2524DD951FA}"/>
-          </ac:grpSpMkLst>
-        </pc:grpChg>
-        <pc:grpChg chg="add del mod">
-          <ac:chgData name="Thiago Ney Evaristo Rodrigues" userId="fb50eefc1efb6381" providerId="LiveId" clId="{CDB8E314-E490-485E-BFDC-E1775CB67CF5}" dt="2025-08-19T04:36:22.390" v="1051" actId="165"/>
-          <ac:grpSpMkLst>
-            <pc:docMk/>
-            <pc:sldMk cId="1496372959" sldId="277"/>
-            <ac:grpSpMk id="27" creationId="{18603E39-0A6D-9128-0C41-C900EC1CAEDD}"/>
-          </ac:grpSpMkLst>
-        </pc:grpChg>
-        <pc:grpChg chg="add del mod">
-          <ac:chgData name="Thiago Ney Evaristo Rodrigues" userId="fb50eefc1efb6381" providerId="LiveId" clId="{CDB8E314-E490-485E-BFDC-E1775CB67CF5}" dt="2025-08-19T04:38:38.392" v="1106" actId="165"/>
-          <ac:grpSpMkLst>
-            <pc:docMk/>
-            <pc:sldMk cId="1496372959" sldId="277"/>
-            <ac:grpSpMk id="29" creationId="{2E4C0CC4-167C-0B8D-0583-8254D9748A0E}"/>
-          </ac:grpSpMkLst>
-        </pc:grpChg>
-        <pc:picChg chg="mod">
-          <ac:chgData name="Thiago Ney Evaristo Rodrigues" userId="fb50eefc1efb6381" providerId="LiveId" clId="{CDB8E314-E490-485E-BFDC-E1775CB67CF5}" dt="2025-08-19T04:19:26.007" v="711"/>
-          <ac:picMkLst>
-            <pc:docMk/>
-            <pc:sldMk cId="1496372959" sldId="277"/>
-            <ac:picMk id="3" creationId="{2E2E94EB-66C2-A866-CC2A-107260A799B6}"/>
-          </ac:picMkLst>
-        </pc:picChg>
-        <pc:picChg chg="mod">
-          <ac:chgData name="Thiago Ney Evaristo Rodrigues" userId="fb50eefc1efb6381" providerId="LiveId" clId="{CDB8E314-E490-485E-BFDC-E1775CB67CF5}" dt="2025-08-19T04:36:22.390" v="1051" actId="165"/>
-          <ac:picMkLst>
-            <pc:docMk/>
-            <pc:sldMk cId="1496372959" sldId="277"/>
-            <ac:picMk id="19" creationId="{FA5753EC-E1BA-5343-8E01-8BA590DD0E74}"/>
-          </ac:picMkLst>
-        </pc:picChg>
-        <pc:picChg chg="mod">
-          <ac:chgData name="Thiago Ney Evaristo Rodrigues" userId="fb50eefc1efb6381" providerId="LiveId" clId="{CDB8E314-E490-485E-BFDC-E1775CB67CF5}" dt="2025-08-19T04:36:22.390" v="1051" actId="165"/>
-          <ac:picMkLst>
-            <pc:docMk/>
-            <pc:sldMk cId="1496372959" sldId="277"/>
-            <ac:picMk id="21" creationId="{36B2778A-8ACD-1642-FAE4-53D5E1236AE7}"/>
-          </ac:picMkLst>
-        </pc:picChg>
-        <pc:picChg chg="add mod topLvl modCrop">
-          <ac:chgData name="Thiago Ney Evaristo Rodrigues" userId="fb50eefc1efb6381" providerId="LiveId" clId="{CDB8E314-E490-485E-BFDC-E1775CB67CF5}" dt="2025-08-19T04:38:38.392" v="1106" actId="165"/>
-          <ac:picMkLst>
-            <pc:docMk/>
-            <pc:sldMk cId="1496372959" sldId="277"/>
-            <ac:picMk id="26" creationId="{E7913E36-4C44-FBDF-8E64-80EDD1A0EE5D}"/>
-          </ac:picMkLst>
-        </pc:picChg>
       </pc:sldChg>
       <pc:sldChg chg="del">
         <pc:chgData name="Thiago Ney Evaristo Rodrigues" userId="fb50eefc1efb6381" providerId="LiveId" clId="{CDB8E314-E490-485E-BFDC-E1775CB67CF5}" dt="2025-08-19T03:26:27.021" v="7" actId="47"/>
@@ -2317,38 +1126,6 @@
           <pc:docMk/>
           <pc:sldMk cId="1257190996" sldId="278"/>
         </pc:sldMkLst>
-        <pc:spChg chg="mod">
-          <ac:chgData name="Thiago Ney Evaristo Rodrigues" userId="fb50eefc1efb6381" providerId="LiveId" clId="{CDB8E314-E490-485E-BFDC-E1775CB67CF5}" dt="2025-08-19T03:29:19.581" v="32" actId="14100"/>
-          <ac:spMkLst>
-            <pc:docMk/>
-            <pc:sldMk cId="1257190996" sldId="278"/>
-            <ac:spMk id="4" creationId="{8AD25D58-02AA-1564-F027-437FFF869BD7}"/>
-          </ac:spMkLst>
-        </pc:spChg>
-        <pc:picChg chg="add mod">
-          <ac:chgData name="Thiago Ney Evaristo Rodrigues" userId="fb50eefc1efb6381" providerId="LiveId" clId="{CDB8E314-E490-485E-BFDC-E1775CB67CF5}" dt="2025-08-19T03:34:14.252" v="69" actId="553"/>
-          <ac:picMkLst>
-            <pc:docMk/>
-            <pc:sldMk cId="1257190996" sldId="278"/>
-            <ac:picMk id="5" creationId="{5B8101CD-6D53-25A1-28C6-F77E6413DB5F}"/>
-          </ac:picMkLst>
-        </pc:picChg>
-        <pc:picChg chg="add del mod">
-          <ac:chgData name="Thiago Ney Evaristo Rodrigues" userId="fb50eefc1efb6381" providerId="LiveId" clId="{CDB8E314-E490-485E-BFDC-E1775CB67CF5}" dt="2025-08-19T03:34:11.401" v="63" actId="1076"/>
-          <ac:picMkLst>
-            <pc:docMk/>
-            <pc:sldMk cId="1257190996" sldId="278"/>
-            <ac:picMk id="6" creationId="{07348B68-EF4B-D6A4-96A1-D7EA19793B44}"/>
-          </ac:picMkLst>
-        </pc:picChg>
-        <pc:picChg chg="del">
-          <ac:chgData name="Thiago Ney Evaristo Rodrigues" userId="fb50eefc1efb6381" providerId="LiveId" clId="{CDB8E314-E490-485E-BFDC-E1775CB67CF5}" dt="2025-08-19T03:29:34.050" v="37" actId="478"/>
-          <ac:picMkLst>
-            <pc:docMk/>
-            <pc:sldMk cId="1257190996" sldId="278"/>
-            <ac:picMk id="8" creationId="{D9222C2F-9E2B-5271-8A36-3299248AC23A}"/>
-          </ac:picMkLst>
-        </pc:picChg>
       </pc:sldChg>
       <pc:sldChg chg="addSp delSp modSp add mod modTransition">
         <pc:chgData name="Thiago Ney Evaristo Rodrigues" userId="fb50eefc1efb6381" providerId="LiveId" clId="{CDB8E314-E490-485E-BFDC-E1775CB67CF5}" dt="2025-08-19T23:05:37.440" v="3243"/>
@@ -2356,174 +1133,6 @@
           <pc:docMk/>
           <pc:sldMk cId="2544411512" sldId="278"/>
         </pc:sldMkLst>
-        <pc:spChg chg="add del mod">
-          <ac:chgData name="Thiago Ney Evaristo Rodrigues" userId="fb50eefc1efb6381" providerId="LiveId" clId="{CDB8E314-E490-485E-BFDC-E1775CB67CF5}" dt="2025-08-19T22:52:08.644" v="3057" actId="478"/>
-          <ac:spMkLst>
-            <pc:docMk/>
-            <pc:sldMk cId="2544411512" sldId="278"/>
-            <ac:spMk id="2" creationId="{C886226C-0867-8434-2A47-3BDEFB945D1E}"/>
-          </ac:spMkLst>
-        </pc:spChg>
-        <pc:spChg chg="mod">
-          <ac:chgData name="Thiago Ney Evaristo Rodrigues" userId="fb50eefc1efb6381" providerId="LiveId" clId="{CDB8E314-E490-485E-BFDC-E1775CB67CF5}" dt="2025-08-19T04:19:22.696" v="709"/>
-          <ac:spMkLst>
-            <pc:docMk/>
-            <pc:sldMk cId="2544411512" sldId="278"/>
-            <ac:spMk id="5" creationId="{3FF9E037-1DC9-94FB-0763-7C36CC5D05BE}"/>
-          </ac:spMkLst>
-        </pc:spChg>
-        <pc:spChg chg="add del mod">
-          <ac:chgData name="Thiago Ney Evaristo Rodrigues" userId="fb50eefc1efb6381" providerId="LiveId" clId="{CDB8E314-E490-485E-BFDC-E1775CB67CF5}" dt="2025-08-19T04:24:01.485" v="822" actId="478"/>
-          <ac:spMkLst>
-            <pc:docMk/>
-            <pc:sldMk cId="2544411512" sldId="278"/>
-            <ac:spMk id="6" creationId="{E0599945-B741-4F5D-3604-6F9E66D4B093}"/>
-          </ac:spMkLst>
-        </pc:spChg>
-        <pc:spChg chg="mod">
-          <ac:chgData name="Thiago Ney Evaristo Rodrigues" userId="fb50eefc1efb6381" providerId="LiveId" clId="{CDB8E314-E490-485E-BFDC-E1775CB67CF5}" dt="2025-08-19T04:43:46.791" v="1288" actId="20577"/>
-          <ac:spMkLst>
-            <pc:docMk/>
-            <pc:sldMk cId="2544411512" sldId="278"/>
-            <ac:spMk id="7" creationId="{AE8D1C3E-4548-DB00-1FF2-87FB0D2A6E45}"/>
-          </ac:spMkLst>
-        </pc:spChg>
-        <pc:spChg chg="del mod">
-          <ac:chgData name="Thiago Ney Evaristo Rodrigues" userId="fb50eefc1efb6381" providerId="LiveId" clId="{CDB8E314-E490-485E-BFDC-E1775CB67CF5}" dt="2025-08-19T04:20:29.646" v="733" actId="478"/>
-          <ac:spMkLst>
-            <pc:docMk/>
-            <pc:sldMk cId="2544411512" sldId="278"/>
-            <ac:spMk id="10" creationId="{EE1A33B8-6011-3C18-1429-504029416A3F}"/>
-          </ac:spMkLst>
-        </pc:spChg>
-        <pc:spChg chg="mod">
-          <ac:chgData name="Thiago Ney Evaristo Rodrigues" userId="fb50eefc1efb6381" providerId="LiveId" clId="{CDB8E314-E490-485E-BFDC-E1775CB67CF5}" dt="2025-08-19T04:23:18.779" v="815" actId="207"/>
-          <ac:spMkLst>
-            <pc:docMk/>
-            <pc:sldMk cId="2544411512" sldId="278"/>
-            <ac:spMk id="11" creationId="{9B2D98CE-F03C-792D-5885-D865F85DCC64}"/>
-          </ac:spMkLst>
-        </pc:spChg>
-        <pc:spChg chg="add mod">
-          <ac:chgData name="Thiago Ney Evaristo Rodrigues" userId="fb50eefc1efb6381" providerId="LiveId" clId="{CDB8E314-E490-485E-BFDC-E1775CB67CF5}" dt="2025-08-19T22:51:11.331" v="3041" actId="20577"/>
-          <ac:spMkLst>
-            <pc:docMk/>
-            <pc:sldMk cId="2544411512" sldId="278"/>
-            <ac:spMk id="13" creationId="{97D8539D-8C5B-97C3-49A4-1DCF5C5E6254}"/>
-          </ac:spMkLst>
-        </pc:spChg>
-        <pc:spChg chg="mod">
-          <ac:chgData name="Thiago Ney Evaristo Rodrigues" userId="fb50eefc1efb6381" providerId="LiveId" clId="{CDB8E314-E490-485E-BFDC-E1775CB67CF5}" dt="2025-08-19T04:19:08.715" v="705" actId="2711"/>
-          <ac:spMkLst>
-            <pc:docMk/>
-            <pc:sldMk cId="2544411512" sldId="278"/>
-            <ac:spMk id="15" creationId="{44B92CC4-E84F-B1C8-C3C5-22F5FFFE4F7E}"/>
-          </ac:spMkLst>
-        </pc:spChg>
-        <pc:spChg chg="mod">
-          <ac:chgData name="Thiago Ney Evaristo Rodrigues" userId="fb50eefc1efb6381" providerId="LiveId" clId="{CDB8E314-E490-485E-BFDC-E1775CB67CF5}" dt="2025-08-19T04:27:06.582" v="881" actId="12789"/>
-          <ac:spMkLst>
-            <pc:docMk/>
-            <pc:sldMk cId="2544411512" sldId="278"/>
-            <ac:spMk id="17" creationId="{0A1A0A5E-A152-47FB-9F10-FA9E3B030512}"/>
-          </ac:spMkLst>
-        </pc:spChg>
-        <pc:spChg chg="mod">
-          <ac:chgData name="Thiago Ney Evaristo Rodrigues" userId="fb50eefc1efb6381" providerId="LiveId" clId="{CDB8E314-E490-485E-BFDC-E1775CB67CF5}" dt="2025-08-19T04:27:12.387" v="882" actId="12788"/>
-          <ac:spMkLst>
-            <pc:docMk/>
-            <pc:sldMk cId="2544411512" sldId="278"/>
-            <ac:spMk id="18" creationId="{300688E3-2283-405D-1EBD-03B2DF5C56C1}"/>
-          </ac:spMkLst>
-        </pc:spChg>
-        <pc:spChg chg="mod">
-          <ac:chgData name="Thiago Ney Evaristo Rodrigues" userId="fb50eefc1efb6381" providerId="LiveId" clId="{CDB8E314-E490-485E-BFDC-E1775CB67CF5}" dt="2025-08-19T22:51:37.838" v="3051" actId="1076"/>
-          <ac:spMkLst>
-            <pc:docMk/>
-            <pc:sldMk cId="2544411512" sldId="278"/>
-            <ac:spMk id="20" creationId="{8639397D-525C-B7D9-8A0C-D0996578313A}"/>
-          </ac:spMkLst>
-        </pc:spChg>
-        <pc:grpChg chg="add del mod">
-          <ac:chgData name="Thiago Ney Evaristo Rodrigues" userId="fb50eefc1efb6381" providerId="LiveId" clId="{CDB8E314-E490-485E-BFDC-E1775CB67CF5}" dt="2025-08-19T04:21:54.441" v="800" actId="478"/>
-          <ac:grpSpMkLst>
-            <pc:docMk/>
-            <pc:sldMk cId="2544411512" sldId="278"/>
-            <ac:grpSpMk id="2" creationId="{2FA0766F-3301-7B5B-BA33-3E861D8DBDB2}"/>
-          </ac:grpSpMkLst>
-        </pc:grpChg>
-        <pc:grpChg chg="mod">
-          <ac:chgData name="Thiago Ney Evaristo Rodrigues" userId="fb50eefc1efb6381" providerId="LiveId" clId="{CDB8E314-E490-485E-BFDC-E1775CB67CF5}" dt="2025-08-19T22:52:06.128" v="3056" actId="12788"/>
-          <ac:grpSpMkLst>
-            <pc:docMk/>
-            <pc:sldMk cId="2544411512" sldId="278"/>
-            <ac:grpSpMk id="3" creationId="{42CC9DE2-0B20-F9D4-406B-69433882CAF4}"/>
-          </ac:grpSpMkLst>
-        </pc:grpChg>
-        <pc:grpChg chg="add del mod">
-          <ac:chgData name="Thiago Ney Evaristo Rodrigues" userId="fb50eefc1efb6381" providerId="LiveId" clId="{CDB8E314-E490-485E-BFDC-E1775CB67CF5}" dt="2025-08-19T04:24:02.283" v="823" actId="478"/>
-          <ac:grpSpMkLst>
-            <pc:docMk/>
-            <pc:sldMk cId="2544411512" sldId="278"/>
-            <ac:grpSpMk id="8" creationId="{3F9AB71F-D826-B9D4-401B-8281F06B71C7}"/>
-          </ac:grpSpMkLst>
-        </pc:grpChg>
-        <pc:grpChg chg="del">
-          <ac:chgData name="Thiago Ney Evaristo Rodrigues" userId="fb50eefc1efb6381" providerId="LiveId" clId="{CDB8E314-E490-485E-BFDC-E1775CB67CF5}" dt="2025-08-19T04:19:22.200" v="708" actId="478"/>
-          <ac:grpSpMkLst>
-            <pc:docMk/>
-            <pc:sldMk cId="2544411512" sldId="278"/>
-            <ac:grpSpMk id="16" creationId="{07C218EF-4570-8345-2BC6-D12347F33705}"/>
-          </ac:grpSpMkLst>
-        </pc:grpChg>
-        <pc:grpChg chg="add mod">
-          <ac:chgData name="Thiago Ney Evaristo Rodrigues" userId="fb50eefc1efb6381" providerId="LiveId" clId="{CDB8E314-E490-485E-BFDC-E1775CB67CF5}" dt="2025-08-19T04:27:02.004" v="880" actId="164"/>
-          <ac:grpSpMkLst>
-            <pc:docMk/>
-            <pc:sldMk cId="2544411512" sldId="278"/>
-            <ac:grpSpMk id="19" creationId="{496E543B-A700-7A38-B82F-B2FCE65AE888}"/>
-          </ac:grpSpMkLst>
-        </pc:grpChg>
-        <pc:grpChg chg="add mod">
-          <ac:chgData name="Thiago Ney Evaristo Rodrigues" userId="fb50eefc1efb6381" providerId="LiveId" clId="{CDB8E314-E490-485E-BFDC-E1775CB67CF5}" dt="2025-08-19T04:27:12.387" v="882" actId="12788"/>
-          <ac:grpSpMkLst>
-            <pc:docMk/>
-            <pc:sldMk cId="2544411512" sldId="278"/>
-            <ac:grpSpMk id="22" creationId="{4CC90E34-A0D1-C1EC-CDD8-66145819A2AF}"/>
-          </ac:grpSpMkLst>
-        </pc:grpChg>
-        <pc:picChg chg="mod">
-          <ac:chgData name="Thiago Ney Evaristo Rodrigues" userId="fb50eefc1efb6381" providerId="LiveId" clId="{CDB8E314-E490-485E-BFDC-E1775CB67CF5}" dt="2025-08-19T04:19:22.696" v="709"/>
-          <ac:picMkLst>
-            <pc:docMk/>
-            <pc:sldMk cId="2544411512" sldId="278"/>
-            <ac:picMk id="3" creationId="{C14A4F90-0AB7-9D78-8C17-39CD17C6FFED}"/>
-          </ac:picMkLst>
-        </pc:picChg>
-        <pc:picChg chg="mod">
-          <ac:chgData name="Thiago Ney Evaristo Rodrigues" userId="fb50eefc1efb6381" providerId="LiveId" clId="{CDB8E314-E490-485E-BFDC-E1775CB67CF5}" dt="2025-08-19T04:21:54.858" v="801"/>
-          <ac:picMkLst>
-            <pc:docMk/>
-            <pc:sldMk cId="2544411512" sldId="278"/>
-            <ac:picMk id="12" creationId="{D5C692D1-7067-9D75-10EA-9DCD49F13A05}"/>
-          </ac:picMkLst>
-        </pc:picChg>
-        <pc:picChg chg="mod">
-          <ac:chgData name="Thiago Ney Evaristo Rodrigues" userId="fb50eefc1efb6381" providerId="LiveId" clId="{CDB8E314-E490-485E-BFDC-E1775CB67CF5}" dt="2025-08-19T22:51:33.790" v="3050" actId="1038"/>
-          <ac:picMkLst>
-            <pc:docMk/>
-            <pc:sldMk cId="2544411512" sldId="278"/>
-            <ac:picMk id="21" creationId="{BD481728-67E8-B60B-7112-00164173D4C3}"/>
-          </ac:picMkLst>
-        </pc:picChg>
-        <pc:picChg chg="add del mod">
-          <ac:chgData name="Thiago Ney Evaristo Rodrigues" userId="fb50eefc1efb6381" providerId="LiveId" clId="{CDB8E314-E490-485E-BFDC-E1775CB67CF5}" dt="2025-08-19T04:30:51.453" v="939" actId="21"/>
-          <ac:picMkLst>
-            <pc:docMk/>
-            <pc:sldMk cId="2544411512" sldId="278"/>
-            <ac:picMk id="24" creationId="{79F03EFA-75A3-0428-BC27-72534AAEEA22}"/>
-          </ac:picMkLst>
-        </pc:picChg>
       </pc:sldChg>
       <pc:sldChg chg="addSp delSp modSp add mod replId modTransition">
         <pc:chgData name="Thiago Ney Evaristo Rodrigues" userId="fb50eefc1efb6381" providerId="LiveId" clId="{CDB8E314-E490-485E-BFDC-E1775CB67CF5}" dt="2025-08-19T23:05:37.440" v="3243"/>
@@ -2531,150 +1140,6 @@
           <pc:docMk/>
           <pc:sldMk cId="3228108186" sldId="279"/>
         </pc:sldMkLst>
-        <pc:spChg chg="mod">
-          <ac:chgData name="Thiago Ney Evaristo Rodrigues" userId="fb50eefc1efb6381" providerId="LiveId" clId="{CDB8E314-E490-485E-BFDC-E1775CB67CF5}" dt="2025-08-19T04:23:25.510" v="816" actId="207"/>
-          <ac:spMkLst>
-            <pc:docMk/>
-            <pc:sldMk cId="3228108186" sldId="279"/>
-            <ac:spMk id="5" creationId="{EC80D361-4AEE-8A44-952E-ADA501EAB19A}"/>
-          </ac:spMkLst>
-        </pc:spChg>
-        <pc:spChg chg="mod">
-          <ac:chgData name="Thiago Ney Evaristo Rodrigues" userId="fb50eefc1efb6381" providerId="LiveId" clId="{CDB8E314-E490-485E-BFDC-E1775CB67CF5}" dt="2025-08-19T22:32:41.110" v="2556" actId="20577"/>
-          <ac:spMkLst>
-            <pc:docMk/>
-            <pc:sldMk cId="3228108186" sldId="279"/>
-            <ac:spMk id="7" creationId="{008AB573-A494-6C71-F44F-C8A7548FAE58}"/>
-          </ac:spMkLst>
-        </pc:spChg>
-        <pc:spChg chg="del mod">
-          <ac:chgData name="Thiago Ney Evaristo Rodrigues" userId="fb50eefc1efb6381" providerId="LiveId" clId="{CDB8E314-E490-485E-BFDC-E1775CB67CF5}" dt="2025-08-19T04:23:47.323" v="819" actId="478"/>
-          <ac:spMkLst>
-            <pc:docMk/>
-            <pc:sldMk cId="3228108186" sldId="279"/>
-            <ac:spMk id="10" creationId="{11FBCB81-34CB-3134-5406-F6530B5C4878}"/>
-          </ac:spMkLst>
-        </pc:spChg>
-        <pc:spChg chg="mod">
-          <ac:chgData name="Thiago Ney Evaristo Rodrigues" userId="fb50eefc1efb6381" providerId="LiveId" clId="{CDB8E314-E490-485E-BFDC-E1775CB67CF5}" dt="2025-08-19T14:47:18.920" v="1446" actId="20577"/>
-          <ac:spMkLst>
-            <pc:docMk/>
-            <pc:sldMk cId="3228108186" sldId="279"/>
-            <ac:spMk id="13" creationId="{CD4F1C54-EB4E-858E-87FD-63C63354B4E7}"/>
-          </ac:spMkLst>
-        </pc:spChg>
-        <pc:spChg chg="del mod">
-          <ac:chgData name="Thiago Ney Evaristo Rodrigues" userId="fb50eefc1efb6381" providerId="LiveId" clId="{CDB8E314-E490-485E-BFDC-E1775CB67CF5}" dt="2025-08-19T04:34:57.765" v="975" actId="478"/>
-          <ac:spMkLst>
-            <pc:docMk/>
-            <pc:sldMk cId="3228108186" sldId="279"/>
-            <ac:spMk id="17" creationId="{368E4E4F-6EF0-4CD9-8BFD-5A1D6FAEC71D}"/>
-          </ac:spMkLst>
-        </pc:spChg>
-        <pc:spChg chg="del mod">
-          <ac:chgData name="Thiago Ney Evaristo Rodrigues" userId="fb50eefc1efb6381" providerId="LiveId" clId="{CDB8E314-E490-485E-BFDC-E1775CB67CF5}" dt="2025-08-19T04:34:59.881" v="976" actId="478"/>
-          <ac:spMkLst>
-            <pc:docMk/>
-            <pc:sldMk cId="3228108186" sldId="279"/>
-            <ac:spMk id="18" creationId="{9CA4E117-FE36-3724-9D74-CBB381E89E65}"/>
-          </ac:spMkLst>
-        </pc:spChg>
-        <pc:spChg chg="mod">
-          <ac:chgData name="Thiago Ney Evaristo Rodrigues" userId="fb50eefc1efb6381" providerId="LiveId" clId="{CDB8E314-E490-485E-BFDC-E1775CB67CF5}" dt="2025-08-19T14:47:21.698" v="1448" actId="20577"/>
-          <ac:spMkLst>
-            <pc:docMk/>
-            <pc:sldMk cId="3228108186" sldId="279"/>
-            <ac:spMk id="19" creationId="{8EB3840C-1EF8-00A9-838F-E870E2E79EE6}"/>
-          </ac:spMkLst>
-        </pc:spChg>
-        <pc:spChg chg="add mod">
-          <ac:chgData name="Thiago Ney Evaristo Rodrigues" userId="fb50eefc1efb6381" providerId="LiveId" clId="{CDB8E314-E490-485E-BFDC-E1775CB67CF5}" dt="2025-08-19T22:32:28.007" v="2545" actId="20577"/>
-          <ac:spMkLst>
-            <pc:docMk/>
-            <pc:sldMk cId="3228108186" sldId="279"/>
-            <ac:spMk id="21" creationId="{CC051EE1-FA57-586B-12BB-433E4E862C94}"/>
-          </ac:spMkLst>
-        </pc:spChg>
-        <pc:grpChg chg="add del mod">
-          <ac:chgData name="Thiago Ney Evaristo Rodrigues" userId="fb50eefc1efb6381" providerId="LiveId" clId="{CDB8E314-E490-485E-BFDC-E1775CB67CF5}" dt="2025-08-19T04:23:29.890" v="817" actId="478"/>
-          <ac:grpSpMkLst>
-            <pc:docMk/>
-            <pc:sldMk cId="3228108186" sldId="279"/>
-            <ac:grpSpMk id="2" creationId="{629313AC-0762-BA21-C3D7-B1503688A2A8}"/>
-          </ac:grpSpMkLst>
-        </pc:grpChg>
-        <pc:grpChg chg="add mod">
-          <ac:chgData name="Thiago Ney Evaristo Rodrigues" userId="fb50eefc1efb6381" providerId="LiveId" clId="{CDB8E314-E490-485E-BFDC-E1775CB67CF5}" dt="2025-08-19T04:27:20.881" v="883" actId="164"/>
-          <ac:grpSpMkLst>
-            <pc:docMk/>
-            <pc:sldMk cId="3228108186" sldId="279"/>
-            <ac:grpSpMk id="6" creationId="{979D6555-480E-2AAA-9D91-5FC4CD06BE95}"/>
-          </ac:grpSpMkLst>
-        </pc:grpChg>
-        <pc:grpChg chg="mod">
-          <ac:chgData name="Thiago Ney Evaristo Rodrigues" userId="fb50eefc1efb6381" providerId="LiveId" clId="{CDB8E314-E490-485E-BFDC-E1775CB67CF5}" dt="2025-08-19T04:23:44.367" v="818"/>
-          <ac:grpSpMkLst>
-            <pc:docMk/>
-            <pc:sldMk cId="3228108186" sldId="279"/>
-            <ac:grpSpMk id="8" creationId="{DCCC2655-D727-88C2-8C8F-074BF32BB09F}"/>
-          </ac:grpSpMkLst>
-        </pc:grpChg>
-        <pc:grpChg chg="mod">
-          <ac:chgData name="Thiago Ney Evaristo Rodrigues" userId="fb50eefc1efb6381" providerId="LiveId" clId="{CDB8E314-E490-485E-BFDC-E1775CB67CF5}" dt="2025-08-19T04:23:44.367" v="818"/>
-          <ac:grpSpMkLst>
-            <pc:docMk/>
-            <pc:sldMk cId="3228108186" sldId="279"/>
-            <ac:grpSpMk id="11" creationId="{E5596FDF-AABC-7FDF-4E9F-9B6D9523A889}"/>
-          </ac:grpSpMkLst>
-        </pc:grpChg>
-        <pc:grpChg chg="del">
-          <ac:chgData name="Thiago Ney Evaristo Rodrigues" userId="fb50eefc1efb6381" providerId="LiveId" clId="{CDB8E314-E490-485E-BFDC-E1775CB67CF5}" dt="2025-08-19T04:19:17.323" v="706" actId="478"/>
-          <ac:grpSpMkLst>
-            <pc:docMk/>
-            <pc:sldMk cId="3228108186" sldId="279"/>
-            <ac:grpSpMk id="16" creationId="{42B9BC29-8D2A-17E7-1CEB-DA1F8B8BC204}"/>
-          </ac:grpSpMkLst>
-        </pc:grpChg>
-        <pc:grpChg chg="add mod">
-          <ac:chgData name="Thiago Ney Evaristo Rodrigues" userId="fb50eefc1efb6381" providerId="LiveId" clId="{CDB8E314-E490-485E-BFDC-E1775CB67CF5}" dt="2025-08-19T04:27:38.195" v="887" actId="12788"/>
-          <ac:grpSpMkLst>
-            <pc:docMk/>
-            <pc:sldMk cId="3228108186" sldId="279"/>
-            <ac:grpSpMk id="22" creationId="{1F22117F-A1B8-ACD1-2B0E-0F17BA15D2F1}"/>
-          </ac:grpSpMkLst>
-        </pc:grpChg>
-        <pc:picChg chg="mod">
-          <ac:chgData name="Thiago Ney Evaristo Rodrigues" userId="fb50eefc1efb6381" providerId="LiveId" clId="{CDB8E314-E490-485E-BFDC-E1775CB67CF5}" dt="2025-08-19T04:19:18.504" v="707"/>
-          <ac:picMkLst>
-            <pc:docMk/>
-            <pc:sldMk cId="3228108186" sldId="279"/>
-            <ac:picMk id="3" creationId="{AAD9031B-A2B4-489A-C338-1BF7852E3186}"/>
-          </ac:picMkLst>
-        </pc:picChg>
-        <pc:picChg chg="mod">
-          <ac:chgData name="Thiago Ney Evaristo Rodrigues" userId="fb50eefc1efb6381" providerId="LiveId" clId="{CDB8E314-E490-485E-BFDC-E1775CB67CF5}" dt="2025-08-19T04:23:44.367" v="818"/>
-          <ac:picMkLst>
-            <pc:docMk/>
-            <pc:sldMk cId="3228108186" sldId="279"/>
-            <ac:picMk id="12" creationId="{9D4C41C5-94E9-86D0-09EE-1C7192F18941}"/>
-          </ac:picMkLst>
-        </pc:picChg>
-        <pc:picChg chg="mod">
-          <ac:chgData name="Thiago Ney Evaristo Rodrigues" userId="fb50eefc1efb6381" providerId="LiveId" clId="{CDB8E314-E490-485E-BFDC-E1775CB67CF5}" dt="2025-08-19T04:23:44.367" v="818"/>
-          <ac:picMkLst>
-            <pc:docMk/>
-            <pc:sldMk cId="3228108186" sldId="279"/>
-            <ac:picMk id="20" creationId="{69C4A23B-637B-8E17-6B0C-DA7C125BD840}"/>
-          </ac:picMkLst>
-        </pc:picChg>
-        <pc:picChg chg="add del mod">
-          <ac:chgData name="Thiago Ney Evaristo Rodrigues" userId="fb50eefc1efb6381" providerId="LiveId" clId="{CDB8E314-E490-485E-BFDC-E1775CB67CF5}" dt="2025-08-19T04:31:03.159" v="942" actId="478"/>
-          <ac:picMkLst>
-            <pc:docMk/>
-            <pc:sldMk cId="3228108186" sldId="279"/>
-            <ac:picMk id="24" creationId="{79F03EFA-75A3-0428-BC27-72534AAEEA22}"/>
-          </ac:picMkLst>
-        </pc:picChg>
       </pc:sldChg>
       <pc:sldChg chg="addSp delSp modSp add mod replId modTransition">
         <pc:chgData name="Thiago Ney Evaristo Rodrigues" userId="fb50eefc1efb6381" providerId="LiveId" clId="{CDB8E314-E490-485E-BFDC-E1775CB67CF5}" dt="2025-08-19T23:05:37.440" v="3243"/>
@@ -2682,54 +1147,6 @@
           <pc:docMk/>
           <pc:sldMk cId="3445230944" sldId="280"/>
         </pc:sldMkLst>
-        <pc:spChg chg="add del mod">
-          <ac:chgData name="Thiago Ney Evaristo Rodrigues" userId="fb50eefc1efb6381" providerId="LiveId" clId="{CDB8E314-E490-485E-BFDC-E1775CB67CF5}" dt="2025-08-19T23:04:27.872" v="3241" actId="478"/>
-          <ac:spMkLst>
-            <pc:docMk/>
-            <pc:sldMk cId="3445230944" sldId="280"/>
-            <ac:spMk id="2" creationId="{3343895D-1366-680B-5B82-5718953C0EB7}"/>
-          </ac:spMkLst>
-        </pc:spChg>
-        <pc:spChg chg="mod">
-          <ac:chgData name="Thiago Ney Evaristo Rodrigues" userId="fb50eefc1efb6381" providerId="LiveId" clId="{CDB8E314-E490-485E-BFDC-E1775CB67CF5}" dt="2025-08-19T04:14:49.587" v="649" actId="20577"/>
-          <ac:spMkLst>
-            <pc:docMk/>
-            <pc:sldMk cId="3445230944" sldId="280"/>
-            <ac:spMk id="7" creationId="{59DD5CC0-4B25-813C-E288-C750B90C0B80}"/>
-          </ac:spMkLst>
-        </pc:spChg>
-        <pc:spChg chg="mod">
-          <ac:chgData name="Thiago Ney Evaristo Rodrigues" userId="fb50eefc1efb6381" providerId="LiveId" clId="{CDB8E314-E490-485E-BFDC-E1775CB67CF5}" dt="2025-08-19T23:04:23.687" v="3240" actId="12789"/>
-          <ac:spMkLst>
-            <pc:docMk/>
-            <pc:sldMk cId="3445230944" sldId="280"/>
-            <ac:spMk id="10" creationId="{B1A2B9F6-6CEC-8F22-FD63-10C3021FBABE}"/>
-          </ac:spMkLst>
-        </pc:spChg>
-        <pc:spChg chg="del mod">
-          <ac:chgData name="Thiago Ney Evaristo Rodrigues" userId="fb50eefc1efb6381" providerId="LiveId" clId="{CDB8E314-E490-485E-BFDC-E1775CB67CF5}" dt="2025-08-19T23:04:28.620" v="3242" actId="478"/>
-          <ac:spMkLst>
-            <pc:docMk/>
-            <pc:sldMk cId="3445230944" sldId="280"/>
-            <ac:spMk id="17" creationId="{317A0BCB-676E-0801-4354-6FAFDD922449}"/>
-          </ac:spMkLst>
-        </pc:spChg>
-        <pc:spChg chg="del">
-          <ac:chgData name="Thiago Ney Evaristo Rodrigues" userId="fb50eefc1efb6381" providerId="LiveId" clId="{CDB8E314-E490-485E-BFDC-E1775CB67CF5}" dt="2025-08-19T04:17:06.818" v="682" actId="478"/>
-          <ac:spMkLst>
-            <pc:docMk/>
-            <pc:sldMk cId="3445230944" sldId="280"/>
-            <ac:spMk id="18" creationId="{7F1ACB93-8EC5-F77A-C9FA-0F165ED15C51}"/>
-          </ac:spMkLst>
-        </pc:spChg>
-        <pc:grpChg chg="del">
-          <ac:chgData name="Thiago Ney Evaristo Rodrigues" userId="fb50eefc1efb6381" providerId="LiveId" clId="{CDB8E314-E490-485E-BFDC-E1775CB67CF5}" dt="2025-08-19T04:17:03.914" v="681" actId="478"/>
-          <ac:grpSpMkLst>
-            <pc:docMk/>
-            <pc:sldMk cId="3445230944" sldId="280"/>
-            <ac:grpSpMk id="16" creationId="{50282425-3D3A-54FD-CAD2-F33C8925F2D0}"/>
-          </ac:grpSpMkLst>
-        </pc:grpChg>
       </pc:sldChg>
       <pc:sldChg chg="addSp delSp modSp add mod replId modTransition">
         <pc:chgData name="Thiago Ney Evaristo Rodrigues" userId="fb50eefc1efb6381" providerId="LiveId" clId="{CDB8E314-E490-485E-BFDC-E1775CB67CF5}" dt="2025-08-19T23:05:37.440" v="3243"/>
@@ -2737,54 +1154,6 @@
           <pc:docMk/>
           <pc:sldMk cId="4029257523" sldId="281"/>
         </pc:sldMkLst>
-        <pc:spChg chg="add del mod">
-          <ac:chgData name="Thiago Ney Evaristo Rodrigues" userId="fb50eefc1efb6381" providerId="LiveId" clId="{CDB8E314-E490-485E-BFDC-E1775CB67CF5}" dt="2025-08-19T04:27:51.910" v="891" actId="478"/>
-          <ac:spMkLst>
-            <pc:docMk/>
-            <pc:sldMk cId="4029257523" sldId="281"/>
-            <ac:spMk id="2" creationId="{C809BC3A-ABFB-F6F4-DDF2-CE62780D5D1C}"/>
-          </ac:spMkLst>
-        </pc:spChg>
-        <pc:spChg chg="mod">
-          <ac:chgData name="Thiago Ney Evaristo Rodrigues" userId="fb50eefc1efb6381" providerId="LiveId" clId="{CDB8E314-E490-485E-BFDC-E1775CB67CF5}" dt="2025-08-19T04:15:10.097" v="660" actId="20577"/>
-          <ac:spMkLst>
-            <pc:docMk/>
-            <pc:sldMk cId="4029257523" sldId="281"/>
-            <ac:spMk id="7" creationId="{385D133D-6F74-2BFE-42F2-58078ACD2920}"/>
-          </ac:spMkLst>
-        </pc:spChg>
-        <pc:spChg chg="add del mod">
-          <ac:chgData name="Thiago Ney Evaristo Rodrigues" userId="fb50eefc1efb6381" providerId="LiveId" clId="{CDB8E314-E490-485E-BFDC-E1775CB67CF5}" dt="2025-08-19T15:21:09.185" v="1837" actId="255"/>
-          <ac:spMkLst>
-            <pc:docMk/>
-            <pc:sldMk cId="4029257523" sldId="281"/>
-            <ac:spMk id="10" creationId="{E57875DD-505E-29DB-9373-561214D2BBDB}"/>
-          </ac:spMkLst>
-        </pc:spChg>
-        <pc:spChg chg="add del mod">
-          <ac:chgData name="Thiago Ney Evaristo Rodrigues" userId="fb50eefc1efb6381" providerId="LiveId" clId="{CDB8E314-E490-485E-BFDC-E1775CB67CF5}" dt="2025-08-19T04:16:30.314" v="677" actId="478"/>
-          <ac:spMkLst>
-            <pc:docMk/>
-            <pc:sldMk cId="4029257523" sldId="281"/>
-            <ac:spMk id="17" creationId="{C0473808-03BB-F7A5-184D-34ADB7AF37F9}"/>
-          </ac:spMkLst>
-        </pc:spChg>
-        <pc:spChg chg="del">
-          <ac:chgData name="Thiago Ney Evaristo Rodrigues" userId="fb50eefc1efb6381" providerId="LiveId" clId="{CDB8E314-E490-485E-BFDC-E1775CB67CF5}" dt="2025-08-19T04:15:23.711" v="666" actId="478"/>
-          <ac:spMkLst>
-            <pc:docMk/>
-            <pc:sldMk cId="4029257523" sldId="281"/>
-            <ac:spMk id="18" creationId="{53511AE0-D461-0C21-38EC-B0E3E7704124}"/>
-          </ac:spMkLst>
-        </pc:spChg>
-        <pc:grpChg chg="del">
-          <ac:chgData name="Thiago Ney Evaristo Rodrigues" userId="fb50eefc1efb6381" providerId="LiveId" clId="{CDB8E314-E490-485E-BFDC-E1775CB67CF5}" dt="2025-08-19T04:15:12.947" v="661" actId="478"/>
-          <ac:grpSpMkLst>
-            <pc:docMk/>
-            <pc:sldMk cId="4029257523" sldId="281"/>
-            <ac:grpSpMk id="16" creationId="{06612247-A763-CDA6-362C-3849C6065687}"/>
-          </ac:grpSpMkLst>
-        </pc:grpChg>
       </pc:sldChg>
       <pc:sldChg chg="addSp delSp modSp add del mod">
         <pc:chgData name="Thiago Ney Evaristo Rodrigues" userId="fb50eefc1efb6381" providerId="LiveId" clId="{CDB8E314-E490-485E-BFDC-E1775CB67CF5}" dt="2025-08-19T22:25:21.993" v="2481" actId="47"/>
@@ -2792,110 +1161,6 @@
           <pc:docMk/>
           <pc:sldMk cId="2982126972" sldId="282"/>
         </pc:sldMkLst>
-        <pc:spChg chg="add mod">
-          <ac:chgData name="Thiago Ney Evaristo Rodrigues" userId="fb50eefc1efb6381" providerId="LiveId" clId="{CDB8E314-E490-485E-BFDC-E1775CB67CF5}" dt="2025-08-19T15:23:30.887" v="1843" actId="12789"/>
-          <ac:spMkLst>
-            <pc:docMk/>
-            <pc:sldMk cId="2982126972" sldId="282"/>
-            <ac:spMk id="3" creationId="{407E9802-3FD9-54FC-510E-0CA638C3F605}"/>
-          </ac:spMkLst>
-        </pc:spChg>
-        <pc:spChg chg="add mod">
-          <ac:chgData name="Thiago Ney Evaristo Rodrigues" userId="fb50eefc1efb6381" providerId="LiveId" clId="{CDB8E314-E490-485E-BFDC-E1775CB67CF5}" dt="2025-08-19T14:48:33.582" v="1456"/>
-          <ac:spMkLst>
-            <pc:docMk/>
-            <pc:sldMk cId="2982126972" sldId="282"/>
-            <ac:spMk id="5" creationId="{B24625BF-FD76-F926-E82C-0CDCFA5E978C}"/>
-          </ac:spMkLst>
-        </pc:spChg>
-        <pc:spChg chg="add del mod">
-          <ac:chgData name="Thiago Ney Evaristo Rodrigues" userId="fb50eefc1efb6381" providerId="LiveId" clId="{CDB8E314-E490-485E-BFDC-E1775CB67CF5}" dt="2025-08-19T21:39:54.458" v="1847" actId="478"/>
-          <ac:spMkLst>
-            <pc:docMk/>
-            <pc:sldMk cId="2982126972" sldId="282"/>
-            <ac:spMk id="6" creationId="{CFDCEEEF-7C3F-86D3-3AD2-358CC375FE89}"/>
-          </ac:spMkLst>
-        </pc:spChg>
-        <pc:spChg chg="mod">
-          <ac:chgData name="Thiago Ney Evaristo Rodrigues" userId="fb50eefc1efb6381" providerId="LiveId" clId="{CDB8E314-E490-485E-BFDC-E1775CB67CF5}" dt="2025-08-19T04:43:52.592" v="1297" actId="20577"/>
-          <ac:spMkLst>
-            <pc:docMk/>
-            <pc:sldMk cId="2982126972" sldId="282"/>
-            <ac:spMk id="7" creationId="{0725485C-BB29-24B5-25F9-D774D71EA915}"/>
-          </ac:spMkLst>
-        </pc:spChg>
-        <pc:spChg chg="del mod topLvl">
-          <ac:chgData name="Thiago Ney Evaristo Rodrigues" userId="fb50eefc1efb6381" providerId="LiveId" clId="{CDB8E314-E490-485E-BFDC-E1775CB67CF5}" dt="2025-08-19T04:33:25.464" v="948" actId="478"/>
-          <ac:spMkLst>
-            <pc:docMk/>
-            <pc:sldMk cId="2982126972" sldId="282"/>
-            <ac:spMk id="13" creationId="{742ED9FB-05D5-9EB2-520B-B7CF88849A47}"/>
-          </ac:spMkLst>
-        </pc:spChg>
-        <pc:spChg chg="del">
-          <ac:chgData name="Thiago Ney Evaristo Rodrigues" userId="fb50eefc1efb6381" providerId="LiveId" clId="{CDB8E314-E490-485E-BFDC-E1775CB67CF5}" dt="2025-08-19T04:34:06.463" v="954" actId="478"/>
-          <ac:spMkLst>
-            <pc:docMk/>
-            <pc:sldMk cId="2982126972" sldId="282"/>
-            <ac:spMk id="17" creationId="{503C09D3-1409-DE05-9882-8F217457AB0B}"/>
-          </ac:spMkLst>
-        </pc:spChg>
-        <pc:spChg chg="del">
-          <ac:chgData name="Thiago Ney Evaristo Rodrigues" userId="fb50eefc1efb6381" providerId="LiveId" clId="{CDB8E314-E490-485E-BFDC-E1775CB67CF5}" dt="2025-08-19T04:34:06.463" v="954" actId="478"/>
-          <ac:spMkLst>
-            <pc:docMk/>
-            <pc:sldMk cId="2982126972" sldId="282"/>
-            <ac:spMk id="18" creationId="{6AA8CF76-925F-9909-77EF-C4396B9132A2}"/>
-          </ac:spMkLst>
-        </pc:spChg>
-        <pc:spChg chg="mod topLvl">
-          <ac:chgData name="Thiago Ney Evaristo Rodrigues" userId="fb50eefc1efb6381" providerId="LiveId" clId="{CDB8E314-E490-485E-BFDC-E1775CB67CF5}" dt="2025-08-19T15:23:30.887" v="1843" actId="12789"/>
-          <ac:spMkLst>
-            <pc:docMk/>
-            <pc:sldMk cId="2982126972" sldId="282"/>
-            <ac:spMk id="20" creationId="{70CC9BEB-C56F-63F0-0DDD-584B856FBD42}"/>
-          </ac:spMkLst>
-        </pc:spChg>
-        <pc:grpChg chg="add del mod">
-          <ac:chgData name="Thiago Ney Evaristo Rodrigues" userId="fb50eefc1efb6381" providerId="LiveId" clId="{CDB8E314-E490-485E-BFDC-E1775CB67CF5}" dt="2025-08-19T22:25:09.551" v="2479" actId="21"/>
-          <ac:grpSpMkLst>
-            <pc:docMk/>
-            <pc:sldMk cId="2982126972" sldId="282"/>
-            <ac:grpSpMk id="2" creationId="{CE534E28-6C28-9FF8-769F-520E8B11FCAF}"/>
-          </ac:grpSpMkLst>
-        </pc:grpChg>
-        <pc:grpChg chg="del mod topLvl">
-          <ac:chgData name="Thiago Ney Evaristo Rodrigues" userId="fb50eefc1efb6381" providerId="LiveId" clId="{CDB8E314-E490-485E-BFDC-E1775CB67CF5}" dt="2025-08-19T14:35:04.833" v="1309" actId="165"/>
-          <ac:grpSpMkLst>
-            <pc:docMk/>
-            <pc:sldMk cId="2982126972" sldId="282"/>
-            <ac:grpSpMk id="19" creationId="{08E84F2F-927E-9BF1-B9F1-D4906549DEDC}"/>
-          </ac:grpSpMkLst>
-        </pc:grpChg>
-        <pc:grpChg chg="del">
-          <ac:chgData name="Thiago Ney Evaristo Rodrigues" userId="fb50eefc1efb6381" providerId="LiveId" clId="{CDB8E314-E490-485E-BFDC-E1775CB67CF5}" dt="2025-08-19T04:33:19.014" v="947" actId="165"/>
-          <ac:grpSpMkLst>
-            <pc:docMk/>
-            <pc:sldMk cId="2982126972" sldId="282"/>
-            <ac:grpSpMk id="22" creationId="{3A7D247D-40D8-36B3-6C5F-4AFB2C3D32B1}"/>
-          </ac:grpSpMkLst>
-        </pc:grpChg>
-        <pc:picChg chg="del mod topLvl">
-          <ac:chgData name="Thiago Ney Evaristo Rodrigues" userId="fb50eefc1efb6381" providerId="LiveId" clId="{CDB8E314-E490-485E-BFDC-E1775CB67CF5}" dt="2025-08-19T14:35:08.166" v="1310" actId="478"/>
-          <ac:picMkLst>
-            <pc:docMk/>
-            <pc:sldMk cId="2982126972" sldId="282"/>
-            <ac:picMk id="21" creationId="{ED7F1543-F828-3207-04CA-C414949E5B3E}"/>
-          </ac:picMkLst>
-        </pc:picChg>
-        <pc:picChg chg="add mod">
-          <ac:chgData name="Thiago Ney Evaristo Rodrigues" userId="fb50eefc1efb6381" providerId="LiveId" clId="{CDB8E314-E490-485E-BFDC-E1775CB67CF5}" dt="2025-08-19T15:23:30.887" v="1843" actId="12789"/>
-          <ac:picMkLst>
-            <pc:docMk/>
-            <pc:sldMk cId="2982126972" sldId="282"/>
-            <ac:picMk id="1026" creationId="{CAA76FF2-DFD6-5C25-38BB-DA445E8DE0FC}"/>
-          </ac:picMkLst>
-        </pc:picChg>
       </pc:sldChg>
       <pc:sldChg chg="delSp add del mod">
         <pc:chgData name="Thiago Ney Evaristo Rodrigues" userId="fb50eefc1efb6381" providerId="LiveId" clId="{CDB8E314-E490-485E-BFDC-E1775CB67CF5}" dt="2025-08-19T22:32:08.828" v="2539" actId="47"/>
@@ -2903,14 +1168,6 @@
           <pc:docMk/>
           <pc:sldMk cId="961217323" sldId="283"/>
         </pc:sldMkLst>
-        <pc:spChg chg="del">
-          <ac:chgData name="Thiago Ney Evaristo Rodrigues" userId="fb50eefc1efb6381" providerId="LiveId" clId="{CDB8E314-E490-485E-BFDC-E1775CB67CF5}" dt="2025-08-19T14:58:01.170" v="1717" actId="478"/>
-          <ac:spMkLst>
-            <pc:docMk/>
-            <pc:sldMk cId="961217323" sldId="283"/>
-            <ac:spMk id="22" creationId="{C6F9B5BD-CAB5-7B8F-74E9-4F87260B3E67}"/>
-          </ac:spMkLst>
-        </pc:spChg>
       </pc:sldChg>
       <pc:sldChg chg="addSp delSp modSp add mod modTransition">
         <pc:chgData name="Thiago Ney Evaristo Rodrigues" userId="fb50eefc1efb6381" providerId="LiveId" clId="{CDB8E314-E490-485E-BFDC-E1775CB67CF5}" dt="2025-08-19T23:05:37.440" v="3243"/>
@@ -2918,150 +1175,6 @@
           <pc:docMk/>
           <pc:sldMk cId="3092909903" sldId="284"/>
         </pc:sldMkLst>
-        <pc:spChg chg="add del mod">
-          <ac:chgData name="Thiago Ney Evaristo Rodrigues" userId="fb50eefc1efb6381" providerId="LiveId" clId="{CDB8E314-E490-485E-BFDC-E1775CB67CF5}" dt="2025-08-19T15:06:32.797" v="1770" actId="478"/>
-          <ac:spMkLst>
-            <pc:docMk/>
-            <pc:sldMk cId="3092909903" sldId="284"/>
-            <ac:spMk id="3" creationId="{246B7F1A-A6EF-7F77-9393-A5D32E9CDFE9}"/>
-          </ac:spMkLst>
-        </pc:spChg>
-        <pc:spChg chg="add del mod">
-          <ac:chgData name="Thiago Ney Evaristo Rodrigues" userId="fb50eefc1efb6381" providerId="LiveId" clId="{CDB8E314-E490-485E-BFDC-E1775CB67CF5}" dt="2025-08-19T15:06:31.764" v="1769" actId="478"/>
-          <ac:spMkLst>
-            <pc:docMk/>
-            <pc:sldMk cId="3092909903" sldId="284"/>
-            <ac:spMk id="5" creationId="{901071D7-D855-3483-869D-3CA3C073B09A}"/>
-          </ac:spMkLst>
-        </pc:spChg>
-        <pc:spChg chg="add">
-          <ac:chgData name="Thiago Ney Evaristo Rodrigues" userId="fb50eefc1efb6381" providerId="LiveId" clId="{CDB8E314-E490-485E-BFDC-E1775CB67CF5}" dt="2025-08-19T15:10:13.039" v="1771"/>
-          <ac:spMkLst>
-            <pc:docMk/>
-            <pc:sldMk cId="3092909903" sldId="284"/>
-            <ac:spMk id="6" creationId="{9F90CBD8-B658-12F9-65C8-F117EEA219D9}"/>
-          </ac:spMkLst>
-        </pc:spChg>
-        <pc:spChg chg="mod">
-          <ac:chgData name="Thiago Ney Evaristo Rodrigues" userId="fb50eefc1efb6381" providerId="LiveId" clId="{CDB8E314-E490-485E-BFDC-E1775CB67CF5}" dt="2025-08-19T14:54:00.118" v="1699" actId="20577"/>
-          <ac:spMkLst>
-            <pc:docMk/>
-            <pc:sldMk cId="3092909903" sldId="284"/>
-            <ac:spMk id="7" creationId="{B68B0392-36CF-2CC5-9D75-A8875FA8CEFE}"/>
-          </ac:spMkLst>
-        </pc:spChg>
-        <pc:spChg chg="mod topLvl">
-          <ac:chgData name="Thiago Ney Evaristo Rodrigues" userId="fb50eefc1efb6381" providerId="LiveId" clId="{CDB8E314-E490-485E-BFDC-E1775CB67CF5}" dt="2025-08-19T15:19:57.859" v="1824" actId="12789"/>
-          <ac:spMkLst>
-            <pc:docMk/>
-            <pc:sldMk cId="3092909903" sldId="284"/>
-            <ac:spMk id="8" creationId="{8219161B-33CE-6FF6-FEDC-91E07D631557}"/>
-          </ac:spMkLst>
-        </pc:spChg>
-        <pc:spChg chg="add del mod">
-          <ac:chgData name="Thiago Ney Evaristo Rodrigues" userId="fb50eefc1efb6381" providerId="LiveId" clId="{CDB8E314-E490-485E-BFDC-E1775CB67CF5}" dt="2025-08-19T15:13:05.332" v="1802" actId="478"/>
-          <ac:spMkLst>
-            <pc:docMk/>
-            <pc:sldMk cId="3092909903" sldId="284"/>
-            <ac:spMk id="12" creationId="{33A5015D-EBD3-E2E0-9DDD-D7F702CBD14B}"/>
-          </ac:spMkLst>
-        </pc:spChg>
-        <pc:spChg chg="add del mod">
-          <ac:chgData name="Thiago Ney Evaristo Rodrigues" userId="fb50eefc1efb6381" providerId="LiveId" clId="{CDB8E314-E490-485E-BFDC-E1775CB67CF5}" dt="2025-08-19T15:13:06.601" v="1803" actId="478"/>
-          <ac:spMkLst>
-            <pc:docMk/>
-            <pc:sldMk cId="3092909903" sldId="284"/>
-            <ac:spMk id="13" creationId="{D9EA7569-F8D2-F437-3C88-1D3B5B7D70C2}"/>
-          </ac:spMkLst>
-        </pc:spChg>
-        <pc:spChg chg="add del mod">
-          <ac:chgData name="Thiago Ney Evaristo Rodrigues" userId="fb50eefc1efb6381" providerId="LiveId" clId="{CDB8E314-E490-485E-BFDC-E1775CB67CF5}" dt="2025-08-19T15:14:06.032" v="1813" actId="478"/>
-          <ac:spMkLst>
-            <pc:docMk/>
-            <pc:sldMk cId="3092909903" sldId="284"/>
-            <ac:spMk id="16" creationId="{F677DFCF-DC4A-823F-0100-F14E6638DF8D}"/>
-          </ac:spMkLst>
-        </pc:spChg>
-        <pc:spChg chg="mod topLvl">
-          <ac:chgData name="Thiago Ney Evaristo Rodrigues" userId="fb50eefc1efb6381" providerId="LiveId" clId="{CDB8E314-E490-485E-BFDC-E1775CB67CF5}" dt="2025-08-19T15:19:53.793" v="1823" actId="164"/>
-          <ac:spMkLst>
-            <pc:docMk/>
-            <pc:sldMk cId="3092909903" sldId="284"/>
-            <ac:spMk id="20" creationId="{5A366956-6BDB-F479-4211-A3DC5BE75621}"/>
-          </ac:spMkLst>
-        </pc:spChg>
-        <pc:grpChg chg="add del mod">
-          <ac:chgData name="Thiago Ney Evaristo Rodrigues" userId="fb50eefc1efb6381" providerId="LiveId" clId="{CDB8E314-E490-485E-BFDC-E1775CB67CF5}" dt="2025-08-19T15:10:25.951" v="1775" actId="165"/>
-          <ac:grpSpMkLst>
-            <pc:docMk/>
-            <pc:sldMk cId="3092909903" sldId="284"/>
-            <ac:grpSpMk id="2" creationId="{D81EBAE3-E532-1575-D1B3-CC480BF1CF31}"/>
-          </ac:grpSpMkLst>
-        </pc:grpChg>
-        <pc:grpChg chg="add del mod">
-          <ac:chgData name="Thiago Ney Evaristo Rodrigues" userId="fb50eefc1efb6381" providerId="LiveId" clId="{CDB8E314-E490-485E-BFDC-E1775CB67CF5}" dt="2025-08-19T15:11:07.604" v="1785" actId="165"/>
-          <ac:grpSpMkLst>
-            <pc:docMk/>
-            <pc:sldMk cId="3092909903" sldId="284"/>
-            <ac:grpSpMk id="11" creationId="{DDD4EB5F-652E-CF98-94D9-139AABA36A56}"/>
-          </ac:grpSpMkLst>
-        </pc:grpChg>
-        <pc:grpChg chg="add del mod topLvl">
-          <ac:chgData name="Thiago Ney Evaristo Rodrigues" userId="fb50eefc1efb6381" providerId="LiveId" clId="{CDB8E314-E490-485E-BFDC-E1775CB67CF5}" dt="2025-08-19T15:19:43.280" v="1821" actId="165"/>
-          <ac:grpSpMkLst>
-            <pc:docMk/>
-            <pc:sldMk cId="3092909903" sldId="284"/>
-            <ac:grpSpMk id="14" creationId="{03062B31-5479-EF5F-54DE-3DDBCC3E1652}"/>
-          </ac:grpSpMkLst>
-        </pc:grpChg>
-        <pc:grpChg chg="add del mod">
-          <ac:chgData name="Thiago Ney Evaristo Rodrigues" userId="fb50eefc1efb6381" providerId="LiveId" clId="{CDB8E314-E490-485E-BFDC-E1775CB67CF5}" dt="2025-08-19T15:13:01.972" v="1801" actId="165"/>
-          <ac:grpSpMkLst>
-            <pc:docMk/>
-            <pc:sldMk cId="3092909903" sldId="284"/>
-            <ac:grpSpMk id="15" creationId="{4399621B-94A5-692A-CEED-57878C751CD3}"/>
-          </ac:grpSpMkLst>
-        </pc:grpChg>
-        <pc:grpChg chg="add mod">
-          <ac:chgData name="Thiago Ney Evaristo Rodrigues" userId="fb50eefc1efb6381" providerId="LiveId" clId="{CDB8E314-E490-485E-BFDC-E1775CB67CF5}" dt="2025-08-19T15:19:57.859" v="1824" actId="12789"/>
-          <ac:grpSpMkLst>
-            <pc:docMk/>
-            <pc:sldMk cId="3092909903" sldId="284"/>
-            <ac:grpSpMk id="17" creationId="{6C4092C6-5E39-15AE-6F3E-6D3D1B907A1E}"/>
-          </ac:grpSpMkLst>
-        </pc:grpChg>
-        <pc:grpChg chg="del mod topLvl">
-          <ac:chgData name="Thiago Ney Evaristo Rodrigues" userId="fb50eefc1efb6381" providerId="LiveId" clId="{CDB8E314-E490-485E-BFDC-E1775CB67CF5}" dt="2025-08-19T15:10:31.119" v="1776" actId="165"/>
-          <ac:grpSpMkLst>
-            <pc:docMk/>
-            <pc:sldMk cId="3092909903" sldId="284"/>
-            <ac:grpSpMk id="23" creationId="{5DFC5C5D-90D5-5CF0-E7D7-E5EE88F8FBBC}"/>
-          </ac:grpSpMkLst>
-        </pc:grpChg>
-        <pc:grpChg chg="del">
-          <ac:chgData name="Thiago Ney Evaristo Rodrigues" userId="fb50eefc1efb6381" providerId="LiveId" clId="{CDB8E314-E490-485E-BFDC-E1775CB67CF5}" dt="2025-08-19T14:53:11.561" v="1629" actId="478"/>
-          <ac:grpSpMkLst>
-            <pc:docMk/>
-            <pc:sldMk cId="3092909903" sldId="284"/>
-            <ac:grpSpMk id="24" creationId="{F1A9E7F3-6322-B68A-F4C7-492BEAB0A9DF}"/>
-          </ac:grpSpMkLst>
-        </pc:grpChg>
-        <pc:picChg chg="add mod topLvl">
-          <ac:chgData name="Thiago Ney Evaristo Rodrigues" userId="fb50eefc1efb6381" providerId="LiveId" clId="{CDB8E314-E490-485E-BFDC-E1775CB67CF5}" dt="2025-08-19T15:19:53.793" v="1823" actId="164"/>
-          <ac:picMkLst>
-            <pc:docMk/>
-            <pc:sldMk cId="3092909903" sldId="284"/>
-            <ac:picMk id="10" creationId="{CC30D25E-19A0-5DE0-35B0-DADAB9323D3B}"/>
-          </ac:picMkLst>
-        </pc:picChg>
-        <pc:picChg chg="del mod topLvl">
-          <ac:chgData name="Thiago Ney Evaristo Rodrigues" userId="fb50eefc1efb6381" providerId="LiveId" clId="{CDB8E314-E490-485E-BFDC-E1775CB67CF5}" dt="2025-08-19T15:10:33.588" v="1777" actId="478"/>
-          <ac:picMkLst>
-            <pc:docMk/>
-            <pc:sldMk cId="3092909903" sldId="284"/>
-            <ac:picMk id="19" creationId="{4B35577D-64C7-ABF5-63E1-5EFE623642AC}"/>
-          </ac:picMkLst>
-        </pc:picChg>
       </pc:sldChg>
       <pc:sldChg chg="addSp delSp modSp add mod ord modTransition">
         <pc:chgData name="Thiago Ney Evaristo Rodrigues" userId="fb50eefc1efb6381" providerId="LiveId" clId="{CDB8E314-E490-485E-BFDC-E1775CB67CF5}" dt="2025-08-19T23:05:37.440" v="3243"/>
@@ -3069,54 +1182,6 @@
           <pc:docMk/>
           <pc:sldMk cId="4051431390" sldId="285"/>
         </pc:sldMkLst>
-        <pc:spChg chg="del mod">
-          <ac:chgData name="Thiago Ney Evaristo Rodrigues" userId="fb50eefc1efb6381" providerId="LiveId" clId="{CDB8E314-E490-485E-BFDC-E1775CB67CF5}" dt="2025-08-19T22:27:38.323" v="2532" actId="478"/>
-          <ac:spMkLst>
-            <pc:docMk/>
-            <pc:sldMk cId="4051431390" sldId="285"/>
-            <ac:spMk id="3" creationId="{FBDD0D65-28E8-610C-E921-59D81B3B4688}"/>
-          </ac:spMkLst>
-        </pc:spChg>
-        <pc:spChg chg="del mod">
-          <ac:chgData name="Thiago Ney Evaristo Rodrigues" userId="fb50eefc1efb6381" providerId="LiveId" clId="{CDB8E314-E490-485E-BFDC-E1775CB67CF5}" dt="2025-08-19T22:27:39.296" v="2533" actId="478"/>
-          <ac:spMkLst>
-            <pc:docMk/>
-            <pc:sldMk cId="4051431390" sldId="285"/>
-            <ac:spMk id="5" creationId="{004A077F-4220-D97B-E9B1-1CF23812059B}"/>
-          </ac:spMkLst>
-        </pc:spChg>
-        <pc:spChg chg="mod">
-          <ac:chgData name="Thiago Ney Evaristo Rodrigues" userId="fb50eefc1efb6381" providerId="LiveId" clId="{CDB8E314-E490-485E-BFDC-E1775CB67CF5}" dt="2025-08-19T22:52:42.977" v="3072" actId="12788"/>
-          <ac:spMkLst>
-            <pc:docMk/>
-            <pc:sldMk cId="4051431390" sldId="285"/>
-            <ac:spMk id="6" creationId="{D7BFA22C-4E90-86B6-B8E6-DC263C3D5B22}"/>
-          </ac:spMkLst>
-        </pc:spChg>
-        <pc:spChg chg="add">
-          <ac:chgData name="Thiago Ney Evaristo Rodrigues" userId="fb50eefc1efb6381" providerId="LiveId" clId="{CDB8E314-E490-485E-BFDC-E1775CB67CF5}" dt="2025-08-19T21:44:16.731" v="1934"/>
-          <ac:spMkLst>
-            <pc:docMk/>
-            <pc:sldMk cId="4051431390" sldId="285"/>
-            <ac:spMk id="8" creationId="{BB18B011-FD0E-9663-BA1E-A06B3DB88CA0}"/>
-          </ac:spMkLst>
-        </pc:spChg>
-        <pc:spChg chg="add mod">
-          <ac:chgData name="Thiago Ney Evaristo Rodrigues" userId="fb50eefc1efb6381" providerId="LiveId" clId="{CDB8E314-E490-485E-BFDC-E1775CB67CF5}" dt="2025-08-19T21:44:26.912" v="1938"/>
-          <ac:spMkLst>
-            <pc:docMk/>
-            <pc:sldMk cId="4051431390" sldId="285"/>
-            <ac:spMk id="10" creationId="{35C53D33-19A4-92B8-97DB-BB06C0DC7F60}"/>
-          </ac:spMkLst>
-        </pc:spChg>
-        <pc:grpChg chg="del">
-          <ac:chgData name="Thiago Ney Evaristo Rodrigues" userId="fb50eefc1efb6381" providerId="LiveId" clId="{CDB8E314-E490-485E-BFDC-E1775CB67CF5}" dt="2025-08-19T21:40:02.846" v="1849" actId="478"/>
-          <ac:grpSpMkLst>
-            <pc:docMk/>
-            <pc:sldMk cId="4051431390" sldId="285"/>
-            <ac:grpSpMk id="2" creationId="{2D3BB647-2CAF-CFB7-383A-450A1B78379B}"/>
-          </ac:grpSpMkLst>
-        </pc:grpChg>
       </pc:sldChg>
       <pc:sldChg chg="addSp delSp modSp add mod modTransition">
         <pc:chgData name="Thiago Ney Evaristo Rodrigues" userId="fb50eefc1efb6381" providerId="LiveId" clId="{CDB8E314-E490-485E-BFDC-E1775CB67CF5}" dt="2025-08-19T23:05:37.440" v="3243"/>
@@ -3124,110 +1189,6 @@
           <pc:docMk/>
           <pc:sldMk cId="297038157" sldId="286"/>
         </pc:sldMkLst>
-        <pc:spChg chg="add">
-          <ac:chgData name="Thiago Ney Evaristo Rodrigues" userId="fb50eefc1efb6381" providerId="LiveId" clId="{CDB8E314-E490-485E-BFDC-E1775CB67CF5}" dt="2025-08-19T22:03:27.728" v="2116"/>
-          <ac:spMkLst>
-            <pc:docMk/>
-            <pc:sldMk cId="297038157" sldId="286"/>
-            <ac:spMk id="2" creationId="{6B439BCE-771E-3882-E1F6-A4BB29A24B11}"/>
-          </ac:spMkLst>
-        </pc:spChg>
-        <pc:spChg chg="del mod">
-          <ac:chgData name="Thiago Ney Evaristo Rodrigues" userId="fb50eefc1efb6381" providerId="LiveId" clId="{CDB8E314-E490-485E-BFDC-E1775CB67CF5}" dt="2025-08-19T22:27:59.605" v="2537" actId="478"/>
-          <ac:spMkLst>
-            <pc:docMk/>
-            <pc:sldMk cId="297038157" sldId="286"/>
-            <ac:spMk id="3" creationId="{0C54A474-7CDB-8449-44CB-AE106486BD6F}"/>
-          </ac:spMkLst>
-        </pc:spChg>
-        <pc:spChg chg="del mod">
-          <ac:chgData name="Thiago Ney Evaristo Rodrigues" userId="fb50eefc1efb6381" providerId="LiveId" clId="{CDB8E314-E490-485E-BFDC-E1775CB67CF5}" dt="2025-08-19T22:27:58.935" v="2536" actId="478"/>
-          <ac:spMkLst>
-            <pc:docMk/>
-            <pc:sldMk cId="297038157" sldId="286"/>
-            <ac:spMk id="5" creationId="{977B4AB2-F717-8056-5BF2-66DF57A28E68}"/>
-          </ac:spMkLst>
-        </pc:spChg>
-        <pc:spChg chg="mod topLvl">
-          <ac:chgData name="Thiago Ney Evaristo Rodrigues" userId="fb50eefc1efb6381" providerId="LiveId" clId="{CDB8E314-E490-485E-BFDC-E1775CB67CF5}" dt="2025-08-19T22:38:42.489" v="2767" actId="12788"/>
-          <ac:spMkLst>
-            <pc:docMk/>
-            <pc:sldMk cId="297038157" sldId="286"/>
-            <ac:spMk id="6" creationId="{931AE91E-89B5-EEB4-8261-99486D59BE8F}"/>
-          </ac:spMkLst>
-        </pc:spChg>
-        <pc:spChg chg="add del mod">
-          <ac:chgData name="Thiago Ney Evaristo Rodrigues" userId="fb50eefc1efb6381" providerId="LiveId" clId="{CDB8E314-E490-485E-BFDC-E1775CB67CF5}" dt="2025-08-19T22:39:04.502" v="2768" actId="478"/>
-          <ac:spMkLst>
-            <pc:docMk/>
-            <pc:sldMk cId="297038157" sldId="286"/>
-            <ac:spMk id="13" creationId="{09C93515-7636-8E79-4F91-3F1D971B8725}"/>
-          </ac:spMkLst>
-        </pc:spChg>
-        <pc:spChg chg="add del mod">
-          <ac:chgData name="Thiago Ney Evaristo Rodrigues" userId="fb50eefc1efb6381" providerId="LiveId" clId="{CDB8E314-E490-485E-BFDC-E1775CB67CF5}" dt="2025-08-19T22:39:05.600" v="2769" actId="478"/>
-          <ac:spMkLst>
-            <pc:docMk/>
-            <pc:sldMk cId="297038157" sldId="286"/>
-            <ac:spMk id="14" creationId="{C9CE14AF-C1D9-006C-8C95-C2B3D86C92C4}"/>
-          </ac:spMkLst>
-        </pc:spChg>
-        <pc:spChg chg="mod topLvl">
-          <ac:chgData name="Thiago Ney Evaristo Rodrigues" userId="fb50eefc1efb6381" providerId="LiveId" clId="{CDB8E314-E490-485E-BFDC-E1775CB67CF5}" dt="2025-08-19T22:38:42.489" v="2767" actId="12788"/>
-          <ac:spMkLst>
-            <pc:docMk/>
-            <pc:sldMk cId="297038157" sldId="286"/>
-            <ac:spMk id="20" creationId="{70CC9BEB-C56F-63F0-0DDD-584B856FBD42}"/>
-          </ac:spMkLst>
-        </pc:spChg>
-        <pc:grpChg chg="add del mod topLvl">
-          <ac:chgData name="Thiago Ney Evaristo Rodrigues" userId="fb50eefc1efb6381" providerId="LiveId" clId="{CDB8E314-E490-485E-BFDC-E1775CB67CF5}" dt="2025-08-19T22:33:03.400" v="2560" actId="165"/>
-          <ac:grpSpMkLst>
-            <pc:docMk/>
-            <pc:sldMk cId="297038157" sldId="286"/>
-            <ac:grpSpMk id="8" creationId="{CE534E28-6C28-9FF8-769F-520E8B11FCAF}"/>
-          </ac:grpSpMkLst>
-        </pc:grpChg>
-        <pc:grpChg chg="add del mod">
-          <ac:chgData name="Thiago Ney Evaristo Rodrigues" userId="fb50eefc1efb6381" providerId="LiveId" clId="{CDB8E314-E490-485E-BFDC-E1775CB67CF5}" dt="2025-08-19T22:32:59.237" v="2559" actId="165"/>
-          <ac:grpSpMkLst>
-            <pc:docMk/>
-            <pc:sldMk cId="297038157" sldId="286"/>
-            <ac:grpSpMk id="10" creationId="{0E5A7261-4155-48DE-6777-14986CAC361F}"/>
-          </ac:grpSpMkLst>
-        </pc:grpChg>
-        <pc:grpChg chg="add del mod">
-          <ac:chgData name="Thiago Ney Evaristo Rodrigues" userId="fb50eefc1efb6381" providerId="LiveId" clId="{CDB8E314-E490-485E-BFDC-E1775CB67CF5}" dt="2025-08-19T22:35:16.766" v="2615" actId="165"/>
-          <ac:grpSpMkLst>
-            <pc:docMk/>
-            <pc:sldMk cId="297038157" sldId="286"/>
-            <ac:grpSpMk id="11" creationId="{E55E2177-5E89-9D31-2893-83CCA52D5CB2}"/>
-          </ac:grpSpMkLst>
-        </pc:grpChg>
-        <pc:grpChg chg="add mod">
-          <ac:chgData name="Thiago Ney Evaristo Rodrigues" userId="fb50eefc1efb6381" providerId="LiveId" clId="{CDB8E314-E490-485E-BFDC-E1775CB67CF5}" dt="2025-08-19T22:38:42.489" v="2767" actId="12788"/>
-          <ac:grpSpMkLst>
-            <pc:docMk/>
-            <pc:sldMk cId="297038157" sldId="286"/>
-            <ac:grpSpMk id="12" creationId="{5AB11290-9D2F-E370-B845-D00FD31A74D7}"/>
-          </ac:grpSpMkLst>
-        </pc:grpChg>
-        <pc:grpChg chg="add mod">
-          <ac:chgData name="Thiago Ney Evaristo Rodrigues" userId="fb50eefc1efb6381" providerId="LiveId" clId="{CDB8E314-E490-485E-BFDC-E1775CB67CF5}" dt="2025-08-19T22:38:42.489" v="2767" actId="12788"/>
-          <ac:grpSpMkLst>
-            <pc:docMk/>
-            <pc:sldMk cId="297038157" sldId="286"/>
-            <ac:grpSpMk id="15" creationId="{7D6434F1-1402-17B7-D82E-238DEB640F9C}"/>
-          </ac:grpSpMkLst>
-        </pc:grpChg>
-        <pc:picChg chg="mod topLvl">
-          <ac:chgData name="Thiago Ney Evaristo Rodrigues" userId="fb50eefc1efb6381" providerId="LiveId" clId="{CDB8E314-E490-485E-BFDC-E1775CB67CF5}" dt="2025-08-19T22:38:42.489" v="2767" actId="12788"/>
-          <ac:picMkLst>
-            <pc:docMk/>
-            <pc:sldMk cId="297038157" sldId="286"/>
-            <ac:picMk id="1026" creationId="{CAA76FF2-DFD6-5C25-38BB-DA445E8DE0FC}"/>
-          </ac:picMkLst>
-        </pc:picChg>
       </pc:sldChg>
       <pc:sldChg chg="addSp delSp modSp add del mod">
         <pc:chgData name="Thiago Ney Evaristo Rodrigues" userId="fb50eefc1efb6381" providerId="LiveId" clId="{CDB8E314-E490-485E-BFDC-E1775CB67CF5}" dt="2025-08-19T22:28:02.487" v="2538" actId="47"/>
@@ -3235,38 +1196,6 @@
           <pc:docMk/>
           <pc:sldMk cId="996914907" sldId="287"/>
         </pc:sldMkLst>
-        <pc:spChg chg="mod">
-          <ac:chgData name="Thiago Ney Evaristo Rodrigues" userId="fb50eefc1efb6381" providerId="LiveId" clId="{CDB8E314-E490-485E-BFDC-E1775CB67CF5}" dt="2025-08-19T22:24:38.288" v="2478" actId="20577"/>
-          <ac:spMkLst>
-            <pc:docMk/>
-            <pc:sldMk cId="996914907" sldId="287"/>
-            <ac:spMk id="6" creationId="{7668B147-B4B8-DD55-073D-E2035EE7F561}"/>
-          </ac:spMkLst>
-        </pc:spChg>
-        <pc:spChg chg="mod">
-          <ac:chgData name="Thiago Ney Evaristo Rodrigues" userId="fb50eefc1efb6381" providerId="LiveId" clId="{CDB8E314-E490-485E-BFDC-E1775CB67CF5}" dt="2025-08-19T22:25:11.285" v="2480"/>
-          <ac:spMkLst>
-            <pc:docMk/>
-            <pc:sldMk cId="996914907" sldId="287"/>
-            <ac:spMk id="20" creationId="{70CC9BEB-C56F-63F0-0DDD-584B856FBD42}"/>
-          </ac:spMkLst>
-        </pc:spChg>
-        <pc:grpChg chg="add del mod">
-          <ac:chgData name="Thiago Ney Evaristo Rodrigues" userId="fb50eefc1efb6381" providerId="LiveId" clId="{CDB8E314-E490-485E-BFDC-E1775CB67CF5}" dt="2025-08-19T22:27:12.657" v="2525" actId="21"/>
-          <ac:grpSpMkLst>
-            <pc:docMk/>
-            <pc:sldMk cId="996914907" sldId="287"/>
-            <ac:grpSpMk id="2" creationId="{CE534E28-6C28-9FF8-769F-520E8B11FCAF}"/>
-          </ac:grpSpMkLst>
-        </pc:grpChg>
-        <pc:picChg chg="mod">
-          <ac:chgData name="Thiago Ney Evaristo Rodrigues" userId="fb50eefc1efb6381" providerId="LiveId" clId="{CDB8E314-E490-485E-BFDC-E1775CB67CF5}" dt="2025-08-19T22:25:11.285" v="2480"/>
-          <ac:picMkLst>
-            <pc:docMk/>
-            <pc:sldMk cId="996914907" sldId="287"/>
-            <ac:picMk id="1026" creationId="{CAA76FF2-DFD6-5C25-38BB-DA445E8DE0FC}"/>
-          </ac:picMkLst>
-        </pc:picChg>
       </pc:sldChg>
       <pc:sldChg chg="add del">
         <pc:chgData name="Thiago Ney Evaristo Rodrigues" userId="fb50eefc1efb6381" providerId="LiveId" clId="{CDB8E314-E490-485E-BFDC-E1775CB67CF5}" dt="2025-08-19T22:23:15.476" v="2391" actId="2890"/>
@@ -3304,38 +1233,6 @@
           <pc:docMk/>
           <pc:sldMk cId="3536410419" sldId="264"/>
         </pc:sldMkLst>
-        <pc:spChg chg="mod">
-          <ac:chgData name="Thiago Ney Evaristo Rodrigues" userId="fb50eefc1efb6381" providerId="Windows Live" clId="Web-{7ACC5FD9-364D-82F7-346C-F5AE636F9869}" dt="2025-08-18T17:30:47.259" v="79" actId="20577"/>
-          <ac:spMkLst>
-            <pc:docMk/>
-            <pc:sldMk cId="3536410419" sldId="264"/>
-            <ac:spMk id="3" creationId="{A2566FEB-E0B9-C52F-25A4-D2A9488DACB2}"/>
-          </ac:spMkLst>
-        </pc:spChg>
-        <pc:spChg chg="mod">
-          <ac:chgData name="Thiago Ney Evaristo Rodrigues" userId="fb50eefc1efb6381" providerId="Windows Live" clId="Web-{7ACC5FD9-364D-82F7-346C-F5AE636F9869}" dt="2025-08-18T17:35:39.455" v="104"/>
-          <ac:spMkLst>
-            <pc:docMk/>
-            <pc:sldMk cId="3536410419" sldId="264"/>
-            <ac:spMk id="4" creationId="{A9E5F64C-D008-1E3B-7FC3-892F3A20E554}"/>
-          </ac:spMkLst>
-        </pc:spChg>
-        <pc:spChg chg="mod">
-          <ac:chgData name="Thiago Ney Evaristo Rodrigues" userId="fb50eefc1efb6381" providerId="Windows Live" clId="Web-{7ACC5FD9-364D-82F7-346C-F5AE636F9869}" dt="2025-08-18T17:31:11.152" v="100" actId="20577"/>
-          <ac:spMkLst>
-            <pc:docMk/>
-            <pc:sldMk cId="3536410419" sldId="264"/>
-            <ac:spMk id="9" creationId="{D8430433-FA66-D5A3-062F-A93112CB2B52}"/>
-          </ac:spMkLst>
-        </pc:spChg>
-        <pc:spChg chg="mod">
-          <ac:chgData name="Thiago Ney Evaristo Rodrigues" userId="fb50eefc1efb6381" providerId="Windows Live" clId="Web-{7ACC5FD9-364D-82F7-346C-F5AE636F9869}" dt="2025-08-18T17:31:52.264" v="102" actId="20577"/>
-          <ac:spMkLst>
-            <pc:docMk/>
-            <pc:sldMk cId="3536410419" sldId="264"/>
-            <ac:spMk id="10" creationId="{B6CC3FE1-0548-4031-10F5-7E8ED23E955E}"/>
-          </ac:spMkLst>
-        </pc:spChg>
       </pc:sldChg>
       <pc:sldChg chg="addSp modSp">
         <pc:chgData name="Thiago Ney Evaristo Rodrigues" userId="fb50eefc1efb6381" providerId="Windows Live" clId="Web-{7ACC5FD9-364D-82F7-346C-F5AE636F9869}" dt="2025-08-18T17:54:56.144" v="340" actId="14100"/>
@@ -3343,22 +1240,6 @@
           <pc:docMk/>
           <pc:sldMk cId="280983118" sldId="265"/>
         </pc:sldMkLst>
-        <pc:spChg chg="mod">
-          <ac:chgData name="Thiago Ney Evaristo Rodrigues" userId="fb50eefc1efb6381" providerId="Windows Live" clId="Web-{7ACC5FD9-364D-82F7-346C-F5AE636F9869}" dt="2025-08-18T17:54:56.144" v="340" actId="14100"/>
-          <ac:spMkLst>
-            <pc:docMk/>
-            <pc:sldMk cId="280983118" sldId="265"/>
-            <ac:spMk id="3" creationId="{BB559D3D-4FBE-8E76-CB69-02073D9729B9}"/>
-          </ac:spMkLst>
-        </pc:spChg>
-        <pc:picChg chg="add mod">
-          <ac:chgData name="Thiago Ney Evaristo Rodrigues" userId="fb50eefc1efb6381" providerId="Windows Live" clId="Web-{7ACC5FD9-364D-82F7-346C-F5AE636F9869}" dt="2025-08-18T17:54:51.394" v="339" actId="1076"/>
-          <ac:picMkLst>
-            <pc:docMk/>
-            <pc:sldMk cId="280983118" sldId="265"/>
-            <ac:picMk id="5" creationId="{18C07F95-DA9D-953A-01AA-93C1BF6E2F95}"/>
-          </ac:picMkLst>
-        </pc:picChg>
       </pc:sldChg>
       <pc:sldChg chg="addSp modSp">
         <pc:chgData name="Thiago Ney Evaristo Rodrigues" userId="fb50eefc1efb6381" providerId="Windows Live" clId="Web-{7ACC5FD9-364D-82F7-346C-F5AE636F9869}" dt="2025-08-18T18:00:47.659" v="379" actId="20577"/>
@@ -3366,22 +1247,6 @@
           <pc:docMk/>
           <pc:sldMk cId="3614048354" sldId="266"/>
         </pc:sldMkLst>
-        <pc:spChg chg="mod">
-          <ac:chgData name="Thiago Ney Evaristo Rodrigues" userId="fb50eefc1efb6381" providerId="Windows Live" clId="Web-{7ACC5FD9-364D-82F7-346C-F5AE636F9869}" dt="2025-08-18T18:00:47.659" v="379" actId="20577"/>
-          <ac:spMkLst>
-            <pc:docMk/>
-            <pc:sldMk cId="3614048354" sldId="266"/>
-            <ac:spMk id="3" creationId="{54795B77-50A9-AE54-C5E4-B3DE4348BE09}"/>
-          </ac:spMkLst>
-        </pc:spChg>
-        <pc:picChg chg="add mod">
-          <ac:chgData name="Thiago Ney Evaristo Rodrigues" userId="fb50eefc1efb6381" providerId="Windows Live" clId="Web-{7ACC5FD9-364D-82F7-346C-F5AE636F9869}" dt="2025-08-18T17:55:41.070" v="343" actId="1076"/>
-          <ac:picMkLst>
-            <pc:docMk/>
-            <pc:sldMk cId="3614048354" sldId="266"/>
-            <ac:picMk id="5" creationId="{06F26671-4A0E-3770-263C-E2C6B886A9EB}"/>
-          </ac:picMkLst>
-        </pc:picChg>
       </pc:sldChg>
       <pc:sldChg chg="addSp delSp modSp">
         <pc:chgData name="Thiago Ney Evaristo Rodrigues" userId="fb50eefc1efb6381" providerId="Windows Live" clId="Web-{7ACC5FD9-364D-82F7-346C-F5AE636F9869}" dt="2025-08-18T18:54:12.957" v="766" actId="20577"/>
@@ -3389,46 +1254,6 @@
           <pc:docMk/>
           <pc:sldMk cId="2936865589" sldId="267"/>
         </pc:sldMkLst>
-        <pc:spChg chg="mod">
-          <ac:chgData name="Thiago Ney Evaristo Rodrigues" userId="fb50eefc1efb6381" providerId="Windows Live" clId="Web-{7ACC5FD9-364D-82F7-346C-F5AE636F9869}" dt="2025-08-18T18:54:12.957" v="766" actId="20577"/>
-          <ac:spMkLst>
-            <pc:docMk/>
-            <pc:sldMk cId="2936865589" sldId="267"/>
-            <ac:spMk id="3" creationId="{60D62624-8412-1DD1-D048-3C13B60D3EC0}"/>
-          </ac:spMkLst>
-        </pc:spChg>
-        <pc:picChg chg="add del mod">
-          <ac:chgData name="Thiago Ney Evaristo Rodrigues" userId="fb50eefc1efb6381" providerId="Windows Live" clId="Web-{7ACC5FD9-364D-82F7-346C-F5AE636F9869}" dt="2025-08-18T18:32:02.376" v="583"/>
-          <ac:picMkLst>
-            <pc:docMk/>
-            <pc:sldMk cId="2936865589" sldId="267"/>
-            <ac:picMk id="5" creationId="{FBFDD9F4-02A2-2BB0-A10B-830C71897469}"/>
-          </ac:picMkLst>
-        </pc:picChg>
-        <pc:picChg chg="add mod">
-          <ac:chgData name="Thiago Ney Evaristo Rodrigues" userId="fb50eefc1efb6381" providerId="Windows Live" clId="Web-{7ACC5FD9-364D-82F7-346C-F5AE636F9869}" dt="2025-08-18T18:39:24.223" v="599" actId="1076"/>
-          <ac:picMkLst>
-            <pc:docMk/>
-            <pc:sldMk cId="2936865589" sldId="267"/>
-            <ac:picMk id="6" creationId="{180A3A88-C16E-4BED-06D1-45C572A20374}"/>
-          </ac:picMkLst>
-        </pc:picChg>
-        <pc:picChg chg="add mod">
-          <ac:chgData name="Thiago Ney Evaristo Rodrigues" userId="fb50eefc1efb6381" providerId="Windows Live" clId="Web-{7ACC5FD9-364D-82F7-346C-F5AE636F9869}" dt="2025-08-18T18:39:25.833" v="600" actId="1076"/>
-          <ac:picMkLst>
-            <pc:docMk/>
-            <pc:sldMk cId="2936865589" sldId="267"/>
-            <ac:picMk id="7" creationId="{D367DE33-B6F2-AF57-0FEC-0951A8F39C3D}"/>
-          </ac:picMkLst>
-        </pc:picChg>
-        <pc:picChg chg="add del mod">
-          <ac:chgData name="Thiago Ney Evaristo Rodrigues" userId="fb50eefc1efb6381" providerId="Windows Live" clId="Web-{7ACC5FD9-364D-82F7-346C-F5AE636F9869}" dt="2025-08-18T18:38:14.624" v="587"/>
-          <ac:picMkLst>
-            <pc:docMk/>
-            <pc:sldMk cId="2936865589" sldId="267"/>
-            <ac:picMk id="9" creationId="{E9E67D9A-7DB5-9661-2A7E-5CB671F72A7D}"/>
-          </ac:picMkLst>
-        </pc:picChg>
       </pc:sldChg>
       <pc:sldChg chg="addSp delSp modSp">
         <pc:chgData name="Thiago Ney Evaristo Rodrigues" userId="fb50eefc1efb6381" providerId="Windows Live" clId="Web-{7ACC5FD9-364D-82F7-346C-F5AE636F9869}" dt="2025-08-18T19:12:50.707" v="875" actId="20577"/>
@@ -3436,38 +1261,6 @@
           <pc:docMk/>
           <pc:sldMk cId="872924692" sldId="268"/>
         </pc:sldMkLst>
-        <pc:spChg chg="mod">
-          <ac:chgData name="Thiago Ney Evaristo Rodrigues" userId="fb50eefc1efb6381" providerId="Windows Live" clId="Web-{7ACC5FD9-364D-82F7-346C-F5AE636F9869}" dt="2025-08-18T19:12:50.707" v="875" actId="20577"/>
-          <ac:spMkLst>
-            <pc:docMk/>
-            <pc:sldMk cId="872924692" sldId="268"/>
-            <ac:spMk id="3" creationId="{95FF030B-F453-B2DE-D408-C18AC94305C3}"/>
-          </ac:spMkLst>
-        </pc:spChg>
-        <pc:picChg chg="add mod">
-          <ac:chgData name="Thiago Ney Evaristo Rodrigues" userId="fb50eefc1efb6381" providerId="Windows Live" clId="Web-{7ACC5FD9-364D-82F7-346C-F5AE636F9869}" dt="2025-08-18T19:09:45.083" v="830" actId="1076"/>
-          <ac:picMkLst>
-            <pc:docMk/>
-            <pc:sldMk cId="872924692" sldId="268"/>
-            <ac:picMk id="5" creationId="{FD1B6C40-6C42-16AC-8A0C-1B7D57718FE5}"/>
-          </ac:picMkLst>
-        </pc:picChg>
-        <pc:picChg chg="add del mod">
-          <ac:chgData name="Thiago Ney Evaristo Rodrigues" userId="fb50eefc1efb6381" providerId="Windows Live" clId="Web-{7ACC5FD9-364D-82F7-346C-F5AE636F9869}" dt="2025-08-18T19:03:11.252" v="774"/>
-          <ac:picMkLst>
-            <pc:docMk/>
-            <pc:sldMk cId="872924692" sldId="268"/>
-            <ac:picMk id="6" creationId="{BB718876-D7C9-911B-C1CE-4EE287F1CE36}"/>
-          </ac:picMkLst>
-        </pc:picChg>
-        <pc:picChg chg="add del mod">
-          <ac:chgData name="Thiago Ney Evaristo Rodrigues" userId="fb50eefc1efb6381" providerId="Windows Live" clId="Web-{7ACC5FD9-364D-82F7-346C-F5AE636F9869}" dt="2025-08-18T19:09:57.912" v="833"/>
-          <ac:picMkLst>
-            <pc:docMk/>
-            <pc:sldMk cId="872924692" sldId="268"/>
-            <ac:picMk id="7" creationId="{1C16AEA2-7DBC-A178-E8CF-12EABE535659}"/>
-          </ac:picMkLst>
-        </pc:picChg>
       </pc:sldChg>
       <pc:sldChg chg="delSp modSp add replId">
         <pc:chgData name="Thiago Ney Evaristo Rodrigues" userId="fb50eefc1efb6381" providerId="Windows Live" clId="Web-{7ACC5FD9-364D-82F7-346C-F5AE636F9869}" dt="2025-08-18T18:04:12.801" v="399" actId="20577"/>
@@ -3475,22 +1268,6 @@
           <pc:docMk/>
           <pc:sldMk cId="1618868839" sldId="273"/>
         </pc:sldMkLst>
-        <pc:spChg chg="mod">
-          <ac:chgData name="Thiago Ney Evaristo Rodrigues" userId="fb50eefc1efb6381" providerId="Windows Live" clId="Web-{7ACC5FD9-364D-82F7-346C-F5AE636F9869}" dt="2025-08-18T18:04:12.801" v="399" actId="20577"/>
-          <ac:spMkLst>
-            <pc:docMk/>
-            <pc:sldMk cId="1618868839" sldId="273"/>
-            <ac:spMk id="3" creationId="{9B7A3BA1-1FA7-DDAF-6F8C-E41477414288}"/>
-          </ac:spMkLst>
-        </pc:spChg>
-        <pc:picChg chg="del">
-          <ac:chgData name="Thiago Ney Evaristo Rodrigues" userId="fb50eefc1efb6381" providerId="Windows Live" clId="Web-{7ACC5FD9-364D-82F7-346C-F5AE636F9869}" dt="2025-08-18T18:01:24.396" v="390"/>
-          <ac:picMkLst>
-            <pc:docMk/>
-            <pc:sldMk cId="1618868839" sldId="273"/>
-            <ac:picMk id="5" creationId="{7B308E29-8FE4-B45D-6C9B-159280BD3E2A}"/>
-          </ac:picMkLst>
-        </pc:picChg>
       </pc:sldChg>
       <pc:sldChg chg="delSp modSp add del replId">
         <pc:chgData name="Thiago Ney Evaristo Rodrigues" userId="fb50eefc1efb6381" providerId="Windows Live" clId="Web-{7ACC5FD9-364D-82F7-346C-F5AE636F9869}" dt="2025-08-18T18:01:18.317" v="388"/>
@@ -3498,22 +1275,6 @@
           <pc:docMk/>
           <pc:sldMk cId="3866793740" sldId="273"/>
         </pc:sldMkLst>
-        <pc:spChg chg="mod">
-          <ac:chgData name="Thiago Ney Evaristo Rodrigues" userId="fb50eefc1efb6381" providerId="Windows Live" clId="Web-{7ACC5FD9-364D-82F7-346C-F5AE636F9869}" dt="2025-08-18T18:01:16.974" v="387" actId="20577"/>
-          <ac:spMkLst>
-            <pc:docMk/>
-            <pc:sldMk cId="3866793740" sldId="273"/>
-            <ac:spMk id="2" creationId="{E5305C69-BBA5-9354-E849-1655D792EDBD}"/>
-          </ac:spMkLst>
-        </pc:spChg>
-        <pc:picChg chg="del">
-          <ac:chgData name="Thiago Ney Evaristo Rodrigues" userId="fb50eefc1efb6381" providerId="Windows Live" clId="Web-{7ACC5FD9-364D-82F7-346C-F5AE636F9869}" dt="2025-08-18T18:00:52.753" v="381"/>
-          <ac:picMkLst>
-            <pc:docMk/>
-            <pc:sldMk cId="3866793740" sldId="273"/>
-            <ac:picMk id="5" creationId="{4903C1C3-4585-114D-3465-772615715482}"/>
-          </ac:picMkLst>
-        </pc:picChg>
       </pc:sldChg>
       <pc:sldChg chg="modSp add replId">
         <pc:chgData name="Thiago Ney Evaristo Rodrigues" userId="fb50eefc1efb6381" providerId="Windows Live" clId="Web-{7ACC5FD9-364D-82F7-346C-F5AE636F9869}" dt="2025-08-18T18:08:48.729" v="405"/>
@@ -3521,22 +1282,6 @@
           <pc:docMk/>
           <pc:sldMk cId="3847462140" sldId="274"/>
         </pc:sldMkLst>
-        <pc:spChg chg="mod">
-          <ac:chgData name="Thiago Ney Evaristo Rodrigues" userId="fb50eefc1efb6381" providerId="Windows Live" clId="Web-{7ACC5FD9-364D-82F7-346C-F5AE636F9869}" dt="2025-08-18T18:04:20.536" v="403" actId="20577"/>
-          <ac:spMkLst>
-            <pc:docMk/>
-            <pc:sldMk cId="3847462140" sldId="274"/>
-            <ac:spMk id="3" creationId="{814073FD-FF5D-623B-E912-7DB62A56CF31}"/>
-          </ac:spMkLst>
-        </pc:spChg>
-        <pc:spChg chg="mod">
-          <ac:chgData name="Thiago Ney Evaristo Rodrigues" userId="fb50eefc1efb6381" providerId="Windows Live" clId="Web-{7ACC5FD9-364D-82F7-346C-F5AE636F9869}" dt="2025-08-18T18:08:48.729" v="405"/>
-          <ac:spMkLst>
-            <pc:docMk/>
-            <pc:sldMk cId="3847462140" sldId="274"/>
-            <ac:spMk id="4" creationId="{80DE6686-1D5E-C5D0-1311-0A87CC14D54B}"/>
-          </ac:spMkLst>
-        </pc:spChg>
       </pc:sldChg>
       <pc:sldChg chg="addSp delSp modSp add ord replId">
         <pc:chgData name="Thiago Ney Evaristo Rodrigues" userId="fb50eefc1efb6381" providerId="Windows Live" clId="Web-{7ACC5FD9-364D-82F7-346C-F5AE636F9869}" dt="2025-08-18T18:53:07.904" v="730" actId="20577"/>
@@ -3544,30 +1289,6 @@
           <pc:docMk/>
           <pc:sldMk cId="2318078833" sldId="275"/>
         </pc:sldMkLst>
-        <pc:spChg chg="mod">
-          <ac:chgData name="Thiago Ney Evaristo Rodrigues" userId="fb50eefc1efb6381" providerId="Windows Live" clId="Web-{7ACC5FD9-364D-82F7-346C-F5AE636F9869}" dt="2025-08-18T18:53:07.904" v="730" actId="20577"/>
-          <ac:spMkLst>
-            <pc:docMk/>
-            <pc:sldMk cId="2318078833" sldId="275"/>
-            <ac:spMk id="3" creationId="{7E00A612-3E79-92DB-CC20-143B92011F19}"/>
-          </ac:spMkLst>
-        </pc:spChg>
-        <pc:picChg chg="del">
-          <ac:chgData name="Thiago Ney Evaristo Rodrigues" userId="fb50eefc1efb6381" providerId="Windows Live" clId="Web-{7ACC5FD9-364D-82F7-346C-F5AE636F9869}" dt="2025-08-18T18:25:29.220" v="578"/>
-          <ac:picMkLst>
-            <pc:docMk/>
-            <pc:sldMk cId="2318078833" sldId="275"/>
-            <ac:picMk id="5" creationId="{C017942A-777D-5D47-34D9-00683A54FACB}"/>
-          </ac:picMkLst>
-        </pc:picChg>
-        <pc:picChg chg="add mod">
-          <ac:chgData name="Thiago Ney Evaristo Rodrigues" userId="fb50eefc1efb6381" providerId="Windows Live" clId="Web-{7ACC5FD9-364D-82F7-346C-F5AE636F9869}" dt="2025-08-18T18:25:47.643" v="581" actId="1076"/>
-          <ac:picMkLst>
-            <pc:docMk/>
-            <pc:sldMk cId="2318078833" sldId="275"/>
-            <ac:picMk id="6" creationId="{2A7EB31C-1E1E-E087-CAF8-3FA48AB54368}"/>
-          </ac:picMkLst>
-        </pc:picChg>
       </pc:sldChg>
       <pc:sldChg chg="delSp modSp add del replId">
         <pc:chgData name="Thiago Ney Evaristo Rodrigues" userId="fb50eefc1efb6381" providerId="Windows Live" clId="Web-{7ACC5FD9-364D-82F7-346C-F5AE636F9869}" dt="2025-08-18T18:51:34.427" v="723"/>
@@ -3575,22 +1296,6 @@
           <pc:docMk/>
           <pc:sldMk cId="1319517906" sldId="276"/>
         </pc:sldMkLst>
-        <pc:spChg chg="mod">
-          <ac:chgData name="Thiago Ney Evaristo Rodrigues" userId="fb50eefc1efb6381" providerId="Windows Live" clId="Web-{7ACC5FD9-364D-82F7-346C-F5AE636F9869}" dt="2025-08-18T18:21:12.683" v="576" actId="20577"/>
-          <ac:spMkLst>
-            <pc:docMk/>
-            <pc:sldMk cId="1319517906" sldId="276"/>
-            <ac:spMk id="3" creationId="{926075E0-9664-90A6-3671-2342E5DC649B}"/>
-          </ac:spMkLst>
-        </pc:spChg>
-        <pc:picChg chg="del">
-          <ac:chgData name="Thiago Ney Evaristo Rodrigues" userId="fb50eefc1efb6381" providerId="Windows Live" clId="Web-{7ACC5FD9-364D-82F7-346C-F5AE636F9869}" dt="2025-08-18T18:21:13.933" v="577"/>
-          <ac:picMkLst>
-            <pc:docMk/>
-            <pc:sldMk cId="1319517906" sldId="276"/>
-            <ac:picMk id="5" creationId="{E1D27267-AAA7-5C6E-B1F6-DB145E01723B}"/>
-          </ac:picMkLst>
-        </pc:picChg>
       </pc:sldChg>
       <pc:sldChg chg="delSp modSp add replId">
         <pc:chgData name="Thiago Ney Evaristo Rodrigues" userId="fb50eefc1efb6381" providerId="Windows Live" clId="Web-{7ACC5FD9-364D-82F7-346C-F5AE636F9869}" dt="2025-08-18T19:10:08.366" v="836" actId="20577"/>
@@ -3598,22 +1303,6 @@
           <pc:docMk/>
           <pc:sldMk cId="4106440066" sldId="276"/>
         </pc:sldMkLst>
-        <pc:spChg chg="mod">
-          <ac:chgData name="Thiago Ney Evaristo Rodrigues" userId="fb50eefc1efb6381" providerId="Windows Live" clId="Web-{7ACC5FD9-364D-82F7-346C-F5AE636F9869}" dt="2025-08-18T19:10:08.366" v="836" actId="20577"/>
-          <ac:spMkLst>
-            <pc:docMk/>
-            <pc:sldMk cId="4106440066" sldId="276"/>
-            <ac:spMk id="3" creationId="{42910F21-DC0B-734A-A7CC-460BE5C31677}"/>
-          </ac:spMkLst>
-        </pc:spChg>
-        <pc:picChg chg="del">
-          <ac:chgData name="Thiago Ney Evaristo Rodrigues" userId="fb50eefc1efb6381" providerId="Windows Live" clId="Web-{7ACC5FD9-364D-82F7-346C-F5AE636F9869}" dt="2025-08-18T19:10:01.256" v="834"/>
-          <ac:picMkLst>
-            <pc:docMk/>
-            <pc:sldMk cId="4106440066" sldId="276"/>
-            <ac:picMk id="5" creationId="{E919E1AF-53FA-9466-7BB4-674F4316F3B4}"/>
-          </ac:picMkLst>
-        </pc:picChg>
       </pc:sldChg>
     </pc:docChg>
   </pc:docChgLst>
@@ -3767,7 +1456,7 @@
           <a:p>
             <a:fld id="{56F18234-2FBA-41B5-BFE7-D52526C53AEF}" type="datetimeFigureOut">
               <a:rPr lang="pt-BR" smtClean="0"/>
-              <a:t>03/09/2025</a:t>
+              <a:t>04/09/2025</a:t>
             </a:fld>
             <a:endParaRPr lang="pt-BR"/>
           </a:p>
@@ -3965,7 +1654,7 @@
           <a:p>
             <a:fld id="{56F18234-2FBA-41B5-BFE7-D52526C53AEF}" type="datetimeFigureOut">
               <a:rPr lang="pt-BR" smtClean="0"/>
-              <a:t>03/09/2025</a:t>
+              <a:t>04/09/2025</a:t>
             </a:fld>
             <a:endParaRPr lang="pt-BR"/>
           </a:p>
@@ -4173,7 +1862,7 @@
           <a:p>
             <a:fld id="{56F18234-2FBA-41B5-BFE7-D52526C53AEF}" type="datetimeFigureOut">
               <a:rPr lang="pt-BR" smtClean="0"/>
-              <a:t>03/09/2025</a:t>
+              <a:t>04/09/2025</a:t>
             </a:fld>
             <a:endParaRPr lang="pt-BR"/>
           </a:p>
@@ -4371,7 +2060,7 @@
           <a:p>
             <a:fld id="{56F18234-2FBA-41B5-BFE7-D52526C53AEF}" type="datetimeFigureOut">
               <a:rPr lang="pt-BR" smtClean="0"/>
-              <a:t>03/09/2025</a:t>
+              <a:t>04/09/2025</a:t>
             </a:fld>
             <a:endParaRPr lang="pt-BR"/>
           </a:p>
@@ -4646,7 +2335,7 @@
           <a:p>
             <a:fld id="{56F18234-2FBA-41B5-BFE7-D52526C53AEF}" type="datetimeFigureOut">
               <a:rPr lang="pt-BR" smtClean="0"/>
-              <a:t>03/09/2025</a:t>
+              <a:t>04/09/2025</a:t>
             </a:fld>
             <a:endParaRPr lang="pt-BR"/>
           </a:p>
@@ -4911,7 +2600,7 @@
           <a:p>
             <a:fld id="{56F18234-2FBA-41B5-BFE7-D52526C53AEF}" type="datetimeFigureOut">
               <a:rPr lang="pt-BR" smtClean="0"/>
-              <a:t>03/09/2025</a:t>
+              <a:t>04/09/2025</a:t>
             </a:fld>
             <a:endParaRPr lang="pt-BR"/>
           </a:p>
@@ -5323,7 +3012,7 @@
           <a:p>
             <a:fld id="{56F18234-2FBA-41B5-BFE7-D52526C53AEF}" type="datetimeFigureOut">
               <a:rPr lang="pt-BR" smtClean="0"/>
-              <a:t>03/09/2025</a:t>
+              <a:t>04/09/2025</a:t>
             </a:fld>
             <a:endParaRPr lang="pt-BR"/>
           </a:p>
@@ -5464,7 +3153,7 @@
           <a:p>
             <a:fld id="{56F18234-2FBA-41B5-BFE7-D52526C53AEF}" type="datetimeFigureOut">
               <a:rPr lang="pt-BR" smtClean="0"/>
-              <a:t>03/09/2025</a:t>
+              <a:t>04/09/2025</a:t>
             </a:fld>
             <a:endParaRPr lang="pt-BR"/>
           </a:p>
@@ -5577,7 +3266,7 @@
           <a:p>
             <a:fld id="{56F18234-2FBA-41B5-BFE7-D52526C53AEF}" type="datetimeFigureOut">
               <a:rPr lang="pt-BR" smtClean="0"/>
-              <a:t>03/09/2025</a:t>
+              <a:t>04/09/2025</a:t>
             </a:fld>
             <a:endParaRPr lang="pt-BR"/>
           </a:p>
@@ -5888,7 +3577,7 @@
           <a:p>
             <a:fld id="{56F18234-2FBA-41B5-BFE7-D52526C53AEF}" type="datetimeFigureOut">
               <a:rPr lang="pt-BR" smtClean="0"/>
-              <a:t>03/09/2025</a:t>
+              <a:t>04/09/2025</a:t>
             </a:fld>
             <a:endParaRPr lang="pt-BR"/>
           </a:p>
@@ -6176,7 +3865,7 @@
           <a:p>
             <a:fld id="{56F18234-2FBA-41B5-BFE7-D52526C53AEF}" type="datetimeFigureOut">
               <a:rPr lang="pt-BR" smtClean="0"/>
-              <a:t>03/09/2025</a:t>
+              <a:t>04/09/2025</a:t>
             </a:fld>
             <a:endParaRPr lang="pt-BR"/>
           </a:p>
@@ -6417,7 +4106,7 @@
           <a:p>
             <a:fld id="{56F18234-2FBA-41B5-BFE7-D52526C53AEF}" type="datetimeFigureOut">
               <a:rPr lang="pt-BR" smtClean="0"/>
-              <a:t>03/09/2025</a:t>
+              <a:t>04/09/2025</a:t>
             </a:fld>
             <a:endParaRPr lang="pt-BR"/>
           </a:p>
@@ -8392,12 +6081,2722 @@
           </a:p>
         </p:txBody>
       </p:sp>
+      <p:graphicFrame>
+        <p:nvGraphicFramePr>
+          <p:cNvPr id="6" name="Tabela 5">
+            <a:extLst>
+              <a:ext uri="{FF2B5EF4-FFF2-40B4-BE49-F238E27FC236}">
+                <a16:creationId xmlns:a16="http://schemas.microsoft.com/office/drawing/2014/main" id="{BE38C40E-F58B-9FFB-527D-7B0D2C3AB70A}"/>
+              </a:ext>
+            </a:extLst>
+          </p:cNvPr>
+          <p:cNvGraphicFramePr>
+            <a:graphicFrameLocks noGrp="1"/>
+          </p:cNvGraphicFramePr>
+          <p:nvPr>
+            <p:extLst>
+              <p:ext uri="{D42A27DB-BD31-4B8C-83A1-F6EECF244321}">
+                <p14:modId xmlns:p14="http://schemas.microsoft.com/office/powerpoint/2010/main" val="1771091228"/>
+              </p:ext>
+            </p:extLst>
+          </p:nvPr>
+        </p:nvGraphicFramePr>
+        <p:xfrm>
+          <a:off x="5617439" y="2373321"/>
+          <a:ext cx="5818490" cy="3191359"/>
+        </p:xfrm>
+        <a:graphic>
+          <a:graphicData uri="http://schemas.openxmlformats.org/drawingml/2006/table">
+            <a:tbl>
+              <a:tblPr/>
+              <a:tblGrid>
+                <a:gridCol w="1546688">
+                  <a:extLst>
+                    <a:ext uri="{9D8B030D-6E8A-4147-A177-3AD203B41FA5}">
+                      <a16:colId xmlns:a16="http://schemas.microsoft.com/office/drawing/2014/main" val="4135503403"/>
+                    </a:ext>
+                  </a:extLst>
+                </a:gridCol>
+                <a:gridCol w="1012712">
+                  <a:extLst>
+                    <a:ext uri="{9D8B030D-6E8A-4147-A177-3AD203B41FA5}">
+                      <a16:colId xmlns:a16="http://schemas.microsoft.com/office/drawing/2014/main" val="2522455301"/>
+                    </a:ext>
+                  </a:extLst>
+                </a:gridCol>
+                <a:gridCol w="331433">
+                  <a:extLst>
+                    <a:ext uri="{9D8B030D-6E8A-4147-A177-3AD203B41FA5}">
+                      <a16:colId xmlns:a16="http://schemas.microsoft.com/office/drawing/2014/main" val="1403997485"/>
+                    </a:ext>
+                  </a:extLst>
+                </a:gridCol>
+                <a:gridCol w="883821">
+                  <a:extLst>
+                    <a:ext uri="{9D8B030D-6E8A-4147-A177-3AD203B41FA5}">
+                      <a16:colId xmlns:a16="http://schemas.microsoft.com/office/drawing/2014/main" val="3023076059"/>
+                    </a:ext>
+                  </a:extLst>
+                </a:gridCol>
+                <a:gridCol w="1235068">
+                  <a:extLst>
+                    <a:ext uri="{9D8B030D-6E8A-4147-A177-3AD203B41FA5}">
+                      <a16:colId xmlns:a16="http://schemas.microsoft.com/office/drawing/2014/main" val="2164156650"/>
+                    </a:ext>
+                  </a:extLst>
+                </a:gridCol>
+                <a:gridCol w="808768">
+                  <a:extLst>
+                    <a:ext uri="{9D8B030D-6E8A-4147-A177-3AD203B41FA5}">
+                      <a16:colId xmlns:a16="http://schemas.microsoft.com/office/drawing/2014/main" val="1178426066"/>
+                    </a:ext>
+                  </a:extLst>
+                </a:gridCol>
+              </a:tblGrid>
+              <a:tr h="469574">
+                <a:tc>
+                  <a:txBody>
+                    <a:bodyPr/>
+                    <a:lstStyle/>
+                    <a:p>
+                      <a:pPr algn="ctr" fontAlgn="ctr">
+                        <a:buNone/>
+                      </a:pPr>
+                      <a:r>
+                        <a:rPr lang="en-US" sz="1500" b="1" i="0" u="none" strike="noStrike">
+                          <a:solidFill>
+                            <a:srgbClr val="FFFFFF"/>
+                          </a:solidFill>
+                          <a:effectLst/>
+                          <a:latin typeface="Aptos Narrow" panose="020B0004020202020204" pitchFamily="34" charset="0"/>
+                        </a:rPr>
+                        <a:t>Classes</a:t>
+                      </a:r>
+                    </a:p>
+                  </a:txBody>
+                  <a:tcPr marL="10310" marR="10310" marT="10310" marB="0" anchor="ctr">
+                    <a:lnL>
+                      <a:noFill/>
+                    </a:lnL>
+                    <a:lnR>
+                      <a:noFill/>
+                    </a:lnR>
+                    <a:lnT>
+                      <a:noFill/>
+                    </a:lnT>
+                    <a:lnB>
+                      <a:noFill/>
+                    </a:lnB>
+                    <a:solidFill>
+                      <a:srgbClr val="002060"/>
+                    </a:solidFill>
+                  </a:tcPr>
+                </a:tc>
+                <a:tc>
+                  <a:txBody>
+                    <a:bodyPr/>
+                    <a:lstStyle/>
+                    <a:p>
+                      <a:pPr algn="ctr" fontAlgn="ctr">
+                        <a:buNone/>
+                      </a:pPr>
+                      <a:r>
+                        <a:rPr lang="en-US" sz="1500" b="1" i="0" u="none" strike="noStrike">
+                          <a:solidFill>
+                            <a:srgbClr val="FFFFFF"/>
+                          </a:solidFill>
+                          <a:effectLst/>
+                          <a:latin typeface="Aptos Narrow" panose="020B0004020202020204" pitchFamily="34" charset="0"/>
+                        </a:rPr>
+                        <a:t>Frequência</a:t>
+                      </a:r>
+                    </a:p>
+                  </a:txBody>
+                  <a:tcPr marL="10310" marR="10310" marT="10310" marB="0" anchor="ctr">
+                    <a:lnL>
+                      <a:noFill/>
+                    </a:lnL>
+                    <a:lnR>
+                      <a:noFill/>
+                    </a:lnR>
+                    <a:lnT>
+                      <a:noFill/>
+                    </a:lnT>
+                    <a:lnB>
+                      <a:noFill/>
+                    </a:lnB>
+                    <a:solidFill>
+                      <a:srgbClr val="002060"/>
+                    </a:solidFill>
+                  </a:tcPr>
+                </a:tc>
+                <a:tc>
+                  <a:txBody>
+                    <a:bodyPr/>
+                    <a:lstStyle/>
+                    <a:p>
+                      <a:pPr algn="ctr" fontAlgn="ctr">
+                        <a:buNone/>
+                      </a:pPr>
+                      <a:r>
+                        <a:rPr lang="en-US" sz="1500" b="1" i="0" u="none" strike="noStrike">
+                          <a:solidFill>
+                            <a:srgbClr val="FFFFFF"/>
+                          </a:solidFill>
+                          <a:effectLst/>
+                          <a:latin typeface="Aptos Narrow" panose="020B0004020202020204" pitchFamily="34" charset="0"/>
+                        </a:rPr>
+                        <a:t> </a:t>
+                      </a:r>
+                    </a:p>
+                  </a:txBody>
+                  <a:tcPr marL="10310" marR="10310" marT="10310" marB="0" anchor="ctr">
+                    <a:lnL>
+                      <a:noFill/>
+                    </a:lnL>
+                    <a:lnR>
+                      <a:noFill/>
+                    </a:lnR>
+                    <a:lnT>
+                      <a:noFill/>
+                    </a:lnT>
+                    <a:lnB>
+                      <a:noFill/>
+                    </a:lnB>
+                    <a:solidFill>
+                      <a:srgbClr val="002060"/>
+                    </a:solidFill>
+                  </a:tcPr>
+                </a:tc>
+                <a:tc>
+                  <a:txBody>
+                    <a:bodyPr/>
+                    <a:lstStyle/>
+                    <a:p>
+                      <a:pPr algn="ctr" fontAlgn="ctr">
+                        <a:buNone/>
+                      </a:pPr>
+                      <a:r>
+                        <a:rPr lang="en-US" sz="1500" b="1" i="0" u="none" strike="noStrike">
+                          <a:solidFill>
+                            <a:srgbClr val="FFFFFF"/>
+                          </a:solidFill>
+                          <a:effectLst/>
+                          <a:latin typeface="Aptos Narrow" panose="020B0004020202020204" pitchFamily="34" charset="0"/>
+                        </a:rPr>
+                        <a:t>Precisão</a:t>
+                      </a:r>
+                    </a:p>
+                  </a:txBody>
+                  <a:tcPr marL="10310" marR="10310" marT="10310" marB="0" anchor="ctr">
+                    <a:lnL>
+                      <a:noFill/>
+                    </a:lnL>
+                    <a:lnR>
+                      <a:noFill/>
+                    </a:lnR>
+                    <a:lnT>
+                      <a:noFill/>
+                    </a:lnT>
+                    <a:lnB>
+                      <a:noFill/>
+                    </a:lnB>
+                    <a:solidFill>
+                      <a:srgbClr val="002060"/>
+                    </a:solidFill>
+                  </a:tcPr>
+                </a:tc>
+                <a:tc>
+                  <a:txBody>
+                    <a:bodyPr/>
+                    <a:lstStyle/>
+                    <a:p>
+                      <a:pPr algn="ctr" fontAlgn="ctr">
+                        <a:buNone/>
+                      </a:pPr>
+                      <a:r>
+                        <a:rPr lang="en-US" sz="1500" b="1" i="0" u="none" strike="noStrike">
+                          <a:solidFill>
+                            <a:srgbClr val="FFFFFF"/>
+                          </a:solidFill>
+                          <a:effectLst/>
+                          <a:latin typeface="Aptos Narrow" panose="020B0004020202020204" pitchFamily="34" charset="0"/>
+                        </a:rPr>
+                        <a:t>Sensibilidade</a:t>
+                      </a:r>
+                    </a:p>
+                  </a:txBody>
+                  <a:tcPr marL="10310" marR="10310" marT="10310" marB="0" anchor="ctr">
+                    <a:lnL>
+                      <a:noFill/>
+                    </a:lnL>
+                    <a:lnR>
+                      <a:noFill/>
+                    </a:lnR>
+                    <a:lnT>
+                      <a:noFill/>
+                    </a:lnT>
+                    <a:lnB>
+                      <a:noFill/>
+                    </a:lnB>
+                    <a:solidFill>
+                      <a:srgbClr val="002060"/>
+                    </a:solidFill>
+                  </a:tcPr>
+                </a:tc>
+                <a:tc>
+                  <a:txBody>
+                    <a:bodyPr/>
+                    <a:lstStyle/>
+                    <a:p>
+                      <a:pPr algn="ctr" fontAlgn="ctr">
+                        <a:buNone/>
+                      </a:pPr>
+                      <a:r>
+                        <a:rPr lang="en-US" sz="1500" b="1" i="0" u="none" strike="noStrike">
+                          <a:solidFill>
+                            <a:srgbClr val="FFFFFF"/>
+                          </a:solidFill>
+                          <a:effectLst/>
+                          <a:latin typeface="Aptos Narrow" panose="020B0004020202020204" pitchFamily="34" charset="0"/>
+                        </a:rPr>
+                        <a:t>F1-Score</a:t>
+                      </a:r>
+                    </a:p>
+                  </a:txBody>
+                  <a:tcPr marL="10310" marR="10310" marT="10310" marB="0" anchor="ctr">
+                    <a:lnL>
+                      <a:noFill/>
+                    </a:lnL>
+                    <a:lnR>
+                      <a:noFill/>
+                    </a:lnR>
+                    <a:lnT>
+                      <a:noFill/>
+                    </a:lnT>
+                    <a:lnB>
+                      <a:noFill/>
+                    </a:lnB>
+                    <a:solidFill>
+                      <a:srgbClr val="002060"/>
+                    </a:solidFill>
+                  </a:tcPr>
+                </a:tc>
+                <a:extLst>
+                  <a:ext uri="{0D108BD9-81ED-4DB2-BD59-A6C34878D82A}">
+                    <a16:rowId xmlns:a16="http://schemas.microsoft.com/office/drawing/2014/main" val="3115098224"/>
+                  </a:ext>
+                </a:extLst>
+              </a:tr>
+              <a:tr h="247435">
+                <a:tc>
+                  <a:txBody>
+                    <a:bodyPr/>
+                    <a:lstStyle/>
+                    <a:p>
+                      <a:pPr algn="ctr" fontAlgn="ctr">
+                        <a:buNone/>
+                      </a:pPr>
+                      <a:r>
+                        <a:rPr lang="en-US" sz="1500" b="1" i="0" u="none" strike="noStrike">
+                          <a:solidFill>
+                            <a:srgbClr val="002060"/>
+                          </a:solidFill>
+                          <a:effectLst/>
+                          <a:latin typeface="Aptos Narrow" panose="020B0004020202020204" pitchFamily="34" charset="0"/>
+                        </a:rPr>
+                        <a:t>0</a:t>
+                      </a:r>
+                    </a:p>
+                  </a:txBody>
+                  <a:tcPr marL="10310" marR="10310" marT="10310" marB="0" anchor="ctr">
+                    <a:lnL>
+                      <a:noFill/>
+                    </a:lnL>
+                    <a:lnR>
+                      <a:noFill/>
+                    </a:lnR>
+                    <a:lnT>
+                      <a:noFill/>
+                    </a:lnT>
+                    <a:lnB>
+                      <a:noFill/>
+                    </a:lnB>
+                    <a:noFill/>
+                  </a:tcPr>
+                </a:tc>
+                <a:tc>
+                  <a:txBody>
+                    <a:bodyPr/>
+                    <a:lstStyle/>
+                    <a:p>
+                      <a:pPr algn="ctr" fontAlgn="ctr">
+                        <a:buNone/>
+                      </a:pPr>
+                      <a:r>
+                        <a:rPr lang="en-US" sz="1500" b="0" i="0" u="none" strike="noStrike">
+                          <a:solidFill>
+                            <a:srgbClr val="002060"/>
+                          </a:solidFill>
+                          <a:effectLst/>
+                          <a:latin typeface="Aptos Narrow" panose="020B0004020202020204" pitchFamily="34" charset="0"/>
+                        </a:rPr>
+                        <a:t>3</a:t>
+                      </a:r>
+                    </a:p>
+                  </a:txBody>
+                  <a:tcPr marL="10310" marR="10310" marT="10310" marB="0" anchor="ctr">
+                    <a:lnL>
+                      <a:noFill/>
+                    </a:lnL>
+                    <a:lnR>
+                      <a:noFill/>
+                    </a:lnR>
+                    <a:lnT>
+                      <a:noFill/>
+                    </a:lnT>
+                    <a:lnB>
+                      <a:noFill/>
+                    </a:lnB>
+                    <a:noFill/>
+                  </a:tcPr>
+                </a:tc>
+                <a:tc>
+                  <a:txBody>
+                    <a:bodyPr/>
+                    <a:lstStyle/>
+                    <a:p>
+                      <a:pPr algn="ctr" fontAlgn="ctr">
+                        <a:buNone/>
+                      </a:pPr>
+                      <a:endParaRPr lang="en-US" sz="1500" b="0" i="0" u="none" strike="noStrike">
+                        <a:solidFill>
+                          <a:srgbClr val="002060"/>
+                        </a:solidFill>
+                        <a:effectLst/>
+                        <a:latin typeface="Aptos Narrow" panose="020B0004020202020204" pitchFamily="34" charset="0"/>
+                      </a:endParaRPr>
+                    </a:p>
+                  </a:txBody>
+                  <a:tcPr marL="10310" marR="10310" marT="10310" marB="0" anchor="ctr">
+                    <a:lnL>
+                      <a:noFill/>
+                    </a:lnL>
+                    <a:lnR>
+                      <a:noFill/>
+                    </a:lnR>
+                    <a:lnT>
+                      <a:noFill/>
+                    </a:lnT>
+                    <a:lnB>
+                      <a:noFill/>
+                    </a:lnB>
+                    <a:noFill/>
+                  </a:tcPr>
+                </a:tc>
+                <a:tc>
+                  <a:txBody>
+                    <a:bodyPr/>
+                    <a:lstStyle/>
+                    <a:p>
+                      <a:pPr algn="ctr" fontAlgn="ctr">
+                        <a:buNone/>
+                      </a:pPr>
+                      <a:r>
+                        <a:rPr lang="en-US" sz="1500" b="0" i="0" u="none" strike="noStrike">
+                          <a:solidFill>
+                            <a:srgbClr val="002060"/>
+                          </a:solidFill>
+                          <a:effectLst/>
+                          <a:latin typeface="Aptos Narrow" panose="020B0004020202020204" pitchFamily="34" charset="0"/>
+                        </a:rPr>
+                        <a:t>0.00</a:t>
+                      </a:r>
+                    </a:p>
+                  </a:txBody>
+                  <a:tcPr marL="10310" marR="10310" marT="10310" marB="0" anchor="ctr">
+                    <a:lnL>
+                      <a:noFill/>
+                    </a:lnL>
+                    <a:lnR>
+                      <a:noFill/>
+                    </a:lnR>
+                    <a:lnT>
+                      <a:noFill/>
+                    </a:lnT>
+                    <a:lnB>
+                      <a:noFill/>
+                    </a:lnB>
+                    <a:noFill/>
+                  </a:tcPr>
+                </a:tc>
+                <a:tc>
+                  <a:txBody>
+                    <a:bodyPr/>
+                    <a:lstStyle/>
+                    <a:p>
+                      <a:pPr algn="ctr" fontAlgn="ctr">
+                        <a:buNone/>
+                      </a:pPr>
+                      <a:r>
+                        <a:rPr lang="en-US" sz="1500" b="0" i="0" u="none" strike="noStrike">
+                          <a:solidFill>
+                            <a:srgbClr val="002060"/>
+                          </a:solidFill>
+                          <a:effectLst/>
+                          <a:latin typeface="Aptos Narrow" panose="020B0004020202020204" pitchFamily="34" charset="0"/>
+                        </a:rPr>
+                        <a:t>0.00</a:t>
+                      </a:r>
+                    </a:p>
+                  </a:txBody>
+                  <a:tcPr marL="10310" marR="10310" marT="10310" marB="0" anchor="ctr">
+                    <a:lnL>
+                      <a:noFill/>
+                    </a:lnL>
+                    <a:lnR>
+                      <a:noFill/>
+                    </a:lnR>
+                    <a:lnT>
+                      <a:noFill/>
+                    </a:lnT>
+                    <a:lnB>
+                      <a:noFill/>
+                    </a:lnB>
+                    <a:noFill/>
+                  </a:tcPr>
+                </a:tc>
+                <a:tc>
+                  <a:txBody>
+                    <a:bodyPr/>
+                    <a:lstStyle/>
+                    <a:p>
+                      <a:pPr algn="ctr" fontAlgn="ctr">
+                        <a:buNone/>
+                      </a:pPr>
+                      <a:r>
+                        <a:rPr lang="en-US" sz="1500" b="0" i="0" u="none" strike="noStrike">
+                          <a:solidFill>
+                            <a:srgbClr val="002060"/>
+                          </a:solidFill>
+                          <a:effectLst/>
+                          <a:latin typeface="Aptos Narrow" panose="020B0004020202020204" pitchFamily="34" charset="0"/>
+                        </a:rPr>
+                        <a:t>0.00</a:t>
+                      </a:r>
+                    </a:p>
+                  </a:txBody>
+                  <a:tcPr marL="10310" marR="10310" marT="10310" marB="0" anchor="ctr">
+                    <a:lnL>
+                      <a:noFill/>
+                    </a:lnL>
+                    <a:lnR>
+                      <a:noFill/>
+                    </a:lnR>
+                    <a:lnT>
+                      <a:noFill/>
+                    </a:lnT>
+                    <a:lnB>
+                      <a:noFill/>
+                    </a:lnB>
+                    <a:noFill/>
+                  </a:tcPr>
+                </a:tc>
+                <a:extLst>
+                  <a:ext uri="{0D108BD9-81ED-4DB2-BD59-A6C34878D82A}">
+                    <a16:rowId xmlns:a16="http://schemas.microsoft.com/office/drawing/2014/main" val="2207725334"/>
+                  </a:ext>
+                </a:extLst>
+              </a:tr>
+              <a:tr h="247435">
+                <a:tc>
+                  <a:txBody>
+                    <a:bodyPr/>
+                    <a:lstStyle/>
+                    <a:p>
+                      <a:pPr algn="ctr" fontAlgn="ctr">
+                        <a:buNone/>
+                      </a:pPr>
+                      <a:r>
+                        <a:rPr lang="en-US" sz="1500" b="1" i="0" u="none" strike="noStrike">
+                          <a:solidFill>
+                            <a:srgbClr val="002060"/>
+                          </a:solidFill>
+                          <a:effectLst/>
+                          <a:latin typeface="Aptos Narrow" panose="020B0004020202020204" pitchFamily="34" charset="0"/>
+                        </a:rPr>
+                        <a:t>1</a:t>
+                      </a:r>
+                    </a:p>
+                  </a:txBody>
+                  <a:tcPr marL="10310" marR="10310" marT="10310" marB="0" anchor="ctr">
+                    <a:lnL>
+                      <a:noFill/>
+                    </a:lnL>
+                    <a:lnR>
+                      <a:noFill/>
+                    </a:lnR>
+                    <a:lnT>
+                      <a:noFill/>
+                    </a:lnT>
+                    <a:lnB>
+                      <a:noFill/>
+                    </a:lnB>
+                    <a:noFill/>
+                  </a:tcPr>
+                </a:tc>
+                <a:tc>
+                  <a:txBody>
+                    <a:bodyPr/>
+                    <a:lstStyle/>
+                    <a:p>
+                      <a:pPr algn="ctr" fontAlgn="ctr">
+                        <a:buNone/>
+                      </a:pPr>
+                      <a:r>
+                        <a:rPr lang="en-US" sz="1500" b="0" i="0" u="none" strike="noStrike">
+                          <a:solidFill>
+                            <a:srgbClr val="002060"/>
+                          </a:solidFill>
+                          <a:effectLst/>
+                          <a:latin typeface="Aptos Narrow" panose="020B0004020202020204" pitchFamily="34" charset="0"/>
+                        </a:rPr>
+                        <a:t>26</a:t>
+                      </a:r>
+                    </a:p>
+                  </a:txBody>
+                  <a:tcPr marL="10310" marR="10310" marT="10310" marB="0" anchor="ctr">
+                    <a:lnL>
+                      <a:noFill/>
+                    </a:lnL>
+                    <a:lnR>
+                      <a:noFill/>
+                    </a:lnR>
+                    <a:lnT>
+                      <a:noFill/>
+                    </a:lnT>
+                    <a:lnB>
+                      <a:noFill/>
+                    </a:lnB>
+                    <a:noFill/>
+                  </a:tcPr>
+                </a:tc>
+                <a:tc>
+                  <a:txBody>
+                    <a:bodyPr/>
+                    <a:lstStyle/>
+                    <a:p>
+                      <a:pPr algn="ctr" fontAlgn="ctr">
+                        <a:buNone/>
+                      </a:pPr>
+                      <a:endParaRPr lang="en-US" sz="1500" b="0" i="0" u="none" strike="noStrike">
+                        <a:solidFill>
+                          <a:srgbClr val="002060"/>
+                        </a:solidFill>
+                        <a:effectLst/>
+                        <a:latin typeface="Aptos Narrow" panose="020B0004020202020204" pitchFamily="34" charset="0"/>
+                      </a:endParaRPr>
+                    </a:p>
+                  </a:txBody>
+                  <a:tcPr marL="10310" marR="10310" marT="10310" marB="0" anchor="ctr">
+                    <a:lnL>
+                      <a:noFill/>
+                    </a:lnL>
+                    <a:lnR>
+                      <a:noFill/>
+                    </a:lnR>
+                    <a:lnT>
+                      <a:noFill/>
+                    </a:lnT>
+                    <a:lnB>
+                      <a:noFill/>
+                    </a:lnB>
+                    <a:noFill/>
+                  </a:tcPr>
+                </a:tc>
+                <a:tc>
+                  <a:txBody>
+                    <a:bodyPr/>
+                    <a:lstStyle/>
+                    <a:p>
+                      <a:pPr algn="ctr" fontAlgn="ctr">
+                        <a:buNone/>
+                      </a:pPr>
+                      <a:r>
+                        <a:rPr lang="en-US" sz="1500" b="0" i="0" u="none" strike="noStrike">
+                          <a:solidFill>
+                            <a:srgbClr val="002060"/>
+                          </a:solidFill>
+                          <a:effectLst/>
+                          <a:latin typeface="Aptos Narrow" panose="020B0004020202020204" pitchFamily="34" charset="0"/>
+                        </a:rPr>
+                        <a:t>0.50</a:t>
+                      </a:r>
+                    </a:p>
+                  </a:txBody>
+                  <a:tcPr marL="10310" marR="10310" marT="10310" marB="0" anchor="ctr">
+                    <a:lnL>
+                      <a:noFill/>
+                    </a:lnL>
+                    <a:lnR>
+                      <a:noFill/>
+                    </a:lnR>
+                    <a:lnT>
+                      <a:noFill/>
+                    </a:lnT>
+                    <a:lnB>
+                      <a:noFill/>
+                    </a:lnB>
+                    <a:noFill/>
+                  </a:tcPr>
+                </a:tc>
+                <a:tc>
+                  <a:txBody>
+                    <a:bodyPr/>
+                    <a:lstStyle/>
+                    <a:p>
+                      <a:pPr algn="ctr" fontAlgn="ctr">
+                        <a:buNone/>
+                      </a:pPr>
+                      <a:r>
+                        <a:rPr lang="en-US" sz="1500" b="0" i="0" u="none" strike="noStrike">
+                          <a:solidFill>
+                            <a:srgbClr val="002060"/>
+                          </a:solidFill>
+                          <a:effectLst/>
+                          <a:latin typeface="Aptos Narrow" panose="020B0004020202020204" pitchFamily="34" charset="0"/>
+                        </a:rPr>
+                        <a:t>0.04</a:t>
+                      </a:r>
+                    </a:p>
+                  </a:txBody>
+                  <a:tcPr marL="10310" marR="10310" marT="10310" marB="0" anchor="ctr">
+                    <a:lnL>
+                      <a:noFill/>
+                    </a:lnL>
+                    <a:lnR>
+                      <a:noFill/>
+                    </a:lnR>
+                    <a:lnT>
+                      <a:noFill/>
+                    </a:lnT>
+                    <a:lnB>
+                      <a:noFill/>
+                    </a:lnB>
+                    <a:noFill/>
+                  </a:tcPr>
+                </a:tc>
+                <a:tc>
+                  <a:txBody>
+                    <a:bodyPr/>
+                    <a:lstStyle/>
+                    <a:p>
+                      <a:pPr algn="ctr" fontAlgn="ctr">
+                        <a:buNone/>
+                      </a:pPr>
+                      <a:r>
+                        <a:rPr lang="en-US" sz="1500" b="0" i="0" u="none" strike="noStrike">
+                          <a:solidFill>
+                            <a:srgbClr val="002060"/>
+                          </a:solidFill>
+                          <a:effectLst/>
+                          <a:latin typeface="Aptos Narrow" panose="020B0004020202020204" pitchFamily="34" charset="0"/>
+                        </a:rPr>
+                        <a:t>0.07</a:t>
+                      </a:r>
+                    </a:p>
+                  </a:txBody>
+                  <a:tcPr marL="10310" marR="10310" marT="10310" marB="0" anchor="ctr">
+                    <a:lnL>
+                      <a:noFill/>
+                    </a:lnL>
+                    <a:lnR>
+                      <a:noFill/>
+                    </a:lnR>
+                    <a:lnT>
+                      <a:noFill/>
+                    </a:lnT>
+                    <a:lnB>
+                      <a:noFill/>
+                    </a:lnB>
+                    <a:noFill/>
+                  </a:tcPr>
+                </a:tc>
+                <a:extLst>
+                  <a:ext uri="{0D108BD9-81ED-4DB2-BD59-A6C34878D82A}">
+                    <a16:rowId xmlns:a16="http://schemas.microsoft.com/office/drawing/2014/main" val="1875604679"/>
+                  </a:ext>
+                </a:extLst>
+              </a:tr>
+              <a:tr h="247435">
+                <a:tc>
+                  <a:txBody>
+                    <a:bodyPr/>
+                    <a:lstStyle/>
+                    <a:p>
+                      <a:pPr algn="ctr" fontAlgn="ctr">
+                        <a:buNone/>
+                      </a:pPr>
+                      <a:r>
+                        <a:rPr lang="en-US" sz="1500" b="1" i="0" u="none" strike="noStrike">
+                          <a:solidFill>
+                            <a:srgbClr val="002060"/>
+                          </a:solidFill>
+                          <a:effectLst/>
+                          <a:latin typeface="Aptos Narrow" panose="020B0004020202020204" pitchFamily="34" charset="0"/>
+                        </a:rPr>
+                        <a:t>2</a:t>
+                      </a:r>
+                    </a:p>
+                  </a:txBody>
+                  <a:tcPr marL="10310" marR="10310" marT="10310" marB="0" anchor="ctr">
+                    <a:lnL>
+                      <a:noFill/>
+                    </a:lnL>
+                    <a:lnR>
+                      <a:noFill/>
+                    </a:lnR>
+                    <a:lnT>
+                      <a:noFill/>
+                    </a:lnT>
+                    <a:lnB>
+                      <a:noFill/>
+                    </a:lnB>
+                    <a:noFill/>
+                  </a:tcPr>
+                </a:tc>
+                <a:tc>
+                  <a:txBody>
+                    <a:bodyPr/>
+                    <a:lstStyle/>
+                    <a:p>
+                      <a:pPr algn="ctr" fontAlgn="ctr">
+                        <a:buNone/>
+                      </a:pPr>
+                      <a:r>
+                        <a:rPr lang="en-US" sz="1500" b="0" i="0" u="none" strike="noStrike">
+                          <a:solidFill>
+                            <a:srgbClr val="002060"/>
+                          </a:solidFill>
+                          <a:effectLst/>
+                          <a:latin typeface="Aptos Narrow" panose="020B0004020202020204" pitchFamily="34" charset="0"/>
+                        </a:rPr>
+                        <a:t>198</a:t>
+                      </a:r>
+                    </a:p>
+                  </a:txBody>
+                  <a:tcPr marL="10310" marR="10310" marT="10310" marB="0" anchor="ctr">
+                    <a:lnL>
+                      <a:noFill/>
+                    </a:lnL>
+                    <a:lnR>
+                      <a:noFill/>
+                    </a:lnR>
+                    <a:lnT>
+                      <a:noFill/>
+                    </a:lnT>
+                    <a:lnB>
+                      <a:noFill/>
+                    </a:lnB>
+                    <a:noFill/>
+                  </a:tcPr>
+                </a:tc>
+                <a:tc>
+                  <a:txBody>
+                    <a:bodyPr/>
+                    <a:lstStyle/>
+                    <a:p>
+                      <a:pPr algn="ctr" fontAlgn="ctr">
+                        <a:buNone/>
+                      </a:pPr>
+                      <a:endParaRPr lang="en-US" sz="1500" b="0" i="0" u="none" strike="noStrike">
+                        <a:solidFill>
+                          <a:srgbClr val="002060"/>
+                        </a:solidFill>
+                        <a:effectLst/>
+                        <a:latin typeface="Aptos Narrow" panose="020B0004020202020204" pitchFamily="34" charset="0"/>
+                      </a:endParaRPr>
+                    </a:p>
+                  </a:txBody>
+                  <a:tcPr marL="10310" marR="10310" marT="10310" marB="0" anchor="ctr">
+                    <a:lnL>
+                      <a:noFill/>
+                    </a:lnL>
+                    <a:lnR>
+                      <a:noFill/>
+                    </a:lnR>
+                    <a:lnT>
+                      <a:noFill/>
+                    </a:lnT>
+                    <a:lnB>
+                      <a:noFill/>
+                    </a:lnB>
+                    <a:noFill/>
+                  </a:tcPr>
+                </a:tc>
+                <a:tc>
+                  <a:txBody>
+                    <a:bodyPr/>
+                    <a:lstStyle/>
+                    <a:p>
+                      <a:pPr algn="ctr" fontAlgn="ctr">
+                        <a:buNone/>
+                      </a:pPr>
+                      <a:r>
+                        <a:rPr lang="en-US" sz="1500" b="0" i="0" u="none" strike="noStrike">
+                          <a:solidFill>
+                            <a:srgbClr val="002060"/>
+                          </a:solidFill>
+                          <a:effectLst/>
+                          <a:latin typeface="Aptos Narrow" panose="020B0004020202020204" pitchFamily="34" charset="0"/>
+                        </a:rPr>
+                        <a:t>0.59</a:t>
+                      </a:r>
+                    </a:p>
+                  </a:txBody>
+                  <a:tcPr marL="10310" marR="10310" marT="10310" marB="0" anchor="ctr">
+                    <a:lnL>
+                      <a:noFill/>
+                    </a:lnL>
+                    <a:lnR>
+                      <a:noFill/>
+                    </a:lnR>
+                    <a:lnT>
+                      <a:noFill/>
+                    </a:lnT>
+                    <a:lnB>
+                      <a:noFill/>
+                    </a:lnB>
+                    <a:noFill/>
+                  </a:tcPr>
+                </a:tc>
+                <a:tc>
+                  <a:txBody>
+                    <a:bodyPr/>
+                    <a:lstStyle/>
+                    <a:p>
+                      <a:pPr algn="ctr" fontAlgn="ctr">
+                        <a:buNone/>
+                      </a:pPr>
+                      <a:r>
+                        <a:rPr lang="en-US" sz="1500" b="0" i="0" u="none" strike="noStrike">
+                          <a:solidFill>
+                            <a:srgbClr val="002060"/>
+                          </a:solidFill>
+                          <a:effectLst/>
+                          <a:latin typeface="Aptos Narrow" panose="020B0004020202020204" pitchFamily="34" charset="0"/>
+                        </a:rPr>
+                        <a:t>0.74</a:t>
+                      </a:r>
+                    </a:p>
+                  </a:txBody>
+                  <a:tcPr marL="10310" marR="10310" marT="10310" marB="0" anchor="ctr">
+                    <a:lnL>
+                      <a:noFill/>
+                    </a:lnL>
+                    <a:lnR>
+                      <a:noFill/>
+                    </a:lnR>
+                    <a:lnT>
+                      <a:noFill/>
+                    </a:lnT>
+                    <a:lnB>
+                      <a:noFill/>
+                    </a:lnB>
+                    <a:noFill/>
+                  </a:tcPr>
+                </a:tc>
+                <a:tc>
+                  <a:txBody>
+                    <a:bodyPr/>
+                    <a:lstStyle/>
+                    <a:p>
+                      <a:pPr algn="ctr" fontAlgn="ctr">
+                        <a:buNone/>
+                      </a:pPr>
+                      <a:r>
+                        <a:rPr lang="en-US" sz="1500" b="0" i="0" u="none" strike="noStrike">
+                          <a:solidFill>
+                            <a:srgbClr val="002060"/>
+                          </a:solidFill>
+                          <a:effectLst/>
+                          <a:latin typeface="Aptos Narrow" panose="020B0004020202020204" pitchFamily="34" charset="0"/>
+                        </a:rPr>
+                        <a:t>0.65</a:t>
+                      </a:r>
+                    </a:p>
+                  </a:txBody>
+                  <a:tcPr marL="10310" marR="10310" marT="10310" marB="0" anchor="ctr">
+                    <a:lnL>
+                      <a:noFill/>
+                    </a:lnL>
+                    <a:lnR>
+                      <a:noFill/>
+                    </a:lnR>
+                    <a:lnT>
+                      <a:noFill/>
+                    </a:lnT>
+                    <a:lnB>
+                      <a:noFill/>
+                    </a:lnB>
+                    <a:noFill/>
+                  </a:tcPr>
+                </a:tc>
+                <a:extLst>
+                  <a:ext uri="{0D108BD9-81ED-4DB2-BD59-A6C34878D82A}">
+                    <a16:rowId xmlns:a16="http://schemas.microsoft.com/office/drawing/2014/main" val="2063512595"/>
+                  </a:ext>
+                </a:extLst>
+              </a:tr>
+              <a:tr h="247435">
+                <a:tc>
+                  <a:txBody>
+                    <a:bodyPr/>
+                    <a:lstStyle/>
+                    <a:p>
+                      <a:pPr algn="ctr" fontAlgn="ctr">
+                        <a:buNone/>
+                      </a:pPr>
+                      <a:r>
+                        <a:rPr lang="en-US" sz="1500" b="1" i="0" u="none" strike="noStrike">
+                          <a:solidFill>
+                            <a:srgbClr val="002060"/>
+                          </a:solidFill>
+                          <a:effectLst/>
+                          <a:latin typeface="Aptos Narrow" panose="020B0004020202020204" pitchFamily="34" charset="0"/>
+                        </a:rPr>
+                        <a:t>3</a:t>
+                      </a:r>
+                    </a:p>
+                  </a:txBody>
+                  <a:tcPr marL="10310" marR="10310" marT="10310" marB="0" anchor="ctr">
+                    <a:lnL>
+                      <a:noFill/>
+                    </a:lnL>
+                    <a:lnR>
+                      <a:noFill/>
+                    </a:lnR>
+                    <a:lnT>
+                      <a:noFill/>
+                    </a:lnT>
+                    <a:lnB>
+                      <a:noFill/>
+                    </a:lnB>
+                    <a:noFill/>
+                  </a:tcPr>
+                </a:tc>
+                <a:tc>
+                  <a:txBody>
+                    <a:bodyPr/>
+                    <a:lstStyle/>
+                    <a:p>
+                      <a:pPr algn="ctr" fontAlgn="ctr">
+                        <a:buNone/>
+                      </a:pPr>
+                      <a:r>
+                        <a:rPr lang="en-US" sz="1500" b="0" i="0" u="none" strike="noStrike">
+                          <a:solidFill>
+                            <a:srgbClr val="002060"/>
+                          </a:solidFill>
+                          <a:effectLst/>
+                          <a:latin typeface="Aptos Narrow" panose="020B0004020202020204" pitchFamily="34" charset="0"/>
+                        </a:rPr>
+                        <a:t>300</a:t>
+                      </a:r>
+                    </a:p>
+                  </a:txBody>
+                  <a:tcPr marL="10310" marR="10310" marT="10310" marB="0" anchor="ctr">
+                    <a:lnL>
+                      <a:noFill/>
+                    </a:lnL>
+                    <a:lnR>
+                      <a:noFill/>
+                    </a:lnR>
+                    <a:lnT>
+                      <a:noFill/>
+                    </a:lnT>
+                    <a:lnB>
+                      <a:noFill/>
+                    </a:lnB>
+                    <a:noFill/>
+                  </a:tcPr>
+                </a:tc>
+                <a:tc>
+                  <a:txBody>
+                    <a:bodyPr/>
+                    <a:lstStyle/>
+                    <a:p>
+                      <a:pPr algn="ctr" fontAlgn="ctr">
+                        <a:buNone/>
+                      </a:pPr>
+                      <a:endParaRPr lang="en-US" sz="1500" b="0" i="0" u="none" strike="noStrike">
+                        <a:solidFill>
+                          <a:srgbClr val="002060"/>
+                        </a:solidFill>
+                        <a:effectLst/>
+                        <a:latin typeface="Aptos Narrow" panose="020B0004020202020204" pitchFamily="34" charset="0"/>
+                      </a:endParaRPr>
+                    </a:p>
+                  </a:txBody>
+                  <a:tcPr marL="10310" marR="10310" marT="10310" marB="0" anchor="ctr">
+                    <a:lnL>
+                      <a:noFill/>
+                    </a:lnL>
+                    <a:lnR>
+                      <a:noFill/>
+                    </a:lnR>
+                    <a:lnT>
+                      <a:noFill/>
+                    </a:lnT>
+                    <a:lnB>
+                      <a:noFill/>
+                    </a:lnB>
+                    <a:noFill/>
+                  </a:tcPr>
+                </a:tc>
+                <a:tc>
+                  <a:txBody>
+                    <a:bodyPr/>
+                    <a:lstStyle/>
+                    <a:p>
+                      <a:pPr algn="ctr" fontAlgn="ctr">
+                        <a:buNone/>
+                      </a:pPr>
+                      <a:r>
+                        <a:rPr lang="en-US" sz="1500" b="0" i="0" u="none" strike="noStrike">
+                          <a:solidFill>
+                            <a:srgbClr val="002060"/>
+                          </a:solidFill>
+                          <a:effectLst/>
+                          <a:latin typeface="Aptos Narrow" panose="020B0004020202020204" pitchFamily="34" charset="0"/>
+                        </a:rPr>
+                        <a:t>0.61</a:t>
+                      </a:r>
+                    </a:p>
+                  </a:txBody>
+                  <a:tcPr marL="10310" marR="10310" marT="10310" marB="0" anchor="ctr">
+                    <a:lnL>
+                      <a:noFill/>
+                    </a:lnL>
+                    <a:lnR>
+                      <a:noFill/>
+                    </a:lnR>
+                    <a:lnT>
+                      <a:noFill/>
+                    </a:lnT>
+                    <a:lnB>
+                      <a:noFill/>
+                    </a:lnB>
+                    <a:noFill/>
+                  </a:tcPr>
+                </a:tc>
+                <a:tc>
+                  <a:txBody>
+                    <a:bodyPr/>
+                    <a:lstStyle/>
+                    <a:p>
+                      <a:pPr algn="ctr" fontAlgn="ctr">
+                        <a:buNone/>
+                      </a:pPr>
+                      <a:r>
+                        <a:rPr lang="en-US" sz="1500" b="0" i="0" u="none" strike="noStrike">
+                          <a:solidFill>
+                            <a:srgbClr val="002060"/>
+                          </a:solidFill>
+                          <a:effectLst/>
+                          <a:latin typeface="Aptos Narrow" panose="020B0004020202020204" pitchFamily="34" charset="0"/>
+                        </a:rPr>
+                        <a:t>0.64</a:t>
+                      </a:r>
+                    </a:p>
+                  </a:txBody>
+                  <a:tcPr marL="10310" marR="10310" marT="10310" marB="0" anchor="ctr">
+                    <a:lnL>
+                      <a:noFill/>
+                    </a:lnL>
+                    <a:lnR>
+                      <a:noFill/>
+                    </a:lnR>
+                    <a:lnT>
+                      <a:noFill/>
+                    </a:lnT>
+                    <a:lnB>
+                      <a:noFill/>
+                    </a:lnB>
+                    <a:noFill/>
+                  </a:tcPr>
+                </a:tc>
+                <a:tc>
+                  <a:txBody>
+                    <a:bodyPr/>
+                    <a:lstStyle/>
+                    <a:p>
+                      <a:pPr algn="ctr" fontAlgn="ctr">
+                        <a:buNone/>
+                      </a:pPr>
+                      <a:r>
+                        <a:rPr lang="en-US" sz="1500" b="0" i="0" u="none" strike="noStrike">
+                          <a:solidFill>
+                            <a:srgbClr val="002060"/>
+                          </a:solidFill>
+                          <a:effectLst/>
+                          <a:latin typeface="Aptos Narrow" panose="020B0004020202020204" pitchFamily="34" charset="0"/>
+                        </a:rPr>
+                        <a:t>0.63</a:t>
+                      </a:r>
+                    </a:p>
+                  </a:txBody>
+                  <a:tcPr marL="10310" marR="10310" marT="10310" marB="0" anchor="ctr">
+                    <a:lnL>
+                      <a:noFill/>
+                    </a:lnL>
+                    <a:lnR>
+                      <a:noFill/>
+                    </a:lnR>
+                    <a:lnT>
+                      <a:noFill/>
+                    </a:lnT>
+                    <a:lnB>
+                      <a:noFill/>
+                    </a:lnB>
+                    <a:noFill/>
+                  </a:tcPr>
+                </a:tc>
+                <a:extLst>
+                  <a:ext uri="{0D108BD9-81ED-4DB2-BD59-A6C34878D82A}">
+                    <a16:rowId xmlns:a16="http://schemas.microsoft.com/office/drawing/2014/main" val="3139098190"/>
+                  </a:ext>
+                </a:extLst>
+              </a:tr>
+              <a:tr h="247435">
+                <a:tc>
+                  <a:txBody>
+                    <a:bodyPr/>
+                    <a:lstStyle/>
+                    <a:p>
+                      <a:pPr algn="ctr" fontAlgn="ctr">
+                        <a:buNone/>
+                      </a:pPr>
+                      <a:r>
+                        <a:rPr lang="en-US" sz="1500" b="1" i="0" u="none" strike="noStrike">
+                          <a:solidFill>
+                            <a:srgbClr val="002060"/>
+                          </a:solidFill>
+                          <a:effectLst/>
+                          <a:latin typeface="Aptos Narrow" panose="020B0004020202020204" pitchFamily="34" charset="0"/>
+                        </a:rPr>
+                        <a:t>4</a:t>
+                      </a:r>
+                    </a:p>
+                  </a:txBody>
+                  <a:tcPr marL="10310" marR="10310" marT="10310" marB="0" anchor="ctr">
+                    <a:lnL>
+                      <a:noFill/>
+                    </a:lnL>
+                    <a:lnR>
+                      <a:noFill/>
+                    </a:lnR>
+                    <a:lnT>
+                      <a:noFill/>
+                    </a:lnT>
+                    <a:lnB>
+                      <a:noFill/>
+                    </a:lnB>
+                    <a:noFill/>
+                  </a:tcPr>
+                </a:tc>
+                <a:tc>
+                  <a:txBody>
+                    <a:bodyPr/>
+                    <a:lstStyle/>
+                    <a:p>
+                      <a:pPr algn="ctr" fontAlgn="ctr">
+                        <a:buNone/>
+                      </a:pPr>
+                      <a:r>
+                        <a:rPr lang="en-US" sz="1500" b="0" i="0" u="none" strike="noStrike">
+                          <a:solidFill>
+                            <a:srgbClr val="002060"/>
+                          </a:solidFill>
+                          <a:effectLst/>
+                          <a:latin typeface="Aptos Narrow" panose="020B0004020202020204" pitchFamily="34" charset="0"/>
+                        </a:rPr>
+                        <a:t>105</a:t>
+                      </a:r>
+                    </a:p>
+                  </a:txBody>
+                  <a:tcPr marL="10310" marR="10310" marT="10310" marB="0" anchor="ctr">
+                    <a:lnL>
+                      <a:noFill/>
+                    </a:lnL>
+                    <a:lnR>
+                      <a:noFill/>
+                    </a:lnR>
+                    <a:lnT>
+                      <a:noFill/>
+                    </a:lnT>
+                    <a:lnB>
+                      <a:noFill/>
+                    </a:lnB>
+                    <a:noFill/>
+                  </a:tcPr>
+                </a:tc>
+                <a:tc>
+                  <a:txBody>
+                    <a:bodyPr/>
+                    <a:lstStyle/>
+                    <a:p>
+                      <a:pPr algn="ctr" fontAlgn="ctr">
+                        <a:buNone/>
+                      </a:pPr>
+                      <a:endParaRPr lang="en-US" sz="1500" b="0" i="0" u="none" strike="noStrike">
+                        <a:solidFill>
+                          <a:srgbClr val="002060"/>
+                        </a:solidFill>
+                        <a:effectLst/>
+                        <a:latin typeface="Aptos Narrow" panose="020B0004020202020204" pitchFamily="34" charset="0"/>
+                      </a:endParaRPr>
+                    </a:p>
+                  </a:txBody>
+                  <a:tcPr marL="10310" marR="10310" marT="10310" marB="0" anchor="ctr">
+                    <a:lnL>
+                      <a:noFill/>
+                    </a:lnL>
+                    <a:lnR>
+                      <a:noFill/>
+                    </a:lnR>
+                    <a:lnT>
+                      <a:noFill/>
+                    </a:lnT>
+                    <a:lnB>
+                      <a:noFill/>
+                    </a:lnB>
+                    <a:noFill/>
+                  </a:tcPr>
+                </a:tc>
+                <a:tc>
+                  <a:txBody>
+                    <a:bodyPr/>
+                    <a:lstStyle/>
+                    <a:p>
+                      <a:pPr algn="ctr" fontAlgn="ctr">
+                        <a:buNone/>
+                      </a:pPr>
+                      <a:r>
+                        <a:rPr lang="en-US" sz="1500" b="0" i="0" u="none" strike="noStrike">
+                          <a:solidFill>
+                            <a:srgbClr val="002060"/>
+                          </a:solidFill>
+                          <a:effectLst/>
+                          <a:latin typeface="Aptos Narrow" panose="020B0004020202020204" pitchFamily="34" charset="0"/>
+                        </a:rPr>
+                        <a:t>0.56</a:t>
+                      </a:r>
+                    </a:p>
+                  </a:txBody>
+                  <a:tcPr marL="10310" marR="10310" marT="10310" marB="0" anchor="ctr">
+                    <a:lnL>
+                      <a:noFill/>
+                    </a:lnL>
+                    <a:lnR>
+                      <a:noFill/>
+                    </a:lnR>
+                    <a:lnT>
+                      <a:noFill/>
+                    </a:lnT>
+                    <a:lnB>
+                      <a:noFill/>
+                    </a:lnB>
+                    <a:noFill/>
+                  </a:tcPr>
+                </a:tc>
+                <a:tc>
+                  <a:txBody>
+                    <a:bodyPr/>
+                    <a:lstStyle/>
+                    <a:p>
+                      <a:pPr algn="ctr" fontAlgn="ctr">
+                        <a:buNone/>
+                      </a:pPr>
+                      <a:r>
+                        <a:rPr lang="en-US" sz="1500" b="0" i="0" u="none" strike="noStrike">
+                          <a:solidFill>
+                            <a:srgbClr val="002060"/>
+                          </a:solidFill>
+                          <a:effectLst/>
+                          <a:latin typeface="Aptos Narrow" panose="020B0004020202020204" pitchFamily="34" charset="0"/>
+                        </a:rPr>
+                        <a:t>0.45</a:t>
+                      </a:r>
+                    </a:p>
+                  </a:txBody>
+                  <a:tcPr marL="10310" marR="10310" marT="10310" marB="0" anchor="ctr">
+                    <a:lnL>
+                      <a:noFill/>
+                    </a:lnL>
+                    <a:lnR>
+                      <a:noFill/>
+                    </a:lnR>
+                    <a:lnT>
+                      <a:noFill/>
+                    </a:lnT>
+                    <a:lnB>
+                      <a:noFill/>
+                    </a:lnB>
+                    <a:noFill/>
+                  </a:tcPr>
+                </a:tc>
+                <a:tc>
+                  <a:txBody>
+                    <a:bodyPr/>
+                    <a:lstStyle/>
+                    <a:p>
+                      <a:pPr algn="ctr" fontAlgn="ctr">
+                        <a:buNone/>
+                      </a:pPr>
+                      <a:r>
+                        <a:rPr lang="en-US" sz="1500" b="0" i="0" u="none" strike="noStrike">
+                          <a:solidFill>
+                            <a:srgbClr val="002060"/>
+                          </a:solidFill>
+                          <a:effectLst/>
+                          <a:latin typeface="Aptos Narrow" panose="020B0004020202020204" pitchFamily="34" charset="0"/>
+                        </a:rPr>
+                        <a:t>0.50</a:t>
+                      </a:r>
+                    </a:p>
+                  </a:txBody>
+                  <a:tcPr marL="10310" marR="10310" marT="10310" marB="0" anchor="ctr">
+                    <a:lnL>
+                      <a:noFill/>
+                    </a:lnL>
+                    <a:lnR>
+                      <a:noFill/>
+                    </a:lnR>
+                    <a:lnT>
+                      <a:noFill/>
+                    </a:lnT>
+                    <a:lnB>
+                      <a:noFill/>
+                    </a:lnB>
+                    <a:noFill/>
+                  </a:tcPr>
+                </a:tc>
+                <a:extLst>
+                  <a:ext uri="{0D108BD9-81ED-4DB2-BD59-A6C34878D82A}">
+                    <a16:rowId xmlns:a16="http://schemas.microsoft.com/office/drawing/2014/main" val="2294501078"/>
+                  </a:ext>
+                </a:extLst>
+              </a:tr>
+              <a:tr h="247435">
+                <a:tc>
+                  <a:txBody>
+                    <a:bodyPr/>
+                    <a:lstStyle/>
+                    <a:p>
+                      <a:pPr algn="ctr" fontAlgn="ctr">
+                        <a:buNone/>
+                      </a:pPr>
+                      <a:r>
+                        <a:rPr lang="en-US" sz="1500" b="1" i="0" u="none" strike="noStrike">
+                          <a:solidFill>
+                            <a:srgbClr val="002060"/>
+                          </a:solidFill>
+                          <a:effectLst/>
+                          <a:latin typeface="Aptos Narrow" panose="020B0004020202020204" pitchFamily="34" charset="0"/>
+                        </a:rPr>
+                        <a:t>5</a:t>
+                      </a:r>
+                    </a:p>
+                  </a:txBody>
+                  <a:tcPr marL="10310" marR="10310" marT="10310" marB="0" anchor="ctr">
+                    <a:lnL>
+                      <a:noFill/>
+                    </a:lnL>
+                    <a:lnR>
+                      <a:noFill/>
+                    </a:lnR>
+                    <a:lnT>
+                      <a:noFill/>
+                    </a:lnT>
+                    <a:lnB>
+                      <a:noFill/>
+                    </a:lnB>
+                    <a:noFill/>
+                  </a:tcPr>
+                </a:tc>
+                <a:tc>
+                  <a:txBody>
+                    <a:bodyPr/>
+                    <a:lstStyle/>
+                    <a:p>
+                      <a:pPr algn="ctr" fontAlgn="ctr">
+                        <a:buNone/>
+                      </a:pPr>
+                      <a:r>
+                        <a:rPr lang="en-US" sz="1500" b="0" i="0" u="none" strike="noStrike">
+                          <a:solidFill>
+                            <a:srgbClr val="002060"/>
+                          </a:solidFill>
+                          <a:effectLst/>
+                          <a:latin typeface="Aptos Narrow" panose="020B0004020202020204" pitchFamily="34" charset="0"/>
+                        </a:rPr>
+                        <a:t>17</a:t>
+                      </a:r>
+                    </a:p>
+                  </a:txBody>
+                  <a:tcPr marL="10310" marR="10310" marT="10310" marB="0" anchor="ctr">
+                    <a:lnL>
+                      <a:noFill/>
+                    </a:lnL>
+                    <a:lnR>
+                      <a:noFill/>
+                    </a:lnR>
+                    <a:lnT>
+                      <a:noFill/>
+                    </a:lnT>
+                    <a:lnB>
+                      <a:noFill/>
+                    </a:lnB>
+                    <a:noFill/>
+                  </a:tcPr>
+                </a:tc>
+                <a:tc>
+                  <a:txBody>
+                    <a:bodyPr/>
+                    <a:lstStyle/>
+                    <a:p>
+                      <a:pPr algn="ctr" fontAlgn="ctr">
+                        <a:buNone/>
+                      </a:pPr>
+                      <a:endParaRPr lang="en-US" sz="1500" b="0" i="0" u="none" strike="noStrike">
+                        <a:solidFill>
+                          <a:srgbClr val="002060"/>
+                        </a:solidFill>
+                        <a:effectLst/>
+                        <a:latin typeface="Aptos Narrow" panose="020B0004020202020204" pitchFamily="34" charset="0"/>
+                      </a:endParaRPr>
+                    </a:p>
+                  </a:txBody>
+                  <a:tcPr marL="10310" marR="10310" marT="10310" marB="0" anchor="ctr">
+                    <a:lnL>
+                      <a:noFill/>
+                    </a:lnL>
+                    <a:lnR>
+                      <a:noFill/>
+                    </a:lnR>
+                    <a:lnT>
+                      <a:noFill/>
+                    </a:lnT>
+                    <a:lnB>
+                      <a:noFill/>
+                    </a:lnB>
+                    <a:noFill/>
+                  </a:tcPr>
+                </a:tc>
+                <a:tc>
+                  <a:txBody>
+                    <a:bodyPr/>
+                    <a:lstStyle/>
+                    <a:p>
+                      <a:pPr algn="ctr" fontAlgn="ctr">
+                        <a:buNone/>
+                      </a:pPr>
+                      <a:r>
+                        <a:rPr lang="en-US" sz="1500" b="0" i="0" u="none" strike="noStrike">
+                          <a:solidFill>
+                            <a:srgbClr val="002060"/>
+                          </a:solidFill>
+                          <a:effectLst/>
+                          <a:latin typeface="Aptos Narrow" panose="020B0004020202020204" pitchFamily="34" charset="0"/>
+                        </a:rPr>
+                        <a:t>0.00</a:t>
+                      </a:r>
+                    </a:p>
+                  </a:txBody>
+                  <a:tcPr marL="10310" marR="10310" marT="10310" marB="0" anchor="ctr">
+                    <a:lnL>
+                      <a:noFill/>
+                    </a:lnL>
+                    <a:lnR>
+                      <a:noFill/>
+                    </a:lnR>
+                    <a:lnT>
+                      <a:noFill/>
+                    </a:lnT>
+                    <a:lnB>
+                      <a:noFill/>
+                    </a:lnB>
+                    <a:noFill/>
+                  </a:tcPr>
+                </a:tc>
+                <a:tc>
+                  <a:txBody>
+                    <a:bodyPr/>
+                    <a:lstStyle/>
+                    <a:p>
+                      <a:pPr algn="ctr" fontAlgn="ctr">
+                        <a:buNone/>
+                      </a:pPr>
+                      <a:r>
+                        <a:rPr lang="en-US" sz="1500" b="0" i="0" u="none" strike="noStrike">
+                          <a:solidFill>
+                            <a:srgbClr val="002060"/>
+                          </a:solidFill>
+                          <a:effectLst/>
+                          <a:latin typeface="Aptos Narrow" panose="020B0004020202020204" pitchFamily="34" charset="0"/>
+                        </a:rPr>
+                        <a:t>0.00</a:t>
+                      </a:r>
+                    </a:p>
+                  </a:txBody>
+                  <a:tcPr marL="10310" marR="10310" marT="10310" marB="0" anchor="ctr">
+                    <a:lnL>
+                      <a:noFill/>
+                    </a:lnL>
+                    <a:lnR>
+                      <a:noFill/>
+                    </a:lnR>
+                    <a:lnT>
+                      <a:noFill/>
+                    </a:lnT>
+                    <a:lnB>
+                      <a:noFill/>
+                    </a:lnB>
+                    <a:noFill/>
+                  </a:tcPr>
+                </a:tc>
+                <a:tc>
+                  <a:txBody>
+                    <a:bodyPr/>
+                    <a:lstStyle/>
+                    <a:p>
+                      <a:pPr algn="ctr" fontAlgn="ctr">
+                        <a:buNone/>
+                      </a:pPr>
+                      <a:r>
+                        <a:rPr lang="en-US" sz="1500" b="0" i="0" u="none" strike="noStrike">
+                          <a:solidFill>
+                            <a:srgbClr val="002060"/>
+                          </a:solidFill>
+                          <a:effectLst/>
+                          <a:latin typeface="Aptos Narrow" panose="020B0004020202020204" pitchFamily="34" charset="0"/>
+                        </a:rPr>
+                        <a:t>0.00</a:t>
+                      </a:r>
+                    </a:p>
+                  </a:txBody>
+                  <a:tcPr marL="10310" marR="10310" marT="10310" marB="0" anchor="ctr">
+                    <a:lnL>
+                      <a:noFill/>
+                    </a:lnL>
+                    <a:lnR>
+                      <a:noFill/>
+                    </a:lnR>
+                    <a:lnT>
+                      <a:noFill/>
+                    </a:lnT>
+                    <a:lnB>
+                      <a:noFill/>
+                    </a:lnB>
+                    <a:noFill/>
+                  </a:tcPr>
+                </a:tc>
+                <a:extLst>
+                  <a:ext uri="{0D108BD9-81ED-4DB2-BD59-A6C34878D82A}">
+                    <a16:rowId xmlns:a16="http://schemas.microsoft.com/office/drawing/2014/main" val="3562751483"/>
+                  </a:ext>
+                </a:extLst>
+              </a:tr>
+              <a:tr h="247435">
+                <a:tc>
+                  <a:txBody>
+                    <a:bodyPr/>
+                    <a:lstStyle/>
+                    <a:p>
+                      <a:pPr algn="ctr" fontAlgn="ctr">
+                        <a:buNone/>
+                      </a:pPr>
+                      <a:r>
+                        <a:rPr lang="en-US" sz="1500" b="1" i="0" u="none" strike="noStrike">
+                          <a:solidFill>
+                            <a:srgbClr val="002060"/>
+                          </a:solidFill>
+                          <a:effectLst/>
+                          <a:latin typeface="Aptos Narrow" panose="020B0004020202020204" pitchFamily="34" charset="0"/>
+                        </a:rPr>
+                        <a:t>6</a:t>
+                      </a:r>
+                    </a:p>
+                  </a:txBody>
+                  <a:tcPr marL="10310" marR="10310" marT="10310" marB="0" anchor="ctr">
+                    <a:lnL>
+                      <a:noFill/>
+                    </a:lnL>
+                    <a:lnR>
+                      <a:noFill/>
+                    </a:lnR>
+                    <a:lnT>
+                      <a:noFill/>
+                    </a:lnT>
+                    <a:lnB>
+                      <a:noFill/>
+                    </a:lnB>
+                    <a:noFill/>
+                  </a:tcPr>
+                </a:tc>
+                <a:tc>
+                  <a:txBody>
+                    <a:bodyPr/>
+                    <a:lstStyle/>
+                    <a:p>
+                      <a:pPr algn="ctr" fontAlgn="ctr">
+                        <a:buNone/>
+                      </a:pPr>
+                      <a:r>
+                        <a:rPr lang="en-US" sz="1500" b="0" i="0" u="none" strike="noStrike">
+                          <a:solidFill>
+                            <a:srgbClr val="002060"/>
+                          </a:solidFill>
+                          <a:effectLst/>
+                          <a:latin typeface="Aptos Narrow" panose="020B0004020202020204" pitchFamily="34" charset="0"/>
+                        </a:rPr>
+                        <a:t>1</a:t>
+                      </a:r>
+                    </a:p>
+                  </a:txBody>
+                  <a:tcPr marL="10310" marR="10310" marT="10310" marB="0" anchor="ctr">
+                    <a:lnL>
+                      <a:noFill/>
+                    </a:lnL>
+                    <a:lnR>
+                      <a:noFill/>
+                    </a:lnR>
+                    <a:lnT>
+                      <a:noFill/>
+                    </a:lnT>
+                    <a:lnB>
+                      <a:noFill/>
+                    </a:lnB>
+                    <a:noFill/>
+                  </a:tcPr>
+                </a:tc>
+                <a:tc>
+                  <a:txBody>
+                    <a:bodyPr/>
+                    <a:lstStyle/>
+                    <a:p>
+                      <a:pPr algn="ctr" fontAlgn="ctr">
+                        <a:buNone/>
+                      </a:pPr>
+                      <a:endParaRPr lang="en-US" sz="1500" b="0" i="0" u="none" strike="noStrike">
+                        <a:solidFill>
+                          <a:srgbClr val="002060"/>
+                        </a:solidFill>
+                        <a:effectLst/>
+                        <a:latin typeface="Aptos Narrow" panose="020B0004020202020204" pitchFamily="34" charset="0"/>
+                      </a:endParaRPr>
+                    </a:p>
+                  </a:txBody>
+                  <a:tcPr marL="10310" marR="10310" marT="10310" marB="0" anchor="ctr">
+                    <a:lnL>
+                      <a:noFill/>
+                    </a:lnL>
+                    <a:lnR>
+                      <a:noFill/>
+                    </a:lnR>
+                    <a:lnT>
+                      <a:noFill/>
+                    </a:lnT>
+                    <a:lnB>
+                      <a:noFill/>
+                    </a:lnB>
+                    <a:noFill/>
+                  </a:tcPr>
+                </a:tc>
+                <a:tc>
+                  <a:txBody>
+                    <a:bodyPr/>
+                    <a:lstStyle/>
+                    <a:p>
+                      <a:pPr algn="ctr" fontAlgn="ctr">
+                        <a:buNone/>
+                      </a:pPr>
+                      <a:r>
+                        <a:rPr lang="en-US" sz="1500" b="0" i="0" u="none" strike="noStrike">
+                          <a:solidFill>
+                            <a:srgbClr val="002060"/>
+                          </a:solidFill>
+                          <a:effectLst/>
+                          <a:latin typeface="Aptos Narrow" panose="020B0004020202020204" pitchFamily="34" charset="0"/>
+                        </a:rPr>
+                        <a:t>0.00</a:t>
+                      </a:r>
+                    </a:p>
+                  </a:txBody>
+                  <a:tcPr marL="10310" marR="10310" marT="10310" marB="0" anchor="ctr">
+                    <a:lnL>
+                      <a:noFill/>
+                    </a:lnL>
+                    <a:lnR>
+                      <a:noFill/>
+                    </a:lnR>
+                    <a:lnT>
+                      <a:noFill/>
+                    </a:lnT>
+                    <a:lnB>
+                      <a:noFill/>
+                    </a:lnB>
+                    <a:noFill/>
+                  </a:tcPr>
+                </a:tc>
+                <a:tc>
+                  <a:txBody>
+                    <a:bodyPr/>
+                    <a:lstStyle/>
+                    <a:p>
+                      <a:pPr algn="ctr" fontAlgn="ctr">
+                        <a:buNone/>
+                      </a:pPr>
+                      <a:r>
+                        <a:rPr lang="en-US" sz="1500" b="0" i="0" u="none" strike="noStrike">
+                          <a:solidFill>
+                            <a:srgbClr val="002060"/>
+                          </a:solidFill>
+                          <a:effectLst/>
+                          <a:latin typeface="Aptos Narrow" panose="020B0004020202020204" pitchFamily="34" charset="0"/>
+                        </a:rPr>
+                        <a:t>0.00</a:t>
+                      </a:r>
+                    </a:p>
+                  </a:txBody>
+                  <a:tcPr marL="10310" marR="10310" marT="10310" marB="0" anchor="ctr">
+                    <a:lnL>
+                      <a:noFill/>
+                    </a:lnL>
+                    <a:lnR>
+                      <a:noFill/>
+                    </a:lnR>
+                    <a:lnT>
+                      <a:noFill/>
+                    </a:lnT>
+                    <a:lnB>
+                      <a:noFill/>
+                    </a:lnB>
+                    <a:noFill/>
+                  </a:tcPr>
+                </a:tc>
+                <a:tc>
+                  <a:txBody>
+                    <a:bodyPr/>
+                    <a:lstStyle/>
+                    <a:p>
+                      <a:pPr algn="ctr" fontAlgn="ctr">
+                        <a:buNone/>
+                      </a:pPr>
+                      <a:r>
+                        <a:rPr lang="en-US" sz="1500" b="0" i="0" u="none" strike="noStrike">
+                          <a:solidFill>
+                            <a:srgbClr val="002060"/>
+                          </a:solidFill>
+                          <a:effectLst/>
+                          <a:latin typeface="Aptos Narrow" panose="020B0004020202020204" pitchFamily="34" charset="0"/>
+                        </a:rPr>
+                        <a:t>0.00</a:t>
+                      </a:r>
+                    </a:p>
+                  </a:txBody>
+                  <a:tcPr marL="10310" marR="10310" marT="10310" marB="0" anchor="ctr">
+                    <a:lnL>
+                      <a:noFill/>
+                    </a:lnL>
+                    <a:lnR>
+                      <a:noFill/>
+                    </a:lnR>
+                    <a:lnT>
+                      <a:noFill/>
+                    </a:lnT>
+                    <a:lnB>
+                      <a:noFill/>
+                    </a:lnB>
+                    <a:noFill/>
+                  </a:tcPr>
+                </a:tc>
+                <a:extLst>
+                  <a:ext uri="{0D108BD9-81ED-4DB2-BD59-A6C34878D82A}">
+                    <a16:rowId xmlns:a16="http://schemas.microsoft.com/office/drawing/2014/main" val="2291632936"/>
+                  </a:ext>
+                </a:extLst>
+              </a:tr>
+              <a:tr h="247435">
+                <a:tc>
+                  <a:txBody>
+                    <a:bodyPr/>
+                    <a:lstStyle/>
+                    <a:p>
+                      <a:pPr algn="ctr" fontAlgn="ctr">
+                        <a:buNone/>
+                      </a:pPr>
+                      <a:endParaRPr lang="en-US" sz="1500" b="1" i="0" u="none" strike="noStrike">
+                        <a:solidFill>
+                          <a:srgbClr val="002060"/>
+                        </a:solidFill>
+                        <a:effectLst/>
+                        <a:latin typeface="Aptos Narrow" panose="020B0004020202020204" pitchFamily="34" charset="0"/>
+                      </a:endParaRPr>
+                    </a:p>
+                  </a:txBody>
+                  <a:tcPr marL="10310" marR="10310" marT="10310" marB="0" anchor="ctr">
+                    <a:lnL>
+                      <a:noFill/>
+                    </a:lnL>
+                    <a:lnR>
+                      <a:noFill/>
+                    </a:lnR>
+                    <a:lnT>
+                      <a:noFill/>
+                    </a:lnT>
+                    <a:lnB>
+                      <a:noFill/>
+                    </a:lnB>
+                    <a:noFill/>
+                  </a:tcPr>
+                </a:tc>
+                <a:tc>
+                  <a:txBody>
+                    <a:bodyPr/>
+                    <a:lstStyle/>
+                    <a:p>
+                      <a:pPr algn="ctr" fontAlgn="ctr">
+                        <a:buNone/>
+                      </a:pPr>
+                      <a:endParaRPr lang="en-US" sz="1500" b="0" i="0" u="none" strike="noStrike">
+                        <a:solidFill>
+                          <a:srgbClr val="002060"/>
+                        </a:solidFill>
+                        <a:effectLst/>
+                        <a:latin typeface="Aptos Narrow" panose="020B0004020202020204" pitchFamily="34" charset="0"/>
+                      </a:endParaRPr>
+                    </a:p>
+                  </a:txBody>
+                  <a:tcPr marL="10310" marR="10310" marT="10310" marB="0" anchor="ctr">
+                    <a:lnL>
+                      <a:noFill/>
+                    </a:lnL>
+                    <a:lnR>
+                      <a:noFill/>
+                    </a:lnR>
+                    <a:lnT>
+                      <a:noFill/>
+                    </a:lnT>
+                    <a:lnB>
+                      <a:noFill/>
+                    </a:lnB>
+                    <a:noFill/>
+                  </a:tcPr>
+                </a:tc>
+                <a:tc>
+                  <a:txBody>
+                    <a:bodyPr/>
+                    <a:lstStyle/>
+                    <a:p>
+                      <a:pPr algn="ctr" fontAlgn="ctr">
+                        <a:buNone/>
+                      </a:pPr>
+                      <a:endParaRPr lang="en-US" sz="1500" b="0" i="0" u="none" strike="noStrike">
+                        <a:solidFill>
+                          <a:srgbClr val="002060"/>
+                        </a:solidFill>
+                        <a:effectLst/>
+                        <a:latin typeface="Aptos Narrow" panose="020B0004020202020204" pitchFamily="34" charset="0"/>
+                      </a:endParaRPr>
+                    </a:p>
+                  </a:txBody>
+                  <a:tcPr marL="10310" marR="10310" marT="10310" marB="0" anchor="ctr">
+                    <a:lnL>
+                      <a:noFill/>
+                    </a:lnL>
+                    <a:lnR>
+                      <a:noFill/>
+                    </a:lnR>
+                    <a:lnT>
+                      <a:noFill/>
+                    </a:lnT>
+                    <a:lnB>
+                      <a:noFill/>
+                    </a:lnB>
+                    <a:noFill/>
+                  </a:tcPr>
+                </a:tc>
+                <a:tc>
+                  <a:txBody>
+                    <a:bodyPr/>
+                    <a:lstStyle/>
+                    <a:p>
+                      <a:pPr algn="ctr" fontAlgn="ctr">
+                        <a:buNone/>
+                      </a:pPr>
+                      <a:endParaRPr lang="en-US" sz="1500" b="0" i="0" u="none" strike="noStrike">
+                        <a:solidFill>
+                          <a:srgbClr val="002060"/>
+                        </a:solidFill>
+                        <a:effectLst/>
+                        <a:latin typeface="Aptos Narrow" panose="020B0004020202020204" pitchFamily="34" charset="0"/>
+                      </a:endParaRPr>
+                    </a:p>
+                  </a:txBody>
+                  <a:tcPr marL="10310" marR="10310" marT="10310" marB="0" anchor="ctr">
+                    <a:lnL>
+                      <a:noFill/>
+                    </a:lnL>
+                    <a:lnR>
+                      <a:noFill/>
+                    </a:lnR>
+                    <a:lnT>
+                      <a:noFill/>
+                    </a:lnT>
+                    <a:lnB>
+                      <a:noFill/>
+                    </a:lnB>
+                    <a:noFill/>
+                  </a:tcPr>
+                </a:tc>
+                <a:tc>
+                  <a:txBody>
+                    <a:bodyPr/>
+                    <a:lstStyle/>
+                    <a:p>
+                      <a:pPr algn="ctr" fontAlgn="ctr">
+                        <a:buNone/>
+                      </a:pPr>
+                      <a:endParaRPr lang="en-US" sz="1500" b="0" i="0" u="none" strike="noStrike">
+                        <a:solidFill>
+                          <a:srgbClr val="002060"/>
+                        </a:solidFill>
+                        <a:effectLst/>
+                        <a:latin typeface="Aptos Narrow" panose="020B0004020202020204" pitchFamily="34" charset="0"/>
+                      </a:endParaRPr>
+                    </a:p>
+                  </a:txBody>
+                  <a:tcPr marL="10310" marR="10310" marT="10310" marB="0" anchor="ctr">
+                    <a:lnL>
+                      <a:noFill/>
+                    </a:lnL>
+                    <a:lnR>
+                      <a:noFill/>
+                    </a:lnR>
+                    <a:lnT>
+                      <a:noFill/>
+                    </a:lnT>
+                    <a:lnB>
+                      <a:noFill/>
+                    </a:lnB>
+                    <a:noFill/>
+                  </a:tcPr>
+                </a:tc>
+                <a:tc>
+                  <a:txBody>
+                    <a:bodyPr/>
+                    <a:lstStyle/>
+                    <a:p>
+                      <a:pPr algn="ctr" fontAlgn="ctr">
+                        <a:buNone/>
+                      </a:pPr>
+                      <a:endParaRPr lang="en-US" sz="1500" b="0" i="0" u="none" strike="noStrike">
+                        <a:solidFill>
+                          <a:srgbClr val="002060"/>
+                        </a:solidFill>
+                        <a:effectLst/>
+                        <a:latin typeface="Aptos Narrow" panose="020B0004020202020204" pitchFamily="34" charset="0"/>
+                      </a:endParaRPr>
+                    </a:p>
+                  </a:txBody>
+                  <a:tcPr marL="10310" marR="10310" marT="10310" marB="0" anchor="ctr">
+                    <a:lnL>
+                      <a:noFill/>
+                    </a:lnL>
+                    <a:lnR>
+                      <a:noFill/>
+                    </a:lnR>
+                    <a:lnT>
+                      <a:noFill/>
+                    </a:lnT>
+                    <a:lnB>
+                      <a:noFill/>
+                    </a:lnB>
+                    <a:noFill/>
+                  </a:tcPr>
+                </a:tc>
+                <a:extLst>
+                  <a:ext uri="{0D108BD9-81ED-4DB2-BD59-A6C34878D82A}">
+                    <a16:rowId xmlns:a16="http://schemas.microsoft.com/office/drawing/2014/main" val="1145051536"/>
+                  </a:ext>
+                </a:extLst>
+              </a:tr>
+              <a:tr h="247435">
+                <a:tc>
+                  <a:txBody>
+                    <a:bodyPr/>
+                    <a:lstStyle/>
+                    <a:p>
+                      <a:pPr algn="ctr" fontAlgn="ctr">
+                        <a:buNone/>
+                      </a:pPr>
+                      <a:r>
+                        <a:rPr lang="en-US" sz="1500" b="1" i="0" u="none" strike="noStrike">
+                          <a:solidFill>
+                            <a:srgbClr val="002060"/>
+                          </a:solidFill>
+                          <a:effectLst/>
+                          <a:latin typeface="Aptos Narrow" panose="020B0004020202020204" pitchFamily="34" charset="0"/>
+                        </a:rPr>
+                        <a:t>Acurácia</a:t>
+                      </a:r>
+                    </a:p>
+                  </a:txBody>
+                  <a:tcPr marL="10310" marR="10310" marT="10310" marB="0" anchor="ctr">
+                    <a:lnL>
+                      <a:noFill/>
+                    </a:lnL>
+                    <a:lnR>
+                      <a:noFill/>
+                    </a:lnR>
+                    <a:lnT>
+                      <a:noFill/>
+                    </a:lnT>
+                    <a:lnB>
+                      <a:noFill/>
+                    </a:lnB>
+                    <a:noFill/>
+                  </a:tcPr>
+                </a:tc>
+                <a:tc>
+                  <a:txBody>
+                    <a:bodyPr/>
+                    <a:lstStyle/>
+                    <a:p>
+                      <a:pPr algn="ctr" fontAlgn="ctr">
+                        <a:buNone/>
+                      </a:pPr>
+                      <a:r>
+                        <a:rPr lang="en-US" sz="1500" b="0" i="0" u="none" strike="noStrike">
+                          <a:solidFill>
+                            <a:srgbClr val="002060"/>
+                          </a:solidFill>
+                          <a:effectLst/>
+                          <a:latin typeface="Aptos Narrow" panose="020B0004020202020204" pitchFamily="34" charset="0"/>
+                        </a:rPr>
+                        <a:t>650</a:t>
+                      </a:r>
+                    </a:p>
+                  </a:txBody>
+                  <a:tcPr marL="10310" marR="10310" marT="10310" marB="0" anchor="ctr">
+                    <a:lnL>
+                      <a:noFill/>
+                    </a:lnL>
+                    <a:lnR>
+                      <a:noFill/>
+                    </a:lnR>
+                    <a:lnT>
+                      <a:noFill/>
+                    </a:lnT>
+                    <a:lnB>
+                      <a:noFill/>
+                    </a:lnB>
+                    <a:noFill/>
+                  </a:tcPr>
+                </a:tc>
+                <a:tc>
+                  <a:txBody>
+                    <a:bodyPr/>
+                    <a:lstStyle/>
+                    <a:p>
+                      <a:pPr algn="ctr" fontAlgn="ctr">
+                        <a:buNone/>
+                      </a:pPr>
+                      <a:endParaRPr lang="en-US" sz="1500" b="0" i="0" u="none" strike="noStrike">
+                        <a:solidFill>
+                          <a:srgbClr val="002060"/>
+                        </a:solidFill>
+                        <a:effectLst/>
+                        <a:latin typeface="Aptos Narrow" panose="020B0004020202020204" pitchFamily="34" charset="0"/>
+                      </a:endParaRPr>
+                    </a:p>
+                  </a:txBody>
+                  <a:tcPr marL="10310" marR="10310" marT="10310" marB="0" anchor="ctr">
+                    <a:lnL>
+                      <a:noFill/>
+                    </a:lnL>
+                    <a:lnR>
+                      <a:noFill/>
+                    </a:lnR>
+                    <a:lnT>
+                      <a:noFill/>
+                    </a:lnT>
+                    <a:lnB>
+                      <a:noFill/>
+                    </a:lnB>
+                    <a:noFill/>
+                  </a:tcPr>
+                </a:tc>
+                <a:tc>
+                  <a:txBody>
+                    <a:bodyPr/>
+                    <a:lstStyle/>
+                    <a:p>
+                      <a:pPr algn="ctr" fontAlgn="ctr">
+                        <a:buNone/>
+                      </a:pPr>
+                      <a:endParaRPr lang="en-US" sz="1500" b="0" i="0" u="none" strike="noStrike">
+                        <a:solidFill>
+                          <a:srgbClr val="002060"/>
+                        </a:solidFill>
+                        <a:effectLst/>
+                        <a:latin typeface="Aptos Narrow" panose="020B0004020202020204" pitchFamily="34" charset="0"/>
+                      </a:endParaRPr>
+                    </a:p>
+                  </a:txBody>
+                  <a:tcPr marL="10310" marR="10310" marT="10310" marB="0" anchor="ctr">
+                    <a:lnL>
+                      <a:noFill/>
+                    </a:lnL>
+                    <a:lnR>
+                      <a:noFill/>
+                    </a:lnR>
+                    <a:lnT>
+                      <a:noFill/>
+                    </a:lnT>
+                    <a:lnB>
+                      <a:noFill/>
+                    </a:lnB>
+                    <a:noFill/>
+                  </a:tcPr>
+                </a:tc>
+                <a:tc>
+                  <a:txBody>
+                    <a:bodyPr/>
+                    <a:lstStyle/>
+                    <a:p>
+                      <a:pPr algn="ctr" fontAlgn="ctr">
+                        <a:buNone/>
+                      </a:pPr>
+                      <a:endParaRPr lang="en-US" sz="1500" b="0" i="0" u="none" strike="noStrike">
+                        <a:solidFill>
+                          <a:srgbClr val="002060"/>
+                        </a:solidFill>
+                        <a:effectLst/>
+                        <a:latin typeface="Aptos Narrow" panose="020B0004020202020204" pitchFamily="34" charset="0"/>
+                      </a:endParaRPr>
+                    </a:p>
+                  </a:txBody>
+                  <a:tcPr marL="10310" marR="10310" marT="10310" marB="0" anchor="ctr">
+                    <a:lnL>
+                      <a:noFill/>
+                    </a:lnL>
+                    <a:lnR>
+                      <a:noFill/>
+                    </a:lnR>
+                    <a:lnT>
+                      <a:noFill/>
+                    </a:lnT>
+                    <a:lnB>
+                      <a:noFill/>
+                    </a:lnB>
+                    <a:noFill/>
+                  </a:tcPr>
+                </a:tc>
+                <a:tc>
+                  <a:txBody>
+                    <a:bodyPr/>
+                    <a:lstStyle/>
+                    <a:p>
+                      <a:pPr algn="ctr" fontAlgn="ctr">
+                        <a:buNone/>
+                      </a:pPr>
+                      <a:r>
+                        <a:rPr lang="en-US" sz="1500" b="1" i="0" u="none" strike="noStrike">
+                          <a:solidFill>
+                            <a:srgbClr val="002060"/>
+                          </a:solidFill>
+                          <a:effectLst/>
+                          <a:latin typeface="Aptos Narrow" panose="020B0004020202020204" pitchFamily="34" charset="0"/>
+                        </a:rPr>
+                        <a:t>0.59</a:t>
+                      </a:r>
+                    </a:p>
+                  </a:txBody>
+                  <a:tcPr marL="10310" marR="10310" marT="10310" marB="0" anchor="ctr">
+                    <a:lnL>
+                      <a:noFill/>
+                    </a:lnL>
+                    <a:lnR>
+                      <a:noFill/>
+                    </a:lnR>
+                    <a:lnT>
+                      <a:noFill/>
+                    </a:lnT>
+                    <a:lnB>
+                      <a:noFill/>
+                    </a:lnB>
+                    <a:noFill/>
+                  </a:tcPr>
+                </a:tc>
+                <a:extLst>
+                  <a:ext uri="{0D108BD9-81ED-4DB2-BD59-A6C34878D82A}">
+                    <a16:rowId xmlns:a16="http://schemas.microsoft.com/office/drawing/2014/main" val="3511136943"/>
+                  </a:ext>
+                </a:extLst>
+              </a:tr>
+              <a:tr h="247435">
+                <a:tc>
+                  <a:txBody>
+                    <a:bodyPr/>
+                    <a:lstStyle/>
+                    <a:p>
+                      <a:pPr algn="ctr" fontAlgn="ctr">
+                        <a:buNone/>
+                      </a:pPr>
+                      <a:r>
+                        <a:rPr lang="en-US" sz="1500" b="1" i="0" u="none" strike="noStrike">
+                          <a:solidFill>
+                            <a:srgbClr val="002060"/>
+                          </a:solidFill>
+                          <a:effectLst/>
+                          <a:latin typeface="Aptos Narrow" panose="020B0004020202020204" pitchFamily="34" charset="0"/>
+                        </a:rPr>
+                        <a:t>Média</a:t>
+                      </a:r>
+                    </a:p>
+                  </a:txBody>
+                  <a:tcPr marL="10310" marR="10310" marT="10310" marB="0" anchor="ctr">
+                    <a:lnL>
+                      <a:noFill/>
+                    </a:lnL>
+                    <a:lnR>
+                      <a:noFill/>
+                    </a:lnR>
+                    <a:lnT>
+                      <a:noFill/>
+                    </a:lnT>
+                    <a:lnB>
+                      <a:noFill/>
+                    </a:lnB>
+                    <a:noFill/>
+                  </a:tcPr>
+                </a:tc>
+                <a:tc>
+                  <a:txBody>
+                    <a:bodyPr/>
+                    <a:lstStyle/>
+                    <a:p>
+                      <a:pPr algn="ctr" fontAlgn="ctr">
+                        <a:buNone/>
+                      </a:pPr>
+                      <a:r>
+                        <a:rPr lang="en-US" sz="1500" b="0" i="0" u="none" strike="noStrike">
+                          <a:solidFill>
+                            <a:srgbClr val="002060"/>
+                          </a:solidFill>
+                          <a:effectLst/>
+                          <a:latin typeface="Aptos Narrow" panose="020B0004020202020204" pitchFamily="34" charset="0"/>
+                        </a:rPr>
+                        <a:t>650</a:t>
+                      </a:r>
+                    </a:p>
+                  </a:txBody>
+                  <a:tcPr marL="10310" marR="10310" marT="10310" marB="0" anchor="ctr">
+                    <a:lnL>
+                      <a:noFill/>
+                    </a:lnL>
+                    <a:lnR>
+                      <a:noFill/>
+                    </a:lnR>
+                    <a:lnT>
+                      <a:noFill/>
+                    </a:lnT>
+                    <a:lnB>
+                      <a:noFill/>
+                    </a:lnB>
+                    <a:noFill/>
+                  </a:tcPr>
+                </a:tc>
+                <a:tc>
+                  <a:txBody>
+                    <a:bodyPr/>
+                    <a:lstStyle/>
+                    <a:p>
+                      <a:pPr algn="ctr" fontAlgn="ctr">
+                        <a:buNone/>
+                      </a:pPr>
+                      <a:endParaRPr lang="en-US" sz="1500" b="0" i="0" u="none" strike="noStrike">
+                        <a:solidFill>
+                          <a:srgbClr val="002060"/>
+                        </a:solidFill>
+                        <a:effectLst/>
+                        <a:latin typeface="Aptos Narrow" panose="020B0004020202020204" pitchFamily="34" charset="0"/>
+                      </a:endParaRPr>
+                    </a:p>
+                  </a:txBody>
+                  <a:tcPr marL="10310" marR="10310" marT="10310" marB="0" anchor="ctr">
+                    <a:lnL>
+                      <a:noFill/>
+                    </a:lnL>
+                    <a:lnR>
+                      <a:noFill/>
+                    </a:lnR>
+                    <a:lnT>
+                      <a:noFill/>
+                    </a:lnT>
+                    <a:lnB>
+                      <a:noFill/>
+                    </a:lnB>
+                    <a:noFill/>
+                  </a:tcPr>
+                </a:tc>
+                <a:tc>
+                  <a:txBody>
+                    <a:bodyPr/>
+                    <a:lstStyle/>
+                    <a:p>
+                      <a:pPr algn="ctr" fontAlgn="ctr">
+                        <a:buNone/>
+                      </a:pPr>
+                      <a:r>
+                        <a:rPr lang="en-US" sz="1500" b="0" i="0" u="none" strike="noStrike">
+                          <a:solidFill>
+                            <a:srgbClr val="002060"/>
+                          </a:solidFill>
+                          <a:effectLst/>
+                          <a:latin typeface="Aptos Narrow" panose="020B0004020202020204" pitchFamily="34" charset="0"/>
+                        </a:rPr>
+                        <a:t>0.32</a:t>
+                      </a:r>
+                    </a:p>
+                  </a:txBody>
+                  <a:tcPr marL="10310" marR="10310" marT="10310" marB="0" anchor="ctr">
+                    <a:lnL>
+                      <a:noFill/>
+                    </a:lnL>
+                    <a:lnR>
+                      <a:noFill/>
+                    </a:lnR>
+                    <a:lnT>
+                      <a:noFill/>
+                    </a:lnT>
+                    <a:lnB>
+                      <a:noFill/>
+                    </a:lnB>
+                    <a:noFill/>
+                  </a:tcPr>
+                </a:tc>
+                <a:tc>
+                  <a:txBody>
+                    <a:bodyPr/>
+                    <a:lstStyle/>
+                    <a:p>
+                      <a:pPr algn="ctr" fontAlgn="ctr">
+                        <a:buNone/>
+                      </a:pPr>
+                      <a:r>
+                        <a:rPr lang="en-US" sz="1500" b="0" i="0" u="none" strike="noStrike">
+                          <a:solidFill>
+                            <a:srgbClr val="002060"/>
+                          </a:solidFill>
+                          <a:effectLst/>
+                          <a:latin typeface="Aptos Narrow" panose="020B0004020202020204" pitchFamily="34" charset="0"/>
+                        </a:rPr>
+                        <a:t>0.27</a:t>
+                      </a:r>
+                    </a:p>
+                  </a:txBody>
+                  <a:tcPr marL="10310" marR="10310" marT="10310" marB="0" anchor="ctr">
+                    <a:lnL>
+                      <a:noFill/>
+                    </a:lnL>
+                    <a:lnR>
+                      <a:noFill/>
+                    </a:lnR>
+                    <a:lnT>
+                      <a:noFill/>
+                    </a:lnT>
+                    <a:lnB>
+                      <a:noFill/>
+                    </a:lnB>
+                    <a:noFill/>
+                  </a:tcPr>
+                </a:tc>
+                <a:tc>
+                  <a:txBody>
+                    <a:bodyPr/>
+                    <a:lstStyle/>
+                    <a:p>
+                      <a:pPr algn="ctr" fontAlgn="ctr">
+                        <a:buNone/>
+                      </a:pPr>
+                      <a:r>
+                        <a:rPr lang="en-US" sz="1500" b="0" i="0" u="none" strike="noStrike">
+                          <a:solidFill>
+                            <a:srgbClr val="002060"/>
+                          </a:solidFill>
+                          <a:effectLst/>
+                          <a:latin typeface="Aptos Narrow" panose="020B0004020202020204" pitchFamily="34" charset="0"/>
+                        </a:rPr>
+                        <a:t>0.26</a:t>
+                      </a:r>
+                    </a:p>
+                  </a:txBody>
+                  <a:tcPr marL="10310" marR="10310" marT="10310" marB="0" anchor="ctr">
+                    <a:lnL>
+                      <a:noFill/>
+                    </a:lnL>
+                    <a:lnR>
+                      <a:noFill/>
+                    </a:lnR>
+                    <a:lnT>
+                      <a:noFill/>
+                    </a:lnT>
+                    <a:lnB>
+                      <a:noFill/>
+                    </a:lnB>
+                    <a:noFill/>
+                  </a:tcPr>
+                </a:tc>
+                <a:extLst>
+                  <a:ext uri="{0D108BD9-81ED-4DB2-BD59-A6C34878D82A}">
+                    <a16:rowId xmlns:a16="http://schemas.microsoft.com/office/drawing/2014/main" val="3585921985"/>
+                  </a:ext>
+                </a:extLst>
+              </a:tr>
+              <a:tr h="247435">
+                <a:tc>
+                  <a:txBody>
+                    <a:bodyPr/>
+                    <a:lstStyle/>
+                    <a:p>
+                      <a:pPr algn="ctr" fontAlgn="ctr">
+                        <a:buNone/>
+                      </a:pPr>
+                      <a:r>
+                        <a:rPr lang="en-US" sz="1500" b="1" i="0" u="none" strike="noStrike">
+                          <a:solidFill>
+                            <a:srgbClr val="002060"/>
+                          </a:solidFill>
+                          <a:effectLst/>
+                          <a:latin typeface="Aptos Narrow" panose="020B0004020202020204" pitchFamily="34" charset="0"/>
+                        </a:rPr>
+                        <a:t>Média Ponderada</a:t>
+                      </a:r>
+                    </a:p>
+                  </a:txBody>
+                  <a:tcPr marL="10310" marR="10310" marT="10310" marB="0" anchor="ctr">
+                    <a:lnL>
+                      <a:noFill/>
+                    </a:lnL>
+                    <a:lnR>
+                      <a:noFill/>
+                    </a:lnR>
+                    <a:lnT>
+                      <a:noFill/>
+                    </a:lnT>
+                    <a:lnB>
+                      <a:noFill/>
+                    </a:lnB>
+                    <a:noFill/>
+                  </a:tcPr>
+                </a:tc>
+                <a:tc>
+                  <a:txBody>
+                    <a:bodyPr/>
+                    <a:lstStyle/>
+                    <a:p>
+                      <a:pPr algn="ctr" fontAlgn="ctr">
+                        <a:buNone/>
+                      </a:pPr>
+                      <a:r>
+                        <a:rPr lang="en-US" sz="1500" b="0" i="0" u="none" strike="noStrike">
+                          <a:solidFill>
+                            <a:srgbClr val="002060"/>
+                          </a:solidFill>
+                          <a:effectLst/>
+                          <a:latin typeface="Aptos Narrow" panose="020B0004020202020204" pitchFamily="34" charset="0"/>
+                        </a:rPr>
+                        <a:t>650</a:t>
+                      </a:r>
+                    </a:p>
+                  </a:txBody>
+                  <a:tcPr marL="10310" marR="10310" marT="10310" marB="0" anchor="ctr">
+                    <a:lnL>
+                      <a:noFill/>
+                    </a:lnL>
+                    <a:lnR>
+                      <a:noFill/>
+                    </a:lnR>
+                    <a:lnT>
+                      <a:noFill/>
+                    </a:lnT>
+                    <a:lnB>
+                      <a:noFill/>
+                    </a:lnB>
+                    <a:noFill/>
+                  </a:tcPr>
+                </a:tc>
+                <a:tc>
+                  <a:txBody>
+                    <a:bodyPr/>
+                    <a:lstStyle/>
+                    <a:p>
+                      <a:pPr algn="ctr" fontAlgn="ctr">
+                        <a:buNone/>
+                      </a:pPr>
+                      <a:endParaRPr lang="en-US" sz="1500" b="0" i="0" u="none" strike="noStrike">
+                        <a:solidFill>
+                          <a:srgbClr val="002060"/>
+                        </a:solidFill>
+                        <a:effectLst/>
+                        <a:latin typeface="Aptos Narrow" panose="020B0004020202020204" pitchFamily="34" charset="0"/>
+                      </a:endParaRPr>
+                    </a:p>
+                  </a:txBody>
+                  <a:tcPr marL="10310" marR="10310" marT="10310" marB="0" anchor="ctr">
+                    <a:lnL>
+                      <a:noFill/>
+                    </a:lnL>
+                    <a:lnR>
+                      <a:noFill/>
+                    </a:lnR>
+                    <a:lnT>
+                      <a:noFill/>
+                    </a:lnT>
+                    <a:lnB>
+                      <a:noFill/>
+                    </a:lnB>
+                    <a:noFill/>
+                  </a:tcPr>
+                </a:tc>
+                <a:tc>
+                  <a:txBody>
+                    <a:bodyPr/>
+                    <a:lstStyle/>
+                    <a:p>
+                      <a:pPr algn="ctr" fontAlgn="ctr">
+                        <a:buNone/>
+                      </a:pPr>
+                      <a:r>
+                        <a:rPr lang="en-US" sz="1500" b="1" i="0" u="none" strike="noStrike">
+                          <a:solidFill>
+                            <a:srgbClr val="002060"/>
+                          </a:solidFill>
+                          <a:effectLst/>
+                          <a:latin typeface="Aptos Narrow" panose="020B0004020202020204" pitchFamily="34" charset="0"/>
+                        </a:rPr>
+                        <a:t>0.57</a:t>
+                      </a:r>
+                    </a:p>
+                  </a:txBody>
+                  <a:tcPr marL="10310" marR="10310" marT="10310" marB="0" anchor="ctr">
+                    <a:lnL>
+                      <a:noFill/>
+                    </a:lnL>
+                    <a:lnR>
+                      <a:noFill/>
+                    </a:lnR>
+                    <a:lnT>
+                      <a:noFill/>
+                    </a:lnT>
+                    <a:lnB>
+                      <a:noFill/>
+                    </a:lnB>
+                    <a:noFill/>
+                  </a:tcPr>
+                </a:tc>
+                <a:tc>
+                  <a:txBody>
+                    <a:bodyPr/>
+                    <a:lstStyle/>
+                    <a:p>
+                      <a:pPr algn="ctr" fontAlgn="ctr">
+                        <a:buNone/>
+                      </a:pPr>
+                      <a:r>
+                        <a:rPr lang="en-US" sz="1500" b="1" i="0" u="none" strike="noStrike">
+                          <a:solidFill>
+                            <a:srgbClr val="002060"/>
+                          </a:solidFill>
+                          <a:effectLst/>
+                          <a:latin typeface="Aptos Narrow" panose="020B0004020202020204" pitchFamily="34" charset="0"/>
+                        </a:rPr>
+                        <a:t>0.59</a:t>
+                      </a:r>
+                    </a:p>
+                  </a:txBody>
+                  <a:tcPr marL="10310" marR="10310" marT="10310" marB="0" anchor="ctr">
+                    <a:lnL>
+                      <a:noFill/>
+                    </a:lnL>
+                    <a:lnR>
+                      <a:noFill/>
+                    </a:lnR>
+                    <a:lnT>
+                      <a:noFill/>
+                    </a:lnT>
+                    <a:lnB>
+                      <a:noFill/>
+                    </a:lnB>
+                    <a:noFill/>
+                  </a:tcPr>
+                </a:tc>
+                <a:tc>
+                  <a:txBody>
+                    <a:bodyPr/>
+                    <a:lstStyle/>
+                    <a:p>
+                      <a:pPr algn="ctr" fontAlgn="ctr">
+                        <a:buNone/>
+                      </a:pPr>
+                      <a:r>
+                        <a:rPr lang="en-US" sz="1500" b="1" i="0" u="none" strike="noStrike">
+                          <a:solidFill>
+                            <a:srgbClr val="002060"/>
+                          </a:solidFill>
+                          <a:effectLst/>
+                          <a:latin typeface="Aptos Narrow" panose="020B0004020202020204" pitchFamily="34" charset="0"/>
+                        </a:rPr>
+                        <a:t>0.57</a:t>
+                      </a:r>
+                    </a:p>
+                  </a:txBody>
+                  <a:tcPr marL="10310" marR="10310" marT="10310" marB="0" anchor="ctr">
+                    <a:lnL>
+                      <a:noFill/>
+                    </a:lnL>
+                    <a:lnR>
+                      <a:noFill/>
+                    </a:lnR>
+                    <a:lnT>
+                      <a:noFill/>
+                    </a:lnT>
+                    <a:lnB>
+                      <a:noFill/>
+                    </a:lnB>
+                    <a:noFill/>
+                  </a:tcPr>
+                </a:tc>
+                <a:extLst>
+                  <a:ext uri="{0D108BD9-81ED-4DB2-BD59-A6C34878D82A}">
+                    <a16:rowId xmlns:a16="http://schemas.microsoft.com/office/drawing/2014/main" val="3242429263"/>
+                  </a:ext>
+                </a:extLst>
+              </a:tr>
+            </a:tbl>
+          </a:graphicData>
+        </a:graphic>
+      </p:graphicFrame>
       <p:pic>
         <p:nvPicPr>
-          <p:cNvPr id="5" name="Imagem 4">
-            <a:extLst>
-              <a:ext uri="{FF2B5EF4-FFF2-40B4-BE49-F238E27FC236}">
-                <a16:creationId xmlns:a16="http://schemas.microsoft.com/office/drawing/2014/main" id="{D80ACCA3-C007-11A4-550D-6ED1C2C7F0FA}"/>
+          <p:cNvPr id="10" name="Imagem 9">
+            <a:extLst>
+              <a:ext uri="{FF2B5EF4-FFF2-40B4-BE49-F238E27FC236}">
+                <a16:creationId xmlns:a16="http://schemas.microsoft.com/office/drawing/2014/main" id="{0BC0456A-7AAC-1A2F-4869-74219DF5C2BA}"/>
               </a:ext>
             </a:extLst>
           </p:cNvPr>
@@ -8414,110 +8813,14 @@
         </p:blipFill>
         <p:spPr>
           <a:xfrm>
-            <a:off x="1848669" y="1893841"/>
-            <a:ext cx="4684692" cy="4150317"/>
+            <a:off x="382448" y="1893600"/>
+            <a:ext cx="4685238" cy="4150800"/>
           </a:xfrm>
           <a:prstGeom prst="rect">
             <a:avLst/>
           </a:prstGeom>
         </p:spPr>
       </p:pic>
-      <p:sp>
-        <p:nvSpPr>
-          <p:cNvPr id="8" name="CaixaDeTexto 7">
-            <a:extLst>
-              <a:ext uri="{FF2B5EF4-FFF2-40B4-BE49-F238E27FC236}">
-                <a16:creationId xmlns:a16="http://schemas.microsoft.com/office/drawing/2014/main" id="{682D01B6-027A-8B6E-02B7-A29D71679E37}"/>
-              </a:ext>
-            </a:extLst>
-          </p:cNvPr>
-          <p:cNvSpPr txBox="1"/>
-          <p:nvPr/>
-        </p:nvSpPr>
-        <p:spPr>
-          <a:xfrm>
-            <a:off x="7115256" y="3230335"/>
-            <a:ext cx="3228075" cy="1477328"/>
-          </a:xfrm>
-          <a:prstGeom prst="rect">
-            <a:avLst/>
-          </a:prstGeom>
-          <a:noFill/>
-        </p:spPr>
-        <p:txBody>
-          <a:bodyPr wrap="square" rtlCol="0">
-            <a:spAutoFit/>
-          </a:bodyPr>
-          <a:lstStyle/>
-          <a:p>
-            <a:pPr marL="285750" indent="-285750">
-              <a:buFont typeface="Arial" panose="020B0604020202020204" pitchFamily="34" charset="0"/>
-              <a:buChar char="•"/>
-            </a:pPr>
-            <a:r>
-              <a:rPr lang="pt-BR">
-                <a:solidFill>
-                  <a:srgbClr val="0F2040"/>
-                </a:solidFill>
-              </a:rPr>
-              <a:t>Precisão: 0.99538</a:t>
-            </a:r>
-          </a:p>
-          <a:p>
-            <a:pPr marL="285750" indent="-285750">
-              <a:buFont typeface="Arial" panose="020B0604020202020204" pitchFamily="34" charset="0"/>
-              <a:buChar char="•"/>
-            </a:pPr>
-            <a:r>
-              <a:rPr lang="pt-BR">
-                <a:solidFill>
-                  <a:srgbClr val="0F2040"/>
-                </a:solidFill>
-              </a:rPr>
-              <a:t>Recall: 0.99845</a:t>
-            </a:r>
-          </a:p>
-          <a:p>
-            <a:pPr marL="285750" indent="-285750">
-              <a:buFont typeface="Arial" panose="020B0604020202020204" pitchFamily="34" charset="0"/>
-              <a:buChar char="•"/>
-            </a:pPr>
-            <a:r>
-              <a:rPr lang="pt-BR">
-                <a:solidFill>
-                  <a:srgbClr val="0F2040"/>
-                </a:solidFill>
-              </a:rPr>
-              <a:t>F1 Score: 0.99691</a:t>
-            </a:r>
-          </a:p>
-          <a:p>
-            <a:pPr marL="285750" indent="-285750">
-              <a:buFont typeface="Arial" panose="020B0604020202020204" pitchFamily="34" charset="0"/>
-              <a:buChar char="•"/>
-            </a:pPr>
-            <a:endParaRPr lang="pt-BR">
-              <a:solidFill>
-                <a:srgbClr val="0F2040"/>
-              </a:solidFill>
-            </a:endParaRPr>
-          </a:p>
-          <a:p>
-            <a:pPr marL="285750" indent="-285750">
-              <a:buFont typeface="Arial" panose="020B0604020202020204" pitchFamily="34" charset="0"/>
-              <a:buChar char="•"/>
-            </a:pPr>
-            <a:r>
-              <a:rPr lang="pt-BR" b="1">
-                <a:solidFill>
-                  <a:srgbClr val="0F2040"/>
-                </a:solidFill>
-              </a:rPr>
-              <a:t>Acurácia: 0.59538</a:t>
-            </a:r>
-          </a:p>
-        </p:txBody>
-      </p:sp>
     </p:spTree>
     <p:extLst>
       <p:ext uri="{BB962C8B-B14F-4D97-AF65-F5344CB8AC3E}">
@@ -9037,14 +9340,104 @@
         </p:blipFill>
         <p:spPr>
           <a:xfrm>
-            <a:off x="3490462" y="2416765"/>
-            <a:ext cx="5211076" cy="3104471"/>
+            <a:off x="3943678" y="1595001"/>
+            <a:ext cx="7955271" cy="4743019"/>
           </a:xfrm>
           <a:prstGeom prst="rect">
             <a:avLst/>
           </a:prstGeom>
         </p:spPr>
       </p:pic>
+      <p:sp>
+        <p:nvSpPr>
+          <p:cNvPr id="6" name="CaixaDeTexto 5">
+            <a:extLst>
+              <a:ext uri="{FF2B5EF4-FFF2-40B4-BE49-F238E27FC236}">
+                <a16:creationId xmlns:a16="http://schemas.microsoft.com/office/drawing/2014/main" id="{38A5B6F3-9F41-A03B-5DEC-FF8D2D1C7007}"/>
+              </a:ext>
+            </a:extLst>
+          </p:cNvPr>
+          <p:cNvSpPr txBox="1"/>
+          <p:nvPr/>
+        </p:nvSpPr>
+        <p:spPr>
+          <a:xfrm>
+            <a:off x="221524" y="3429551"/>
+            <a:ext cx="3431696" cy="646331"/>
+          </a:xfrm>
+          <a:prstGeom prst="rect">
+            <a:avLst/>
+          </a:prstGeom>
+          <a:noFill/>
+        </p:spPr>
+        <p:txBody>
+          <a:bodyPr wrap="square" lIns="91440" tIns="45720" rIns="91440" bIns="45720" rtlCol="0" anchor="t">
+            <a:spAutoFit/>
+          </a:bodyPr>
+          <a:lstStyle/>
+          <a:p>
+            <a:pPr marL="285750" indent="-285750">
+              <a:buFont typeface="Arial"/>
+              <a:buChar char="•"/>
+            </a:pPr>
+            <a:r>
+              <a:rPr lang="pt-BR" b="1">
+                <a:solidFill>
+                  <a:srgbClr val="0F2040"/>
+                </a:solidFill>
+              </a:rPr>
+              <a:t>Treinamento</a:t>
+            </a:r>
+            <a:r>
+              <a:rPr lang="pt-BR">
+                <a:solidFill>
+                  <a:srgbClr val="0F2040"/>
+                </a:solidFill>
+              </a:rPr>
+              <a:t>: 50.000 </a:t>
+            </a:r>
+            <a:r>
+              <a:rPr lang="pt-BR" err="1">
+                <a:solidFill>
+                  <a:srgbClr val="0F2040"/>
+                </a:solidFill>
+              </a:rPr>
+              <a:t>imgs</a:t>
+            </a:r>
+            <a:endParaRPr lang="pt-BR" err="1"/>
+          </a:p>
+          <a:p>
+            <a:pPr marL="285750" indent="-285750">
+              <a:buFont typeface="Arial"/>
+              <a:buChar char="•"/>
+            </a:pPr>
+            <a:r>
+              <a:rPr lang="pt-BR" b="1">
+                <a:solidFill>
+                  <a:srgbClr val="0F2040"/>
+                </a:solidFill>
+              </a:rPr>
+              <a:t>Validação</a:t>
+            </a:r>
+            <a:r>
+              <a:rPr lang="pt-BR">
+                <a:solidFill>
+                  <a:srgbClr val="0F2040"/>
+                </a:solidFill>
+              </a:rPr>
+              <a:t>: 10.000 </a:t>
+            </a:r>
+            <a:r>
+              <a:rPr lang="pt-BR" err="1">
+                <a:solidFill>
+                  <a:srgbClr val="0F2040"/>
+                </a:solidFill>
+              </a:rPr>
+              <a:t>imgs</a:t>
+            </a:r>
+          </a:p>
+        </p:txBody>
+      </p:sp>
     </p:spTree>
     <p:extLst>
       <p:ext uri="{BB962C8B-B14F-4D97-AF65-F5344CB8AC3E}">
@@ -9254,68 +9647,8 @@
         </p:blipFill>
         <p:spPr>
           <a:xfrm>
-            <a:off x="1290701" y="1249261"/>
+            <a:off x="3673574" y="1249261"/>
             <a:ext cx="4844853" cy="5439479"/>
-          </a:xfrm>
-          <a:prstGeom prst="rect">
-            <a:avLst/>
-          </a:prstGeom>
-        </p:spPr>
-      </p:pic>
-      <p:pic>
-        <p:nvPicPr>
-          <p:cNvPr id="11" name="Imagem 10">
-            <a:extLst>
-              <a:ext uri="{FF2B5EF4-FFF2-40B4-BE49-F238E27FC236}">
-                <a16:creationId xmlns:a16="http://schemas.microsoft.com/office/drawing/2014/main" id="{D9E487DF-3CF7-4366-D2AA-A0FB4F371200}"/>
-              </a:ext>
-            </a:extLst>
-          </p:cNvPr>
-          <p:cNvPicPr>
-            <a:picLocks noChangeAspect="1"/>
-          </p:cNvPicPr>
-          <p:nvPr/>
-        </p:nvPicPr>
-        <p:blipFill>
-          <a:blip r:embed="rId3"/>
-          <a:stretch>
-            <a:fillRect/>
-          </a:stretch>
-        </p:blipFill>
-        <p:spPr>
-          <a:xfrm>
-            <a:off x="7579890" y="1300424"/>
-            <a:ext cx="3321409" cy="2617414"/>
-          </a:xfrm>
-          <a:prstGeom prst="rect">
-            <a:avLst/>
-          </a:prstGeom>
-        </p:spPr>
-      </p:pic>
-      <p:pic>
-        <p:nvPicPr>
-          <p:cNvPr id="13" name="Imagem 12">
-            <a:extLst>
-              <a:ext uri="{FF2B5EF4-FFF2-40B4-BE49-F238E27FC236}">
-                <a16:creationId xmlns:a16="http://schemas.microsoft.com/office/drawing/2014/main" id="{DF2CA6EE-0793-D03F-5EEB-95840F864BD7}"/>
-              </a:ext>
-            </a:extLst>
-          </p:cNvPr>
-          <p:cNvPicPr>
-            <a:picLocks noChangeAspect="1"/>
-          </p:cNvPicPr>
-          <p:nvPr/>
-        </p:nvPicPr>
-        <p:blipFill>
-          <a:blip r:embed="rId4"/>
-          <a:stretch>
-            <a:fillRect/>
-          </a:stretch>
-        </p:blipFill>
-        <p:spPr>
-          <a:xfrm>
-            <a:off x="7579890" y="4020162"/>
-            <a:ext cx="3321408" cy="2617414"/>
           </a:xfrm>
           <a:prstGeom prst="rect">
             <a:avLst/>
@@ -9355,7 +9688,7 @@
         <p:cNvPr id="1" name="">
           <a:extLst>
             <a:ext uri="{FF2B5EF4-FFF2-40B4-BE49-F238E27FC236}">
-              <a16:creationId xmlns:a16="http://schemas.microsoft.com/office/drawing/2014/main" id="{B8166978-0F44-DDB0-901D-C65910BCA3B4}"/>
+              <a16:creationId xmlns:a16="http://schemas.microsoft.com/office/drawing/2014/main" id="{ABAC4D06-D2F6-C313-40D3-690EDA133C12}"/>
             </a:ext>
           </a:extLst>
         </p:cNvPr>
@@ -9375,7 +9708,7 @@
           <p:cNvPr id="4" name="Retângulo 3">
             <a:extLst>
               <a:ext uri="{FF2B5EF4-FFF2-40B4-BE49-F238E27FC236}">
-                <a16:creationId xmlns:a16="http://schemas.microsoft.com/office/drawing/2014/main" id="{52808D6D-7018-B6E6-9969-0274A2EFD1BB}"/>
+                <a16:creationId xmlns:a16="http://schemas.microsoft.com/office/drawing/2014/main" id="{62531D8F-6DA8-CC46-D844-4C6630637027}"/>
               </a:ext>
             </a:extLst>
           </p:cNvPr>
@@ -9427,7 +9760,7 @@
           <p:cNvPr id="7" name="Título 1">
             <a:extLst>
               <a:ext uri="{FF2B5EF4-FFF2-40B4-BE49-F238E27FC236}">
-                <a16:creationId xmlns:a16="http://schemas.microsoft.com/office/drawing/2014/main" id="{4F1CF599-353C-3887-D159-4CC2B56A822C}"/>
+                <a16:creationId xmlns:a16="http://schemas.microsoft.com/office/drawing/2014/main" id="{62C6711D-CD10-30B0-DB5E-425D3FA1AEC6}"/>
               </a:ext>
             </a:extLst>
           </p:cNvPr>
@@ -9458,7 +9791,7 @@
                 <a:latin typeface="Fjalla One" panose="02000506040000020004" pitchFamily="2" charset="0"/>
                 <a:cs typeface="Arial" panose="020B0604020202020204" pitchFamily="34" charset="0"/>
               </a:rPr>
-              <a:t>Questão 3. Predição</a:t>
+              <a:t>Questão 3. Criação do Modelo e Treinamento</a:t>
             </a:r>
           </a:p>
         </p:txBody>
@@ -9468,7 +9801,7 @@
           <p:cNvPr id="2" name="Retângulo 1">
             <a:extLst>
               <a:ext uri="{FF2B5EF4-FFF2-40B4-BE49-F238E27FC236}">
-                <a16:creationId xmlns:a16="http://schemas.microsoft.com/office/drawing/2014/main" id="{59E30EC5-67EE-7643-F93F-823921459132}"/>
+                <a16:creationId xmlns:a16="http://schemas.microsoft.com/office/drawing/2014/main" id="{570E30F1-5B3D-460E-D9DE-5A6DF11C13CA}"/>
               </a:ext>
             </a:extLst>
           </p:cNvPr>
@@ -9511,10 +9844,10 @@
       </p:sp>
       <p:pic>
         <p:nvPicPr>
-          <p:cNvPr id="6" name="Imagem 5">
-            <a:extLst>
-              <a:ext uri="{FF2B5EF4-FFF2-40B4-BE49-F238E27FC236}">
-                <a16:creationId xmlns:a16="http://schemas.microsoft.com/office/drawing/2014/main" id="{1BBC747F-40A5-C207-0F9C-75EFC933FB38}"/>
+          <p:cNvPr id="6" name="Imagem 5" descr="Diagrama&#10;&#10;O conteúdo gerado por IA pode estar incorreto.">
+            <a:extLst>
+              <a:ext uri="{FF2B5EF4-FFF2-40B4-BE49-F238E27FC236}">
+                <a16:creationId xmlns:a16="http://schemas.microsoft.com/office/drawing/2014/main" id="{F541213F-CBF0-9851-3207-BC937B27617D}"/>
               </a:ext>
             </a:extLst>
           </p:cNvPr>
@@ -9530,9 +9863,9 @@
           </a:stretch>
         </p:blipFill>
         <p:spPr>
-          <a:xfrm>
-            <a:off x="3529012" y="1802062"/>
-            <a:ext cx="5133975" cy="4333875"/>
+          <a:xfrm rot="16200000">
+            <a:off x="5320333" y="-2639608"/>
+            <a:ext cx="1476628" cy="12122274"/>
           </a:xfrm>
           <a:prstGeom prst="rect">
             <a:avLst/>
@@ -9542,7 +9875,7 @@
     </p:spTree>
     <p:extLst>
       <p:ext uri="{BB962C8B-B14F-4D97-AF65-F5344CB8AC3E}">
-        <p14:creationId xmlns:p14="http://schemas.microsoft.com/office/powerpoint/2010/main" val="1299049715"/>
+        <p14:creationId xmlns:p14="http://schemas.microsoft.com/office/powerpoint/2010/main" val="2125416589"/>
       </p:ext>
     </p:extLst>
   </p:cSld>
@@ -9572,7 +9905,7 @@
         <p:cNvPr id="1" name="">
           <a:extLst>
             <a:ext uri="{FF2B5EF4-FFF2-40B4-BE49-F238E27FC236}">
-              <a16:creationId xmlns:a16="http://schemas.microsoft.com/office/drawing/2014/main" id="{ED7B4123-DDE2-5D1B-205F-0E71AAD92D12}"/>
+              <a16:creationId xmlns:a16="http://schemas.microsoft.com/office/drawing/2014/main" id="{B8166978-0F44-DDB0-901D-C65910BCA3B4}"/>
             </a:ext>
           </a:extLst>
         </p:cNvPr>
@@ -9592,7 +9925,7 @@
           <p:cNvPr id="4" name="Retângulo 3">
             <a:extLst>
               <a:ext uri="{FF2B5EF4-FFF2-40B4-BE49-F238E27FC236}">
-                <a16:creationId xmlns:a16="http://schemas.microsoft.com/office/drawing/2014/main" id="{AD7DFB88-BFF7-F36F-128D-7E717CA78B3E}"/>
+                <a16:creationId xmlns:a16="http://schemas.microsoft.com/office/drawing/2014/main" id="{52808D6D-7018-B6E6-9969-0274A2EFD1BB}"/>
               </a:ext>
             </a:extLst>
           </p:cNvPr>
@@ -9644,7 +9977,7 @@
           <p:cNvPr id="7" name="Título 1">
             <a:extLst>
               <a:ext uri="{FF2B5EF4-FFF2-40B4-BE49-F238E27FC236}">
-                <a16:creationId xmlns:a16="http://schemas.microsoft.com/office/drawing/2014/main" id="{A48B6F6B-35DE-05D5-C2D1-C1DB4AC839FE}"/>
+                <a16:creationId xmlns:a16="http://schemas.microsoft.com/office/drawing/2014/main" id="{4F1CF599-353C-3887-D159-4CC2B56A822C}"/>
               </a:ext>
             </a:extLst>
           </p:cNvPr>
@@ -9675,264 +10008,7 @@
                 <a:latin typeface="Fjalla One" panose="02000506040000020004" pitchFamily="2" charset="0"/>
                 <a:cs typeface="Arial" panose="020B0604020202020204" pitchFamily="34" charset="0"/>
               </a:rPr>
-              <a:t>Questão 4. Enunciado</a:t>
-            </a:r>
-          </a:p>
-        </p:txBody>
-      </p:sp>
-      <p:sp>
-        <p:nvSpPr>
-          <p:cNvPr id="8" name="CaixaDeTexto 7">
-            <a:extLst>
-              <a:ext uri="{FF2B5EF4-FFF2-40B4-BE49-F238E27FC236}">
-                <a16:creationId xmlns:a16="http://schemas.microsoft.com/office/drawing/2014/main" id="{BE2BC138-453B-6FF9-685B-9277BCB1A08C}"/>
-              </a:ext>
-            </a:extLst>
-          </p:cNvPr>
-          <p:cNvSpPr txBox="1"/>
-          <p:nvPr/>
-        </p:nvSpPr>
-        <p:spPr>
-          <a:xfrm>
-            <a:off x="313460" y="1583732"/>
-            <a:ext cx="11565081" cy="4770537"/>
-          </a:xfrm>
-          <a:prstGeom prst="rect">
-            <a:avLst/>
-          </a:prstGeom>
-          <a:noFill/>
-        </p:spPr>
-        <p:txBody>
-          <a:bodyPr wrap="square" rtlCol="0">
-            <a:spAutoFit/>
-          </a:bodyPr>
-          <a:lstStyle/>
-          <a:p>
-            <a:r>
-              <a:rPr lang="pt-BR" sz="1600">
-                <a:solidFill>
-                  <a:srgbClr val="0F2040"/>
-                </a:solidFill>
-              </a:rPr>
-              <a:t>Implemente e treine um </a:t>
-            </a:r>
-            <a:r>
-              <a:rPr lang="pt-BR" sz="1600" b="1">
-                <a:solidFill>
-                  <a:srgbClr val="0F2040"/>
-                </a:solidFill>
-              </a:rPr>
-              <a:t>autoencoder</a:t>
-            </a:r>
-            <a:r>
-              <a:rPr lang="pt-BR" sz="1600">
-                <a:solidFill>
-                  <a:srgbClr val="0F2040"/>
-                </a:solidFill>
-              </a:rPr>
-              <a:t> utilizando o </a:t>
-            </a:r>
-            <a:r>
-              <a:rPr lang="pt-BR" sz="1600" b="1">
-                <a:solidFill>
-                  <a:srgbClr val="0F2040"/>
-                </a:solidFill>
-              </a:rPr>
-              <a:t>dataset Fashion-MNIST</a:t>
-            </a:r>
-            <a:r>
-              <a:rPr lang="pt-BR" sz="1600">
-                <a:solidFill>
-                  <a:srgbClr val="0F2040"/>
-                </a:solidFill>
-              </a:rPr>
-              <a:t>.</a:t>
-            </a:r>
-          </a:p>
-          <a:p>
-            <a:endParaRPr lang="pt-BR" sz="1600">
-              <a:solidFill>
-                <a:srgbClr val="0F2040"/>
-              </a:solidFill>
-            </a:endParaRPr>
-          </a:p>
-          <a:p>
-            <a:r>
-              <a:rPr lang="pt-BR" sz="1600" u="sng">
-                <a:solidFill>
-                  <a:srgbClr val="0F2040"/>
-                </a:solidFill>
-              </a:rPr>
-              <a:t>Item a.</a:t>
-            </a:r>
-            <a:r>
-              <a:rPr lang="pt-BR" sz="1600">
-                <a:solidFill>
-                  <a:srgbClr val="0F2040"/>
-                </a:solidFill>
-              </a:rPr>
-              <a:t> O  objetivo deste exercício é compreender como esse tipo de rede neural é capaz de aprender representações comprimidas de dados e realizar reconstruções a partir dessas representações.</a:t>
-            </a:r>
-          </a:p>
-          <a:p>
-            <a:endParaRPr lang="pt-BR" sz="1600">
-              <a:solidFill>
-                <a:srgbClr val="0F2040"/>
-              </a:solidFill>
-            </a:endParaRPr>
-          </a:p>
-          <a:p>
-            <a:pPr marL="285750" indent="-285750">
-              <a:buFont typeface="Arial" panose="020B0604020202020204" pitchFamily="34" charset="0"/>
-              <a:buChar char="•"/>
-            </a:pPr>
-            <a:r>
-              <a:rPr lang="pt-BR" sz="1600">
-                <a:solidFill>
-                  <a:srgbClr val="0F2040"/>
-                </a:solidFill>
-              </a:rPr>
-              <a:t>O autoencoder pode ser construído utilizando apenas </a:t>
-            </a:r>
-            <a:r>
-              <a:rPr lang="pt-BR" sz="1600" b="1">
-                <a:solidFill>
-                  <a:srgbClr val="0F2040"/>
-                </a:solidFill>
-              </a:rPr>
-              <a:t>camadas densas </a:t>
-            </a:r>
-            <a:r>
-              <a:rPr lang="pt-BR" sz="1600">
-                <a:solidFill>
-                  <a:srgbClr val="0F2040"/>
-                </a:solidFill>
-              </a:rPr>
-              <a:t>(fully connected) ou, alternativamente, camadas convolucionais e deconvolucionais.</a:t>
-            </a:r>
-          </a:p>
-          <a:p>
-            <a:pPr marL="285750" indent="-285750">
-              <a:buFont typeface="Arial" panose="020B0604020202020204" pitchFamily="34" charset="0"/>
-              <a:buChar char="•"/>
-            </a:pPr>
-            <a:r>
-              <a:rPr lang="pt-BR" sz="1600">
-                <a:solidFill>
-                  <a:srgbClr val="0F2040"/>
-                </a:solidFill>
-              </a:rPr>
-              <a:t>Após o treinamento, selecione 10 imagens do conjunto de teste e utilize o modelo treinado para gerar as reconstruções correspondentes. </a:t>
-            </a:r>
-          </a:p>
-          <a:p>
-            <a:pPr marL="285750" indent="-285750">
-              <a:buFont typeface="Arial" panose="020B0604020202020204" pitchFamily="34" charset="0"/>
-              <a:buChar char="•"/>
-            </a:pPr>
-            <a:r>
-              <a:rPr lang="pt-BR" sz="1600">
-                <a:solidFill>
-                  <a:srgbClr val="0F2040"/>
-                </a:solidFill>
-              </a:rPr>
-              <a:t>Apresente os resultados visualmente, exibindo lado a lado as imagens originais e suas respectivas reconstruções, de modo que seja possível avaliar qualitativamente o desempenho do autoencoder. Apresente também a curva do erro médio ao longo do treinamento.</a:t>
-            </a:r>
-          </a:p>
-          <a:p>
-            <a:pPr marL="285750" indent="-285750">
-              <a:buFont typeface="Arial" panose="020B0604020202020204" pitchFamily="34" charset="0"/>
-              <a:buChar char="•"/>
-            </a:pPr>
-            <a:endParaRPr lang="pt-BR" sz="1600">
-              <a:solidFill>
-                <a:srgbClr val="0F2040"/>
-              </a:solidFill>
-            </a:endParaRPr>
-          </a:p>
-          <a:p>
-            <a:r>
-              <a:rPr lang="pt-BR" sz="1600" u="sng">
-                <a:solidFill>
-                  <a:srgbClr val="0F2040"/>
-                </a:solidFill>
-              </a:rPr>
-              <a:t>Item b.</a:t>
-            </a:r>
-            <a:r>
-              <a:rPr lang="pt-BR" sz="1600">
-                <a:solidFill>
-                  <a:srgbClr val="0F2040"/>
-                </a:solidFill>
-              </a:rPr>
-              <a:t> Complete o exercício da questão 4(a) </a:t>
-            </a:r>
-            <a:r>
-              <a:rPr lang="pt-BR" sz="1600" b="1">
-                <a:solidFill>
-                  <a:srgbClr val="0F2040"/>
-                </a:solidFill>
-              </a:rPr>
-              <a:t>adicionando ruído aleatório às imagens</a:t>
-            </a:r>
-            <a:r>
-              <a:rPr lang="pt-BR" sz="1600">
-                <a:solidFill>
-                  <a:srgbClr val="0F2040"/>
-                </a:solidFill>
-              </a:rPr>
-              <a:t> de entrada, com o objetivo de treinar um </a:t>
-            </a:r>
-            <a:r>
-              <a:rPr lang="pt-BR" sz="1600" b="1">
-                <a:solidFill>
-                  <a:srgbClr val="0F2040"/>
-                </a:solidFill>
-              </a:rPr>
-              <a:t>denoising autoencoder</a:t>
-            </a:r>
-            <a:r>
-              <a:rPr lang="pt-BR" sz="1600">
-                <a:solidFill>
-                  <a:srgbClr val="0F2040"/>
-                </a:solidFill>
-              </a:rPr>
-              <a:t>.</a:t>
-            </a:r>
-          </a:p>
-          <a:p>
-            <a:endParaRPr lang="pt-BR" sz="1600">
-              <a:solidFill>
-                <a:srgbClr val="0F2040"/>
-              </a:solidFill>
-            </a:endParaRPr>
-          </a:p>
-          <a:p>
-            <a:pPr marL="285750" indent="-285750">
-              <a:buFont typeface="Arial" panose="020B0604020202020204" pitchFamily="34" charset="0"/>
-              <a:buChar char="•"/>
-            </a:pPr>
-            <a:r>
-              <a:rPr lang="pt-BR" sz="1600">
-                <a:solidFill>
-                  <a:srgbClr val="0F2040"/>
-                </a:solidFill>
-              </a:rPr>
-              <a:t>Após o treinamento, utilize as 10 imagens selecionadas  na  questão  anterior  (com  o  ruído  aplicado)  e  apresente  os  resultados visualmente, exibindo lado a lado as imagens originais e suas respectivas reconstruções.</a:t>
-            </a:r>
-          </a:p>
-          <a:p>
-            <a:pPr marL="285750" indent="-285750">
-              <a:buFont typeface="Arial" panose="020B0604020202020204" pitchFamily="34" charset="0"/>
-              <a:buChar char="•"/>
-            </a:pPr>
-            <a:r>
-              <a:rPr lang="pt-BR" sz="1600">
-                <a:solidFill>
-                  <a:srgbClr val="0F2040"/>
-                </a:solidFill>
-              </a:rPr>
-              <a:t>Avalie qualitativamente o desempenho do modelo em remover o ruído e preservar as características das imagens originais. </a:t>
+              <a:t>Questão 3. Predição</a:t>
             </a:r>
           </a:p>
         </p:txBody>
@@ -9942,7 +10018,7 @@
           <p:cNvPr id="2" name="Retângulo 1">
             <a:extLst>
               <a:ext uri="{FF2B5EF4-FFF2-40B4-BE49-F238E27FC236}">
-                <a16:creationId xmlns:a16="http://schemas.microsoft.com/office/drawing/2014/main" id="{EB728245-2B42-08F4-125E-658A27506723}"/>
+                <a16:creationId xmlns:a16="http://schemas.microsoft.com/office/drawing/2014/main" id="{59E30EC5-67EE-7643-F93F-823921459132}"/>
               </a:ext>
             </a:extLst>
           </p:cNvPr>
@@ -9983,10 +10059,173 @@
           </a:p>
         </p:txBody>
       </p:sp>
+      <p:pic>
+        <p:nvPicPr>
+          <p:cNvPr id="10" name="Imagem 9" descr="Gráfico, Histograma&#10;&#10;O conteúdo gerado por IA pode estar incorreto.">
+            <a:extLst>
+              <a:ext uri="{FF2B5EF4-FFF2-40B4-BE49-F238E27FC236}">
+                <a16:creationId xmlns:a16="http://schemas.microsoft.com/office/drawing/2014/main" id="{46884FDC-A2D8-32E6-583B-1344038D08EE}"/>
+              </a:ext>
+            </a:extLst>
+          </p:cNvPr>
+          <p:cNvPicPr>
+            <a:picLocks noChangeAspect="1"/>
+          </p:cNvPicPr>
+          <p:nvPr/>
+        </p:nvPicPr>
+        <p:blipFill>
+          <a:blip r:embed="rId2"/>
+          <a:stretch>
+            <a:fillRect/>
+          </a:stretch>
+        </p:blipFill>
+        <p:spPr>
+          <a:xfrm>
+            <a:off x="3695109" y="1999783"/>
+            <a:ext cx="3472019" cy="2788709"/>
+          </a:xfrm>
+          <a:prstGeom prst="rect">
+            <a:avLst/>
+          </a:prstGeom>
+        </p:spPr>
+      </p:pic>
+      <p:pic>
+        <p:nvPicPr>
+          <p:cNvPr id="11" name="Imagem 10" descr="Gráfico&#10;&#10;O conteúdo gerado por IA pode estar incorreto.">
+            <a:extLst>
+              <a:ext uri="{FF2B5EF4-FFF2-40B4-BE49-F238E27FC236}">
+                <a16:creationId xmlns:a16="http://schemas.microsoft.com/office/drawing/2014/main" id="{41BA781A-4432-2AD2-929C-A81FA7B72528}"/>
+              </a:ext>
+            </a:extLst>
+          </p:cNvPr>
+          <p:cNvPicPr>
+            <a:picLocks noChangeAspect="1"/>
+          </p:cNvPicPr>
+          <p:nvPr/>
+        </p:nvPicPr>
+        <p:blipFill>
+          <a:blip r:embed="rId3"/>
+          <a:stretch>
+            <a:fillRect/>
+          </a:stretch>
+        </p:blipFill>
+        <p:spPr>
+          <a:xfrm>
+            <a:off x="203854" y="1999783"/>
+            <a:ext cx="3467039" cy="2773768"/>
+          </a:xfrm>
+          <a:prstGeom prst="rect">
+            <a:avLst/>
+          </a:prstGeom>
+        </p:spPr>
+      </p:pic>
+      <p:pic>
+        <p:nvPicPr>
+          <p:cNvPr id="12" name="Imagem 11" descr="Calendário&#10;&#10;O conteúdo gerado por IA pode estar incorreto.">
+            <a:extLst>
+              <a:ext uri="{FF2B5EF4-FFF2-40B4-BE49-F238E27FC236}">
+                <a16:creationId xmlns:a16="http://schemas.microsoft.com/office/drawing/2014/main" id="{A029150B-BC82-5B3B-AD81-2F9B076E1E41}"/>
+              </a:ext>
+            </a:extLst>
+          </p:cNvPr>
+          <p:cNvPicPr>
+            <a:picLocks noChangeAspect="1"/>
+          </p:cNvPicPr>
+          <p:nvPr/>
+        </p:nvPicPr>
+        <p:blipFill>
+          <a:blip r:embed="rId4"/>
+          <a:stretch>
+            <a:fillRect/>
+          </a:stretch>
+        </p:blipFill>
+        <p:spPr>
+          <a:xfrm>
+            <a:off x="7373875" y="1615670"/>
+            <a:ext cx="4790328" cy="4040032"/>
+          </a:xfrm>
+          <a:prstGeom prst="rect">
+            <a:avLst/>
+          </a:prstGeom>
+        </p:spPr>
+      </p:pic>
+      <p:sp>
+        <p:nvSpPr>
+          <p:cNvPr id="15" name="CaixaDeTexto 14">
+            <a:extLst>
+              <a:ext uri="{FF2B5EF4-FFF2-40B4-BE49-F238E27FC236}">
+                <a16:creationId xmlns:a16="http://schemas.microsoft.com/office/drawing/2014/main" id="{A22406C2-D461-168D-2F75-20825A811C95}"/>
+              </a:ext>
+            </a:extLst>
+          </p:cNvPr>
+          <p:cNvSpPr txBox="1"/>
+          <p:nvPr/>
+        </p:nvSpPr>
+        <p:spPr>
+          <a:xfrm>
+            <a:off x="1974621" y="5018295"/>
+            <a:ext cx="3431696" cy="646331"/>
+          </a:xfrm>
+          <a:prstGeom prst="rect">
+            <a:avLst/>
+          </a:prstGeom>
+          <a:noFill/>
+        </p:spPr>
+        <p:txBody>
+          <a:bodyPr wrap="square" lIns="91440" tIns="45720" rIns="91440" bIns="45720" rtlCol="0" anchor="t">
+            <a:spAutoFit/>
+          </a:bodyPr>
+          <a:lstStyle/>
+          <a:p>
+            <a:pPr marL="285750" indent="-285750">
+              <a:buFont typeface="Arial"/>
+              <a:buChar char="•"/>
+            </a:pPr>
+            <a:r>
+              <a:rPr lang="pt-BR" b="1">
+                <a:solidFill>
+                  <a:srgbClr val="0F2040"/>
+                </a:solidFill>
+              </a:rPr>
+              <a:t>Treinamento</a:t>
+            </a:r>
+            <a:r>
+              <a:rPr lang="pt-BR">
+                <a:solidFill>
+                  <a:srgbClr val="0F2040"/>
+                </a:solidFill>
+              </a:rPr>
+              <a:t>: 98.60%</a:t>
+            </a:r>
+          </a:p>
+          <a:p>
+            <a:pPr marL="285750" indent="-285750">
+              <a:buFont typeface="Arial"/>
+              <a:buChar char="•"/>
+            </a:pPr>
+            <a:r>
+              <a:rPr lang="pt-BR" b="1">
+                <a:solidFill>
+                  <a:srgbClr val="0F2040"/>
+                </a:solidFill>
+              </a:rPr>
+              <a:t>Validação</a:t>
+            </a:r>
+            <a:r>
+              <a:rPr lang="pt-BR">
+                <a:solidFill>
+                  <a:srgbClr val="0F2040"/>
+                </a:solidFill>
+              </a:rPr>
+              <a:t>: 87.47%</a:t>
+            </a:r>
+          </a:p>
+        </p:txBody>
+      </p:sp>
     </p:spTree>
     <p:extLst>
       <p:ext uri="{BB962C8B-B14F-4D97-AF65-F5344CB8AC3E}">
-        <p14:creationId xmlns:p14="http://schemas.microsoft.com/office/powerpoint/2010/main" val="1466667699"/>
+        <p14:creationId xmlns:p14="http://schemas.microsoft.com/office/powerpoint/2010/main" val="1299049715"/>
       </p:ext>
     </p:extLst>
   </p:cSld>
@@ -10016,7 +10255,7 @@
         <p:cNvPr id="1" name="">
           <a:extLst>
             <a:ext uri="{FF2B5EF4-FFF2-40B4-BE49-F238E27FC236}">
-              <a16:creationId xmlns:a16="http://schemas.microsoft.com/office/drawing/2014/main" id="{527E555A-7886-DF10-B3CE-279DE3B5CBBF}"/>
+              <a16:creationId xmlns:a16="http://schemas.microsoft.com/office/drawing/2014/main" id="{4B26B98A-EF57-C74D-642B-8E0A6F290A5A}"/>
             </a:ext>
           </a:extLst>
         </p:cNvPr>
@@ -10036,7 +10275,7 @@
           <p:cNvPr id="4" name="Retângulo 3">
             <a:extLst>
               <a:ext uri="{FF2B5EF4-FFF2-40B4-BE49-F238E27FC236}">
-                <a16:creationId xmlns:a16="http://schemas.microsoft.com/office/drawing/2014/main" id="{FB5D5BCE-6BE7-A5F9-D9F1-F5A5E88E07A8}"/>
+                <a16:creationId xmlns:a16="http://schemas.microsoft.com/office/drawing/2014/main" id="{300D396B-D64B-7552-BA9F-5E54306D38ED}"/>
               </a:ext>
             </a:extLst>
           </p:cNvPr>
@@ -10088,7 +10327,7 @@
           <p:cNvPr id="7" name="Título 1">
             <a:extLst>
               <a:ext uri="{FF2B5EF4-FFF2-40B4-BE49-F238E27FC236}">
-                <a16:creationId xmlns:a16="http://schemas.microsoft.com/office/drawing/2014/main" id="{3B92484F-7504-0174-1850-DC96B148129B}"/>
+                <a16:creationId xmlns:a16="http://schemas.microsoft.com/office/drawing/2014/main" id="{CA91D07F-DA65-3F10-9B42-1843851F1710}"/>
               </a:ext>
             </a:extLst>
           </p:cNvPr>
@@ -10119,7 +10358,7 @@
                 <a:latin typeface="Fjalla One" panose="02000506040000020004" pitchFamily="2" charset="0"/>
                 <a:cs typeface="Arial" panose="020B0604020202020204" pitchFamily="34" charset="0"/>
               </a:rPr>
-              <a:t>Questão 4. a) Pré-processamento dos Dados</a:t>
+              <a:t>Questão 3. Predição</a:t>
             </a:r>
           </a:p>
         </p:txBody>
@@ -10129,7 +10368,7 @@
           <p:cNvPr id="2" name="Retângulo 1">
             <a:extLst>
               <a:ext uri="{FF2B5EF4-FFF2-40B4-BE49-F238E27FC236}">
-                <a16:creationId xmlns:a16="http://schemas.microsoft.com/office/drawing/2014/main" id="{7F53BD44-1EFF-3D2A-0EF7-4D35085BC396}"/>
+                <a16:creationId xmlns:a16="http://schemas.microsoft.com/office/drawing/2014/main" id="{04AA2E0B-DAF8-FF28-2489-0C2EE53A5390}"/>
               </a:ext>
             </a:extLst>
           </p:cNvPr>
@@ -10170,83 +10409,12 @@
           </a:p>
         </p:txBody>
       </p:sp>
-      <p:sp>
-        <p:nvSpPr>
-          <p:cNvPr id="6" name="CaixaDeTexto 5">
-            <a:extLst>
-              <a:ext uri="{FF2B5EF4-FFF2-40B4-BE49-F238E27FC236}">
-                <a16:creationId xmlns:a16="http://schemas.microsoft.com/office/drawing/2014/main" id="{F6043F5C-2C58-D437-60CD-B0406EE29F54}"/>
-              </a:ext>
-            </a:extLst>
-          </p:cNvPr>
-          <p:cNvSpPr txBox="1"/>
-          <p:nvPr/>
-        </p:nvSpPr>
-        <p:spPr>
-          <a:xfrm>
-            <a:off x="3736814" y="5207406"/>
-            <a:ext cx="4718369" cy="923330"/>
-          </a:xfrm>
-          <a:prstGeom prst="rect">
-            <a:avLst/>
-          </a:prstGeom>
-          <a:noFill/>
-        </p:spPr>
-        <p:txBody>
-          <a:bodyPr wrap="square" rtlCol="0">
-            <a:spAutoFit/>
-          </a:bodyPr>
-          <a:lstStyle/>
-          <a:p>
-            <a:pPr marL="285750" indent="-285750">
-              <a:buFont typeface="Arial" panose="020B0604020202020204" pitchFamily="34" charset="0"/>
-              <a:buChar char="•"/>
-            </a:pPr>
-            <a:r>
-              <a:rPr lang="pt-BR">
-                <a:solidFill>
-                  <a:srgbClr val="0F2040"/>
-                </a:solidFill>
-              </a:rPr>
-              <a:t>Dados de treino: 60.000 imagens (85,7%)</a:t>
-            </a:r>
-          </a:p>
-          <a:p>
-            <a:pPr marL="285750" indent="-285750">
-              <a:buFont typeface="Arial" panose="020B0604020202020204" pitchFamily="34" charset="0"/>
-              <a:buChar char="•"/>
-            </a:pPr>
-            <a:r>
-              <a:rPr lang="pt-BR">
-                <a:solidFill>
-                  <a:srgbClr val="0F2040"/>
-                </a:solidFill>
-              </a:rPr>
-              <a:t>Dados de validação: 5.000 imagens (7,1%)</a:t>
-            </a:r>
-          </a:p>
-          <a:p>
-            <a:pPr marL="285750" indent="-285750">
-              <a:buFont typeface="Arial" panose="020B0604020202020204" pitchFamily="34" charset="0"/>
-              <a:buChar char="•"/>
-            </a:pPr>
-            <a:r>
-              <a:rPr lang="pt-BR">
-                <a:solidFill>
-                  <a:srgbClr val="0F2040"/>
-                </a:solidFill>
-              </a:rPr>
-              <a:t>Dados de teste: 5.000 imagens (7,1%)</a:t>
-            </a:r>
-          </a:p>
-        </p:txBody>
-      </p:sp>
       <p:pic>
         <p:nvPicPr>
-          <p:cNvPr id="12" name="Imagem 11">
-            <a:extLst>
-              <a:ext uri="{FF2B5EF4-FFF2-40B4-BE49-F238E27FC236}">
-                <a16:creationId xmlns:a16="http://schemas.microsoft.com/office/drawing/2014/main" id="{803B133C-8607-71A0-35F6-9FD8479C992F}"/>
+          <p:cNvPr id="12" name="Imagem 11" descr="Calendário&#10;&#10;O conteúdo gerado por IA pode estar incorreto.">
+            <a:extLst>
+              <a:ext uri="{FF2B5EF4-FFF2-40B4-BE49-F238E27FC236}">
+                <a16:creationId xmlns:a16="http://schemas.microsoft.com/office/drawing/2014/main" id="{B681CA82-52FB-620B-4FE0-3907A923F709}"/>
               </a:ext>
             </a:extLst>
           </p:cNvPr>
@@ -10263,8 +10431,38 @@
         </p:blipFill>
         <p:spPr>
           <a:xfrm>
-            <a:off x="3030194" y="1650594"/>
-            <a:ext cx="6131611" cy="3042579"/>
+            <a:off x="6208463" y="1799945"/>
+            <a:ext cx="5133975" cy="4333875"/>
+          </a:xfrm>
+          <a:prstGeom prst="rect">
+            <a:avLst/>
+          </a:prstGeom>
+        </p:spPr>
+      </p:pic>
+      <p:pic>
+        <p:nvPicPr>
+          <p:cNvPr id="3" name="Imagem 2" descr="Training a Classifier — PyTorch Tutorials 2.8.0+cu128 documentation">
+            <a:extLst>
+              <a:ext uri="{FF2B5EF4-FFF2-40B4-BE49-F238E27FC236}">
+                <a16:creationId xmlns:a16="http://schemas.microsoft.com/office/drawing/2014/main" id="{163A8CC1-DED4-3AFD-9DF1-D099F7BEC835}"/>
+              </a:ext>
+            </a:extLst>
+          </p:cNvPr>
+          <p:cNvPicPr>
+            <a:picLocks noChangeAspect="1"/>
+          </p:cNvPicPr>
+          <p:nvPr/>
+        </p:nvPicPr>
+        <p:blipFill>
+          <a:blip r:embed="rId3"/>
+          <a:stretch>
+            <a:fillRect/>
+          </a:stretch>
+        </p:blipFill>
+        <p:spPr>
+          <a:xfrm>
+            <a:off x="730032" y="1799945"/>
+            <a:ext cx="5133975" cy="4333875"/>
           </a:xfrm>
           <a:prstGeom prst="rect">
             <a:avLst/>
@@ -10274,7 +10472,7 @@
     </p:spTree>
     <p:extLst>
       <p:ext uri="{BB962C8B-B14F-4D97-AF65-F5344CB8AC3E}">
-        <p14:creationId xmlns:p14="http://schemas.microsoft.com/office/powerpoint/2010/main" val="3475443560"/>
+        <p14:creationId xmlns:p14="http://schemas.microsoft.com/office/powerpoint/2010/main" val="3339640022"/>
       </p:ext>
     </p:extLst>
   </p:cSld>
@@ -11231,6 +11429,738 @@
         <p:cNvPr id="1" name="">
           <a:extLst>
             <a:ext uri="{FF2B5EF4-FFF2-40B4-BE49-F238E27FC236}">
+              <a16:creationId xmlns:a16="http://schemas.microsoft.com/office/drawing/2014/main" id="{ED7B4123-DDE2-5D1B-205F-0E71AAD92D12}"/>
+            </a:ext>
+          </a:extLst>
+        </p:cNvPr>
+        <p:cNvGrpSpPr/>
+        <p:nvPr/>
+      </p:nvGrpSpPr>
+      <p:grpSpPr>
+        <a:xfrm>
+          <a:off x="0" y="0"/>
+          <a:ext cx="0" cy="0"/>
+          <a:chOff x="0" y="0"/>
+          <a:chExt cx="0" cy="0"/>
+        </a:xfrm>
+      </p:grpSpPr>
+      <p:sp>
+        <p:nvSpPr>
+          <p:cNvPr id="4" name="Retângulo 3">
+            <a:extLst>
+              <a:ext uri="{FF2B5EF4-FFF2-40B4-BE49-F238E27FC236}">
+                <a16:creationId xmlns:a16="http://schemas.microsoft.com/office/drawing/2014/main" id="{AD7DFB88-BFF7-F36F-128D-7E717CA78B3E}"/>
+              </a:ext>
+            </a:extLst>
+          </p:cNvPr>
+          <p:cNvSpPr/>
+          <p:nvPr/>
+        </p:nvSpPr>
+        <p:spPr>
+          <a:xfrm>
+            <a:off x="-210854" y="-180000"/>
+            <a:ext cx="12613709" cy="1260000"/>
+          </a:xfrm>
+          <a:prstGeom prst="rect">
+            <a:avLst/>
+          </a:prstGeom>
+          <a:solidFill>
+            <a:srgbClr val="0F2040"/>
+          </a:solidFill>
+          <a:ln>
+            <a:noFill/>
+          </a:ln>
+        </p:spPr>
+        <p:style>
+          <a:lnRef idx="2">
+            <a:schemeClr val="accent1">
+              <a:shade val="15000"/>
+            </a:schemeClr>
+          </a:lnRef>
+          <a:fillRef idx="1">
+            <a:schemeClr val="accent1"/>
+          </a:fillRef>
+          <a:effectRef idx="0">
+            <a:schemeClr val="accent1"/>
+          </a:effectRef>
+          <a:fontRef idx="minor">
+            <a:schemeClr val="lt1"/>
+          </a:fontRef>
+        </p:style>
+        <p:txBody>
+          <a:bodyPr rtlCol="0" anchor="ctr"/>
+          <a:lstStyle/>
+          <a:p>
+            <a:pPr algn="ctr"/>
+            <a:endParaRPr lang="pt-BR"/>
+          </a:p>
+        </p:txBody>
+      </p:sp>
+      <p:sp>
+        <p:nvSpPr>
+          <p:cNvPr id="7" name="Título 1">
+            <a:extLst>
+              <a:ext uri="{FF2B5EF4-FFF2-40B4-BE49-F238E27FC236}">
+                <a16:creationId xmlns:a16="http://schemas.microsoft.com/office/drawing/2014/main" id="{A48B6F6B-35DE-05D5-C2D1-C1DB4AC839FE}"/>
+              </a:ext>
+            </a:extLst>
+          </p:cNvPr>
+          <p:cNvSpPr>
+            <a:spLocks noGrp="1"/>
+          </p:cNvSpPr>
+          <p:nvPr>
+            <p:ph type="title"/>
+          </p:nvPr>
+        </p:nvSpPr>
+        <p:spPr>
+          <a:xfrm>
+            <a:off x="0" y="89999"/>
+            <a:ext cx="9961200" cy="900001"/>
+          </a:xfrm>
+        </p:spPr>
+        <p:txBody>
+          <a:bodyPr lIns="720000" bIns="0" anchor="ctr">
+            <a:normAutofit/>
+          </a:bodyPr>
+          <a:lstStyle/>
+          <a:p>
+            <a:r>
+              <a:rPr lang="pt-BR" sz="3200" b="1">
+                <a:solidFill>
+                  <a:schemeClr val="bg1"/>
+                </a:solidFill>
+                <a:latin typeface="Fjalla One" panose="02000506040000020004" pitchFamily="2" charset="0"/>
+                <a:cs typeface="Arial" panose="020B0604020202020204" pitchFamily="34" charset="0"/>
+              </a:rPr>
+              <a:t>Questão 4. Enunciado</a:t>
+            </a:r>
+          </a:p>
+        </p:txBody>
+      </p:sp>
+      <p:sp>
+        <p:nvSpPr>
+          <p:cNvPr id="8" name="CaixaDeTexto 7">
+            <a:extLst>
+              <a:ext uri="{FF2B5EF4-FFF2-40B4-BE49-F238E27FC236}">
+                <a16:creationId xmlns:a16="http://schemas.microsoft.com/office/drawing/2014/main" id="{BE2BC138-453B-6FF9-685B-9277BCB1A08C}"/>
+              </a:ext>
+            </a:extLst>
+          </p:cNvPr>
+          <p:cNvSpPr txBox="1"/>
+          <p:nvPr/>
+        </p:nvSpPr>
+        <p:spPr>
+          <a:xfrm>
+            <a:off x="313460" y="1583732"/>
+            <a:ext cx="11565081" cy="4770537"/>
+          </a:xfrm>
+          <a:prstGeom prst="rect">
+            <a:avLst/>
+          </a:prstGeom>
+          <a:noFill/>
+        </p:spPr>
+        <p:txBody>
+          <a:bodyPr wrap="square" rtlCol="0">
+            <a:spAutoFit/>
+          </a:bodyPr>
+          <a:lstStyle/>
+          <a:p>
+            <a:r>
+              <a:rPr lang="pt-BR" sz="1600">
+                <a:solidFill>
+                  <a:srgbClr val="0F2040"/>
+                </a:solidFill>
+              </a:rPr>
+              <a:t>Implemente e treine um </a:t>
+            </a:r>
+            <a:r>
+              <a:rPr lang="pt-BR" sz="1600" b="1">
+                <a:solidFill>
+                  <a:srgbClr val="0F2040"/>
+                </a:solidFill>
+              </a:rPr>
+              <a:t>autoencoder</a:t>
+            </a:r>
+            <a:r>
+              <a:rPr lang="pt-BR" sz="1600">
+                <a:solidFill>
+                  <a:srgbClr val="0F2040"/>
+                </a:solidFill>
+              </a:rPr>
+              <a:t> utilizando o </a:t>
+            </a:r>
+            <a:r>
+              <a:rPr lang="pt-BR" sz="1600" b="1">
+                <a:solidFill>
+                  <a:srgbClr val="0F2040"/>
+                </a:solidFill>
+              </a:rPr>
+              <a:t>dataset Fashion-MNIST</a:t>
+            </a:r>
+            <a:r>
+              <a:rPr lang="pt-BR" sz="1600">
+                <a:solidFill>
+                  <a:srgbClr val="0F2040"/>
+                </a:solidFill>
+              </a:rPr>
+              <a:t>.</a:t>
+            </a:r>
+          </a:p>
+          <a:p>
+            <a:endParaRPr lang="pt-BR" sz="1600">
+              <a:solidFill>
+                <a:srgbClr val="0F2040"/>
+              </a:solidFill>
+            </a:endParaRPr>
+          </a:p>
+          <a:p>
+            <a:r>
+              <a:rPr lang="pt-BR" sz="1600" u="sng">
+                <a:solidFill>
+                  <a:srgbClr val="0F2040"/>
+                </a:solidFill>
+              </a:rPr>
+              <a:t>Item a.</a:t>
+            </a:r>
+            <a:r>
+              <a:rPr lang="pt-BR" sz="1600">
+                <a:solidFill>
+                  <a:srgbClr val="0F2040"/>
+                </a:solidFill>
+              </a:rPr>
+              <a:t> O  objetivo deste exercício é compreender como esse tipo de rede neural é capaz de aprender representações comprimidas de dados e realizar reconstruções a partir dessas representações.</a:t>
+            </a:r>
+          </a:p>
+          <a:p>
+            <a:endParaRPr lang="pt-BR" sz="1600">
+              <a:solidFill>
+                <a:srgbClr val="0F2040"/>
+              </a:solidFill>
+            </a:endParaRPr>
+          </a:p>
+          <a:p>
+            <a:pPr marL="285750" indent="-285750">
+              <a:buFont typeface="Arial" panose="020B0604020202020204" pitchFamily="34" charset="0"/>
+              <a:buChar char="•"/>
+            </a:pPr>
+            <a:r>
+              <a:rPr lang="pt-BR" sz="1600">
+                <a:solidFill>
+                  <a:srgbClr val="0F2040"/>
+                </a:solidFill>
+              </a:rPr>
+              <a:t>O autoencoder pode ser construído utilizando apenas </a:t>
+            </a:r>
+            <a:r>
+              <a:rPr lang="pt-BR" sz="1600" b="1">
+                <a:solidFill>
+                  <a:srgbClr val="0F2040"/>
+                </a:solidFill>
+              </a:rPr>
+              <a:t>camadas densas </a:t>
+            </a:r>
+            <a:r>
+              <a:rPr lang="pt-BR" sz="1600">
+                <a:solidFill>
+                  <a:srgbClr val="0F2040"/>
+                </a:solidFill>
+              </a:rPr>
+              <a:t>(fully connected) ou, alternativamente, camadas convolucionais e deconvolucionais.</a:t>
+            </a:r>
+          </a:p>
+          <a:p>
+            <a:pPr marL="285750" indent="-285750">
+              <a:buFont typeface="Arial" panose="020B0604020202020204" pitchFamily="34" charset="0"/>
+              <a:buChar char="•"/>
+            </a:pPr>
+            <a:r>
+              <a:rPr lang="pt-BR" sz="1600">
+                <a:solidFill>
+                  <a:srgbClr val="0F2040"/>
+                </a:solidFill>
+              </a:rPr>
+              <a:t>Após o treinamento, selecione 10 imagens do conjunto de teste e utilize o modelo treinado para gerar as reconstruções correspondentes. </a:t>
+            </a:r>
+          </a:p>
+          <a:p>
+            <a:pPr marL="285750" indent="-285750">
+              <a:buFont typeface="Arial" panose="020B0604020202020204" pitchFamily="34" charset="0"/>
+              <a:buChar char="•"/>
+            </a:pPr>
+            <a:r>
+              <a:rPr lang="pt-BR" sz="1600">
+                <a:solidFill>
+                  <a:srgbClr val="0F2040"/>
+                </a:solidFill>
+              </a:rPr>
+              <a:t>Apresente os resultados visualmente, exibindo lado a lado as imagens originais e suas respectivas reconstruções, de modo que seja possível avaliar qualitativamente o desempenho do autoencoder. Apresente também a curva do erro médio ao longo do treinamento.</a:t>
+            </a:r>
+          </a:p>
+          <a:p>
+            <a:pPr marL="285750" indent="-285750">
+              <a:buFont typeface="Arial" panose="020B0604020202020204" pitchFamily="34" charset="0"/>
+              <a:buChar char="•"/>
+            </a:pPr>
+            <a:endParaRPr lang="pt-BR" sz="1600">
+              <a:solidFill>
+                <a:srgbClr val="0F2040"/>
+              </a:solidFill>
+            </a:endParaRPr>
+          </a:p>
+          <a:p>
+            <a:r>
+              <a:rPr lang="pt-BR" sz="1600" u="sng">
+                <a:solidFill>
+                  <a:srgbClr val="0F2040"/>
+                </a:solidFill>
+              </a:rPr>
+              <a:t>Item b.</a:t>
+            </a:r>
+            <a:r>
+              <a:rPr lang="pt-BR" sz="1600">
+                <a:solidFill>
+                  <a:srgbClr val="0F2040"/>
+                </a:solidFill>
+              </a:rPr>
+              <a:t> Complete o exercício da questão 4(a) </a:t>
+            </a:r>
+            <a:r>
+              <a:rPr lang="pt-BR" sz="1600" b="1">
+                <a:solidFill>
+                  <a:srgbClr val="0F2040"/>
+                </a:solidFill>
+              </a:rPr>
+              <a:t>adicionando ruído aleatório às imagens</a:t>
+            </a:r>
+            <a:r>
+              <a:rPr lang="pt-BR" sz="1600">
+                <a:solidFill>
+                  <a:srgbClr val="0F2040"/>
+                </a:solidFill>
+              </a:rPr>
+              <a:t> de entrada, com o objetivo de treinar um </a:t>
+            </a:r>
+            <a:r>
+              <a:rPr lang="pt-BR" sz="1600" b="1">
+                <a:solidFill>
+                  <a:srgbClr val="0F2040"/>
+                </a:solidFill>
+              </a:rPr>
+              <a:t>denoising autoencoder</a:t>
+            </a:r>
+            <a:r>
+              <a:rPr lang="pt-BR" sz="1600">
+                <a:solidFill>
+                  <a:srgbClr val="0F2040"/>
+                </a:solidFill>
+              </a:rPr>
+              <a:t>.</a:t>
+            </a:r>
+          </a:p>
+          <a:p>
+            <a:endParaRPr lang="pt-BR" sz="1600">
+              <a:solidFill>
+                <a:srgbClr val="0F2040"/>
+              </a:solidFill>
+            </a:endParaRPr>
+          </a:p>
+          <a:p>
+            <a:pPr marL="285750" indent="-285750">
+              <a:buFont typeface="Arial" panose="020B0604020202020204" pitchFamily="34" charset="0"/>
+              <a:buChar char="•"/>
+            </a:pPr>
+            <a:r>
+              <a:rPr lang="pt-BR" sz="1600">
+                <a:solidFill>
+                  <a:srgbClr val="0F2040"/>
+                </a:solidFill>
+              </a:rPr>
+              <a:t>Após o treinamento, utilize as 10 imagens selecionadas  na  questão  anterior  (com  o  ruído  aplicado)  e  apresente  os  resultados visualmente, exibindo lado a lado as imagens originais e suas respectivas reconstruções.</a:t>
+            </a:r>
+          </a:p>
+          <a:p>
+            <a:pPr marL="285750" indent="-285750">
+              <a:buFont typeface="Arial" panose="020B0604020202020204" pitchFamily="34" charset="0"/>
+              <a:buChar char="•"/>
+            </a:pPr>
+            <a:r>
+              <a:rPr lang="pt-BR" sz="1600">
+                <a:solidFill>
+                  <a:srgbClr val="0F2040"/>
+                </a:solidFill>
+              </a:rPr>
+              <a:t>Avalie qualitativamente o desempenho do modelo em remover o ruído e preservar as características das imagens originais. </a:t>
+            </a:r>
+          </a:p>
+        </p:txBody>
+      </p:sp>
+      <p:sp>
+        <p:nvSpPr>
+          <p:cNvPr id="2" name="Retângulo 1">
+            <a:extLst>
+              <a:ext uri="{FF2B5EF4-FFF2-40B4-BE49-F238E27FC236}">
+                <a16:creationId xmlns:a16="http://schemas.microsoft.com/office/drawing/2014/main" id="{EB728245-2B42-08F4-125E-658A27506723}"/>
+              </a:ext>
+            </a:extLst>
+          </p:cNvPr>
+          <p:cNvSpPr/>
+          <p:nvPr/>
+        </p:nvSpPr>
+        <p:spPr>
+          <a:xfrm>
+            <a:off x="-1451900" y="1080000"/>
+            <a:ext cx="1342663" cy="5778000"/>
+          </a:xfrm>
+          <a:prstGeom prst="rect">
+            <a:avLst/>
+          </a:prstGeom>
+        </p:spPr>
+        <p:style>
+          <a:lnRef idx="2">
+            <a:schemeClr val="accent1">
+              <a:shade val="15000"/>
+            </a:schemeClr>
+          </a:lnRef>
+          <a:fillRef idx="1">
+            <a:schemeClr val="accent1"/>
+          </a:fillRef>
+          <a:effectRef idx="0">
+            <a:schemeClr val="accent1"/>
+          </a:effectRef>
+          <a:fontRef idx="minor">
+            <a:schemeClr val="lt1"/>
+          </a:fontRef>
+        </p:style>
+        <p:txBody>
+          <a:bodyPr rtlCol="0" anchor="ctr"/>
+          <a:lstStyle/>
+          <a:p>
+            <a:pPr algn="ctr"/>
+            <a:endParaRPr lang="en-US"/>
+          </a:p>
+        </p:txBody>
+      </p:sp>
+    </p:spTree>
+    <p:extLst>
+      <p:ext uri="{BB962C8B-B14F-4D97-AF65-F5344CB8AC3E}">
+        <p14:creationId xmlns:p14="http://schemas.microsoft.com/office/powerpoint/2010/main" val="1466667699"/>
+      </p:ext>
+    </p:extLst>
+  </p:cSld>
+  <p:clrMapOvr>
+    <a:masterClrMapping/>
+  </p:clrMapOvr>
+  <mc:AlternateContent xmlns:mc="http://schemas.openxmlformats.org/markup-compatibility/2006">
+    <mc:Choice xmlns:p14="http://schemas.microsoft.com/office/powerpoint/2010/main" Requires="p14">
+      <p:transition spd="med" p14:dur="700">
+        <p:fade/>
+      </p:transition>
+    </mc:Choice>
+    <mc:Fallback>
+      <p:transition spd="med">
+        <p:fade/>
+      </p:transition>
+    </mc:Fallback>
+  </mc:AlternateContent>
+</p:sld>
+</file>
+
+<file path=ppt/slides/slide21.xml><?xml version="1.0" encoding="utf-8"?>
+<p:sld xmlns:a="http://schemas.openxmlformats.org/drawingml/2006/main" xmlns:r="http://schemas.openxmlformats.org/officeDocument/2006/relationships" xmlns:p="http://schemas.openxmlformats.org/presentationml/2006/main">
+  <p:cSld>
+    <p:spTree>
+      <p:nvGrpSpPr>
+        <p:cNvPr id="1" name="">
+          <a:extLst>
+            <a:ext uri="{FF2B5EF4-FFF2-40B4-BE49-F238E27FC236}">
+              <a16:creationId xmlns:a16="http://schemas.microsoft.com/office/drawing/2014/main" id="{527E555A-7886-DF10-B3CE-279DE3B5CBBF}"/>
+            </a:ext>
+          </a:extLst>
+        </p:cNvPr>
+        <p:cNvGrpSpPr/>
+        <p:nvPr/>
+      </p:nvGrpSpPr>
+      <p:grpSpPr>
+        <a:xfrm>
+          <a:off x="0" y="0"/>
+          <a:ext cx="0" cy="0"/>
+          <a:chOff x="0" y="0"/>
+          <a:chExt cx="0" cy="0"/>
+        </a:xfrm>
+      </p:grpSpPr>
+      <p:sp>
+        <p:nvSpPr>
+          <p:cNvPr id="4" name="Retângulo 3">
+            <a:extLst>
+              <a:ext uri="{FF2B5EF4-FFF2-40B4-BE49-F238E27FC236}">
+                <a16:creationId xmlns:a16="http://schemas.microsoft.com/office/drawing/2014/main" id="{FB5D5BCE-6BE7-A5F9-D9F1-F5A5E88E07A8}"/>
+              </a:ext>
+            </a:extLst>
+          </p:cNvPr>
+          <p:cNvSpPr/>
+          <p:nvPr/>
+        </p:nvSpPr>
+        <p:spPr>
+          <a:xfrm>
+            <a:off x="-210854" y="-180000"/>
+            <a:ext cx="12613709" cy="1260000"/>
+          </a:xfrm>
+          <a:prstGeom prst="rect">
+            <a:avLst/>
+          </a:prstGeom>
+          <a:solidFill>
+            <a:srgbClr val="0F2040"/>
+          </a:solidFill>
+          <a:ln>
+            <a:noFill/>
+          </a:ln>
+        </p:spPr>
+        <p:style>
+          <a:lnRef idx="2">
+            <a:schemeClr val="accent1">
+              <a:shade val="15000"/>
+            </a:schemeClr>
+          </a:lnRef>
+          <a:fillRef idx="1">
+            <a:schemeClr val="accent1"/>
+          </a:fillRef>
+          <a:effectRef idx="0">
+            <a:schemeClr val="accent1"/>
+          </a:effectRef>
+          <a:fontRef idx="minor">
+            <a:schemeClr val="lt1"/>
+          </a:fontRef>
+        </p:style>
+        <p:txBody>
+          <a:bodyPr rtlCol="0" anchor="ctr"/>
+          <a:lstStyle/>
+          <a:p>
+            <a:pPr algn="ctr"/>
+            <a:endParaRPr lang="pt-BR"/>
+          </a:p>
+        </p:txBody>
+      </p:sp>
+      <p:sp>
+        <p:nvSpPr>
+          <p:cNvPr id="7" name="Título 1">
+            <a:extLst>
+              <a:ext uri="{FF2B5EF4-FFF2-40B4-BE49-F238E27FC236}">
+                <a16:creationId xmlns:a16="http://schemas.microsoft.com/office/drawing/2014/main" id="{3B92484F-7504-0174-1850-DC96B148129B}"/>
+              </a:ext>
+            </a:extLst>
+          </p:cNvPr>
+          <p:cNvSpPr>
+            <a:spLocks noGrp="1"/>
+          </p:cNvSpPr>
+          <p:nvPr>
+            <p:ph type="title"/>
+          </p:nvPr>
+        </p:nvSpPr>
+        <p:spPr>
+          <a:xfrm>
+            <a:off x="0" y="89999"/>
+            <a:ext cx="9961200" cy="900001"/>
+          </a:xfrm>
+        </p:spPr>
+        <p:txBody>
+          <a:bodyPr lIns="720000" bIns="0" anchor="ctr">
+            <a:normAutofit/>
+          </a:bodyPr>
+          <a:lstStyle/>
+          <a:p>
+            <a:r>
+              <a:rPr lang="pt-BR" sz="3200" b="1">
+                <a:solidFill>
+                  <a:schemeClr val="bg1"/>
+                </a:solidFill>
+                <a:latin typeface="Fjalla One" panose="02000506040000020004" pitchFamily="2" charset="0"/>
+                <a:cs typeface="Arial" panose="020B0604020202020204" pitchFamily="34" charset="0"/>
+              </a:rPr>
+              <a:t>Questão 4. a) Pré-processamento dos Dados</a:t>
+            </a:r>
+          </a:p>
+        </p:txBody>
+      </p:sp>
+      <p:sp>
+        <p:nvSpPr>
+          <p:cNvPr id="2" name="Retângulo 1">
+            <a:extLst>
+              <a:ext uri="{FF2B5EF4-FFF2-40B4-BE49-F238E27FC236}">
+                <a16:creationId xmlns:a16="http://schemas.microsoft.com/office/drawing/2014/main" id="{7F53BD44-1EFF-3D2A-0EF7-4D35085BC396}"/>
+              </a:ext>
+            </a:extLst>
+          </p:cNvPr>
+          <p:cNvSpPr/>
+          <p:nvPr/>
+        </p:nvSpPr>
+        <p:spPr>
+          <a:xfrm>
+            <a:off x="-1451900" y="1080000"/>
+            <a:ext cx="1342663" cy="5778000"/>
+          </a:xfrm>
+          <a:prstGeom prst="rect">
+            <a:avLst/>
+          </a:prstGeom>
+        </p:spPr>
+        <p:style>
+          <a:lnRef idx="2">
+            <a:schemeClr val="accent1">
+              <a:shade val="15000"/>
+            </a:schemeClr>
+          </a:lnRef>
+          <a:fillRef idx="1">
+            <a:schemeClr val="accent1"/>
+          </a:fillRef>
+          <a:effectRef idx="0">
+            <a:schemeClr val="accent1"/>
+          </a:effectRef>
+          <a:fontRef idx="minor">
+            <a:schemeClr val="lt1"/>
+          </a:fontRef>
+        </p:style>
+        <p:txBody>
+          <a:bodyPr rtlCol="0" anchor="ctr"/>
+          <a:lstStyle/>
+          <a:p>
+            <a:pPr algn="ctr"/>
+            <a:endParaRPr lang="en-US"/>
+          </a:p>
+        </p:txBody>
+      </p:sp>
+      <p:sp>
+        <p:nvSpPr>
+          <p:cNvPr id="6" name="CaixaDeTexto 5">
+            <a:extLst>
+              <a:ext uri="{FF2B5EF4-FFF2-40B4-BE49-F238E27FC236}">
+                <a16:creationId xmlns:a16="http://schemas.microsoft.com/office/drawing/2014/main" id="{F6043F5C-2C58-D437-60CD-B0406EE29F54}"/>
+              </a:ext>
+            </a:extLst>
+          </p:cNvPr>
+          <p:cNvSpPr txBox="1"/>
+          <p:nvPr/>
+        </p:nvSpPr>
+        <p:spPr>
+          <a:xfrm>
+            <a:off x="3736814" y="5207406"/>
+            <a:ext cx="4718369" cy="923330"/>
+          </a:xfrm>
+          <a:prstGeom prst="rect">
+            <a:avLst/>
+          </a:prstGeom>
+          <a:noFill/>
+        </p:spPr>
+        <p:txBody>
+          <a:bodyPr wrap="square" rtlCol="0">
+            <a:spAutoFit/>
+          </a:bodyPr>
+          <a:lstStyle/>
+          <a:p>
+            <a:pPr marL="285750" indent="-285750">
+              <a:buFont typeface="Arial" panose="020B0604020202020204" pitchFamily="34" charset="0"/>
+              <a:buChar char="•"/>
+            </a:pPr>
+            <a:r>
+              <a:rPr lang="pt-BR">
+                <a:solidFill>
+                  <a:srgbClr val="0F2040"/>
+                </a:solidFill>
+              </a:rPr>
+              <a:t>Dados de treino: 60.000 imagens (85,7%)</a:t>
+            </a:r>
+          </a:p>
+          <a:p>
+            <a:pPr marL="285750" indent="-285750">
+              <a:buFont typeface="Arial" panose="020B0604020202020204" pitchFamily="34" charset="0"/>
+              <a:buChar char="•"/>
+            </a:pPr>
+            <a:r>
+              <a:rPr lang="pt-BR">
+                <a:solidFill>
+                  <a:srgbClr val="0F2040"/>
+                </a:solidFill>
+              </a:rPr>
+              <a:t>Dados de validação: 5.000 imagens (7,1%)</a:t>
+            </a:r>
+          </a:p>
+          <a:p>
+            <a:pPr marL="285750" indent="-285750">
+              <a:buFont typeface="Arial" panose="020B0604020202020204" pitchFamily="34" charset="0"/>
+              <a:buChar char="•"/>
+            </a:pPr>
+            <a:r>
+              <a:rPr lang="pt-BR">
+                <a:solidFill>
+                  <a:srgbClr val="0F2040"/>
+                </a:solidFill>
+              </a:rPr>
+              <a:t>Dados de teste: 5.000 imagens (7,1%)</a:t>
+            </a:r>
+          </a:p>
+        </p:txBody>
+      </p:sp>
+      <p:pic>
+        <p:nvPicPr>
+          <p:cNvPr id="12" name="Imagem 11">
+            <a:extLst>
+              <a:ext uri="{FF2B5EF4-FFF2-40B4-BE49-F238E27FC236}">
+                <a16:creationId xmlns:a16="http://schemas.microsoft.com/office/drawing/2014/main" id="{803B133C-8607-71A0-35F6-9FD8479C992F}"/>
+              </a:ext>
+            </a:extLst>
+          </p:cNvPr>
+          <p:cNvPicPr>
+            <a:picLocks noChangeAspect="1"/>
+          </p:cNvPicPr>
+          <p:nvPr/>
+        </p:nvPicPr>
+        <p:blipFill>
+          <a:blip r:embed="rId2"/>
+          <a:stretch>
+            <a:fillRect/>
+          </a:stretch>
+        </p:blipFill>
+        <p:spPr>
+          <a:xfrm>
+            <a:off x="3030194" y="1650594"/>
+            <a:ext cx="6131611" cy="3042579"/>
+          </a:xfrm>
+          <a:prstGeom prst="rect">
+            <a:avLst/>
+          </a:prstGeom>
+        </p:spPr>
+      </p:pic>
+    </p:spTree>
+    <p:extLst>
+      <p:ext uri="{BB962C8B-B14F-4D97-AF65-F5344CB8AC3E}">
+        <p14:creationId xmlns:p14="http://schemas.microsoft.com/office/powerpoint/2010/main" val="3475443560"/>
+      </p:ext>
+    </p:extLst>
+  </p:cSld>
+  <p:clrMapOvr>
+    <a:masterClrMapping/>
+  </p:clrMapOvr>
+  <mc:AlternateContent xmlns:mc="http://schemas.openxmlformats.org/markup-compatibility/2006">
+    <mc:Choice xmlns:p14="http://schemas.microsoft.com/office/powerpoint/2010/main" Requires="p14">
+      <p:transition spd="med" p14:dur="700">
+        <p:fade/>
+      </p:transition>
+    </mc:Choice>
+    <mc:Fallback>
+      <p:transition spd="med">
+        <p:fade/>
+      </p:transition>
+    </mc:Fallback>
+  </mc:AlternateContent>
+</p:sld>
+</file>
+
+<file path=ppt/slides/slide22.xml><?xml version="1.0" encoding="utf-8"?>
+<p:sld xmlns:a="http://schemas.openxmlformats.org/drawingml/2006/main" xmlns:r="http://schemas.openxmlformats.org/officeDocument/2006/relationships" xmlns:p="http://schemas.openxmlformats.org/presentationml/2006/main">
+  <p:cSld>
+    <p:spTree>
+      <p:nvGrpSpPr>
+        <p:cNvPr id="1" name="">
+          <a:extLst>
+            <a:ext uri="{FF2B5EF4-FFF2-40B4-BE49-F238E27FC236}">
               <a16:creationId xmlns:a16="http://schemas.microsoft.com/office/drawing/2014/main" id="{831C3E9D-565F-6349-96EE-472564DBCAF9}"/>
             </a:ext>
           </a:extLst>
@@ -11470,7 +12400,7 @@
 </p:sld>
 </file>
 
-<file path=ppt/slides/slide21.xml><?xml version="1.0" encoding="utf-8"?>
+<file path=ppt/slides/slide23.xml><?xml version="1.0" encoding="utf-8"?>
 <p:sld xmlns:a="http://schemas.openxmlformats.org/drawingml/2006/main" xmlns:r="http://schemas.openxmlformats.org/officeDocument/2006/relationships" xmlns:p="http://schemas.openxmlformats.org/presentationml/2006/main">
   <p:cSld>
     <p:spTree>
@@ -11687,7 +12617,7 @@
 </p:sld>
 </file>
 
-<file path=ppt/slides/slide22.xml><?xml version="1.0" encoding="utf-8"?>
+<file path=ppt/slides/slide24.xml><?xml version="1.0" encoding="utf-8"?>
 <p:sld xmlns:a="http://schemas.openxmlformats.org/drawingml/2006/main" xmlns:r="http://schemas.openxmlformats.org/officeDocument/2006/relationships" xmlns:p="http://schemas.openxmlformats.org/presentationml/2006/main">
   <p:cSld>
     <p:spTree>
@@ -11863,8 +12793,8 @@
         </p:nvSpPr>
         <p:spPr>
           <a:xfrm>
-            <a:off x="3736812" y="4958410"/>
-            <a:ext cx="4718369" cy="1477328"/>
+            <a:off x="3517592" y="4958410"/>
+            <a:ext cx="5156817" cy="1477328"/>
           </a:xfrm>
           <a:prstGeom prst="rect">
             <a:avLst/>
@@ -11912,7 +12842,7 @@
                   <a:srgbClr val="0F2040"/>
                 </a:solidFill>
               </a:rPr>
-              <a:t>Dados de treino: 60.000 imagens (85,7%)</a:t>
+              <a:t>Dados de treino: 60.000 imagens (~85,7%)</a:t>
             </a:r>
           </a:p>
           <a:p>
@@ -11926,7 +12856,7 @@
                   <a:srgbClr val="0F2040"/>
                 </a:solidFill>
               </a:rPr>
-              <a:t>Dados de validação: 5.000 imagens (7,1%)</a:t>
+              <a:t>Dados de validação: 5.000 imagens (~7,1%)</a:t>
             </a:r>
           </a:p>
           <a:p>
@@ -11940,7 +12870,7 @@
                   <a:srgbClr val="0F2040"/>
                 </a:solidFill>
               </a:rPr>
-              <a:t>Dados de teste: 5.000 imagens (7,1%)</a:t>
+              <a:t>Dados de teste: 5.000 imagens (~7,1%)</a:t>
             </a:r>
           </a:p>
         </p:txBody>
@@ -12000,7 +12930,7 @@
 </p:sld>
 </file>
 
-<file path=ppt/slides/slide23.xml><?xml version="1.0" encoding="utf-8"?>
+<file path=ppt/slides/slide25.xml><?xml version="1.0" encoding="utf-8"?>
 <p:sld xmlns:a="http://schemas.openxmlformats.org/drawingml/2006/main" xmlns:r="http://schemas.openxmlformats.org/officeDocument/2006/relationships" xmlns:p="http://schemas.openxmlformats.org/presentationml/2006/main">
   <p:cSld>
     <p:spTree>
@@ -12247,7 +13177,7 @@
 </p:sld>
 </file>
 
-<file path=ppt/slides/slide24.xml><?xml version="1.0" encoding="utf-8"?>
+<file path=ppt/slides/slide26.xml><?xml version="1.0" encoding="utf-8"?>
 <p:sld xmlns:a="http://schemas.openxmlformats.org/drawingml/2006/main" xmlns:r="http://schemas.openxmlformats.org/officeDocument/2006/relationships" xmlns:p="http://schemas.openxmlformats.org/presentationml/2006/main">
   <p:cSld>
     <p:spTree>
@@ -12464,7 +13394,7 @@
 </p:sld>
 </file>
 
-<file path=ppt/slides/slide25.xml><?xml version="1.0" encoding="utf-8"?>
+<file path=ppt/slides/slide27.xml><?xml version="1.0" encoding="utf-8"?>
 <p:sld xmlns:a="http://schemas.openxmlformats.org/drawingml/2006/main" xmlns:r="http://schemas.openxmlformats.org/officeDocument/2006/relationships" xmlns:p="http://schemas.openxmlformats.org/presentationml/2006/main">
   <p:cSld>
     <p:spTree>
@@ -12890,7 +13820,7 @@
 </p:sld>
 </file>
 
-<file path=ppt/slides/slide26.xml><?xml version="1.0" encoding="utf-8"?>
+<file path=ppt/slides/slide28.xml><?xml version="1.0" encoding="utf-8"?>
 <p:sld xmlns:a="http://schemas.openxmlformats.org/drawingml/2006/main" xmlns:r="http://schemas.openxmlformats.org/officeDocument/2006/relationships" xmlns:p="http://schemas.openxmlformats.org/presentationml/2006/main">
   <p:cSld>
     <p:spTree>
@@ -13074,7 +14004,7 @@
         </p:blipFill>
         <p:spPr>
           <a:xfrm>
-            <a:off x="2668879" y="2023770"/>
+            <a:off x="4561428" y="2023770"/>
             <a:ext cx="6854241" cy="3890460"/>
           </a:xfrm>
           <a:prstGeom prst="rect">
@@ -13082,6 +14012,79 @@
           </a:prstGeom>
         </p:spPr>
       </p:pic>
+      <p:sp>
+        <p:nvSpPr>
+          <p:cNvPr id="6" name="CaixaDeTexto 5">
+            <a:extLst>
+              <a:ext uri="{FF2B5EF4-FFF2-40B4-BE49-F238E27FC236}">
+                <a16:creationId xmlns:a16="http://schemas.microsoft.com/office/drawing/2014/main" id="{D40A1869-86B5-13DE-F1FF-333E0A03CBC3}"/>
+              </a:ext>
+            </a:extLst>
+          </p:cNvPr>
+          <p:cNvSpPr txBox="1"/>
+          <p:nvPr/>
+        </p:nvSpPr>
+        <p:spPr>
+          <a:xfrm>
+            <a:off x="221524" y="3429551"/>
+            <a:ext cx="3431696" cy="646331"/>
+          </a:xfrm>
+          <a:prstGeom prst="rect">
+            <a:avLst/>
+          </a:prstGeom>
+          <a:noFill/>
+        </p:spPr>
+        <p:txBody>
+          <a:bodyPr wrap="square" lIns="91440" tIns="45720" rIns="91440" bIns="45720" rtlCol="0" anchor="t">
+            <a:spAutoFit/>
+          </a:bodyPr>
+          <a:lstStyle/>
+          <a:p>
+            <a:pPr marL="285750" indent="-285750">
+              <a:buFont typeface="Arial"/>
+              <a:buChar char="•"/>
+            </a:pPr>
+            <a:r>
+              <a:rPr lang="pt-BR" b="1">
+                <a:solidFill>
+                  <a:srgbClr val="0F2040"/>
+                </a:solidFill>
+              </a:rPr>
+              <a:t>Treinamento</a:t>
+            </a:r>
+            <a:r>
+              <a:rPr lang="pt-BR">
+                <a:solidFill>
+                  <a:srgbClr val="0F2040"/>
+                </a:solidFill>
+              </a:rPr>
+              <a:t>: 25.000 reviews</a:t>
+            </a:r>
+          </a:p>
+          <a:p>
+            <a:pPr marL="285750" indent="-285750">
+              <a:buFont typeface="Arial"/>
+              <a:buChar char="•"/>
+            </a:pPr>
+            <a:r>
+              <a:rPr lang="pt-BR" b="1">
+                <a:solidFill>
+                  <a:srgbClr val="0F2040"/>
+                </a:solidFill>
+              </a:rPr>
+              <a:t>Validação</a:t>
+            </a:r>
+            <a:r>
+              <a:rPr lang="pt-BR">
+                <a:solidFill>
+                  <a:srgbClr val="0F2040"/>
+                </a:solidFill>
+              </a:rPr>
+              <a:t>: 25.000 reviews</a:t>
+            </a:r>
+          </a:p>
+        </p:txBody>
+      </p:sp>
     </p:spTree>
     <p:extLst>
       <p:ext uri="{BB962C8B-B14F-4D97-AF65-F5344CB8AC3E}">
@@ -13107,7 +14110,7 @@
 </p:sld>
 </file>
 
-<file path=ppt/slides/slide27.xml><?xml version="1.0" encoding="utf-8"?>
+<file path=ppt/slides/slide29.xml><?xml version="1.0" encoding="utf-8"?>
 <p:sld xmlns:a="http://schemas.openxmlformats.org/drawingml/2006/main" xmlns:r="http://schemas.openxmlformats.org/officeDocument/2006/relationships" xmlns:p="http://schemas.openxmlformats.org/presentationml/2006/main">
   <p:cSld>
     <p:spTree>
@@ -13291,7 +14294,7 @@
         </p:blipFill>
         <p:spPr>
           <a:xfrm>
-            <a:off x="1021773" y="1368312"/>
+            <a:off x="254793" y="1368312"/>
             <a:ext cx="6039693" cy="5201376"/>
           </a:xfrm>
           <a:prstGeom prst="rect">
@@ -13299,289 +14302,166 @@
           </a:prstGeom>
         </p:spPr>
       </p:pic>
-      <p:pic>
-        <p:nvPicPr>
-          <p:cNvPr id="11" name="Imagem 10">
-            <a:extLst>
-              <a:ext uri="{FF2B5EF4-FFF2-40B4-BE49-F238E27FC236}">
-                <a16:creationId xmlns:a16="http://schemas.microsoft.com/office/drawing/2014/main" id="{9E50F7A6-0CA9-1682-2BD7-27C576D5BDE8}"/>
-              </a:ext>
-            </a:extLst>
-          </p:cNvPr>
-          <p:cNvPicPr>
-            <a:picLocks noChangeAspect="1"/>
-          </p:cNvPicPr>
+      <p:grpSp>
+        <p:nvGrpSpPr>
+          <p:cNvPr id="6" name="Agrupar 5">
+            <a:extLst>
+              <a:ext uri="{FF2B5EF4-FFF2-40B4-BE49-F238E27FC236}">
+                <a16:creationId xmlns:a16="http://schemas.microsoft.com/office/drawing/2014/main" id="{3CE5340B-BA13-1A8D-8701-3C400F363EB8}"/>
+              </a:ext>
+            </a:extLst>
+          </p:cNvPr>
+          <p:cNvGrpSpPr/>
           <p:nvPr/>
-        </p:nvPicPr>
-        <p:blipFill>
-          <a:blip r:embed="rId3"/>
-          <a:srcRect r="50417"/>
-          <a:stretch>
-            <a:fillRect/>
-          </a:stretch>
-        </p:blipFill>
+        </p:nvGrpSpPr>
+        <p:grpSpPr>
+          <a:xfrm>
+            <a:off x="6548990" y="1956922"/>
+            <a:ext cx="5482846" cy="2729255"/>
+            <a:chOff x="6539029" y="3969000"/>
+            <a:chExt cx="5482846" cy="2729255"/>
+          </a:xfrm>
+        </p:grpSpPr>
+        <p:pic>
+          <p:nvPicPr>
+            <p:cNvPr id="11" name="Imagem 10">
+              <a:extLst>
+                <a:ext uri="{FF2B5EF4-FFF2-40B4-BE49-F238E27FC236}">
+                  <a16:creationId xmlns:a16="http://schemas.microsoft.com/office/drawing/2014/main" id="{9E50F7A6-0CA9-1682-2BD7-27C576D5BDE8}"/>
+                </a:ext>
+              </a:extLst>
+            </p:cNvPr>
+            <p:cNvPicPr>
+              <a:picLocks noChangeAspect="1"/>
+            </p:cNvPicPr>
+            <p:nvPr/>
+          </p:nvPicPr>
+          <p:blipFill>
+            <a:blip r:embed="rId3"/>
+            <a:srcRect r="50417"/>
+            <a:stretch>
+              <a:fillRect/>
+            </a:stretch>
+          </p:blipFill>
+          <p:spPr>
+            <a:xfrm>
+              <a:off x="6539029" y="3969722"/>
+              <a:ext cx="2730636" cy="2728533"/>
+            </a:xfrm>
+            <a:prstGeom prst="rect">
+              <a:avLst/>
+            </a:prstGeom>
+          </p:spPr>
+        </p:pic>
+        <p:pic>
+          <p:nvPicPr>
+            <p:cNvPr id="12" name="Imagem 11">
+              <a:extLst>
+                <a:ext uri="{FF2B5EF4-FFF2-40B4-BE49-F238E27FC236}">
+                  <a16:creationId xmlns:a16="http://schemas.microsoft.com/office/drawing/2014/main" id="{CA028F4C-03B6-6514-99D2-096872446998}"/>
+                </a:ext>
+              </a:extLst>
+            </p:cNvPr>
+            <p:cNvPicPr>
+              <a:picLocks noChangeAspect="1"/>
+            </p:cNvPicPr>
+            <p:nvPr/>
+          </p:nvPicPr>
+          <p:blipFill>
+            <a:blip r:embed="rId3"/>
+            <a:srcRect l="50000"/>
+            <a:stretch>
+              <a:fillRect/>
+            </a:stretch>
+          </p:blipFill>
+          <p:spPr>
+            <a:xfrm>
+              <a:off x="9268284" y="3969000"/>
+              <a:ext cx="2753591" cy="2728533"/>
+            </a:xfrm>
+            <a:prstGeom prst="rect">
+              <a:avLst/>
+            </a:prstGeom>
+          </p:spPr>
+        </p:pic>
+      </p:grpSp>
+      <p:sp>
+        <p:nvSpPr>
+          <p:cNvPr id="5" name="CaixaDeTexto 4">
+            <a:extLst>
+              <a:ext uri="{FF2B5EF4-FFF2-40B4-BE49-F238E27FC236}">
+                <a16:creationId xmlns:a16="http://schemas.microsoft.com/office/drawing/2014/main" id="{6D3847B8-291A-12A4-818E-8C0765274384}"/>
+              </a:ext>
+            </a:extLst>
+          </p:cNvPr>
+          <p:cNvSpPr txBox="1"/>
+          <p:nvPr/>
+        </p:nvSpPr>
         <p:spPr>
           <a:xfrm>
-            <a:off x="8416637" y="1240467"/>
-            <a:ext cx="2730636" cy="2728533"/>
+            <a:off x="7572582" y="4853943"/>
+            <a:ext cx="3431696" cy="646331"/>
           </a:xfrm>
           <a:prstGeom prst="rect">
             <a:avLst/>
           </a:prstGeom>
+          <a:noFill/>
         </p:spPr>
-      </p:pic>
-      <p:pic>
-        <p:nvPicPr>
-          <p:cNvPr id="12" name="Imagem 11">
-            <a:extLst>
-              <a:ext uri="{FF2B5EF4-FFF2-40B4-BE49-F238E27FC236}">
-                <a16:creationId xmlns:a16="http://schemas.microsoft.com/office/drawing/2014/main" id="{CA028F4C-03B6-6514-99D2-096872446998}"/>
-              </a:ext>
-            </a:extLst>
-          </p:cNvPr>
-          <p:cNvPicPr>
-            <a:picLocks noChangeAspect="1"/>
-          </p:cNvPicPr>
-          <p:nvPr/>
-        </p:nvPicPr>
-        <p:blipFill>
-          <a:blip r:embed="rId3"/>
-          <a:srcRect l="50000"/>
-          <a:stretch>
-            <a:fillRect/>
-          </a:stretch>
-        </p:blipFill>
-        <p:spPr>
-          <a:xfrm>
-            <a:off x="8416637" y="3969000"/>
-            <a:ext cx="2753591" cy="2728533"/>
-          </a:xfrm>
-          <a:prstGeom prst="rect">
-            <a:avLst/>
-          </a:prstGeom>
-        </p:spPr>
-      </p:pic>
+        <p:txBody>
+          <a:bodyPr wrap="square" lIns="91440" tIns="45720" rIns="91440" bIns="45720" rtlCol="0" anchor="t">
+            <a:spAutoFit/>
+          </a:bodyPr>
+          <a:lstStyle/>
+          <a:p>
+            <a:pPr marL="285750" indent="-285750">
+              <a:buFont typeface="Arial"/>
+              <a:buChar char="•"/>
+            </a:pPr>
+            <a:r>
+              <a:rPr lang="pt-BR" b="1">
+                <a:solidFill>
+                  <a:srgbClr val="0F2040"/>
+                </a:solidFill>
+              </a:rPr>
+              <a:t>Treinamento</a:t>
+            </a:r>
+            <a:r>
+              <a:rPr lang="pt-BR">
+                <a:solidFill>
+                  <a:srgbClr val="0F2040"/>
+                </a:solidFill>
+              </a:rPr>
+              <a:t>: 97.07%</a:t>
+            </a:r>
+          </a:p>
+          <a:p>
+            <a:pPr marL="285750" indent="-285750">
+              <a:buFont typeface="Arial"/>
+              <a:buChar char="•"/>
+            </a:pPr>
+            <a:r>
+              <a:rPr lang="pt-BR" b="1">
+                <a:solidFill>
+                  <a:srgbClr val="0F2040"/>
+                </a:solidFill>
+              </a:rPr>
+              <a:t>Validação</a:t>
+            </a:r>
+            <a:r>
+              <a:rPr lang="pt-BR">
+                <a:solidFill>
+                  <a:srgbClr val="0F2040"/>
+                </a:solidFill>
+              </a:rPr>
+              <a:t>: 86.62%</a:t>
+            </a:r>
+          </a:p>
+        </p:txBody>
+      </p:sp>
     </p:spTree>
     <p:extLst>
       <p:ext uri="{BB962C8B-B14F-4D97-AF65-F5344CB8AC3E}">
         <p14:creationId xmlns:p14="http://schemas.microsoft.com/office/powerpoint/2010/main" val="93527627"/>
-      </p:ext>
-    </p:extLst>
-  </p:cSld>
-  <p:clrMapOvr>
-    <a:masterClrMapping/>
-  </p:clrMapOvr>
-  <mc:AlternateContent xmlns:mc="http://schemas.openxmlformats.org/markup-compatibility/2006">
-    <mc:Choice xmlns:p14="http://schemas.microsoft.com/office/powerpoint/2010/main" Requires="p14">
-      <p:transition spd="med" p14:dur="700">
-        <p:fade/>
-      </p:transition>
-    </mc:Choice>
-    <mc:Fallback>
-      <p:transition spd="med">
-        <p:fade/>
-      </p:transition>
-    </mc:Fallback>
-  </mc:AlternateContent>
-</p:sld>
-</file>
-
-<file path=ppt/slides/slide28.xml><?xml version="1.0" encoding="utf-8"?>
-<p:sld xmlns:a="http://schemas.openxmlformats.org/drawingml/2006/main" xmlns:r="http://schemas.openxmlformats.org/officeDocument/2006/relationships" xmlns:p="http://schemas.openxmlformats.org/presentationml/2006/main">
-  <p:cSld>
-    <p:spTree>
-      <p:nvGrpSpPr>
-        <p:cNvPr id="1" name="">
-          <a:extLst>
-            <a:ext uri="{FF2B5EF4-FFF2-40B4-BE49-F238E27FC236}">
-              <a16:creationId xmlns:a16="http://schemas.microsoft.com/office/drawing/2014/main" id="{DEC37C66-1665-CD15-16D7-31F240ADE300}"/>
-            </a:ext>
-          </a:extLst>
-        </p:cNvPr>
-        <p:cNvGrpSpPr/>
-        <p:nvPr/>
-      </p:nvGrpSpPr>
-      <p:grpSpPr>
-        <a:xfrm>
-          <a:off x="0" y="0"/>
-          <a:ext cx="0" cy="0"/>
-          <a:chOff x="0" y="0"/>
-          <a:chExt cx="0" cy="0"/>
-        </a:xfrm>
-      </p:grpSpPr>
-      <p:sp>
-        <p:nvSpPr>
-          <p:cNvPr id="4" name="Retângulo 3">
-            <a:extLst>
-              <a:ext uri="{FF2B5EF4-FFF2-40B4-BE49-F238E27FC236}">
-                <a16:creationId xmlns:a16="http://schemas.microsoft.com/office/drawing/2014/main" id="{33AABA62-51BA-9E51-9B1E-B5CB572FA8E7}"/>
-              </a:ext>
-            </a:extLst>
-          </p:cNvPr>
-          <p:cNvSpPr/>
-          <p:nvPr/>
-        </p:nvSpPr>
-        <p:spPr>
-          <a:xfrm>
-            <a:off x="-210854" y="-180000"/>
-            <a:ext cx="12613709" cy="1260000"/>
-          </a:xfrm>
-          <a:prstGeom prst="rect">
-            <a:avLst/>
-          </a:prstGeom>
-          <a:solidFill>
-            <a:srgbClr val="0F2040"/>
-          </a:solidFill>
-          <a:ln>
-            <a:noFill/>
-          </a:ln>
-        </p:spPr>
-        <p:style>
-          <a:lnRef idx="2">
-            <a:schemeClr val="accent1">
-              <a:shade val="15000"/>
-            </a:schemeClr>
-          </a:lnRef>
-          <a:fillRef idx="1">
-            <a:schemeClr val="accent1"/>
-          </a:fillRef>
-          <a:effectRef idx="0">
-            <a:schemeClr val="accent1"/>
-          </a:effectRef>
-          <a:fontRef idx="minor">
-            <a:schemeClr val="lt1"/>
-          </a:fontRef>
-        </p:style>
-        <p:txBody>
-          <a:bodyPr rtlCol="0" anchor="ctr"/>
-          <a:lstStyle/>
-          <a:p>
-            <a:pPr algn="ctr"/>
-            <a:endParaRPr lang="pt-BR"/>
-          </a:p>
-        </p:txBody>
-      </p:sp>
-      <p:sp>
-        <p:nvSpPr>
-          <p:cNvPr id="7" name="Título 1">
-            <a:extLst>
-              <a:ext uri="{FF2B5EF4-FFF2-40B4-BE49-F238E27FC236}">
-                <a16:creationId xmlns:a16="http://schemas.microsoft.com/office/drawing/2014/main" id="{6CD4C5FB-6B6E-0752-C001-EB12911D48CC}"/>
-              </a:ext>
-            </a:extLst>
-          </p:cNvPr>
-          <p:cNvSpPr>
-            <a:spLocks noGrp="1"/>
-          </p:cNvSpPr>
-          <p:nvPr>
-            <p:ph type="title"/>
-          </p:nvPr>
-        </p:nvSpPr>
-        <p:spPr>
-          <a:xfrm>
-            <a:off x="0" y="89999"/>
-            <a:ext cx="9961200" cy="900001"/>
-          </a:xfrm>
-        </p:spPr>
-        <p:txBody>
-          <a:bodyPr lIns="720000" bIns="0" anchor="ctr">
-            <a:normAutofit/>
-          </a:bodyPr>
-          <a:lstStyle/>
-          <a:p>
-            <a:r>
-              <a:rPr lang="pt-BR" sz="3200" b="1">
-                <a:solidFill>
-                  <a:schemeClr val="bg1"/>
-                </a:solidFill>
-                <a:latin typeface="Fjalla One" panose="02000506040000020004" pitchFamily="2" charset="0"/>
-                <a:cs typeface="Arial" panose="020B0604020202020204" pitchFamily="34" charset="0"/>
-              </a:rPr>
-              <a:t>Questão 5. Predição</a:t>
-            </a:r>
-          </a:p>
-        </p:txBody>
-      </p:sp>
-      <p:sp>
-        <p:nvSpPr>
-          <p:cNvPr id="2" name="Retângulo 1">
-            <a:extLst>
-              <a:ext uri="{FF2B5EF4-FFF2-40B4-BE49-F238E27FC236}">
-                <a16:creationId xmlns:a16="http://schemas.microsoft.com/office/drawing/2014/main" id="{78FCA121-1CA4-EF27-18AF-C1F1C497AA69}"/>
-              </a:ext>
-            </a:extLst>
-          </p:cNvPr>
-          <p:cNvSpPr/>
-          <p:nvPr/>
-        </p:nvSpPr>
-        <p:spPr>
-          <a:xfrm>
-            <a:off x="-1451900" y="1080000"/>
-            <a:ext cx="1342663" cy="5778000"/>
-          </a:xfrm>
-          <a:prstGeom prst="rect">
-            <a:avLst/>
-          </a:prstGeom>
-        </p:spPr>
-        <p:style>
-          <a:lnRef idx="2">
-            <a:schemeClr val="accent1">
-              <a:shade val="15000"/>
-            </a:schemeClr>
-          </a:lnRef>
-          <a:fillRef idx="1">
-            <a:schemeClr val="accent1"/>
-          </a:fillRef>
-          <a:effectRef idx="0">
-            <a:schemeClr val="accent1"/>
-          </a:effectRef>
-          <a:fontRef idx="minor">
-            <a:schemeClr val="lt1"/>
-          </a:fontRef>
-        </p:style>
-        <p:txBody>
-          <a:bodyPr rtlCol="0" anchor="ctr"/>
-          <a:lstStyle/>
-          <a:p>
-            <a:pPr algn="ctr"/>
-            <a:endParaRPr lang="en-US"/>
-          </a:p>
-        </p:txBody>
-      </p:sp>
-      <p:pic>
-        <p:nvPicPr>
-          <p:cNvPr id="6" name="Imagem 5">
-            <a:extLst>
-              <a:ext uri="{FF2B5EF4-FFF2-40B4-BE49-F238E27FC236}">
-                <a16:creationId xmlns:a16="http://schemas.microsoft.com/office/drawing/2014/main" id="{6107EF58-92F9-8B71-EB49-79C8F22F034E}"/>
-              </a:ext>
-            </a:extLst>
-          </p:cNvPr>
-          <p:cNvPicPr>
-            <a:picLocks noChangeAspect="1"/>
-          </p:cNvPicPr>
-          <p:nvPr/>
-        </p:nvPicPr>
-        <p:blipFill>
-          <a:blip r:embed="rId2"/>
-          <a:stretch>
-            <a:fillRect/>
-          </a:stretch>
-        </p:blipFill>
-        <p:spPr>
-          <a:xfrm>
-            <a:off x="1040822" y="3086042"/>
-            <a:ext cx="10110355" cy="1765916"/>
-          </a:xfrm>
-          <a:prstGeom prst="rect">
-            <a:avLst/>
-          </a:prstGeom>
-        </p:spPr>
-      </p:pic>
-    </p:spTree>
-    <p:extLst>
-      <p:ext uri="{BB962C8B-B14F-4D97-AF65-F5344CB8AC3E}">
-        <p14:creationId xmlns:p14="http://schemas.microsoft.com/office/powerpoint/2010/main" val="197823138"/>
       </p:ext>
     </p:extLst>
   </p:cSld>
@@ -13829,6 +14709,223 @@
     <p:extLst>
       <p:ext uri="{BB962C8B-B14F-4D97-AF65-F5344CB8AC3E}">
         <p14:creationId xmlns:p14="http://schemas.microsoft.com/office/powerpoint/2010/main" val="1463816749"/>
+      </p:ext>
+    </p:extLst>
+  </p:cSld>
+  <p:clrMapOvr>
+    <a:masterClrMapping/>
+  </p:clrMapOvr>
+  <mc:AlternateContent xmlns:mc="http://schemas.openxmlformats.org/markup-compatibility/2006">
+    <mc:Choice xmlns:p14="http://schemas.microsoft.com/office/powerpoint/2010/main" Requires="p14">
+      <p:transition spd="med" p14:dur="700">
+        <p:fade/>
+      </p:transition>
+    </mc:Choice>
+    <mc:Fallback>
+      <p:transition spd="med">
+        <p:fade/>
+      </p:transition>
+    </mc:Fallback>
+  </mc:AlternateContent>
+</p:sld>
+</file>
+
+<file path=ppt/slides/slide30.xml><?xml version="1.0" encoding="utf-8"?>
+<p:sld xmlns:a="http://schemas.openxmlformats.org/drawingml/2006/main" xmlns:r="http://schemas.openxmlformats.org/officeDocument/2006/relationships" xmlns:p="http://schemas.openxmlformats.org/presentationml/2006/main">
+  <p:cSld>
+    <p:spTree>
+      <p:nvGrpSpPr>
+        <p:cNvPr id="1" name="">
+          <a:extLst>
+            <a:ext uri="{FF2B5EF4-FFF2-40B4-BE49-F238E27FC236}">
+              <a16:creationId xmlns:a16="http://schemas.microsoft.com/office/drawing/2014/main" id="{DEC37C66-1665-CD15-16D7-31F240ADE300}"/>
+            </a:ext>
+          </a:extLst>
+        </p:cNvPr>
+        <p:cNvGrpSpPr/>
+        <p:nvPr/>
+      </p:nvGrpSpPr>
+      <p:grpSpPr>
+        <a:xfrm>
+          <a:off x="0" y="0"/>
+          <a:ext cx="0" cy="0"/>
+          <a:chOff x="0" y="0"/>
+          <a:chExt cx="0" cy="0"/>
+        </a:xfrm>
+      </p:grpSpPr>
+      <p:sp>
+        <p:nvSpPr>
+          <p:cNvPr id="4" name="Retângulo 3">
+            <a:extLst>
+              <a:ext uri="{FF2B5EF4-FFF2-40B4-BE49-F238E27FC236}">
+                <a16:creationId xmlns:a16="http://schemas.microsoft.com/office/drawing/2014/main" id="{33AABA62-51BA-9E51-9B1E-B5CB572FA8E7}"/>
+              </a:ext>
+            </a:extLst>
+          </p:cNvPr>
+          <p:cNvSpPr/>
+          <p:nvPr/>
+        </p:nvSpPr>
+        <p:spPr>
+          <a:xfrm>
+            <a:off x="-210854" y="-180000"/>
+            <a:ext cx="12613709" cy="1260000"/>
+          </a:xfrm>
+          <a:prstGeom prst="rect">
+            <a:avLst/>
+          </a:prstGeom>
+          <a:solidFill>
+            <a:srgbClr val="0F2040"/>
+          </a:solidFill>
+          <a:ln>
+            <a:noFill/>
+          </a:ln>
+        </p:spPr>
+        <p:style>
+          <a:lnRef idx="2">
+            <a:schemeClr val="accent1">
+              <a:shade val="15000"/>
+            </a:schemeClr>
+          </a:lnRef>
+          <a:fillRef idx="1">
+            <a:schemeClr val="accent1"/>
+          </a:fillRef>
+          <a:effectRef idx="0">
+            <a:schemeClr val="accent1"/>
+          </a:effectRef>
+          <a:fontRef idx="minor">
+            <a:schemeClr val="lt1"/>
+          </a:fontRef>
+        </p:style>
+        <p:txBody>
+          <a:bodyPr rtlCol="0" anchor="ctr"/>
+          <a:lstStyle/>
+          <a:p>
+            <a:pPr algn="ctr"/>
+            <a:endParaRPr lang="pt-BR"/>
+          </a:p>
+        </p:txBody>
+      </p:sp>
+      <p:sp>
+        <p:nvSpPr>
+          <p:cNvPr id="7" name="Título 1">
+            <a:extLst>
+              <a:ext uri="{FF2B5EF4-FFF2-40B4-BE49-F238E27FC236}">
+                <a16:creationId xmlns:a16="http://schemas.microsoft.com/office/drawing/2014/main" id="{6CD4C5FB-6B6E-0752-C001-EB12911D48CC}"/>
+              </a:ext>
+            </a:extLst>
+          </p:cNvPr>
+          <p:cNvSpPr>
+            <a:spLocks noGrp="1"/>
+          </p:cNvSpPr>
+          <p:nvPr>
+            <p:ph type="title"/>
+          </p:nvPr>
+        </p:nvSpPr>
+        <p:spPr>
+          <a:xfrm>
+            <a:off x="0" y="89999"/>
+            <a:ext cx="9961200" cy="900001"/>
+          </a:xfrm>
+        </p:spPr>
+        <p:txBody>
+          <a:bodyPr lIns="720000" bIns="0" anchor="ctr">
+            <a:normAutofit/>
+          </a:bodyPr>
+          <a:lstStyle/>
+          <a:p>
+            <a:r>
+              <a:rPr lang="pt-BR" sz="3200" b="1">
+                <a:solidFill>
+                  <a:schemeClr val="bg1"/>
+                </a:solidFill>
+                <a:latin typeface="Fjalla One" panose="02000506040000020004" pitchFamily="2" charset="0"/>
+                <a:cs typeface="Arial" panose="020B0604020202020204" pitchFamily="34" charset="0"/>
+              </a:rPr>
+              <a:t>Questão 5. Predição</a:t>
+            </a:r>
+          </a:p>
+        </p:txBody>
+      </p:sp>
+      <p:sp>
+        <p:nvSpPr>
+          <p:cNvPr id="2" name="Retângulo 1">
+            <a:extLst>
+              <a:ext uri="{FF2B5EF4-FFF2-40B4-BE49-F238E27FC236}">
+                <a16:creationId xmlns:a16="http://schemas.microsoft.com/office/drawing/2014/main" id="{78FCA121-1CA4-EF27-18AF-C1F1C497AA69}"/>
+              </a:ext>
+            </a:extLst>
+          </p:cNvPr>
+          <p:cNvSpPr/>
+          <p:nvPr/>
+        </p:nvSpPr>
+        <p:spPr>
+          <a:xfrm>
+            <a:off x="-1451900" y="1080000"/>
+            <a:ext cx="1342663" cy="5778000"/>
+          </a:xfrm>
+          <a:prstGeom prst="rect">
+            <a:avLst/>
+          </a:prstGeom>
+        </p:spPr>
+        <p:style>
+          <a:lnRef idx="2">
+            <a:schemeClr val="accent1">
+              <a:shade val="15000"/>
+            </a:schemeClr>
+          </a:lnRef>
+          <a:fillRef idx="1">
+            <a:schemeClr val="accent1"/>
+          </a:fillRef>
+          <a:effectRef idx="0">
+            <a:schemeClr val="accent1"/>
+          </a:effectRef>
+          <a:fontRef idx="minor">
+            <a:schemeClr val="lt1"/>
+          </a:fontRef>
+        </p:style>
+        <p:txBody>
+          <a:bodyPr rtlCol="0" anchor="ctr"/>
+          <a:lstStyle/>
+          <a:p>
+            <a:pPr algn="ctr"/>
+            <a:endParaRPr lang="en-US"/>
+          </a:p>
+        </p:txBody>
+      </p:sp>
+      <p:pic>
+        <p:nvPicPr>
+          <p:cNvPr id="6" name="Imagem 5">
+            <a:extLst>
+              <a:ext uri="{FF2B5EF4-FFF2-40B4-BE49-F238E27FC236}">
+                <a16:creationId xmlns:a16="http://schemas.microsoft.com/office/drawing/2014/main" id="{6107EF58-92F9-8B71-EB49-79C8F22F034E}"/>
+              </a:ext>
+            </a:extLst>
+          </p:cNvPr>
+          <p:cNvPicPr>
+            <a:picLocks noChangeAspect="1"/>
+          </p:cNvPicPr>
+          <p:nvPr/>
+        </p:nvPicPr>
+        <p:blipFill>
+          <a:blip r:embed="rId2"/>
+          <a:stretch>
+            <a:fillRect/>
+          </a:stretch>
+        </p:blipFill>
+        <p:spPr>
+          <a:xfrm>
+            <a:off x="174234" y="2936630"/>
+            <a:ext cx="11843531" cy="2069719"/>
+          </a:xfrm>
+          <a:prstGeom prst="rect">
+            <a:avLst/>
+          </a:prstGeom>
+        </p:spPr>
+      </p:pic>
+    </p:spTree>
+    <p:extLst>
+      <p:ext uri="{BB962C8B-B14F-4D97-AF65-F5344CB8AC3E}">
+        <p14:creationId xmlns:p14="http://schemas.microsoft.com/office/powerpoint/2010/main" val="197823138"/>
       </p:ext>
     </p:extLst>
   </p:cSld>
